--- a/documentation/Nexus_Documentation/Nexus_Presentation_animated.pptx
+++ b/documentation/Nexus_Documentation/Nexus_Presentation_animated.pptx
@@ -122,26 +122,26 @@
   <p:extLst>
     <p:ext uri="{521415D9-36F7-43E2-AB2F-B90AF26B5E84}">
       <p14:sectionLst xmlns:p14="http://schemas.microsoft.com/office/powerpoint/2010/main">
-        <p14:section name="Introduction" id="{e268a2a8-95da-d611-31e5-9f7c943b3212}">
+        <p14:section name="Introduction" id="{f4af6874-5f95-d15b-347d-22bf2ce94a0b}">
           <p14:sldIdLst>
             <p14:sldId id="256"/>
             <p14:sldId id="257"/>
           </p14:sldIdLst>
         </p14:section>
-        <p14:section name="Problem and solution" id="{f6c1c568-591f-d5e7-b534-18075d67d012}">
+        <p14:section name="Problem and solution" id="{298d7180-c411-c3f9-b460-b2c1f2ed2d25}">
           <p14:sldIdLst>
             <p14:sldId id="258"/>
             <p14:sldId id="259"/>
           </p14:sldIdLst>
         </p14:section>
-        <p14:section name="Design" id="{ff3f86f0-35ae-4aa9-0a9e-2d7c64288928}">
+        <p14:section name="Design" id="{67425f1d-3c55-437c-7f5e-f6d1d83d37cd}">
           <p14:sldIdLst>
             <p14:sldId id="260"/>
             <p14:sldId id="261"/>
             <p14:sldId id="262"/>
           </p14:sldIdLst>
         </p14:section>
-        <p14:section name="Business rules" id="{05214bf9-559b-5d18-3885-0937c6e75366}">
+        <p14:section name="Business rules" id="{180a2c7f-4160-f7c7-d674-76b79fc72fbf}">
           <p14:sldIdLst>
             <p14:sldId id="263"/>
             <p14:sldId id="264"/>
@@ -149,19 +149,19 @@
             <p14:sldId id="266"/>
           </p14:sldIdLst>
         </p14:section>
-        <p14:section name="Interface" id="{d20ee507-e070-56d2-be00-e33cb1d3b898}">
+        <p14:section name="Interface" id="{a0c97f4d-793f-48b9-9b28-dc7d785fe8fe}">
           <p14:sldIdLst>
             <p14:sldId id="267"/>
             <p14:sldId id="268"/>
           </p14:sldIdLst>
         </p14:section>
-        <p14:section name="Quality" id="{a504468f-61e5-dc10-a2f9-69c111fc20ee}">
+        <p14:section name="Quality" id="{1053db42-b9d8-dcf2-1a64-2fd6a2de4975}">
           <p14:sldIdLst>
             <p14:sldId id="269"/>
             <p14:sldId id="270"/>
           </p14:sldIdLst>
         </p14:section>
-        <p14:section name="Close" id="{25d333be-dfb7-dbbc-26f3-6fb1201613dc}">
+        <p14:section name="Close" id="{f3cdece8-d077-4120-6523-08d5e315feda}">
           <p14:sldIdLst>
             <p14:sldId id="271"/>
           </p14:sldIdLst>
@@ -8058,7 +8058,7 @@
                   <a:schemeClr val="tx2"/>
                 </a:solidFill>
               </a:rPr>
-              <a:t>3D parallax hero</a:t>
+              <a:t>Animated dark theme</a:t>
             </a:r>
             <a:endParaRPr lang="en-US" sz="1500" dirty="0"/>
           </a:p>
@@ -8094,7 +8094,7 @@
                   <a:schemeClr val="accent6"/>
                 </a:solidFill>
               </a:rPr>
-              <a:t>Globe, grid and glow layers follow the mouse</a:t>
+              <a:t>Aurora glows and a particle network behind glass cards</a:t>
             </a:r>
             <a:endParaRPr lang="en-US" sz="1250" dirty="0"/>
           </a:p>
@@ -8174,7 +8174,7 @@
                   <a:schemeClr val="tx2"/>
                 </a:solidFill>
               </a:rPr>
-              <a:t>Tilt cards</a:t>
+              <a:t>3D hero and tilt cards</a:t>
             </a:r>
             <a:endParaRPr lang="en-US" sz="1500" dirty="0"/>
           </a:p>
@@ -8210,7 +8210,7 @@
                   <a:schemeClr val="accent6"/>
                 </a:solidFill>
               </a:rPr>
-              <a:t>Cards tilt toward the pointer with a light glare</a:t>
+              <a:t>Parallax globe; cards tilt with a light glare</a:t>
             </a:r>
             <a:endParaRPr lang="en-US" sz="1250" dirty="0"/>
           </a:p>

--- a/documentation/Nexus_Documentation/Nexus_Presentation_animated.pptx
+++ b/documentation/Nexus_Documentation/Nexus_Presentation_animated.pptx
@@ -122,26 +122,26 @@
   <p:extLst>
     <p:ext uri="{521415D9-36F7-43E2-AB2F-B90AF26B5E84}">
       <p14:sectionLst xmlns:p14="http://schemas.microsoft.com/office/powerpoint/2010/main">
-        <p14:section name="Introduction" id="{f4af6874-5f95-d15b-347d-22bf2ce94a0b}">
+        <p14:section name="Introduction" id="{327ce859-87c0-a2a7-b7b2-432a24cc5299}">
           <p14:sldIdLst>
             <p14:sldId id="256"/>
             <p14:sldId id="257"/>
           </p14:sldIdLst>
         </p14:section>
-        <p14:section name="Problem and solution" id="{298d7180-c411-c3f9-b460-b2c1f2ed2d25}">
+        <p14:section name="Problem and solution" id="{71e44aa7-d57e-9d99-1c74-c5a8c9314446}">
           <p14:sldIdLst>
             <p14:sldId id="258"/>
             <p14:sldId id="259"/>
           </p14:sldIdLst>
         </p14:section>
-        <p14:section name="Design" id="{67425f1d-3c55-437c-7f5e-f6d1d83d37cd}">
+        <p14:section name="Design" id="{8a40ffa8-619c-2d6d-3e3e-be8362ebfe3c}">
           <p14:sldIdLst>
             <p14:sldId id="260"/>
             <p14:sldId id="261"/>
             <p14:sldId id="262"/>
           </p14:sldIdLst>
         </p14:section>
-        <p14:section name="Business rules" id="{180a2c7f-4160-f7c7-d674-76b79fc72fbf}">
+        <p14:section name="Business rules" id="{7d7a54ca-1bfb-4494-b649-4515a9933c6d}">
           <p14:sldIdLst>
             <p14:sldId id="263"/>
             <p14:sldId id="264"/>
@@ -149,19 +149,19 @@
             <p14:sldId id="266"/>
           </p14:sldIdLst>
         </p14:section>
-        <p14:section name="Interface" id="{a0c97f4d-793f-48b9-9b28-dc7d785fe8fe}">
+        <p14:section name="Interface" id="{3b5da8fc-a2a0-2d6a-e0e0-94942a7d0a6c}">
           <p14:sldIdLst>
             <p14:sldId id="267"/>
             <p14:sldId id="268"/>
           </p14:sldIdLst>
         </p14:section>
-        <p14:section name="Quality" id="{1053db42-b9d8-dcf2-1a64-2fd6a2de4975}">
+        <p14:section name="Quality" id="{b9cb1bbd-1d93-c40f-8bd2-ea38e4813d99}">
           <p14:sldIdLst>
             <p14:sldId id="269"/>
             <p14:sldId id="270"/>
           </p14:sldIdLst>
         </p14:section>
-        <p14:section name="Close" id="{f3cdece8-d077-4120-6523-08d5e315feda}">
+        <p14:section name="Close" id="{ae1524dc-a634-f29c-6023-7e56c7e60518}">
           <p14:sldIdLst>
             <p14:sldId id="271"/>
           </p14:sldIdLst>
@@ -1110,7 +1110,7 @@
           <a:p>
             <a:r>
               <a:rPr lang="en-US" dirty="0"/>
-              <a:t>The interface uses a custom design system: a 3D parallax hero, tilt cards, smooth page transitions and micro-interactions. Everything respects the reduced-motion setting and works on phones.</a:t>
+              <a:t>The interface uses a custom glass design system: frosted cards over an animated background that turn clear when hovered and press in when clicked, a 3D parallax hero, tilt cards, smooth page transitions and micro-interactions. Everything respects the reduced-motion setting and works on phones.</a:t>
             </a:r>
             <a:endParaRPr lang="en-US" dirty="0"/>
           </a:p>
@@ -7920,7 +7920,7 @@
                   <a:schemeClr val="tx2"/>
                 </a:solidFill>
               </a:rPr>
-              <a:t>A modern interface with 3D motion</a:t>
+              <a:t>A glass interface with 3D motion</a:t>
             </a:r>
             <a:endParaRPr lang="en-US" sz="3200" dirty="0"/>
           </a:p>
@@ -8058,7 +8058,7 @@
                   <a:schemeClr val="tx2"/>
                 </a:solidFill>
               </a:rPr>
-              <a:t>Animated dark theme</a:t>
+              <a:t>Frosted glass theme</a:t>
             </a:r>
             <a:endParaRPr lang="en-US" sz="1500" dirty="0"/>
           </a:p>
@@ -8094,7 +8094,7 @@
                   <a:schemeClr val="accent6"/>
                 </a:solidFill>
               </a:rPr>
-              <a:t>Aurora glows and a particle network behind glass cards</a:t>
+              <a:t>Glass cards over animated aurora glows and particles</a:t>
             </a:r>
             <a:endParaRPr lang="en-US" sz="1250" dirty="0"/>
           </a:p>
@@ -8174,7 +8174,7 @@
                   <a:schemeClr val="tx2"/>
                 </a:solidFill>
               </a:rPr>
-              <a:t>3D hero and tilt cards</a:t>
+              <a:t>Clear glass on hover</a:t>
             </a:r>
             <a:endParaRPr lang="en-US" sz="1500" dirty="0"/>
           </a:p>
@@ -8210,7 +8210,7 @@
                   <a:schemeClr val="accent6"/>
                 </a:solidFill>
               </a:rPr>
-              <a:t>Parallax globe; cards tilt with a light glare</a:t>
+              <a:t>Cards turn clear, light up and tilt; a light flash on click</a:t>
             </a:r>
             <a:endParaRPr lang="en-US" sz="1250" dirty="0"/>
           </a:p>

--- a/documentation/Nexus_Documentation/Nexus_Presentation_animated.pptx
+++ b/documentation/Nexus_Documentation/Nexus_Presentation_animated.pptx
@@ -21,9 +21,10 @@
     <p:sldId id="269" r:id="rId15"/>
     <p:sldId id="270" r:id="rId16"/>
     <p:sldId id="271" r:id="rId17"/>
+    <p:sldId id="272" r:id="rId18"/>
   </p:sldIdLst>
   <p:notesMasterIdLst>
-    <p:notesMasterId r:id="rId18"/>
+    <p:notesMasterId r:id="rId19"/>
   </p:notesMasterIdLst>
   <p:sldSz cx="12192000" cy="6858000"/>
   <p:notesSz cx="6858000" cy="12192000"/>
@@ -122,48 +123,49 @@
   <p:extLst>
     <p:ext uri="{521415D9-36F7-43E2-AB2F-B90AF26B5E84}">
       <p14:sectionLst xmlns:p14="http://schemas.microsoft.com/office/powerpoint/2010/main">
-        <p14:section name="Introduction" id="{327ce859-87c0-a2a7-b7b2-432a24cc5299}">
+        <p14:section name="Introduction" id="{b3f5d123-1a3d-2dff-be96-845a293f6c1f}">
           <p14:sldIdLst>
             <p14:sldId id="256"/>
             <p14:sldId id="257"/>
+            <p14:sldId id="258"/>
           </p14:sldIdLst>
         </p14:section>
-        <p14:section name="Problem and solution" id="{71e44aa7-d57e-9d99-1c74-c5a8c9314446}">
+        <p14:section name="Problem and solution" id="{6a46c6fb-8a0d-5888-a669-06c97fc297e7}">
           <p14:sldIdLst>
-            <p14:sldId id="258"/>
             <p14:sldId id="259"/>
+            <p14:sldId id="260"/>
           </p14:sldIdLst>
         </p14:section>
-        <p14:section name="Design" id="{8a40ffa8-619c-2d6d-3e3e-be8362ebfe3c}">
+        <p14:section name="Design" id="{38bf5e4d-c77d-c876-f1aa-83db6426eda1}">
           <p14:sldIdLst>
-            <p14:sldId id="260"/>
             <p14:sldId id="261"/>
             <p14:sldId id="262"/>
+            <p14:sldId id="263"/>
           </p14:sldIdLst>
         </p14:section>
-        <p14:section name="Business rules" id="{7d7a54ca-1bfb-4494-b649-4515a9933c6d}">
+        <p14:section name="Business rules" id="{7b9275da-df37-a21b-c032-27af92bd02f1}">
           <p14:sldIdLst>
-            <p14:sldId id="263"/>
             <p14:sldId id="264"/>
             <p14:sldId id="265"/>
             <p14:sldId id="266"/>
+            <p14:sldId id="267"/>
           </p14:sldIdLst>
         </p14:section>
-        <p14:section name="Interface" id="{3b5da8fc-a2a0-2d6a-e0e0-94942a7d0a6c}">
+        <p14:section name="Interface" id="{23da28bb-2189-858f-5080-c53f9382f180}">
           <p14:sldIdLst>
-            <p14:sldId id="267"/>
             <p14:sldId id="268"/>
+            <p14:sldId id="269"/>
           </p14:sldIdLst>
         </p14:section>
-        <p14:section name="Quality" id="{b9cb1bbd-1d93-c40f-8bd2-ea38e4813d99}">
+        <p14:section name="Quality" id="{3c934f4b-80af-7168-287e-93c6f6aa8910}">
           <p14:sldIdLst>
-            <p14:sldId id="269"/>
             <p14:sldId id="270"/>
+            <p14:sldId id="271"/>
           </p14:sldIdLst>
         </p14:section>
-        <p14:section name="Close" id="{ae1524dc-a634-f29c-6023-7e56c7e60518}">
+        <p14:section name="Close" id="{ba2ecbb7-c4c4-9698-accd-ae381e0fd752}">
           <p14:sldIdLst>
-            <p14:sldId id="271"/>
+            <p14:sldId id="272"/>
           </p14:sldIdLst>
         </p14:section>
       </p14:sectionLst>
@@ -934,7 +936,7 @@
           <a:p>
             <a:r>
               <a:rPr lang="en-US" dirty="0"/>
-              <a:t>The discount band depends on all the connections a customer takes, and applies to the advance and the security deposit. Deposits are refundable when a connection is closed.</a:t>
+              <a:t>Only the Accounts department generates bills. The service calculates every amount; Accounts only enters call minutes and any other usage. The worked example is one of the automated test cases.</a:t>
             </a:r>
             <a:endParaRPr lang="en-US" dirty="0"/>
           </a:p>
@@ -1022,7 +1024,7 @@
           <a:p>
             <a:r>
               <a:rPr lang="en-US" dirty="0"/>
-              <a:t>The specification says the connection status depends on the bill. Technical staff see every overdue connection, can suspend them, and reactivate them once the customer has paid.</a:t>
+              <a:t>The discount band depends on all the connections a customer takes, and applies to the advance and the security deposit. Deposits are refundable when a connection is closed.</a:t>
             </a:r>
             <a:endParaRPr lang="en-US" dirty="0"/>
           </a:p>
@@ -1110,7 +1112,7 @@
           <a:p>
             <a:r>
               <a:rPr lang="en-US" dirty="0"/>
-              <a:t>The interface uses a custom glass design system: frosted cards over an animated background that turn clear when hovered and press in when clicked, a 3D parallax hero, tilt cards, smooth page transitions and micro-interactions. Everything respects the reduced-motion setting and works on phones.</a:t>
+              <a:t>The specification says the connection status depends on the bill. Technical staff see every overdue connection, can suspend them, and reactivate them once the customer has paid.</a:t>
             </a:r>
             <a:endParaRPr lang="en-US" dirty="0"/>
           </a:p>
@@ -1198,7 +1200,7 @@
           <a:p>
             <a:r>
               <a:rPr lang="en-US" dirty="0"/>
-              <a:t>Each role lands on its own dashboard with live figures and quick actions. Status values everywhere appear as coloured badges, so problems such as overdue bills stand out.</a:t>
+              <a:t>The interface uses a custom design system with a light and a dark theme - the user switches with the sun / moon button and the choice is remembered. It has original illustrations, a 3D parallax hero, tilt cards, smooth page transitions and micro-interactions. Everything respects the reduced-motion setting and works on phones.</a:t>
             </a:r>
             <a:endParaRPr lang="en-US" dirty="0"/>
           </a:p>
@@ -1286,7 +1288,7 @@
           <a:p>
             <a:r>
               <a:rPr lang="en-US" dirty="0"/>
-              <a:t>A script drives every role through the real application and checks the database results - 48 checks, all passing. Testing also found and fixed two real bugs: uploaded documents were saved corrupted, and combined phone and dial-up orders could never be connected.</a:t>
+              <a:t>Each role lands on its own dashboard with live figures and quick actions. Status values everywhere appear as coloured badges, so problems such as overdue bills stand out.</a:t>
             </a:r>
             <a:endParaRPr lang="en-US" dirty="0"/>
           </a:p>
@@ -1374,7 +1376,7 @@
           <a:p>
             <a:r>
               <a:rPr lang="en-US" dirty="0"/>
-              <a:t>Show the steps to run the system and the default admin login. Recommend changing the admin password after the first login.</a:t>
+              <a:t>A script drives every role through the real application and checks the database results - 48 checks, all passing. Testing also found and fixed two real bugs: uploaded documents were saved corrupted, and combined phone and dial-up orders could never be connected.</a:t>
             </a:r>
             <a:endParaRPr lang="en-US" dirty="0"/>
           </a:p>
@@ -1462,6 +1464,94 @@
           <a:p>
             <a:r>
               <a:rPr lang="en-US" dirty="0"/>
+              <a:t>Show the steps to run the system and the default admin login. Recommend changing the admin password after the first login.</a:t>
+            </a:r>
+            <a:endParaRPr lang="en-US" dirty="0"/>
+          </a:p>
+        </p:txBody>
+      </p:sp>
+      <p:sp>
+        <p:nvSpPr>
+          <p:cNvPr id="4" name="Slide Number Placeholder 3"/>
+          <p:cNvSpPr>
+            <a:spLocks noGrp="1"/>
+          </p:cNvSpPr>
+          <p:nvPr>
+            <p:ph type="sldNum" sz="quarter" idx="10"/>
+          </p:nvPr>
+        </p:nvSpPr>
+        <p:spPr/>
+        <p:txBody>
+          <a:bodyPr/>
+          <a:lstStyle/>
+          <a:p>
+            <a:fld id="{F7021451-1387-4CA6-816F-3879F97B5CBC}" type="slidenum">
+              <a:rPr lang="en-US"/>
+              <a:t>16</a:t>
+            </a:fld>
+            <a:endParaRPr lang="en-US"/>
+          </a:p>
+        </p:txBody>
+      </p:sp>
+    </p:spTree>
+    <p:extLst>
+      <p:ext uri="{BB962C8B-B14F-4D97-AF65-F5344CB8AC3E}">
+        <p14:creationId xmlns:p14="http://schemas.microsoft.com/office/powerpoint/2010/main" val="1024086991"/>
+      </p:ext>
+    </p:extLst>
+  </p:cSld>
+  <p:clrMapOvr>
+    <a:masterClrMapping/>
+  </p:clrMapOvr>
+</p:notes>
+</file>
+
+<file path=ppt/notesSlides/notesSlide17.xml><?xml version="1.0" encoding="utf-8"?>
+<p:notes xmlns:a="http://schemas.openxmlformats.org/drawingml/2006/main" xmlns:r="http://schemas.openxmlformats.org/officeDocument/2006/relationships" xmlns:p="http://schemas.openxmlformats.org/presentationml/2006/main">
+  <p:cSld>
+    <p:spTree>
+      <p:nvGrpSpPr>
+        <p:cNvPr id="1" name=""/>
+        <p:cNvGrpSpPr/>
+        <p:nvPr/>
+      </p:nvGrpSpPr>
+      <p:grpSpPr>
+        <a:xfrm>
+          <a:off x="0" y="0"/>
+          <a:ext cx="0" cy="0"/>
+          <a:chOff x="0" y="0"/>
+          <a:chExt cx="0" cy="0"/>
+        </a:xfrm>
+      </p:grpSpPr>
+      <p:sp>
+        <p:nvSpPr>
+          <p:cNvPr id="2" name="Slide Image Placeholder 1"/>
+          <p:cNvSpPr>
+            <a:spLocks noGrp="1" noRot="1" noChangeAspect="1"/>
+          </p:cNvSpPr>
+          <p:nvPr>
+            <p:ph type="sldImg"/>
+          </p:nvPr>
+        </p:nvSpPr>
+        <p:spPr/>
+      </p:sp>
+      <p:sp>
+        <p:nvSpPr>
+          <p:cNvPr id="3" name="Notes Placeholder 2"/>
+          <p:cNvSpPr>
+            <a:spLocks noGrp="1"/>
+          </p:cNvSpPr>
+          <p:nvPr>
+            <p:ph type="body" idx="1"/>
+          </p:nvPr>
+        </p:nvSpPr>
+        <p:spPr/>
+        <p:txBody>
+          <a:bodyPr/>
+          <a:lstStyle/>
+          <a:p>
+            <a:r>
+              <a:rPr lang="en-US" dirty="0"/>
               <a:t>Thank the audience and offer a live demonstration of the system: place an order, run feasibility, create the connection and generate the first bill.</a:t>
             </a:r>
             <a:endParaRPr lang="en-US" dirty="0"/>
@@ -1485,7 +1575,7 @@
           <a:p>
             <a:fld id="{F7021451-1387-4CA6-816F-3879F97B5CBC}" type="slidenum">
               <a:rPr lang="en-US"/>
-              <a:t>16</a:t>
+              <a:t>17</a:t>
             </a:fld>
             <a:endParaRPr lang="en-US"/>
           </a:p>
@@ -1550,7 +1640,7 @@
           <a:p>
             <a:r>
               <a:rPr lang="en-US" dirty="0"/>
-              <a:t>Walk through the agenda: the problem, the solution, the technical design, the business rules, the user interface and finally testing and how to run the system.</a:t>
+              <a:t>Introduce each member of the group, their main area of work and which part of the presentation they will give.</a:t>
             </a:r>
             <a:endParaRPr lang="en-US" dirty="0"/>
           </a:p>
@@ -1638,7 +1728,7 @@
           <a:p>
             <a:r>
               <a:rPr lang="en-US" dirty="0"/>
-              <a:t>Explain the existing scenario from the problem statement: everything is paper based, feasibility and billing are manual, and documents are filed by hand. With retail shops in every city this no longer scales.</a:t>
+              <a:t>Walk through the agenda: the problem, the solution, the technical design, the business rules, the user interface and finally testing and how to run the system.</a:t>
             </a:r>
             <a:endParaRPr lang="en-US" dirty="0"/>
           </a:p>
@@ -1726,7 +1816,7 @@
           <a:p>
             <a:r>
               <a:rPr lang="en-US" dirty="0"/>
-              <a:t>Each role signs in to its own area and only sees its own functions. Passwords are hashed and every page checks the role. Visitors can still see prices and track an order.</a:t>
+              <a:t>Explain the existing scenario from the problem statement: everything is paper based, feasibility and billing are manual, and documents are filed by hand. With retail shops in every city this no longer scales.</a:t>
             </a:r>
             <a:endParaRPr lang="en-US" dirty="0"/>
           </a:p>
@@ -1814,7 +1904,7 @@
           <a:p>
             <a:r>
               <a:rPr lang="en-US" dirty="0"/>
-              <a:t>The browser talks to role areas in ASP.NET Core MVC. Controllers call business services, and the services use Entity Framework Core to reach SQL Server. Customer documents are stored outside the public web folder.</a:t>
+              <a:t>Each role signs in to its own area and only sees its own functions. Passwords are hashed and every page checks the role. Visitors can still see prices and track an order.</a:t>
             </a:r>
             <a:endParaRPr lang="en-US" dirty="0"/>
           </a:p>
@@ -1902,7 +1992,7 @@
           <a:p>
             <a:r>
               <a:rPr lang="en-US" dirty="0"/>
-              <a:t>The ER diagram shows the 19 tables. Orders link customers to plans and cities; connections come from orders; bills belong to connections and payments to bills. The database itself enforces the ID formats and value rules through CHECK constraints.</a:t>
+              <a:t>The browser talks to role areas in ASP.NET Core MVC. Controllers call business services, and the services use Entity Framework Core to reach SQL Server. Customer documents are stored outside the public web folder.</a:t>
             </a:r>
             <a:endParaRPr lang="en-US" dirty="0"/>
           </a:p>
@@ -1990,7 +2080,7 @@
           <a:p>
             <a:r>
               <a:rPr lang="en-US" dirty="0"/>
-              <a:t>Users never type these IDs. A database counter is incremented atomically, so two shops placing orders at the same moment always get different numbers. CHECK constraints reject anything that does not match the format.</a:t>
+              <a:t>The ER diagram shows the 19 tables. Orders link customers to plans and cities; connections come from orders; bills belong to connections and payments to bills. The database itself enforces the ID formats and value rules through CHECK constraints.</a:t>
             </a:r>
             <a:endParaRPr lang="en-US" dirty="0"/>
           </a:p>
@@ -2078,7 +2168,7 @@
           <a:p>
             <a:r>
               <a:rPr lang="en-US" dirty="0"/>
-              <a:t>An order moves through feasibility to connection. If any check fails the order becomes Not feasible. A customer without a Nexus landline can apply for the telephone line and dial-up together; both checks run and the line is created first.</a:t>
+              <a:t>Users never type these IDs. A database counter is incremented atomically, so two shops placing orders at the same moment always get different numbers. CHECK constraints reject anything that does not match the format.</a:t>
             </a:r>
             <a:endParaRPr lang="en-US" dirty="0"/>
           </a:p>
@@ -2166,7 +2256,7 @@
           <a:p>
             <a:r>
               <a:rPr lang="en-US" dirty="0"/>
-              <a:t>Only the Accounts department generates bills. The service calculates every amount; Accounts only enters call minutes and any other usage. The worked example is one of the automated test cases.</a:t>
+              <a:t>An order moves through feasibility to connection. If any check fails the order becomes Not feasible. A customer without a Nexus landline can apply for the telephone line and dial-up together; both checks run and the line is created first.</a:t>
             </a:r>
             <a:endParaRPr lang="en-US" dirty="0"/>
           </a:p>
@@ -3086,8 +3176,8 @@
         </p:nvSpPr>
         <p:spPr>
           <a:xfrm>
-            <a:off x="685800" y="5257800"/>
-            <a:ext cx="6400800" cy="365760"/>
+            <a:off x="685800" y="5120640"/>
+            <a:ext cx="6766560" cy="685800"/>
           </a:xfrm>
           <a:prstGeom prst="rect">
             <a:avLst/>
@@ -3096,21 +3186,32 @@
           <a:ln/>
         </p:spPr>
         <p:txBody>
-          <a:bodyPr wrap="square" lIns="0" tIns="0" rIns="0" bIns="0" rtlCol="0" anchor="ctr"/>
+          <a:bodyPr wrap="square" lIns="0" tIns="0" rIns="0" bIns="0" rtlCol="0" anchor="t"/>
           <a:lstStyle/>
           <a:p>
             <a:pPr indent="0" marL="0">
               <a:buNone/>
             </a:pPr>
             <a:r>
-              <a:rPr lang="en-US" sz="1400" dirty="0">
+              <a:rPr lang="en-US" sz="1300" b="1" dirty="0">
+                <a:solidFill>
+                  <a:srgbClr val="6EE7B7"/>
+                </a:solidFill>
+              </a:rPr>
+              <a:t>Presented by  </a:t>
+            </a:r>
+            <a:pPr indent="0" marL="0">
+              <a:buNone/>
+            </a:pPr>
+            <a:r>
+              <a:rPr lang="en-US" sz="1300" dirty="0">
                 <a:solidFill>
                   <a:srgbClr val="BAE6FD"/>
                 </a:solidFill>
               </a:rPr>
-              <a:t>[Your name]  ·  [Batch] / [Group]  ·  [Centre name]</a:t>
+              <a:t>Ali Jan  ·  Humaiz Khan  ·  Muhammad Ehtisham Shakeel  ·  Muhammad Waleed  ·  Ali Turab</a:t>
             </a:r>
-            <a:endParaRPr lang="en-US" sz="1400" dirty="0"/>
+            <a:endParaRPr lang="en-US" sz="1300" dirty="0"/>
           </a:p>
         </p:txBody>
       </p:sp>
@@ -3430,6 +3531,2080 @@
 <file path=ppt/slides/slide10.xml><?xml version="1.0" encoding="utf-8"?>
 <p:sld xmlns:a="http://schemas.openxmlformats.org/drawingml/2006/main" xmlns:r="http://schemas.openxmlformats.org/officeDocument/2006/relationships" xmlns:p="http://schemas.openxmlformats.org/presentationml/2006/main">
   <p:cSld name="Slide 10">
+    <p:spTree>
+      <p:nvGrpSpPr>
+        <p:cNvPr id="1" name=""/>
+        <p:cNvGrpSpPr/>
+        <p:nvPr/>
+      </p:nvGrpSpPr>
+      <p:grpSpPr>
+        <a:xfrm>
+          <a:off x="0" y="0"/>
+          <a:ext cx="0" cy="0"/>
+          <a:chOff x="0" y="0"/>
+          <a:chExt cx="0" cy="0"/>
+        </a:xfrm>
+      </p:grpSpPr>
+      <p:sp>
+        <p:nvSpPr>
+          <p:cNvPr id="2" name="Text 0"/>
+          <p:cNvSpPr/>
+          <p:nvPr>
+            <p:ph idx="100" type="title" hasCustomPrompt="1"/>
+          </p:nvPr>
+        </p:nvSpPr>
+        <p:spPr>
+          <a:xfrm>
+            <a:off x="548640" y="347472"/>
+            <a:ext cx="11064240" cy="731520"/>
+          </a:xfrm>
+          <a:prstGeom prst="rect">
+            <a:avLst/>
+          </a:prstGeom>
+          <a:noFill/>
+          <a:ln/>
+        </p:spPr>
+        <p:txBody>
+          <a:bodyPr wrap="square" lIns="0" tIns="0" rIns="0" bIns="0" rtlCol="0" anchor="ctr"/>
+          <a:lstStyle/>
+          <a:p>
+            <a:pPr algn="l" indent="0" marL="0">
+              <a:buNone/>
+            </a:pPr>
+            <a:r>
+              <a:rPr lang="en-US" sz="3200" b="1" dirty="0">
+                <a:solidFill>
+                  <a:schemeClr val="tx2"/>
+                </a:solidFill>
+              </a:rPr>
+              <a:t>The billing engine</a:t>
+            </a:r>
+            <a:endParaRPr lang="en-US" sz="3200" dirty="0"/>
+          </a:p>
+        </p:txBody>
+      </p:sp>
+      <p:sp>
+        <p:nvSpPr>
+          <p:cNvPr id="3" name="a-zoom-bill"/>
+          <p:cNvSpPr/>
+          <p:nvPr/>
+        </p:nvSpPr>
+        <p:spPr>
+          <a:xfrm>
+            <a:off x="493776" y="1362456"/>
+            <a:ext cx="6876288" cy="2825496"/>
+          </a:xfrm>
+          <a:prstGeom prst="roundRect">
+            <a:avLst>
+              <a:gd name="adj" fmla="val 2589"/>
+            </a:avLst>
+          </a:prstGeom>
+          <a:solidFill>
+            <a:schemeClr val="bg1"/>
+          </a:solidFill>
+          <a:ln w="9525">
+            <a:solidFill>
+              <a:srgbClr val="CBD5E1"/>
+            </a:solidFill>
+            <a:prstDash val="solid"/>
+          </a:ln>
+          <a:effectLst>
+            <a:outerShdw sx="100000" sy="100000" kx="0" ky="0" algn="bl" rotWithShape="0" blurRad="127000" dist="38100" dir="5400000">
+              <a:srgbClr val="0A2540">
+                <a:alpha val="16000"/>
+              </a:srgbClr>
+            </a:outerShdw>
+          </a:effectLst>
+        </p:spPr>
+      </p:sp>
+      <p:pic>
+        <p:nvPicPr>
+          <p:cNvPr id="4" name="a-zoom-w-bill-img" descr="/tmp/claude-0/-home-user-done/4a4296a4-6fd8-5cee-98c2-5de0aee80c99/scratchpad/docs/img/billing-flow.png">    </p:cNvPr>
+          <p:cNvPicPr>
+            <a:picLocks noChangeAspect="1"/>
+          </p:cNvPicPr>
+          <p:nvPr/>
+        </p:nvPicPr>
+        <p:blipFill>
+          <a:blip r:embed="rId1"/>
+          <a:stretch>
+            <a:fillRect/>
+          </a:stretch>
+        </p:blipFill>
+        <p:spPr>
+          <a:xfrm>
+            <a:off x="548640" y="1417320"/>
+            <a:ext cx="6766560" cy="2715768"/>
+          </a:xfrm>
+          <a:prstGeom prst="rect">
+            <a:avLst/>
+          </a:prstGeom>
+        </p:spPr>
+      </p:pic>
+      <p:pic>
+        <p:nvPicPr>
+          <p:cNvPr id="5" name="a-left-bi0" descr="/tmp/claude-0/-home-user-done/4a4296a4-6fd8-5cee-98c2-5de0aee80c99/scratchpad/docs/img/icons/check-g.png">    </p:cNvPr>
+          <p:cNvPicPr>
+            <a:picLocks noChangeAspect="1"/>
+          </p:cNvPicPr>
+          <p:nvPr/>
+        </p:nvPicPr>
+        <p:blipFill>
+          <a:blip r:embed="rId2"/>
+          <a:stretch>
+            <a:fillRect/>
+          </a:stretch>
+        </p:blipFill>
+        <p:spPr>
+          <a:xfrm>
+            <a:off x="548640" y="4526280"/>
+            <a:ext cx="237744" cy="237744"/>
+          </a:xfrm>
+          <a:prstGeom prst="rect">
+            <a:avLst/>
+          </a:prstGeom>
+        </p:spPr>
+      </p:pic>
+      <p:sp>
+        <p:nvSpPr>
+          <p:cNvPr id="6" name="a-left-w-bt0"/>
+          <p:cNvSpPr txBox="1"/>
+          <p:nvPr/>
+        </p:nvSpPr>
+        <p:spPr>
+          <a:xfrm>
+            <a:off x="914400" y="4498848"/>
+            <a:ext cx="6400800" cy="310896"/>
+          </a:xfrm>
+          <a:prstGeom prst="rect">
+            <a:avLst/>
+          </a:prstGeom>
+          <a:noFill/>
+          <a:ln/>
+        </p:spPr>
+        <p:txBody>
+          <a:bodyPr wrap="square" lIns="0" tIns="0" rIns="0" bIns="0" rtlCol="0" anchor="t"/>
+          <a:lstStyle/>
+          <a:p>
+            <a:pPr indent="0" marL="0">
+              <a:buNone/>
+            </a:pPr>
+            <a:r>
+              <a:rPr lang="en-US" sz="1400" dirty="0">
+                <a:solidFill>
+                  <a:schemeClr val="tx1"/>
+                </a:solidFill>
+              </a:rPr>
+              <a:t>Plan fee once per validity period</a:t>
+            </a:r>
+            <a:endParaRPr lang="en-US" sz="1400" dirty="0"/>
+          </a:p>
+        </p:txBody>
+      </p:sp>
+      <p:pic>
+        <p:nvPicPr>
+          <p:cNvPr id="7" name="a-left-bi1" descr="/tmp/claude-0/-home-user-done/4a4296a4-6fd8-5cee-98c2-5de0aee80c99/scratchpad/docs/img/icons/check-g.png">    </p:cNvPr>
+          <p:cNvPicPr>
+            <a:picLocks noChangeAspect="1"/>
+          </p:cNvPicPr>
+          <p:nvPr/>
+        </p:nvPicPr>
+        <p:blipFill>
+          <a:blip r:embed="rId3"/>
+          <a:stretch>
+            <a:fillRect/>
+          </a:stretch>
+        </p:blipFill>
+        <p:spPr>
+          <a:xfrm>
+            <a:off x="548640" y="4873752"/>
+            <a:ext cx="237744" cy="237744"/>
+          </a:xfrm>
+          <a:prstGeom prst="rect">
+            <a:avLst/>
+          </a:prstGeom>
+        </p:spPr>
+      </p:pic>
+      <p:sp>
+        <p:nvSpPr>
+          <p:cNvPr id="8" name="a-left-w-bt1"/>
+          <p:cNvSpPr txBox="1"/>
+          <p:nvPr/>
+        </p:nvSpPr>
+        <p:spPr>
+          <a:xfrm>
+            <a:off x="914400" y="4846320"/>
+            <a:ext cx="6400800" cy="310896"/>
+          </a:xfrm>
+          <a:prstGeom prst="rect">
+            <a:avLst/>
+          </a:prstGeom>
+          <a:noFill/>
+          <a:ln/>
+        </p:spPr>
+        <p:txBody>
+          <a:bodyPr wrap="square" lIns="0" tIns="0" rIns="0" bIns="0" rtlCol="0" anchor="t"/>
+          <a:lstStyle/>
+          <a:p>
+            <a:pPr indent="0" marL="0">
+              <a:buNone/>
+            </a:pPr>
+            <a:r>
+              <a:rPr lang="en-US" sz="1400" dirty="0">
+                <a:solidFill>
+                  <a:schemeClr val="tx1"/>
+                </a:solidFill>
+              </a:rPr>
+              <a:t>Call minutes x the plan's per-minute rates</a:t>
+            </a:r>
+            <a:endParaRPr lang="en-US" sz="1400" dirty="0"/>
+          </a:p>
+        </p:txBody>
+      </p:sp>
+      <p:pic>
+        <p:nvPicPr>
+          <p:cNvPr id="9" name="a-left-bi2" descr="/tmp/claude-0/-home-user-done/4a4296a4-6fd8-5cee-98c2-5de0aee80c99/scratchpad/docs/img/icons/check-g.png">    </p:cNvPr>
+          <p:cNvPicPr>
+            <a:picLocks noChangeAspect="1"/>
+          </p:cNvPicPr>
+          <p:nvPr/>
+        </p:nvPicPr>
+        <p:blipFill>
+          <a:blip r:embed="rId4"/>
+          <a:stretch>
+            <a:fillRect/>
+          </a:stretch>
+        </p:blipFill>
+        <p:spPr>
+          <a:xfrm>
+            <a:off x="548640" y="5221224"/>
+            <a:ext cx="237744" cy="237744"/>
+          </a:xfrm>
+          <a:prstGeom prst="rect">
+            <a:avLst/>
+          </a:prstGeom>
+        </p:spPr>
+      </p:pic>
+      <p:sp>
+        <p:nvSpPr>
+          <p:cNvPr id="10" name="a-left-w-bt2"/>
+          <p:cNvSpPr txBox="1"/>
+          <p:nvPr/>
+        </p:nvSpPr>
+        <p:spPr>
+          <a:xfrm>
+            <a:off x="914400" y="5193792"/>
+            <a:ext cx="6400800" cy="310896"/>
+          </a:xfrm>
+          <a:prstGeom prst="rect">
+            <a:avLst/>
+          </a:prstGeom>
+          <a:noFill/>
+          <a:ln/>
+        </p:spPr>
+        <p:txBody>
+          <a:bodyPr wrap="square" lIns="0" tIns="0" rIns="0" bIns="0" rtlCol="0" anchor="t"/>
+          <a:lstStyle/>
+          <a:p>
+            <a:pPr indent="0" marL="0">
+              <a:buNone/>
+            </a:pPr>
+            <a:r>
+              <a:rPr lang="en-US" sz="1400" dirty="0">
+                <a:solidFill>
+                  <a:schemeClr val="tx1"/>
+                </a:solidFill>
+              </a:rPr>
+              <a:t>Replacement charges added once, automatically</a:t>
+            </a:r>
+            <a:endParaRPr lang="en-US" sz="1400" dirty="0"/>
+          </a:p>
+        </p:txBody>
+      </p:sp>
+      <p:pic>
+        <p:nvPicPr>
+          <p:cNvPr id="11" name="a-left-bi3" descr="/tmp/claude-0/-home-user-done/4a4296a4-6fd8-5cee-98c2-5de0aee80c99/scratchpad/docs/img/icons/check-g.png">    </p:cNvPr>
+          <p:cNvPicPr>
+            <a:picLocks noChangeAspect="1"/>
+          </p:cNvPicPr>
+          <p:nvPr/>
+        </p:nvPicPr>
+        <p:blipFill>
+          <a:blip r:embed="rId5"/>
+          <a:stretch>
+            <a:fillRect/>
+          </a:stretch>
+        </p:blipFill>
+        <p:spPr>
+          <a:xfrm>
+            <a:off x="548640" y="5568696"/>
+            <a:ext cx="237744" cy="237744"/>
+          </a:xfrm>
+          <a:prstGeom prst="rect">
+            <a:avLst/>
+          </a:prstGeom>
+        </p:spPr>
+      </p:pic>
+      <p:sp>
+        <p:nvSpPr>
+          <p:cNvPr id="12" name="a-left-w-bt3"/>
+          <p:cNvSpPr txBox="1"/>
+          <p:nvPr/>
+        </p:nvSpPr>
+        <p:spPr>
+          <a:xfrm>
+            <a:off x="914400" y="5541264"/>
+            <a:ext cx="6400800" cy="310896"/>
+          </a:xfrm>
+          <a:prstGeom prst="rect">
+            <a:avLst/>
+          </a:prstGeom>
+          <a:noFill/>
+          <a:ln/>
+        </p:spPr>
+        <p:txBody>
+          <a:bodyPr wrap="square" lIns="0" tIns="0" rIns="0" bIns="0" rtlCol="0" anchor="t"/>
+          <a:lstStyle/>
+          <a:p>
+            <a:pPr indent="0" marL="0">
+              <a:buNone/>
+            </a:pPr>
+            <a:r>
+              <a:rPr lang="en-US" sz="1400" dirty="0">
+                <a:solidFill>
+                  <a:schemeClr val="tx1"/>
+                </a:solidFill>
+              </a:rPr>
+              <a:t>Deposit and bulk discount on the first bill</a:t>
+            </a:r>
+            <a:endParaRPr lang="en-US" sz="1400" dirty="0"/>
+          </a:p>
+        </p:txBody>
+      </p:sp>
+      <p:pic>
+        <p:nvPicPr>
+          <p:cNvPr id="13" name="a-left-bi4" descr="/tmp/claude-0/-home-user-done/4a4296a4-6fd8-5cee-98c2-5de0aee80c99/scratchpad/docs/img/icons/check-g.png">    </p:cNvPr>
+          <p:cNvPicPr>
+            <a:picLocks noChangeAspect="1"/>
+          </p:cNvPicPr>
+          <p:nvPr/>
+        </p:nvPicPr>
+        <p:blipFill>
+          <a:blip r:embed="rId6"/>
+          <a:stretch>
+            <a:fillRect/>
+          </a:stretch>
+        </p:blipFill>
+        <p:spPr>
+          <a:xfrm>
+            <a:off x="548640" y="5916168"/>
+            <a:ext cx="237744" cy="237744"/>
+          </a:xfrm>
+          <a:prstGeom prst="rect">
+            <a:avLst/>
+          </a:prstGeom>
+        </p:spPr>
+      </p:pic>
+      <p:sp>
+        <p:nvSpPr>
+          <p:cNvPr id="14" name="a-left-w-bt4"/>
+          <p:cNvSpPr txBox="1"/>
+          <p:nvPr/>
+        </p:nvSpPr>
+        <p:spPr>
+          <a:xfrm>
+            <a:off x="914400" y="5888736"/>
+            <a:ext cx="6400800" cy="310896"/>
+          </a:xfrm>
+          <a:prstGeom prst="rect">
+            <a:avLst/>
+          </a:prstGeom>
+          <a:noFill/>
+          <a:ln/>
+        </p:spPr>
+        <p:txBody>
+          <a:bodyPr wrap="square" lIns="0" tIns="0" rIns="0" bIns="0" rtlCol="0" anchor="t"/>
+          <a:lstStyle/>
+          <a:p>
+            <a:pPr indent="0" marL="0">
+              <a:buNone/>
+            </a:pPr>
+            <a:r>
+              <a:rPr lang="en-US" sz="1400" dirty="0">
+                <a:solidFill>
+                  <a:schemeClr val="tx1"/>
+                </a:solidFill>
+              </a:rPr>
+              <a:t>Unpaid earlier bills shown as brought forward</a:t>
+            </a:r>
+            <a:endParaRPr lang="en-US" sz="1400" dirty="0"/>
+          </a:p>
+        </p:txBody>
+      </p:sp>
+      <p:sp>
+        <p:nvSpPr>
+          <p:cNvPr id="15" name="a-zoom-ex"/>
+          <p:cNvSpPr/>
+          <p:nvPr/>
+        </p:nvSpPr>
+        <p:spPr>
+          <a:xfrm>
+            <a:off x="7772400" y="1417320"/>
+            <a:ext cx="3840480" cy="4709160"/>
+          </a:xfrm>
+          <a:prstGeom prst="roundRect">
+            <a:avLst>
+              <a:gd name="adj" fmla="val 2857"/>
+            </a:avLst>
+          </a:prstGeom>
+          <a:solidFill>
+            <a:schemeClr val="bg2"/>
+          </a:solidFill>
+          <a:ln w="9525">
+            <a:solidFill>
+              <a:srgbClr val="CBD5E1"/>
+            </a:solidFill>
+            <a:prstDash val="solid"/>
+          </a:ln>
+          <a:effectLst>
+            <a:outerShdw sx="100000" sy="100000" kx="0" ky="0" algn="bl" rotWithShape="0" blurRad="127000" dist="38100" dir="5400000">
+              <a:srgbClr val="0A2540">
+                <a:alpha val="16000"/>
+              </a:srgbClr>
+            </a:outerShdw>
+          </a:effectLst>
+        </p:spPr>
+      </p:sp>
+      <p:sp>
+        <p:nvSpPr>
+          <p:cNvPr id="16" name="a-fade-exh"/>
+          <p:cNvSpPr txBox="1"/>
+          <p:nvPr/>
+        </p:nvSpPr>
+        <p:spPr>
+          <a:xfrm>
+            <a:off x="8092440" y="1691640"/>
+            <a:ext cx="3291840" cy="365760"/>
+          </a:xfrm>
+          <a:prstGeom prst="rect">
+            <a:avLst/>
+          </a:prstGeom>
+          <a:noFill/>
+          <a:ln/>
+        </p:spPr>
+        <p:txBody>
+          <a:bodyPr wrap="square" lIns="0" tIns="0" rIns="0" bIns="0" rtlCol="0" anchor="t"/>
+          <a:lstStyle/>
+          <a:p>
+            <a:pPr indent="0" marL="0">
+              <a:buNone/>
+            </a:pPr>
+            <a:r>
+              <a:rPr lang="en-US" sz="1600" b="1" dirty="0">
+                <a:solidFill>
+                  <a:schemeClr val="accent1"/>
+                </a:solidFill>
+              </a:rPr>
+              <a:t>Worked example</a:t>
+            </a:r>
+            <a:endParaRPr lang="en-US" sz="1600" dirty="0"/>
+          </a:p>
+        </p:txBody>
+      </p:sp>
+      <p:sp>
+        <p:nvSpPr>
+          <p:cNvPr id="17" name="a-fade-exb"/>
+          <p:cNvSpPr txBox="1"/>
+          <p:nvPr/>
+        </p:nvSpPr>
+        <p:spPr>
+          <a:xfrm>
+            <a:off x="8092440" y="2194560"/>
+            <a:ext cx="3291840" cy="1554480"/>
+          </a:xfrm>
+          <a:prstGeom prst="rect">
+            <a:avLst/>
+          </a:prstGeom>
+          <a:noFill/>
+          <a:ln/>
+        </p:spPr>
+        <p:txBody>
+          <a:bodyPr wrap="square" lIns="0" tIns="0" rIns="0" bIns="0" rtlCol="0" anchor="t"/>
+          <a:lstStyle/>
+          <a:p>
+            <a:pPr indent="0" marL="0">
+              <a:spcAft>
+                <a:spcPts val="600"/>
+              </a:spcAft>
+              <a:buNone/>
+            </a:pPr>
+            <a:r>
+              <a:rPr lang="en-US" sz="1400" dirty="0">
+                <a:solidFill>
+                  <a:schemeClr val="tx2"/>
+                </a:solidFill>
+              </a:rPr>
+              <a:t>Plan fee  $35.00</a:t>
+            </a:r>
+            <a:endParaRPr lang="en-US" sz="1400" dirty="0"/>
+          </a:p>
+          <a:p>
+            <a:pPr indent="0" marL="0">
+              <a:spcAft>
+                <a:spcPts val="600"/>
+              </a:spcAft>
+              <a:buNone/>
+            </a:pPr>
+            <a:r>
+              <a:rPr lang="en-US" sz="1400" dirty="0">
+                <a:solidFill>
+                  <a:schemeClr val="tx2"/>
+                </a:solidFill>
+              </a:rPr>
+              <a:t>100 local min x $0.75  $75.00</a:t>
+            </a:r>
+            <a:endParaRPr lang="en-US" sz="1400" dirty="0"/>
+          </a:p>
+          <a:p>
+            <a:pPr indent="0" marL="0">
+              <a:spcAft>
+                <a:spcPts val="600"/>
+              </a:spcAft>
+              <a:buNone/>
+            </a:pPr>
+            <a:r>
+              <a:rPr lang="en-US" sz="1400" dirty="0">
+                <a:solidFill>
+                  <a:schemeClr val="tx2"/>
+                </a:solidFill>
+              </a:rPr>
+              <a:t>Deposit (first bill)  $250.00</a:t>
+            </a:r>
+            <a:endParaRPr lang="en-US" sz="1400" dirty="0"/>
+          </a:p>
+          <a:p>
+            <a:pPr indent="0" marL="0">
+              <a:spcAft>
+                <a:spcPts val="600"/>
+              </a:spcAft>
+              <a:buNone/>
+            </a:pPr>
+            <a:r>
+              <a:rPr lang="en-US" sz="1400" dirty="0">
+                <a:solidFill>
+                  <a:schemeClr val="tx2"/>
+                </a:solidFill>
+              </a:rPr>
+              <a:t>Service tax 12.24%  $44.06</a:t>
+            </a:r>
+            <a:endParaRPr lang="en-US" sz="1400" dirty="0"/>
+          </a:p>
+        </p:txBody>
+      </p:sp>
+      <p:sp>
+        <p:nvSpPr>
+          <p:cNvPr id="18" name="a-zoom-ext"/>
+          <p:cNvSpPr txBox="1"/>
+          <p:nvPr/>
+        </p:nvSpPr>
+        <p:spPr>
+          <a:xfrm>
+            <a:off x="8092440" y="3886200"/>
+            <a:ext cx="3291840" cy="914400"/>
+          </a:xfrm>
+          <a:prstGeom prst="rect">
+            <a:avLst/>
+          </a:prstGeom>
+          <a:noFill/>
+          <a:ln/>
+        </p:spPr>
+        <p:txBody>
+          <a:bodyPr wrap="square" lIns="0" tIns="0" rIns="0" bIns="0" rtlCol="0" anchor="t"/>
+          <a:lstStyle/>
+          <a:p>
+            <a:pPr indent="0" marL="0">
+              <a:buNone/>
+            </a:pPr>
+            <a:r>
+              <a:rPr lang="en-US" sz="5000" b="1" dirty="0">
+                <a:solidFill>
+                  <a:schemeClr val="accent2"/>
+                </a:solidFill>
+              </a:rPr>
+              <a:t>$404.06</a:t>
+            </a:r>
+            <a:endParaRPr lang="en-US" sz="5000" dirty="0"/>
+          </a:p>
+        </p:txBody>
+      </p:sp>
+      <p:sp>
+        <p:nvSpPr>
+          <p:cNvPr id="19" name="a-fade-exn"/>
+          <p:cNvSpPr txBox="1"/>
+          <p:nvPr/>
+        </p:nvSpPr>
+        <p:spPr>
+          <a:xfrm>
+            <a:off x="8092440" y="4892040"/>
+            <a:ext cx="3291840" cy="822960"/>
+          </a:xfrm>
+          <a:prstGeom prst="rect">
+            <a:avLst/>
+          </a:prstGeom>
+          <a:noFill/>
+          <a:ln/>
+        </p:spPr>
+        <p:txBody>
+          <a:bodyPr wrap="square" lIns="0" tIns="0" rIns="0" bIns="0" rtlCol="0" anchor="t"/>
+          <a:lstStyle/>
+          <a:p>
+            <a:pPr indent="0" marL="0">
+              <a:buNone/>
+            </a:pPr>
+            <a:r>
+              <a:rPr lang="en-US" sz="1300" i="1" dirty="0">
+                <a:solidFill>
+                  <a:schemeClr val="accent6"/>
+                </a:solidFill>
+              </a:rPr>
+              <a:t>First bill total - verified by the automated tests</a:t>
+            </a:r>
+            <a:endParaRPr lang="en-US" sz="1300" dirty="0"/>
+          </a:p>
+        </p:txBody>
+      </p:sp>
+      <p:sp>
+        <p:nvSpPr>
+          <p:cNvPr id="25" name="Slide Number Placeholder 0"/>
+          <p:cNvSpPr>
+            <a:spLocks noGrp="1"/>
+          </p:cNvSpPr>
+          <p:nvPr>
+            <p:ph type="sldNum" sz="quarter" idx="4294967295"/>
+          </p:nvPr>
+        </p:nvSpPr>
+        <p:spPr>
+          <a:xfrm>
+            <a:off x="11155680" y="6382512"/>
+            <a:ext cx="457200" cy="274320"/>
+          </a:xfrm>
+          <a:prstGeom prst="rect">
+            <a:avLst/>
+          </a:prstGeom>
+          <a:extLst>
+            <a:ext uri="{C572A759-6A51-4108-AA02-DFA0A04FC94B}">
+              <ma14:wrappingTextBoxFlag xmlns:ma14="http://schemas.microsoft.com/office/mac/drawingml/2011/main" val="0"/>
+            </a:ext>
+          </a:extLst>
+        </p:spPr>
+        <p:txBody>
+          <a:bodyPr/>
+          <a:lstStyle>
+            <a:lvl1pPr>
+              <a:defRPr sz="1000">
+                <a:solidFill>
+                  <a:schemeClr val="accent6"/>
+                </a:solidFill>
+              </a:defRPr>
+            </a:lvl1pPr>
+          </a:lstStyle>
+          <a:p>
+            <a:pPr algn="r"/>
+            <a:fld id="{F7021451-1387-4CA6-816F-3879F97B5CBC}" type="slidenum">
+              <a:rPr b="0" lang="en-US"/>
+              <a:t>10</a:t>
+            </a:fld>
+            <a:endParaRPr lang="en-US"/>
+          </a:p>
+        </p:txBody>
+      </p:sp>
+    </p:spTree>
+  </p:cSld>
+  <p:clrMapOvr>
+    <a:masterClrMapping/>
+  </p:clrMapOvr>
+  <p:transition spd="med">
+    <p:push dir="u"/>
+  </p:transition>
+  <p:timing>
+    <p:tnLst>
+      <p:par>
+        <p:cTn id="1" dur="indefinite" restart="never" nodeType="tmRoot">
+          <p:childTnLst>
+            <p:seq concurrent="1" nextAc="seek">
+              <p:cTn id="2" dur="indefinite" nodeType="mainSeq">
+                <p:childTnLst>
+                  <p:par>
+                    <p:cTn id="3" fill="hold">
+                      <p:stCondLst>
+                        <p:cond delay="indefinite"/>
+                        <p:cond evt="onBegin" delay="0">
+                          <p:tn val="2"/>
+                        </p:cond>
+                      </p:stCondLst>
+                      <p:childTnLst>
+                        <p:par>
+                          <p:cTn id="89" fill="hold">
+                            <p:stCondLst>
+                              <p:cond delay="0"/>
+                            </p:stCondLst>
+                            <p:childTnLst>
+                              <p:par>
+                                <p:cTn id="6" presetID="10" presetClass="entr" presetSubtype="0" fill="hold" grpId="0" nodeType="afterEffect">
+                                  <p:stCondLst>
+                                    <p:cond delay="0"/>
+                                  </p:stCondLst>
+                                  <p:childTnLst>
+                                    <p:set>
+                                      <p:cBhvr>
+                                        <p:cTn id="4" dur="1" fill="hold">
+                                          <p:stCondLst>
+                                            <p:cond delay="0"/>
+                                          </p:stCondLst>
+                                        </p:cTn>
+                                        <p:tgtEl>
+                                          <p:spTgt spid="2"/>
+                                        </p:tgtEl>
+                                        <p:attrNameLst>
+                                          <p:attrName>style.visibility</p:attrName>
+                                        </p:attrNameLst>
+                                      </p:cBhvr>
+                                      <p:to>
+                                        <p:strVal val="visible"/>
+                                      </p:to>
+                                    </p:set>
+                                    <p:animEffect transition="in" filter="fade">
+                                      <p:cBhvr>
+                                        <p:cTn id="5" dur="500"/>
+                                        <p:tgtEl>
+                                          <p:spTgt spid="2"/>
+                                        </p:tgtEl>
+                                      </p:cBhvr>
+                                    </p:animEffect>
+                                  </p:childTnLst>
+                                </p:cTn>
+                              </p:par>
+                              <p:par>
+                                <p:cTn id="11" presetID="53" presetClass="entr" presetSubtype="16" fill="hold" grpId="0" nodeType="withEffect">
+                                  <p:stCondLst>
+                                    <p:cond delay="200"/>
+                                  </p:stCondLst>
+                                  <p:childTnLst>
+                                    <p:set>
+                                      <p:cBhvr>
+                                        <p:cTn id="7" dur="1" fill="hold">
+                                          <p:stCondLst>
+                                            <p:cond delay="0"/>
+                                          </p:stCondLst>
+                                        </p:cTn>
+                                        <p:tgtEl>
+                                          <p:spTgt spid="3"/>
+                                        </p:tgtEl>
+                                        <p:attrNameLst>
+                                          <p:attrName>style.visibility</p:attrName>
+                                        </p:attrNameLst>
+                                      </p:cBhvr>
+                                      <p:to>
+                                        <p:strVal val="visible"/>
+                                      </p:to>
+                                    </p:set>
+                                    <p:anim calcmode="lin" valueType="num">
+                                      <p:cBhvr>
+                                        <p:cTn id="9" dur="650" decel="100000" fill="hold"/>
+                                        <p:tgtEl>
+                                          <p:spTgt spid="3"/>
+                                        </p:tgtEl>
+                                        <p:attrNameLst>
+                                          <p:attrName>ppt_w</p:attrName>
+                                        </p:attrNameLst>
+                                      </p:cBhvr>
+                                      <p:tavLst>
+                                        <p:tav tm="0">
+                                          <p:val>
+                                            <p:strVal val="#ppt_w*0.7"/>
+                                          </p:val>
+                                        </p:tav>
+                                        <p:tav tm="100000">
+                                          <p:val>
+                                            <p:strVal val="#ppt_w"/>
+                                          </p:val>
+                                        </p:tav>
+                                      </p:tavLst>
+                                    </p:anim>
+                                    <p:anim calcmode="lin" valueType="num">
+                                      <p:cBhvr>
+                                        <p:cTn id="10" dur="650" decel="100000" fill="hold"/>
+                                        <p:tgtEl>
+                                          <p:spTgt spid="3"/>
+                                        </p:tgtEl>
+                                        <p:attrNameLst>
+                                          <p:attrName>ppt_h</p:attrName>
+                                        </p:attrNameLst>
+                                      </p:cBhvr>
+                                      <p:tavLst>
+                                        <p:tav tm="0">
+                                          <p:val>
+                                            <p:strVal val="#ppt_h*0.7"/>
+                                          </p:val>
+                                        </p:tav>
+                                        <p:tav tm="100000">
+                                          <p:val>
+                                            <p:strVal val="#ppt_h"/>
+                                          </p:val>
+                                        </p:tav>
+                                      </p:tavLst>
+                                    </p:anim>
+                                    <p:animEffect transition="in" filter="fade">
+                                      <p:cBhvr>
+                                        <p:cTn id="8" dur="650"/>
+                                        <p:tgtEl>
+                                          <p:spTgt spid="3"/>
+                                        </p:tgtEl>
+                                      </p:cBhvr>
+                                    </p:animEffect>
+                                  </p:childTnLst>
+                                </p:cTn>
+                              </p:par>
+                              <p:par>
+                                <p:cTn id="16" presetID="53" presetClass="entr" presetSubtype="16" fill="hold" grpId="0" nodeType="withEffect">
+                                  <p:stCondLst>
+                                    <p:cond delay="200"/>
+                                  </p:stCondLst>
+                                  <p:childTnLst>
+                                    <p:set>
+                                      <p:cBhvr>
+                                        <p:cTn id="12" dur="1" fill="hold">
+                                          <p:stCondLst>
+                                            <p:cond delay="0"/>
+                                          </p:stCondLst>
+                                        </p:cTn>
+                                        <p:tgtEl>
+                                          <p:spTgt spid="4"/>
+                                        </p:tgtEl>
+                                        <p:attrNameLst>
+                                          <p:attrName>style.visibility</p:attrName>
+                                        </p:attrNameLst>
+                                      </p:cBhvr>
+                                      <p:to>
+                                        <p:strVal val="visible"/>
+                                      </p:to>
+                                    </p:set>
+                                    <p:anim calcmode="lin" valueType="num">
+                                      <p:cBhvr>
+                                        <p:cTn id="14" dur="650" decel="100000" fill="hold"/>
+                                        <p:tgtEl>
+                                          <p:spTgt spid="4"/>
+                                        </p:tgtEl>
+                                        <p:attrNameLst>
+                                          <p:attrName>ppt_w</p:attrName>
+                                        </p:attrNameLst>
+                                      </p:cBhvr>
+                                      <p:tavLst>
+                                        <p:tav tm="0">
+                                          <p:val>
+                                            <p:strVal val="#ppt_w*0.7"/>
+                                          </p:val>
+                                        </p:tav>
+                                        <p:tav tm="100000">
+                                          <p:val>
+                                            <p:strVal val="#ppt_w"/>
+                                          </p:val>
+                                        </p:tav>
+                                      </p:tavLst>
+                                    </p:anim>
+                                    <p:anim calcmode="lin" valueType="num">
+                                      <p:cBhvr>
+                                        <p:cTn id="15" dur="650" decel="100000" fill="hold"/>
+                                        <p:tgtEl>
+                                          <p:spTgt spid="4"/>
+                                        </p:tgtEl>
+                                        <p:attrNameLst>
+                                          <p:attrName>ppt_h</p:attrName>
+                                        </p:attrNameLst>
+                                      </p:cBhvr>
+                                      <p:tavLst>
+                                        <p:tav tm="0">
+                                          <p:val>
+                                            <p:strVal val="#ppt_h*0.7"/>
+                                          </p:val>
+                                        </p:tav>
+                                        <p:tav tm="100000">
+                                          <p:val>
+                                            <p:strVal val="#ppt_h"/>
+                                          </p:val>
+                                        </p:tav>
+                                      </p:tavLst>
+                                    </p:anim>
+                                    <p:animEffect transition="in" filter="fade">
+                                      <p:cBhvr>
+                                        <p:cTn id="13" dur="650"/>
+                                        <p:tgtEl>
+                                          <p:spTgt spid="4"/>
+                                        </p:tgtEl>
+                                      </p:cBhvr>
+                                    </p:animEffect>
+                                  </p:childTnLst>
+                                </p:cTn>
+                              </p:par>
+                              <p:par>
+                                <p:cTn id="21" presetID="42" presetClass="entr" presetSubtype="0" fill="hold" grpId="0" nodeType="withEffect">
+                                  <p:stCondLst>
+                                    <p:cond delay="400"/>
+                                  </p:stCondLst>
+                                  <p:childTnLst>
+                                    <p:set>
+                                      <p:cBhvr>
+                                        <p:cTn id="17" dur="1" fill="hold">
+                                          <p:stCondLst>
+                                            <p:cond delay="0"/>
+                                          </p:stCondLst>
+                                        </p:cTn>
+                                        <p:tgtEl>
+                                          <p:spTgt spid="5"/>
+                                        </p:tgtEl>
+                                        <p:attrNameLst>
+                                          <p:attrName>style.visibility</p:attrName>
+                                        </p:attrNameLst>
+                                      </p:cBhvr>
+                                      <p:to>
+                                        <p:strVal val="visible"/>
+                                      </p:to>
+                                    </p:set>
+                                    <p:animEffect transition="in" filter="fade">
+                                      <p:cBhvr>
+                                        <p:cTn id="18" dur="600"/>
+                                        <p:tgtEl>
+                                          <p:spTgt spid="5"/>
+                                        </p:tgtEl>
+                                      </p:cBhvr>
+                                    </p:animEffect>
+                                    <p:anim calcmode="lin" valueType="num">
+                                      <p:cBhvr>
+                                        <p:cTn id="19" dur="600" decel="100000" fill="hold"/>
+                                        <p:tgtEl>
+                                          <p:spTgt spid="5"/>
+                                        </p:tgtEl>
+                                        <p:attrNameLst>
+                                          <p:attrName>ppt_x</p:attrName>
+                                        </p:attrNameLst>
+                                      </p:cBhvr>
+                                      <p:tavLst>
+                                        <p:tav tm="0">
+                                          <p:val>
+                                            <p:strVal val="#ppt_x-.08"/>
+                                          </p:val>
+                                        </p:tav>
+                                        <p:tav tm="100000">
+                                          <p:val>
+                                            <p:strVal val="#ppt_x"/>
+                                          </p:val>
+                                        </p:tav>
+                                      </p:tavLst>
+                                    </p:anim>
+                                    <p:anim calcmode="lin" valueType="num">
+                                      <p:cBhvr>
+                                        <p:cTn id="20" dur="600" decel="100000" fill="hold"/>
+                                        <p:tgtEl>
+                                          <p:spTgt spid="5"/>
+                                        </p:tgtEl>
+                                        <p:attrNameLst>
+                                          <p:attrName>ppt_y</p:attrName>
+                                        </p:attrNameLst>
+                                      </p:cBhvr>
+                                      <p:tavLst>
+                                        <p:tav tm="0">
+                                          <p:val>
+                                            <p:strVal val="#ppt_y"/>
+                                          </p:val>
+                                        </p:tav>
+                                        <p:tav tm="100000">
+                                          <p:val>
+                                            <p:strVal val="#ppt_y"/>
+                                          </p:val>
+                                        </p:tav>
+                                      </p:tavLst>
+                                    </p:anim>
+                                  </p:childTnLst>
+                                </p:cTn>
+                              </p:par>
+                              <p:par>
+                                <p:cTn id="26" presetID="42" presetClass="entr" presetSubtype="0" fill="hold" grpId="0" nodeType="withEffect">
+                                  <p:stCondLst>
+                                    <p:cond delay="400"/>
+                                  </p:stCondLst>
+                                  <p:childTnLst>
+                                    <p:set>
+                                      <p:cBhvr>
+                                        <p:cTn id="22" dur="1" fill="hold">
+                                          <p:stCondLst>
+                                            <p:cond delay="0"/>
+                                          </p:stCondLst>
+                                        </p:cTn>
+                                        <p:tgtEl>
+                                          <p:spTgt spid="6"/>
+                                        </p:tgtEl>
+                                        <p:attrNameLst>
+                                          <p:attrName>style.visibility</p:attrName>
+                                        </p:attrNameLst>
+                                      </p:cBhvr>
+                                      <p:to>
+                                        <p:strVal val="visible"/>
+                                      </p:to>
+                                    </p:set>
+                                    <p:animEffect transition="in" filter="fade">
+                                      <p:cBhvr>
+                                        <p:cTn id="23" dur="600"/>
+                                        <p:tgtEl>
+                                          <p:spTgt spid="6"/>
+                                        </p:tgtEl>
+                                      </p:cBhvr>
+                                    </p:animEffect>
+                                    <p:anim calcmode="lin" valueType="num">
+                                      <p:cBhvr>
+                                        <p:cTn id="24" dur="600" decel="100000" fill="hold"/>
+                                        <p:tgtEl>
+                                          <p:spTgt spid="6"/>
+                                        </p:tgtEl>
+                                        <p:attrNameLst>
+                                          <p:attrName>ppt_x</p:attrName>
+                                        </p:attrNameLst>
+                                      </p:cBhvr>
+                                      <p:tavLst>
+                                        <p:tav tm="0">
+                                          <p:val>
+                                            <p:strVal val="#ppt_x-.08"/>
+                                          </p:val>
+                                        </p:tav>
+                                        <p:tav tm="100000">
+                                          <p:val>
+                                            <p:strVal val="#ppt_x"/>
+                                          </p:val>
+                                        </p:tav>
+                                      </p:tavLst>
+                                    </p:anim>
+                                    <p:anim calcmode="lin" valueType="num">
+                                      <p:cBhvr>
+                                        <p:cTn id="25" dur="600" decel="100000" fill="hold"/>
+                                        <p:tgtEl>
+                                          <p:spTgt spid="6"/>
+                                        </p:tgtEl>
+                                        <p:attrNameLst>
+                                          <p:attrName>ppt_y</p:attrName>
+                                        </p:attrNameLst>
+                                      </p:cBhvr>
+                                      <p:tavLst>
+                                        <p:tav tm="0">
+                                          <p:val>
+                                            <p:strVal val="#ppt_y"/>
+                                          </p:val>
+                                        </p:tav>
+                                        <p:tav tm="100000">
+                                          <p:val>
+                                            <p:strVal val="#ppt_y"/>
+                                          </p:val>
+                                        </p:tav>
+                                      </p:tavLst>
+                                    </p:anim>
+                                  </p:childTnLst>
+                                </p:cTn>
+                              </p:par>
+                              <p:par>
+                                <p:cTn id="31" presetID="42" presetClass="entr" presetSubtype="0" fill="hold" grpId="0" nodeType="withEffect">
+                                  <p:stCondLst>
+                                    <p:cond delay="600"/>
+                                  </p:stCondLst>
+                                  <p:childTnLst>
+                                    <p:set>
+                                      <p:cBhvr>
+                                        <p:cTn id="27" dur="1" fill="hold">
+                                          <p:stCondLst>
+                                            <p:cond delay="0"/>
+                                          </p:stCondLst>
+                                        </p:cTn>
+                                        <p:tgtEl>
+                                          <p:spTgt spid="7"/>
+                                        </p:tgtEl>
+                                        <p:attrNameLst>
+                                          <p:attrName>style.visibility</p:attrName>
+                                        </p:attrNameLst>
+                                      </p:cBhvr>
+                                      <p:to>
+                                        <p:strVal val="visible"/>
+                                      </p:to>
+                                    </p:set>
+                                    <p:animEffect transition="in" filter="fade">
+                                      <p:cBhvr>
+                                        <p:cTn id="28" dur="600"/>
+                                        <p:tgtEl>
+                                          <p:spTgt spid="7"/>
+                                        </p:tgtEl>
+                                      </p:cBhvr>
+                                    </p:animEffect>
+                                    <p:anim calcmode="lin" valueType="num">
+                                      <p:cBhvr>
+                                        <p:cTn id="29" dur="600" decel="100000" fill="hold"/>
+                                        <p:tgtEl>
+                                          <p:spTgt spid="7"/>
+                                        </p:tgtEl>
+                                        <p:attrNameLst>
+                                          <p:attrName>ppt_x</p:attrName>
+                                        </p:attrNameLst>
+                                      </p:cBhvr>
+                                      <p:tavLst>
+                                        <p:tav tm="0">
+                                          <p:val>
+                                            <p:strVal val="#ppt_x-.08"/>
+                                          </p:val>
+                                        </p:tav>
+                                        <p:tav tm="100000">
+                                          <p:val>
+                                            <p:strVal val="#ppt_x"/>
+                                          </p:val>
+                                        </p:tav>
+                                      </p:tavLst>
+                                    </p:anim>
+                                    <p:anim calcmode="lin" valueType="num">
+                                      <p:cBhvr>
+                                        <p:cTn id="30" dur="600" decel="100000" fill="hold"/>
+                                        <p:tgtEl>
+                                          <p:spTgt spid="7"/>
+                                        </p:tgtEl>
+                                        <p:attrNameLst>
+                                          <p:attrName>ppt_y</p:attrName>
+                                        </p:attrNameLst>
+                                      </p:cBhvr>
+                                      <p:tavLst>
+                                        <p:tav tm="0">
+                                          <p:val>
+                                            <p:strVal val="#ppt_y"/>
+                                          </p:val>
+                                        </p:tav>
+                                        <p:tav tm="100000">
+                                          <p:val>
+                                            <p:strVal val="#ppt_y"/>
+                                          </p:val>
+                                        </p:tav>
+                                      </p:tavLst>
+                                    </p:anim>
+                                  </p:childTnLst>
+                                </p:cTn>
+                              </p:par>
+                              <p:par>
+                                <p:cTn id="36" presetID="42" presetClass="entr" presetSubtype="0" fill="hold" grpId="0" nodeType="withEffect">
+                                  <p:stCondLst>
+                                    <p:cond delay="600"/>
+                                  </p:stCondLst>
+                                  <p:childTnLst>
+                                    <p:set>
+                                      <p:cBhvr>
+                                        <p:cTn id="32" dur="1" fill="hold">
+                                          <p:stCondLst>
+                                            <p:cond delay="0"/>
+                                          </p:stCondLst>
+                                        </p:cTn>
+                                        <p:tgtEl>
+                                          <p:spTgt spid="8"/>
+                                        </p:tgtEl>
+                                        <p:attrNameLst>
+                                          <p:attrName>style.visibility</p:attrName>
+                                        </p:attrNameLst>
+                                      </p:cBhvr>
+                                      <p:to>
+                                        <p:strVal val="visible"/>
+                                      </p:to>
+                                    </p:set>
+                                    <p:animEffect transition="in" filter="fade">
+                                      <p:cBhvr>
+                                        <p:cTn id="33" dur="600"/>
+                                        <p:tgtEl>
+                                          <p:spTgt spid="8"/>
+                                        </p:tgtEl>
+                                      </p:cBhvr>
+                                    </p:animEffect>
+                                    <p:anim calcmode="lin" valueType="num">
+                                      <p:cBhvr>
+                                        <p:cTn id="34" dur="600" decel="100000" fill="hold"/>
+                                        <p:tgtEl>
+                                          <p:spTgt spid="8"/>
+                                        </p:tgtEl>
+                                        <p:attrNameLst>
+                                          <p:attrName>ppt_x</p:attrName>
+                                        </p:attrNameLst>
+                                      </p:cBhvr>
+                                      <p:tavLst>
+                                        <p:tav tm="0">
+                                          <p:val>
+                                            <p:strVal val="#ppt_x-.08"/>
+                                          </p:val>
+                                        </p:tav>
+                                        <p:tav tm="100000">
+                                          <p:val>
+                                            <p:strVal val="#ppt_x"/>
+                                          </p:val>
+                                        </p:tav>
+                                      </p:tavLst>
+                                    </p:anim>
+                                    <p:anim calcmode="lin" valueType="num">
+                                      <p:cBhvr>
+                                        <p:cTn id="35" dur="600" decel="100000" fill="hold"/>
+                                        <p:tgtEl>
+                                          <p:spTgt spid="8"/>
+                                        </p:tgtEl>
+                                        <p:attrNameLst>
+                                          <p:attrName>ppt_y</p:attrName>
+                                        </p:attrNameLst>
+                                      </p:cBhvr>
+                                      <p:tavLst>
+                                        <p:tav tm="0">
+                                          <p:val>
+                                            <p:strVal val="#ppt_y"/>
+                                          </p:val>
+                                        </p:tav>
+                                        <p:tav tm="100000">
+                                          <p:val>
+                                            <p:strVal val="#ppt_y"/>
+                                          </p:val>
+                                        </p:tav>
+                                      </p:tavLst>
+                                    </p:anim>
+                                  </p:childTnLst>
+                                </p:cTn>
+                              </p:par>
+                              <p:par>
+                                <p:cTn id="41" presetID="42" presetClass="entr" presetSubtype="0" fill="hold" grpId="0" nodeType="withEffect">
+                                  <p:stCondLst>
+                                    <p:cond delay="800"/>
+                                  </p:stCondLst>
+                                  <p:childTnLst>
+                                    <p:set>
+                                      <p:cBhvr>
+                                        <p:cTn id="37" dur="1" fill="hold">
+                                          <p:stCondLst>
+                                            <p:cond delay="0"/>
+                                          </p:stCondLst>
+                                        </p:cTn>
+                                        <p:tgtEl>
+                                          <p:spTgt spid="9"/>
+                                        </p:tgtEl>
+                                        <p:attrNameLst>
+                                          <p:attrName>style.visibility</p:attrName>
+                                        </p:attrNameLst>
+                                      </p:cBhvr>
+                                      <p:to>
+                                        <p:strVal val="visible"/>
+                                      </p:to>
+                                    </p:set>
+                                    <p:animEffect transition="in" filter="fade">
+                                      <p:cBhvr>
+                                        <p:cTn id="38" dur="600"/>
+                                        <p:tgtEl>
+                                          <p:spTgt spid="9"/>
+                                        </p:tgtEl>
+                                      </p:cBhvr>
+                                    </p:animEffect>
+                                    <p:anim calcmode="lin" valueType="num">
+                                      <p:cBhvr>
+                                        <p:cTn id="39" dur="600" decel="100000" fill="hold"/>
+                                        <p:tgtEl>
+                                          <p:spTgt spid="9"/>
+                                        </p:tgtEl>
+                                        <p:attrNameLst>
+                                          <p:attrName>ppt_x</p:attrName>
+                                        </p:attrNameLst>
+                                      </p:cBhvr>
+                                      <p:tavLst>
+                                        <p:tav tm="0">
+                                          <p:val>
+                                            <p:strVal val="#ppt_x-.08"/>
+                                          </p:val>
+                                        </p:tav>
+                                        <p:tav tm="100000">
+                                          <p:val>
+                                            <p:strVal val="#ppt_x"/>
+                                          </p:val>
+                                        </p:tav>
+                                      </p:tavLst>
+                                    </p:anim>
+                                    <p:anim calcmode="lin" valueType="num">
+                                      <p:cBhvr>
+                                        <p:cTn id="40" dur="600" decel="100000" fill="hold"/>
+                                        <p:tgtEl>
+                                          <p:spTgt spid="9"/>
+                                        </p:tgtEl>
+                                        <p:attrNameLst>
+                                          <p:attrName>ppt_y</p:attrName>
+                                        </p:attrNameLst>
+                                      </p:cBhvr>
+                                      <p:tavLst>
+                                        <p:tav tm="0">
+                                          <p:val>
+                                            <p:strVal val="#ppt_y"/>
+                                          </p:val>
+                                        </p:tav>
+                                        <p:tav tm="100000">
+                                          <p:val>
+                                            <p:strVal val="#ppt_y"/>
+                                          </p:val>
+                                        </p:tav>
+                                      </p:tavLst>
+                                    </p:anim>
+                                  </p:childTnLst>
+                                </p:cTn>
+                              </p:par>
+                              <p:par>
+                                <p:cTn id="46" presetID="42" presetClass="entr" presetSubtype="0" fill="hold" grpId="0" nodeType="withEffect">
+                                  <p:stCondLst>
+                                    <p:cond delay="800"/>
+                                  </p:stCondLst>
+                                  <p:childTnLst>
+                                    <p:set>
+                                      <p:cBhvr>
+                                        <p:cTn id="42" dur="1" fill="hold">
+                                          <p:stCondLst>
+                                            <p:cond delay="0"/>
+                                          </p:stCondLst>
+                                        </p:cTn>
+                                        <p:tgtEl>
+                                          <p:spTgt spid="10"/>
+                                        </p:tgtEl>
+                                        <p:attrNameLst>
+                                          <p:attrName>style.visibility</p:attrName>
+                                        </p:attrNameLst>
+                                      </p:cBhvr>
+                                      <p:to>
+                                        <p:strVal val="visible"/>
+                                      </p:to>
+                                    </p:set>
+                                    <p:animEffect transition="in" filter="fade">
+                                      <p:cBhvr>
+                                        <p:cTn id="43" dur="600"/>
+                                        <p:tgtEl>
+                                          <p:spTgt spid="10"/>
+                                        </p:tgtEl>
+                                      </p:cBhvr>
+                                    </p:animEffect>
+                                    <p:anim calcmode="lin" valueType="num">
+                                      <p:cBhvr>
+                                        <p:cTn id="44" dur="600" decel="100000" fill="hold"/>
+                                        <p:tgtEl>
+                                          <p:spTgt spid="10"/>
+                                        </p:tgtEl>
+                                        <p:attrNameLst>
+                                          <p:attrName>ppt_x</p:attrName>
+                                        </p:attrNameLst>
+                                      </p:cBhvr>
+                                      <p:tavLst>
+                                        <p:tav tm="0">
+                                          <p:val>
+                                            <p:strVal val="#ppt_x-.08"/>
+                                          </p:val>
+                                        </p:tav>
+                                        <p:tav tm="100000">
+                                          <p:val>
+                                            <p:strVal val="#ppt_x"/>
+                                          </p:val>
+                                        </p:tav>
+                                      </p:tavLst>
+                                    </p:anim>
+                                    <p:anim calcmode="lin" valueType="num">
+                                      <p:cBhvr>
+                                        <p:cTn id="45" dur="600" decel="100000" fill="hold"/>
+                                        <p:tgtEl>
+                                          <p:spTgt spid="10"/>
+                                        </p:tgtEl>
+                                        <p:attrNameLst>
+                                          <p:attrName>ppt_y</p:attrName>
+                                        </p:attrNameLst>
+                                      </p:cBhvr>
+                                      <p:tavLst>
+                                        <p:tav tm="0">
+                                          <p:val>
+                                            <p:strVal val="#ppt_y"/>
+                                          </p:val>
+                                        </p:tav>
+                                        <p:tav tm="100000">
+                                          <p:val>
+                                            <p:strVal val="#ppt_y"/>
+                                          </p:val>
+                                        </p:tav>
+                                      </p:tavLst>
+                                    </p:anim>
+                                  </p:childTnLst>
+                                </p:cTn>
+                              </p:par>
+                              <p:par>
+                                <p:cTn id="51" presetID="42" presetClass="entr" presetSubtype="0" fill="hold" grpId="0" nodeType="withEffect">
+                                  <p:stCondLst>
+                                    <p:cond delay="1000"/>
+                                  </p:stCondLst>
+                                  <p:childTnLst>
+                                    <p:set>
+                                      <p:cBhvr>
+                                        <p:cTn id="47" dur="1" fill="hold">
+                                          <p:stCondLst>
+                                            <p:cond delay="0"/>
+                                          </p:stCondLst>
+                                        </p:cTn>
+                                        <p:tgtEl>
+                                          <p:spTgt spid="11"/>
+                                        </p:tgtEl>
+                                        <p:attrNameLst>
+                                          <p:attrName>style.visibility</p:attrName>
+                                        </p:attrNameLst>
+                                      </p:cBhvr>
+                                      <p:to>
+                                        <p:strVal val="visible"/>
+                                      </p:to>
+                                    </p:set>
+                                    <p:animEffect transition="in" filter="fade">
+                                      <p:cBhvr>
+                                        <p:cTn id="48" dur="600"/>
+                                        <p:tgtEl>
+                                          <p:spTgt spid="11"/>
+                                        </p:tgtEl>
+                                      </p:cBhvr>
+                                    </p:animEffect>
+                                    <p:anim calcmode="lin" valueType="num">
+                                      <p:cBhvr>
+                                        <p:cTn id="49" dur="600" decel="100000" fill="hold"/>
+                                        <p:tgtEl>
+                                          <p:spTgt spid="11"/>
+                                        </p:tgtEl>
+                                        <p:attrNameLst>
+                                          <p:attrName>ppt_x</p:attrName>
+                                        </p:attrNameLst>
+                                      </p:cBhvr>
+                                      <p:tavLst>
+                                        <p:tav tm="0">
+                                          <p:val>
+                                            <p:strVal val="#ppt_x-.08"/>
+                                          </p:val>
+                                        </p:tav>
+                                        <p:tav tm="100000">
+                                          <p:val>
+                                            <p:strVal val="#ppt_x"/>
+                                          </p:val>
+                                        </p:tav>
+                                      </p:tavLst>
+                                    </p:anim>
+                                    <p:anim calcmode="lin" valueType="num">
+                                      <p:cBhvr>
+                                        <p:cTn id="50" dur="600" decel="100000" fill="hold"/>
+                                        <p:tgtEl>
+                                          <p:spTgt spid="11"/>
+                                        </p:tgtEl>
+                                        <p:attrNameLst>
+                                          <p:attrName>ppt_y</p:attrName>
+                                        </p:attrNameLst>
+                                      </p:cBhvr>
+                                      <p:tavLst>
+                                        <p:tav tm="0">
+                                          <p:val>
+                                            <p:strVal val="#ppt_y"/>
+                                          </p:val>
+                                        </p:tav>
+                                        <p:tav tm="100000">
+                                          <p:val>
+                                            <p:strVal val="#ppt_y"/>
+                                          </p:val>
+                                        </p:tav>
+                                      </p:tavLst>
+                                    </p:anim>
+                                  </p:childTnLst>
+                                </p:cTn>
+                              </p:par>
+                              <p:par>
+                                <p:cTn id="56" presetID="42" presetClass="entr" presetSubtype="0" fill="hold" grpId="0" nodeType="withEffect">
+                                  <p:stCondLst>
+                                    <p:cond delay="1000"/>
+                                  </p:stCondLst>
+                                  <p:childTnLst>
+                                    <p:set>
+                                      <p:cBhvr>
+                                        <p:cTn id="52" dur="1" fill="hold">
+                                          <p:stCondLst>
+                                            <p:cond delay="0"/>
+                                          </p:stCondLst>
+                                        </p:cTn>
+                                        <p:tgtEl>
+                                          <p:spTgt spid="12"/>
+                                        </p:tgtEl>
+                                        <p:attrNameLst>
+                                          <p:attrName>style.visibility</p:attrName>
+                                        </p:attrNameLst>
+                                      </p:cBhvr>
+                                      <p:to>
+                                        <p:strVal val="visible"/>
+                                      </p:to>
+                                    </p:set>
+                                    <p:animEffect transition="in" filter="fade">
+                                      <p:cBhvr>
+                                        <p:cTn id="53" dur="600"/>
+                                        <p:tgtEl>
+                                          <p:spTgt spid="12"/>
+                                        </p:tgtEl>
+                                      </p:cBhvr>
+                                    </p:animEffect>
+                                    <p:anim calcmode="lin" valueType="num">
+                                      <p:cBhvr>
+                                        <p:cTn id="54" dur="600" decel="100000" fill="hold"/>
+                                        <p:tgtEl>
+                                          <p:spTgt spid="12"/>
+                                        </p:tgtEl>
+                                        <p:attrNameLst>
+                                          <p:attrName>ppt_x</p:attrName>
+                                        </p:attrNameLst>
+                                      </p:cBhvr>
+                                      <p:tavLst>
+                                        <p:tav tm="0">
+                                          <p:val>
+                                            <p:strVal val="#ppt_x-.08"/>
+                                          </p:val>
+                                        </p:tav>
+                                        <p:tav tm="100000">
+                                          <p:val>
+                                            <p:strVal val="#ppt_x"/>
+                                          </p:val>
+                                        </p:tav>
+                                      </p:tavLst>
+                                    </p:anim>
+                                    <p:anim calcmode="lin" valueType="num">
+                                      <p:cBhvr>
+                                        <p:cTn id="55" dur="600" decel="100000" fill="hold"/>
+                                        <p:tgtEl>
+                                          <p:spTgt spid="12"/>
+                                        </p:tgtEl>
+                                        <p:attrNameLst>
+                                          <p:attrName>ppt_y</p:attrName>
+                                        </p:attrNameLst>
+                                      </p:cBhvr>
+                                      <p:tavLst>
+                                        <p:tav tm="0">
+                                          <p:val>
+                                            <p:strVal val="#ppt_y"/>
+                                          </p:val>
+                                        </p:tav>
+                                        <p:tav tm="100000">
+                                          <p:val>
+                                            <p:strVal val="#ppt_y"/>
+                                          </p:val>
+                                        </p:tav>
+                                      </p:tavLst>
+                                    </p:anim>
+                                  </p:childTnLst>
+                                </p:cTn>
+                              </p:par>
+                              <p:par>
+                                <p:cTn id="61" presetID="42" presetClass="entr" presetSubtype="0" fill="hold" grpId="0" nodeType="withEffect">
+                                  <p:stCondLst>
+                                    <p:cond delay="1200"/>
+                                  </p:stCondLst>
+                                  <p:childTnLst>
+                                    <p:set>
+                                      <p:cBhvr>
+                                        <p:cTn id="57" dur="1" fill="hold">
+                                          <p:stCondLst>
+                                            <p:cond delay="0"/>
+                                          </p:stCondLst>
+                                        </p:cTn>
+                                        <p:tgtEl>
+                                          <p:spTgt spid="13"/>
+                                        </p:tgtEl>
+                                        <p:attrNameLst>
+                                          <p:attrName>style.visibility</p:attrName>
+                                        </p:attrNameLst>
+                                      </p:cBhvr>
+                                      <p:to>
+                                        <p:strVal val="visible"/>
+                                      </p:to>
+                                    </p:set>
+                                    <p:animEffect transition="in" filter="fade">
+                                      <p:cBhvr>
+                                        <p:cTn id="58" dur="600"/>
+                                        <p:tgtEl>
+                                          <p:spTgt spid="13"/>
+                                        </p:tgtEl>
+                                      </p:cBhvr>
+                                    </p:animEffect>
+                                    <p:anim calcmode="lin" valueType="num">
+                                      <p:cBhvr>
+                                        <p:cTn id="59" dur="600" decel="100000" fill="hold"/>
+                                        <p:tgtEl>
+                                          <p:spTgt spid="13"/>
+                                        </p:tgtEl>
+                                        <p:attrNameLst>
+                                          <p:attrName>ppt_x</p:attrName>
+                                        </p:attrNameLst>
+                                      </p:cBhvr>
+                                      <p:tavLst>
+                                        <p:tav tm="0">
+                                          <p:val>
+                                            <p:strVal val="#ppt_x-.08"/>
+                                          </p:val>
+                                        </p:tav>
+                                        <p:tav tm="100000">
+                                          <p:val>
+                                            <p:strVal val="#ppt_x"/>
+                                          </p:val>
+                                        </p:tav>
+                                      </p:tavLst>
+                                    </p:anim>
+                                    <p:anim calcmode="lin" valueType="num">
+                                      <p:cBhvr>
+                                        <p:cTn id="60" dur="600" decel="100000" fill="hold"/>
+                                        <p:tgtEl>
+                                          <p:spTgt spid="13"/>
+                                        </p:tgtEl>
+                                        <p:attrNameLst>
+                                          <p:attrName>ppt_y</p:attrName>
+                                        </p:attrNameLst>
+                                      </p:cBhvr>
+                                      <p:tavLst>
+                                        <p:tav tm="0">
+                                          <p:val>
+                                            <p:strVal val="#ppt_y"/>
+                                          </p:val>
+                                        </p:tav>
+                                        <p:tav tm="100000">
+                                          <p:val>
+                                            <p:strVal val="#ppt_y"/>
+                                          </p:val>
+                                        </p:tav>
+                                      </p:tavLst>
+                                    </p:anim>
+                                  </p:childTnLst>
+                                </p:cTn>
+                              </p:par>
+                              <p:par>
+                                <p:cTn id="66" presetID="42" presetClass="entr" presetSubtype="0" fill="hold" grpId="0" nodeType="withEffect">
+                                  <p:stCondLst>
+                                    <p:cond delay="1200"/>
+                                  </p:stCondLst>
+                                  <p:childTnLst>
+                                    <p:set>
+                                      <p:cBhvr>
+                                        <p:cTn id="62" dur="1" fill="hold">
+                                          <p:stCondLst>
+                                            <p:cond delay="0"/>
+                                          </p:stCondLst>
+                                        </p:cTn>
+                                        <p:tgtEl>
+                                          <p:spTgt spid="14"/>
+                                        </p:tgtEl>
+                                        <p:attrNameLst>
+                                          <p:attrName>style.visibility</p:attrName>
+                                        </p:attrNameLst>
+                                      </p:cBhvr>
+                                      <p:to>
+                                        <p:strVal val="visible"/>
+                                      </p:to>
+                                    </p:set>
+                                    <p:animEffect transition="in" filter="fade">
+                                      <p:cBhvr>
+                                        <p:cTn id="63" dur="600"/>
+                                        <p:tgtEl>
+                                          <p:spTgt spid="14"/>
+                                        </p:tgtEl>
+                                      </p:cBhvr>
+                                    </p:animEffect>
+                                    <p:anim calcmode="lin" valueType="num">
+                                      <p:cBhvr>
+                                        <p:cTn id="64" dur="600" decel="100000" fill="hold"/>
+                                        <p:tgtEl>
+                                          <p:spTgt spid="14"/>
+                                        </p:tgtEl>
+                                        <p:attrNameLst>
+                                          <p:attrName>ppt_x</p:attrName>
+                                        </p:attrNameLst>
+                                      </p:cBhvr>
+                                      <p:tavLst>
+                                        <p:tav tm="0">
+                                          <p:val>
+                                            <p:strVal val="#ppt_x-.08"/>
+                                          </p:val>
+                                        </p:tav>
+                                        <p:tav tm="100000">
+                                          <p:val>
+                                            <p:strVal val="#ppt_x"/>
+                                          </p:val>
+                                        </p:tav>
+                                      </p:tavLst>
+                                    </p:anim>
+                                    <p:anim calcmode="lin" valueType="num">
+                                      <p:cBhvr>
+                                        <p:cTn id="65" dur="600" decel="100000" fill="hold"/>
+                                        <p:tgtEl>
+                                          <p:spTgt spid="14"/>
+                                        </p:tgtEl>
+                                        <p:attrNameLst>
+                                          <p:attrName>ppt_y</p:attrName>
+                                        </p:attrNameLst>
+                                      </p:cBhvr>
+                                      <p:tavLst>
+                                        <p:tav tm="0">
+                                          <p:val>
+                                            <p:strVal val="#ppt_y"/>
+                                          </p:val>
+                                        </p:tav>
+                                        <p:tav tm="100000">
+                                          <p:val>
+                                            <p:strVal val="#ppt_y"/>
+                                          </p:val>
+                                        </p:tav>
+                                      </p:tavLst>
+                                    </p:anim>
+                                  </p:childTnLst>
+                                </p:cTn>
+                              </p:par>
+                              <p:par>
+                                <p:cTn id="71" presetID="53" presetClass="entr" presetSubtype="16" fill="hold" grpId="0" nodeType="withEffect">
+                                  <p:stCondLst>
+                                    <p:cond delay="1400"/>
+                                  </p:stCondLst>
+                                  <p:childTnLst>
+                                    <p:set>
+                                      <p:cBhvr>
+                                        <p:cTn id="67" dur="1" fill="hold">
+                                          <p:stCondLst>
+                                            <p:cond delay="0"/>
+                                          </p:stCondLst>
+                                        </p:cTn>
+                                        <p:tgtEl>
+                                          <p:spTgt spid="15"/>
+                                        </p:tgtEl>
+                                        <p:attrNameLst>
+                                          <p:attrName>style.visibility</p:attrName>
+                                        </p:attrNameLst>
+                                      </p:cBhvr>
+                                      <p:to>
+                                        <p:strVal val="visible"/>
+                                      </p:to>
+                                    </p:set>
+                                    <p:anim calcmode="lin" valueType="num">
+                                      <p:cBhvr>
+                                        <p:cTn id="69" dur="650" decel="100000" fill="hold"/>
+                                        <p:tgtEl>
+                                          <p:spTgt spid="15"/>
+                                        </p:tgtEl>
+                                        <p:attrNameLst>
+                                          <p:attrName>ppt_w</p:attrName>
+                                        </p:attrNameLst>
+                                      </p:cBhvr>
+                                      <p:tavLst>
+                                        <p:tav tm="0">
+                                          <p:val>
+                                            <p:strVal val="#ppt_w*0.7"/>
+                                          </p:val>
+                                        </p:tav>
+                                        <p:tav tm="100000">
+                                          <p:val>
+                                            <p:strVal val="#ppt_w"/>
+                                          </p:val>
+                                        </p:tav>
+                                      </p:tavLst>
+                                    </p:anim>
+                                    <p:anim calcmode="lin" valueType="num">
+                                      <p:cBhvr>
+                                        <p:cTn id="70" dur="650" decel="100000" fill="hold"/>
+                                        <p:tgtEl>
+                                          <p:spTgt spid="15"/>
+                                        </p:tgtEl>
+                                        <p:attrNameLst>
+                                          <p:attrName>ppt_h</p:attrName>
+                                        </p:attrNameLst>
+                                      </p:cBhvr>
+                                      <p:tavLst>
+                                        <p:tav tm="0">
+                                          <p:val>
+                                            <p:strVal val="#ppt_h*0.7"/>
+                                          </p:val>
+                                        </p:tav>
+                                        <p:tav tm="100000">
+                                          <p:val>
+                                            <p:strVal val="#ppt_h"/>
+                                          </p:val>
+                                        </p:tav>
+                                      </p:tavLst>
+                                    </p:anim>
+                                    <p:animEffect transition="in" filter="fade">
+                                      <p:cBhvr>
+                                        <p:cTn id="68" dur="650"/>
+                                        <p:tgtEl>
+                                          <p:spTgt spid="15"/>
+                                        </p:tgtEl>
+                                      </p:cBhvr>
+                                    </p:animEffect>
+                                  </p:childTnLst>
+                                </p:cTn>
+                              </p:par>
+                              <p:par>
+                                <p:cTn id="74" presetID="10" presetClass="entr" presetSubtype="0" fill="hold" grpId="0" nodeType="withEffect">
+                                  <p:stCondLst>
+                                    <p:cond delay="1600"/>
+                                  </p:stCondLst>
+                                  <p:childTnLst>
+                                    <p:set>
+                                      <p:cBhvr>
+                                        <p:cTn id="72" dur="1" fill="hold">
+                                          <p:stCondLst>
+                                            <p:cond delay="0"/>
+                                          </p:stCondLst>
+                                        </p:cTn>
+                                        <p:tgtEl>
+                                          <p:spTgt spid="16"/>
+                                        </p:tgtEl>
+                                        <p:attrNameLst>
+                                          <p:attrName>style.visibility</p:attrName>
+                                        </p:attrNameLst>
+                                      </p:cBhvr>
+                                      <p:to>
+                                        <p:strVal val="visible"/>
+                                      </p:to>
+                                    </p:set>
+                                    <p:animEffect transition="in" filter="fade">
+                                      <p:cBhvr>
+                                        <p:cTn id="73" dur="500"/>
+                                        <p:tgtEl>
+                                          <p:spTgt spid="16"/>
+                                        </p:tgtEl>
+                                      </p:cBhvr>
+                                    </p:animEffect>
+                                  </p:childTnLst>
+                                </p:cTn>
+                              </p:par>
+                              <p:par>
+                                <p:cTn id="77" presetID="10" presetClass="entr" presetSubtype="0" fill="hold" grpId="0" nodeType="withEffect">
+                                  <p:stCondLst>
+                                    <p:cond delay="1800"/>
+                                  </p:stCondLst>
+                                  <p:childTnLst>
+                                    <p:set>
+                                      <p:cBhvr>
+                                        <p:cTn id="75" dur="1" fill="hold">
+                                          <p:stCondLst>
+                                            <p:cond delay="0"/>
+                                          </p:stCondLst>
+                                        </p:cTn>
+                                        <p:tgtEl>
+                                          <p:spTgt spid="17"/>
+                                        </p:tgtEl>
+                                        <p:attrNameLst>
+                                          <p:attrName>style.visibility</p:attrName>
+                                        </p:attrNameLst>
+                                      </p:cBhvr>
+                                      <p:to>
+                                        <p:strVal val="visible"/>
+                                      </p:to>
+                                    </p:set>
+                                    <p:animEffect transition="in" filter="fade">
+                                      <p:cBhvr>
+                                        <p:cTn id="76" dur="500"/>
+                                        <p:tgtEl>
+                                          <p:spTgt spid="17"/>
+                                        </p:tgtEl>
+                                      </p:cBhvr>
+                                    </p:animEffect>
+                                  </p:childTnLst>
+                                </p:cTn>
+                              </p:par>
+                              <p:par>
+                                <p:cTn id="82" presetID="53" presetClass="entr" presetSubtype="16" fill="hold" grpId="0" nodeType="withEffect">
+                                  <p:stCondLst>
+                                    <p:cond delay="2000"/>
+                                  </p:stCondLst>
+                                  <p:childTnLst>
+                                    <p:set>
+                                      <p:cBhvr>
+                                        <p:cTn id="78" dur="1" fill="hold">
+                                          <p:stCondLst>
+                                            <p:cond delay="0"/>
+                                          </p:stCondLst>
+                                        </p:cTn>
+                                        <p:tgtEl>
+                                          <p:spTgt spid="18"/>
+                                        </p:tgtEl>
+                                        <p:attrNameLst>
+                                          <p:attrName>style.visibility</p:attrName>
+                                        </p:attrNameLst>
+                                      </p:cBhvr>
+                                      <p:to>
+                                        <p:strVal val="visible"/>
+                                      </p:to>
+                                    </p:set>
+                                    <p:anim calcmode="lin" valueType="num">
+                                      <p:cBhvr>
+                                        <p:cTn id="80" dur="650" decel="100000" fill="hold"/>
+                                        <p:tgtEl>
+                                          <p:spTgt spid="18"/>
+                                        </p:tgtEl>
+                                        <p:attrNameLst>
+                                          <p:attrName>ppt_w</p:attrName>
+                                        </p:attrNameLst>
+                                      </p:cBhvr>
+                                      <p:tavLst>
+                                        <p:tav tm="0">
+                                          <p:val>
+                                            <p:strVal val="#ppt_w*0.7"/>
+                                          </p:val>
+                                        </p:tav>
+                                        <p:tav tm="100000">
+                                          <p:val>
+                                            <p:strVal val="#ppt_w"/>
+                                          </p:val>
+                                        </p:tav>
+                                      </p:tavLst>
+                                    </p:anim>
+                                    <p:anim calcmode="lin" valueType="num">
+                                      <p:cBhvr>
+                                        <p:cTn id="81" dur="650" decel="100000" fill="hold"/>
+                                        <p:tgtEl>
+                                          <p:spTgt spid="18"/>
+                                        </p:tgtEl>
+                                        <p:attrNameLst>
+                                          <p:attrName>ppt_h</p:attrName>
+                                        </p:attrNameLst>
+                                      </p:cBhvr>
+                                      <p:tavLst>
+                                        <p:tav tm="0">
+                                          <p:val>
+                                            <p:strVal val="#ppt_h*0.7"/>
+                                          </p:val>
+                                        </p:tav>
+                                        <p:tav tm="100000">
+                                          <p:val>
+                                            <p:strVal val="#ppt_h"/>
+                                          </p:val>
+                                        </p:tav>
+                                      </p:tavLst>
+                                    </p:anim>
+                                    <p:animEffect transition="in" filter="fade">
+                                      <p:cBhvr>
+                                        <p:cTn id="79" dur="650"/>
+                                        <p:tgtEl>
+                                          <p:spTgt spid="18"/>
+                                        </p:tgtEl>
+                                      </p:cBhvr>
+                                    </p:animEffect>
+                                  </p:childTnLst>
+                                </p:cTn>
+                              </p:par>
+                              <p:par>
+                                <p:cTn id="85" presetID="10" presetClass="entr" presetSubtype="0" fill="hold" grpId="0" nodeType="withEffect">
+                                  <p:stCondLst>
+                                    <p:cond delay="2200"/>
+                                  </p:stCondLst>
+                                  <p:childTnLst>
+                                    <p:set>
+                                      <p:cBhvr>
+                                        <p:cTn id="83" dur="1" fill="hold">
+                                          <p:stCondLst>
+                                            <p:cond delay="0"/>
+                                          </p:stCondLst>
+                                        </p:cTn>
+                                        <p:tgtEl>
+                                          <p:spTgt spid="19"/>
+                                        </p:tgtEl>
+                                        <p:attrNameLst>
+                                          <p:attrName>style.visibility</p:attrName>
+                                        </p:attrNameLst>
+                                      </p:cBhvr>
+                                      <p:to>
+                                        <p:strVal val="visible"/>
+                                      </p:to>
+                                    </p:set>
+                                    <p:animEffect transition="in" filter="fade">
+                                      <p:cBhvr>
+                                        <p:cTn id="84" dur="500"/>
+                                        <p:tgtEl>
+                                          <p:spTgt spid="19"/>
+                                        </p:tgtEl>
+                                      </p:cBhvr>
+                                    </p:animEffect>
+                                  </p:childTnLst>
+                                </p:cTn>
+                              </p:par>
+                              <p:par>
+                                <p:cTn id="88" presetID="10" presetClass="entr" presetSubtype="0" fill="hold" grpId="0" nodeType="withEffect">
+                                  <p:stCondLst>
+                                    <p:cond delay="2400"/>
+                                  </p:stCondLst>
+                                  <p:childTnLst>
+                                    <p:set>
+                                      <p:cBhvr>
+                                        <p:cTn id="86" dur="1" fill="hold">
+                                          <p:stCondLst>
+                                            <p:cond delay="0"/>
+                                          </p:stCondLst>
+                                        </p:cTn>
+                                        <p:tgtEl>
+                                          <p:spTgt spid="25"/>
+                                        </p:tgtEl>
+                                        <p:attrNameLst>
+                                          <p:attrName>style.visibility</p:attrName>
+                                        </p:attrNameLst>
+                                      </p:cBhvr>
+                                      <p:to>
+                                        <p:strVal val="visible"/>
+                                      </p:to>
+                                    </p:set>
+                                    <p:animEffect transition="in" filter="fade">
+                                      <p:cBhvr>
+                                        <p:cTn id="87" dur="500"/>
+                                        <p:tgtEl>
+                                          <p:spTgt spid="25"/>
+                                        </p:tgtEl>
+                                      </p:cBhvr>
+                                    </p:animEffect>
+                                  </p:childTnLst>
+                                </p:cTn>
+                              </p:par>
+                            </p:childTnLst>
+                          </p:cTn>
+                        </p:par>
+                      </p:childTnLst>
+                    </p:cTn>
+                  </p:par>
+                </p:childTnLst>
+              </p:cTn>
+              <p:prevCondLst>
+                <p:cond evt="onPrev" delay="0">
+                  <p:tgtEl>
+                    <p:sldTgt/>
+                  </p:tgtEl>
+                </p:cond>
+              </p:prevCondLst>
+              <p:nextCondLst>
+                <p:cond evt="onNext" delay="0">
+                  <p:tgtEl>
+                    <p:sldTgt/>
+                  </p:tgtEl>
+                </p:cond>
+              </p:nextCondLst>
+            </p:seq>
+          </p:childTnLst>
+        </p:cTn>
+      </p:par>
+    </p:tnLst>
+    <p:bldLst>
+      <p:bldP spid="2" grpId="0" animBg="1"/>
+      <p:bldP spid="6" grpId="0" animBg="1"/>
+      <p:bldP spid="8" grpId="0" animBg="1"/>
+      <p:bldP spid="10" grpId="0" animBg="1"/>
+      <p:bldP spid="12" grpId="0" animBg="1"/>
+      <p:bldP spid="14" grpId="0" animBg="1"/>
+      <p:bldP spid="16" grpId="0" animBg="1"/>
+      <p:bldP spid="17" grpId="0" animBg="1"/>
+      <p:bldP spid="18" grpId="0" animBg="1"/>
+      <p:bldP spid="19" grpId="0" animBg="1"/>
+      <p:bldP spid="25" grpId="0" animBg="1"/>
+    </p:bldLst>
+  </p:timing>
+</p:sld>
+</file>
+
+<file path=ppt/slides/slide11.xml><?xml version="1.0" encoding="utf-8"?>
+<p:sld xmlns:a="http://schemas.openxmlformats.org/drawingml/2006/main" xmlns:r="http://schemas.openxmlformats.org/officeDocument/2006/relationships" xmlns:p="http://schemas.openxmlformats.org/presentationml/2006/main">
+  <p:cSld name="Slide 11">
     <p:spTree>
       <p:nvGrpSpPr>
         <p:cNvPr id="1" name=""/>
@@ -4203,7 +6378,7 @@
             <a:pPr algn="r"/>
             <a:fld id="{F7021451-1387-4CA6-816F-3879F97B5CBC}" type="slidenum">
               <a:rPr b="0" lang="en-US"/>
-              <a:t>10</a:t>
+              <a:t>11</a:t>
             </a:fld>
             <a:endParaRPr lang="en-US"/>
           </a:p>
@@ -6142,9 +8317,9 @@
 </p:sld>
 </file>
 
-<file path=ppt/slides/slide11.xml><?xml version="1.0" encoding="utf-8"?>
+<file path=ppt/slides/slide12.xml><?xml version="1.0" encoding="utf-8"?>
 <p:sld xmlns:a="http://schemas.openxmlformats.org/drawingml/2006/main" xmlns:r="http://schemas.openxmlformats.org/officeDocument/2006/relationships" xmlns:p="http://schemas.openxmlformats.org/presentationml/2006/main">
-  <p:cSld name="Slide 11">
+  <p:cSld name="Slide 12">
     <p:spTree>
       <p:nvGrpSpPr>
         <p:cNvPr id="1" name=""/>
@@ -6670,7 +8845,7 @@
             <a:pPr algn="r"/>
             <a:fld id="{F7021451-1387-4CA6-816F-3879F97B5CBC}" type="slidenum">
               <a:rPr b="0" lang="en-US"/>
-              <a:t>11</a:t>
+              <a:t>12</a:t>
             </a:fld>
             <a:endParaRPr lang="en-US"/>
           </a:p>
@@ -7871,9 +10046,9 @@
 </p:sld>
 </file>
 
-<file path=ppt/slides/slide12.xml><?xml version="1.0" encoding="utf-8"?>
+<file path=ppt/slides/slide13.xml><?xml version="1.0" encoding="utf-8"?>
 <p:sld xmlns:a="http://schemas.openxmlformats.org/drawingml/2006/main" xmlns:r="http://schemas.openxmlformats.org/officeDocument/2006/relationships" xmlns:p="http://schemas.openxmlformats.org/presentationml/2006/main">
-  <p:cSld name="Slide 12">
+  <p:cSld name="Slide 13">
     <p:spTree>
       <p:nvGrpSpPr>
         <p:cNvPr id="1" name=""/>
@@ -7920,7 +10095,7 @@
                   <a:schemeClr val="tx2"/>
                 </a:solidFill>
               </a:rPr>
-              <a:t>A glass interface with 3D motion</a:t>
+              <a:t>A modern interface: light and dark</a:t>
             </a:r>
             <a:endParaRPr lang="en-US" sz="3200" dirty="0"/>
           </a:p>
@@ -8058,7 +10233,7 @@
                   <a:schemeClr val="tx2"/>
                 </a:solidFill>
               </a:rPr>
-              <a:t>Frosted glass theme</a:t>
+              <a:t>Light and dark themes</a:t>
             </a:r>
             <a:endParaRPr lang="en-US" sz="1500" dirty="0"/>
           </a:p>
@@ -8094,7 +10269,7 @@
                   <a:schemeClr val="accent6"/>
                 </a:solidFill>
               </a:rPr>
-              <a:t>Glass cards over animated aurora glows and particles</a:t>
+              <a:t>Sun / moon switch in the top bar; the choice is remembered</a:t>
             </a:r>
             <a:endParaRPr lang="en-US" sz="1250" dirty="0"/>
           </a:p>
@@ -8174,7 +10349,7 @@
                   <a:schemeClr val="tx2"/>
                 </a:solidFill>
               </a:rPr>
-              <a:t>Clear glass on hover</a:t>
+              <a:t>3D hero and tilt cards</a:t>
             </a:r>
             <a:endParaRPr lang="en-US" sz="1500" dirty="0"/>
           </a:p>
@@ -8210,7 +10385,7 @@
                   <a:schemeClr val="accent6"/>
                 </a:solidFill>
               </a:rPr>
-              <a:t>Cards turn clear, light up and tilt; a light flash on click</a:t>
+              <a:t>Parallax globe; cards tilt and lift on hover</a:t>
             </a:r>
             <a:endParaRPr lang="en-US" sz="1250" dirty="0"/>
           </a:p>
@@ -8290,7 +10465,7 @@
                   <a:schemeClr val="tx2"/>
                 </a:solidFill>
               </a:rPr>
-              <a:t>Loader and reveals</a:t>
+              <a:t>Original illustrations</a:t>
             </a:r>
             <a:endParaRPr lang="en-US" sz="1500" dirty="0"/>
           </a:p>
@@ -8326,7 +10501,7 @@
                   <a:schemeClr val="accent6"/>
                 </a:solidFill>
               </a:rPr>
-              <a:t>Animated logo, word-by-word headlines, scroll reveals</a:t>
+              <a:t>10 drawings that re-colour with the theme</a:t>
             </a:r>
             <a:endParaRPr lang="en-US" sz="1250" dirty="0"/>
           </a:p>
@@ -8603,7 +10778,7 @@
             <a:pPr algn="r"/>
             <a:fld id="{F7021451-1387-4CA6-816F-3879F97B5CBC}" type="slidenum">
               <a:rPr b="0" lang="en-US"/>
-              <a:t>12</a:t>
+              <a:t>13</a:t>
             </a:fld>
             <a:endParaRPr lang="en-US"/>
           </a:p>
@@ -10537,9 +12712,9 @@
 </p:sld>
 </file>
 
-<file path=ppt/slides/slide13.xml><?xml version="1.0" encoding="utf-8"?>
+<file path=ppt/slides/slide14.xml><?xml version="1.0" encoding="utf-8"?>
 <p:sld xmlns:a="http://schemas.openxmlformats.org/drawingml/2006/main" xmlns:r="http://schemas.openxmlformats.org/officeDocument/2006/relationships" xmlns:p="http://schemas.openxmlformats.org/presentationml/2006/main">
-  <p:cSld name="Slide 13">
+  <p:cSld name="Slide 14">
     <p:spTree>
       <p:nvGrpSpPr>
         <p:cNvPr id="1" name=""/>
@@ -10994,7 +13169,7 @@
             <a:pPr algn="r"/>
             <a:fld id="{F7021451-1387-4CA6-816F-3879F97B5CBC}" type="slidenum">
               <a:rPr b="0" lang="en-US"/>
-              <a:t>13</a:t>
+              <a:t>14</a:t>
             </a:fld>
             <a:endParaRPr lang="en-US"/>
           </a:p>
@@ -11939,9 +14114,9 @@
 </p:sld>
 </file>
 
-<file path=ppt/slides/slide14.xml><?xml version="1.0" encoding="utf-8"?>
+<file path=ppt/slides/slide15.xml><?xml version="1.0" encoding="utf-8"?>
 <p:sld xmlns:a="http://schemas.openxmlformats.org/drawingml/2006/main" xmlns:r="http://schemas.openxmlformats.org/officeDocument/2006/relationships" xmlns:p="http://schemas.openxmlformats.org/presentationml/2006/main">
-  <p:cSld name="Slide 14">
+  <p:cSld name="Slide 15">
     <p:spTree>
       <p:nvGrpSpPr>
         <p:cNvPr id="1" name=""/>
@@ -12775,7 +14950,7 @@
             <a:pPr algn="r"/>
             <a:fld id="{F7021451-1387-4CA6-816F-3879F97B5CBC}" type="slidenum">
               <a:rPr b="0" lang="en-US"/>
-              <a:t>14</a:t>
+              <a:t>15</a:t>
             </a:fld>
             <a:endParaRPr lang="en-US"/>
           </a:p>
@@ -14780,9 +16955,9 @@
 </p:sld>
 </file>
 
-<file path=ppt/slides/slide15.xml><?xml version="1.0" encoding="utf-8"?>
+<file path=ppt/slides/slide16.xml><?xml version="1.0" encoding="utf-8"?>
 <p:sld xmlns:a="http://schemas.openxmlformats.org/drawingml/2006/main" xmlns:r="http://schemas.openxmlformats.org/officeDocument/2006/relationships" xmlns:p="http://schemas.openxmlformats.org/presentationml/2006/main">
-  <p:cSld name="Slide 15">
+  <p:cSld name="Slide 16">
     <p:spTree>
       <p:nvGrpSpPr>
         <p:cNvPr id="1" name=""/>
@@ -15013,7 +17188,7 @@
                   <a:schemeClr val="tx1"/>
                 </a:solidFill>
               </a:rPr>
-              <a:t>dotnet ef database update  (or run the SQL script in SSMS)</a:t>
+              <a:t>Set the SQL Server name in Nexus\appsettings.json</a:t>
             </a:r>
             <a:endParaRPr lang="en-US" sz="1600" dirty="0"/>
           </a:p>
@@ -15105,7 +17280,7 @@
                   <a:schemeClr val="tx1"/>
                 </a:solidFill>
               </a:rPr>
-              <a:t>dotnet run - open http://localhost:5294</a:t>
+              <a:t>Double-click RUN-NEXUS.bat - the database is created automatically</a:t>
             </a:r>
             <a:endParaRPr lang="en-US" sz="1600" dirty="0"/>
           </a:p>
@@ -15197,7 +17372,7 @@
                   <a:schemeClr val="tx1"/>
                 </a:solidFill>
               </a:rPr>
-              <a:t>Sign in as admin, create cities, shops and staff</a:t>
+              <a:t>Open http://localhost:5294 and sign in</a:t>
             </a:r>
             <a:endParaRPr lang="en-US" sz="1600" dirty="0"/>
           </a:p>
@@ -15409,7 +17584,52 @@
                   <a:schemeClr val="accent6"/>
                 </a:solidFill>
               </a:rPr>
-              <a:t>Staff and customer logins are created inside the application (Admin &gt; Employees, Register).</a:t>
+              <a:t>Demo staff (from the database backup): </a:t>
+            </a:r>
+            <a:pPr indent="0" marL="0">
+              <a:spcAft>
+                <a:spcPts val="400"/>
+              </a:spcAft>
+              <a:buNone/>
+            </a:pPr>
+            <a:r>
+              <a:rPr lang="en-US" sz="1600" b="1" dirty="0">
+                <a:solidFill>
+                  <a:schemeClr val="tx1"/>
+                </a:solidFill>
+              </a:rPr>
+              <a:t>retail1, tech1, acct1, alice</a:t>
+            </a:r>
+            <a:endParaRPr lang="en-US" sz="1600" dirty="0"/>
+          </a:p>
+          <a:p>
+            <a:pPr indent="0" marL="0">
+              <a:spcAft>
+                <a:spcPts val="400"/>
+              </a:spcAft>
+              <a:buNone/>
+            </a:pPr>
+            <a:r>
+              <a:rPr lang="en-US" sz="1600" dirty="0">
+                <a:solidFill>
+                  <a:schemeClr val="accent6"/>
+                </a:solidFill>
+              </a:rPr>
+              <a:t>password </a:t>
+            </a:r>
+            <a:pPr indent="0" marL="0">
+              <a:spcAft>
+                <a:spcPts val="400"/>
+              </a:spcAft>
+              <a:buNone/>
+            </a:pPr>
+            <a:r>
+              <a:rPr lang="en-US" sz="1600" b="1" dirty="0">
+                <a:solidFill>
+                  <a:schemeClr val="tx1"/>
+                </a:solidFill>
+              </a:rPr>
+              <a:t>Passw0rd!x</a:t>
             </a:r>
             <a:endParaRPr lang="en-US" sz="1600" dirty="0"/>
           </a:p>
@@ -15454,7 +17674,7 @@
             <a:pPr algn="r"/>
             <a:fld id="{F7021451-1387-4CA6-816F-3879F97B5CBC}" type="slidenum">
               <a:rPr b="0" lang="en-US"/>
-              <a:t>15</a:t>
+              <a:t>16</a:t>
             </a:fld>
             <a:endParaRPr lang="en-US"/>
           </a:p>
@@ -16810,9 +19030,9 @@
 </p:sld>
 </file>
 
-<file path=ppt/slides/slide16.xml><?xml version="1.0" encoding="utf-8"?>
+<file path=ppt/slides/slide17.xml><?xml version="1.0" encoding="utf-8"?>
 <p:sld xmlns:a="http://schemas.openxmlformats.org/drawingml/2006/main" xmlns:r="http://schemas.openxmlformats.org/officeDocument/2006/relationships" xmlns:p="http://schemas.openxmlformats.org/presentationml/2006/main">
-  <p:cSld name="Slide 16">
+  <p:cSld name="Slide 17">
     <p:spTree>
       <p:nvGrpSpPr>
         <p:cNvPr id="1" name=""/>
@@ -16935,8 +19155,8 @@
         </p:nvSpPr>
         <p:spPr>
           <a:xfrm>
-            <a:off x="1371600" y="5760720"/>
-            <a:ext cx="9418320" cy="365760"/>
+            <a:off x="731520" y="5669280"/>
+            <a:ext cx="10698480" cy="411480"/>
           </a:xfrm>
           <a:prstGeom prst="rect">
             <a:avLst/>
@@ -16952,14 +19172,14 @@
               <a:buNone/>
             </a:pPr>
             <a:r>
-              <a:rPr lang="en-US" sz="1400" dirty="0">
+              <a:rPr lang="en-US" sz="1300" dirty="0">
                 <a:solidFill>
                   <a:srgbClr val="BAE6FD"/>
                 </a:solidFill>
               </a:rPr>
-              <a:t>Nexus Service Marketing System  ·  [Your name]  ·  [Batch] / [Group]</a:t>
+              <a:t>Ali Jan  ·  Humaiz Khan  ·  Muhammad Ehtisham Shakeel  ·  Muhammad Waleed  ·  Ali Turab</a:t>
             </a:r>
-            <a:endParaRPr lang="en-US" sz="1400" dirty="0"/>
+            <a:endParaRPr lang="en-US" sz="1300" dirty="0"/>
           </a:p>
         </p:txBody>
       </p:sp>
@@ -17219,6 +19439,4272 @@
 <file path=ppt/slides/slide2.xml><?xml version="1.0" encoding="utf-8"?>
 <p:sld xmlns:a="http://schemas.openxmlformats.org/drawingml/2006/main" xmlns:r="http://schemas.openxmlformats.org/officeDocument/2006/relationships" xmlns:p="http://schemas.openxmlformats.org/presentationml/2006/main">
   <p:cSld name="Slide 2">
+    <p:spTree>
+      <p:nvGrpSpPr>
+        <p:cNvPr id="1" name=""/>
+        <p:cNvGrpSpPr/>
+        <p:nvPr/>
+      </p:nvGrpSpPr>
+      <p:grpSpPr>
+        <a:xfrm>
+          <a:off x="0" y="0"/>
+          <a:ext cx="0" cy="0"/>
+          <a:chOff x="0" y="0"/>
+          <a:chExt cx="0" cy="0"/>
+        </a:xfrm>
+      </p:grpSpPr>
+      <p:sp>
+        <p:nvSpPr>
+          <p:cNvPr id="2" name="Text 0"/>
+          <p:cNvSpPr/>
+          <p:nvPr>
+            <p:ph idx="100" type="title" hasCustomPrompt="1"/>
+          </p:nvPr>
+        </p:nvSpPr>
+        <p:spPr>
+          <a:xfrm>
+            <a:off x="548640" y="347472"/>
+            <a:ext cx="11064240" cy="731520"/>
+          </a:xfrm>
+          <a:prstGeom prst="rect">
+            <a:avLst/>
+          </a:prstGeom>
+          <a:noFill/>
+          <a:ln/>
+        </p:spPr>
+        <p:txBody>
+          <a:bodyPr wrap="square" lIns="0" tIns="0" rIns="0" bIns="0" rtlCol="0" anchor="ctr"/>
+          <a:lstStyle/>
+          <a:p>
+            <a:pPr algn="l" indent="0" marL="0">
+              <a:buNone/>
+            </a:pPr>
+            <a:r>
+              <a:rPr lang="en-US" sz="3200" b="1" dirty="0">
+                <a:solidFill>
+                  <a:schemeClr val="tx2"/>
+                </a:solidFill>
+              </a:rPr>
+              <a:t>Meet the team</a:t>
+            </a:r>
+            <a:endParaRPr lang="en-US" sz="3200" dirty="0"/>
+          </a:p>
+        </p:txBody>
+      </p:sp>
+      <p:sp>
+        <p:nvSpPr>
+          <p:cNvPr id="3" name="a-up-tm0"/>
+          <p:cNvSpPr/>
+          <p:nvPr/>
+        </p:nvSpPr>
+        <p:spPr>
+          <a:xfrm>
+            <a:off x="548640" y="1371600"/>
+            <a:ext cx="2121408" cy="4526280"/>
+          </a:xfrm>
+          <a:prstGeom prst="roundRect">
+            <a:avLst>
+              <a:gd name="adj" fmla="val 5172"/>
+            </a:avLst>
+          </a:prstGeom>
+          <a:solidFill>
+            <a:schemeClr val="bg1"/>
+          </a:solidFill>
+          <a:ln w="9525">
+            <a:solidFill>
+              <a:srgbClr val="CBD5E1"/>
+            </a:solidFill>
+            <a:prstDash val="solid"/>
+          </a:ln>
+          <a:effectLst>
+            <a:outerShdw sx="100000" sy="100000" kx="0" ky="0" algn="bl" rotWithShape="0" blurRad="127000" dist="38100" dir="5400000">
+              <a:srgbClr val="0A2540">
+                <a:alpha val="16000"/>
+              </a:srgbClr>
+            </a:outerShdw>
+          </a:effectLst>
+        </p:spPr>
+      </p:sp>
+      <p:sp>
+        <p:nvSpPr>
+          <p:cNvPr id="4" name="a-up-w-tmc0"/>
+          <p:cNvSpPr/>
+          <p:nvPr/>
+        </p:nvSpPr>
+        <p:spPr>
+          <a:xfrm>
+            <a:off x="1152144" y="1691640"/>
+            <a:ext cx="914400" cy="914400"/>
+          </a:xfrm>
+          <a:prstGeom prst="ellipse">
+            <a:avLst/>
+          </a:prstGeom>
+          <a:solidFill>
+            <a:schemeClr val="accent1"/>
+          </a:solidFill>
+          <a:ln/>
+        </p:spPr>
+      </p:sp>
+      <p:sp>
+        <p:nvSpPr>
+          <p:cNvPr id="5" name="a-up-w-tmi0"/>
+          <p:cNvSpPr txBox="1"/>
+          <p:nvPr/>
+        </p:nvSpPr>
+        <p:spPr>
+          <a:xfrm>
+            <a:off x="1152144" y="1691640"/>
+            <a:ext cx="914400" cy="914400"/>
+          </a:xfrm>
+          <a:prstGeom prst="rect">
+            <a:avLst/>
+          </a:prstGeom>
+          <a:noFill/>
+          <a:ln/>
+        </p:spPr>
+        <p:txBody>
+          <a:bodyPr wrap="square" lIns="0" tIns="0" rIns="0" bIns="0" rtlCol="0" anchor="ctr"/>
+          <a:lstStyle/>
+          <a:p>
+            <a:pPr algn="ctr" indent="0" marL="0">
+              <a:buNone/>
+            </a:pPr>
+            <a:r>
+              <a:rPr lang="en-US" sz="2400" b="1" dirty="0">
+                <a:solidFill>
+                  <a:schemeClr val="bg1"/>
+                </a:solidFill>
+              </a:rPr>
+              <a:t>AJ</a:t>
+            </a:r>
+            <a:endParaRPr lang="en-US" sz="2400" dirty="0"/>
+          </a:p>
+        </p:txBody>
+      </p:sp>
+      <p:sp>
+        <p:nvSpPr>
+          <p:cNvPr id="6" name="a-up-w-tmn0"/>
+          <p:cNvSpPr txBox="1"/>
+          <p:nvPr/>
+        </p:nvSpPr>
+        <p:spPr>
+          <a:xfrm>
+            <a:off x="685800" y="2788920"/>
+            <a:ext cx="1847088" cy="685800"/>
+          </a:xfrm>
+          <a:prstGeom prst="rect">
+            <a:avLst/>
+          </a:prstGeom>
+          <a:noFill/>
+          <a:ln/>
+        </p:spPr>
+        <p:txBody>
+          <a:bodyPr wrap="square" lIns="0" tIns="0" rIns="0" bIns="0" rtlCol="0" anchor="ctr"/>
+          <a:lstStyle/>
+          <a:p>
+            <a:pPr algn="ctr" indent="0" marL="0">
+              <a:buNone/>
+            </a:pPr>
+            <a:r>
+              <a:rPr lang="en-US" sz="1500" b="1" dirty="0">
+                <a:solidFill>
+                  <a:schemeClr val="tx2"/>
+                </a:solidFill>
+              </a:rPr>
+              <a:t>Ali Jan</a:t>
+            </a:r>
+            <a:endParaRPr lang="en-US" sz="1500" dirty="0"/>
+          </a:p>
+        </p:txBody>
+      </p:sp>
+      <p:sp>
+        <p:nvSpPr>
+          <p:cNvPr id="7" name="a-up-w-tmd0"/>
+          <p:cNvSpPr txBox="1"/>
+          <p:nvPr/>
+        </p:nvSpPr>
+        <p:spPr>
+          <a:xfrm>
+            <a:off x="685800" y="3474720"/>
+            <a:ext cx="1847088" cy="274320"/>
+          </a:xfrm>
+          <a:prstGeom prst="rect">
+            <a:avLst/>
+          </a:prstGeom>
+          <a:noFill/>
+          <a:ln/>
+        </p:spPr>
+        <p:txBody>
+          <a:bodyPr wrap="square" lIns="0" tIns="0" rIns="0" bIns="0" rtlCol="0" anchor="t"/>
+          <a:lstStyle/>
+          <a:p>
+            <a:pPr algn="ctr" indent="0" marL="0">
+              <a:buNone/>
+            </a:pPr>
+            <a:r>
+              <a:rPr lang="en-US" sz="1100" dirty="0">
+                <a:solidFill>
+                  <a:schemeClr val="accent1"/>
+                </a:solidFill>
+              </a:rPr>
+              <a:t>Student1661815</a:t>
+            </a:r>
+            <a:endParaRPr lang="en-US" sz="1100" dirty="0"/>
+          </a:p>
+        </p:txBody>
+      </p:sp>
+      <p:sp>
+        <p:nvSpPr>
+          <p:cNvPr id="8" name="a-up-w-tmf0"/>
+          <p:cNvSpPr txBox="1"/>
+          <p:nvPr/>
+        </p:nvSpPr>
+        <p:spPr>
+          <a:xfrm>
+            <a:off x="713232" y="3886200"/>
+            <a:ext cx="1792224" cy="1097280"/>
+          </a:xfrm>
+          <a:prstGeom prst="rect">
+            <a:avLst/>
+          </a:prstGeom>
+          <a:noFill/>
+          <a:ln/>
+        </p:spPr>
+        <p:txBody>
+          <a:bodyPr wrap="square" lIns="0" tIns="0" rIns="0" bIns="0" rtlCol="0" anchor="t"/>
+          <a:lstStyle/>
+          <a:p>
+            <a:pPr algn="ctr" indent="0" marL="0">
+              <a:buNone/>
+            </a:pPr>
+            <a:r>
+              <a:rPr lang="en-US" sz="1150" dirty="0">
+                <a:solidFill>
+                  <a:schemeClr val="accent6"/>
+                </a:solidFill>
+              </a:rPr>
+              <a:t>Requirement analysis, admin module and project coordination</a:t>
+            </a:r>
+            <a:endParaRPr lang="en-US" sz="1150" dirty="0"/>
+          </a:p>
+        </p:txBody>
+      </p:sp>
+      <p:sp>
+        <p:nvSpPr>
+          <p:cNvPr id="9" name="a-up-w-tmp0"/>
+          <p:cNvSpPr txBox="1"/>
+          <p:nvPr/>
+        </p:nvSpPr>
+        <p:spPr>
+          <a:xfrm>
+            <a:off x="713232" y="4983480"/>
+            <a:ext cx="1792224" cy="777240"/>
+          </a:xfrm>
+          <a:prstGeom prst="rect">
+            <a:avLst/>
+          </a:prstGeom>
+          <a:noFill/>
+          <a:ln/>
+        </p:spPr>
+        <p:txBody>
+          <a:bodyPr wrap="square" lIns="0" tIns="0" rIns="0" bIns="0" rtlCol="0" anchor="t"/>
+          <a:lstStyle/>
+          <a:p>
+            <a:pPr algn="ctr" indent="0" marL="0">
+              <a:buNone/>
+            </a:pPr>
+            <a:r>
+              <a:rPr lang="en-US" sz="1050" b="1" dirty="0">
+                <a:solidFill>
+                  <a:schemeClr val="accent2"/>
+                </a:solidFill>
+              </a:rPr>
+              <a:t>Slides 1-5: introduction, problem and solution</a:t>
+            </a:r>
+            <a:endParaRPr lang="en-US" sz="1050" dirty="0"/>
+          </a:p>
+        </p:txBody>
+      </p:sp>
+      <p:sp>
+        <p:nvSpPr>
+          <p:cNvPr id="10" name="a-up-tm1"/>
+          <p:cNvSpPr/>
+          <p:nvPr/>
+        </p:nvSpPr>
+        <p:spPr>
+          <a:xfrm>
+            <a:off x="2779776" y="1371600"/>
+            <a:ext cx="2121408" cy="4526280"/>
+          </a:xfrm>
+          <a:prstGeom prst="roundRect">
+            <a:avLst>
+              <a:gd name="adj" fmla="val 5172"/>
+            </a:avLst>
+          </a:prstGeom>
+          <a:solidFill>
+            <a:schemeClr val="bg1"/>
+          </a:solidFill>
+          <a:ln w="9525">
+            <a:solidFill>
+              <a:srgbClr val="CBD5E1"/>
+            </a:solidFill>
+            <a:prstDash val="solid"/>
+          </a:ln>
+          <a:effectLst>
+            <a:outerShdw sx="100000" sy="100000" kx="0" ky="0" algn="bl" rotWithShape="0" blurRad="127000" dist="38100" dir="5400000">
+              <a:srgbClr val="0A2540">
+                <a:alpha val="16000"/>
+              </a:srgbClr>
+            </a:outerShdw>
+          </a:effectLst>
+        </p:spPr>
+      </p:sp>
+      <p:sp>
+        <p:nvSpPr>
+          <p:cNvPr id="11" name="a-up-w-tmc1"/>
+          <p:cNvSpPr/>
+          <p:nvPr/>
+        </p:nvSpPr>
+        <p:spPr>
+          <a:xfrm>
+            <a:off x="3383280" y="1691640"/>
+            <a:ext cx="914400" cy="914400"/>
+          </a:xfrm>
+          <a:prstGeom prst="ellipse">
+            <a:avLst/>
+          </a:prstGeom>
+          <a:solidFill>
+            <a:schemeClr val="accent2"/>
+          </a:solidFill>
+          <a:ln/>
+        </p:spPr>
+      </p:sp>
+      <p:sp>
+        <p:nvSpPr>
+          <p:cNvPr id="12" name="a-up-w-tmi1"/>
+          <p:cNvSpPr txBox="1"/>
+          <p:nvPr/>
+        </p:nvSpPr>
+        <p:spPr>
+          <a:xfrm>
+            <a:off x="3383280" y="1691640"/>
+            <a:ext cx="914400" cy="914400"/>
+          </a:xfrm>
+          <a:prstGeom prst="rect">
+            <a:avLst/>
+          </a:prstGeom>
+          <a:noFill/>
+          <a:ln/>
+        </p:spPr>
+        <p:txBody>
+          <a:bodyPr wrap="square" lIns="0" tIns="0" rIns="0" bIns="0" rtlCol="0" anchor="ctr"/>
+          <a:lstStyle/>
+          <a:p>
+            <a:pPr algn="ctr" indent="0" marL="0">
+              <a:buNone/>
+            </a:pPr>
+            <a:r>
+              <a:rPr lang="en-US" sz="2400" b="1" dirty="0">
+                <a:solidFill>
+                  <a:schemeClr val="bg1"/>
+                </a:solidFill>
+              </a:rPr>
+              <a:t>HK</a:t>
+            </a:r>
+            <a:endParaRPr lang="en-US" sz="2400" dirty="0"/>
+          </a:p>
+        </p:txBody>
+      </p:sp>
+      <p:sp>
+        <p:nvSpPr>
+          <p:cNvPr id="13" name="a-up-w-tmn1"/>
+          <p:cNvSpPr txBox="1"/>
+          <p:nvPr/>
+        </p:nvSpPr>
+        <p:spPr>
+          <a:xfrm>
+            <a:off x="2916936" y="2788920"/>
+            <a:ext cx="1847088" cy="685800"/>
+          </a:xfrm>
+          <a:prstGeom prst="rect">
+            <a:avLst/>
+          </a:prstGeom>
+          <a:noFill/>
+          <a:ln/>
+        </p:spPr>
+        <p:txBody>
+          <a:bodyPr wrap="square" lIns="0" tIns="0" rIns="0" bIns="0" rtlCol="0" anchor="ctr"/>
+          <a:lstStyle/>
+          <a:p>
+            <a:pPr algn="ctr" indent="0" marL="0">
+              <a:buNone/>
+            </a:pPr>
+            <a:r>
+              <a:rPr lang="en-US" sz="1500" b="1" dirty="0">
+                <a:solidFill>
+                  <a:schemeClr val="tx2"/>
+                </a:solidFill>
+              </a:rPr>
+              <a:t>Humaiz Khan</a:t>
+            </a:r>
+            <a:endParaRPr lang="en-US" sz="1500" dirty="0"/>
+          </a:p>
+        </p:txBody>
+      </p:sp>
+      <p:sp>
+        <p:nvSpPr>
+          <p:cNvPr id="14" name="a-up-w-tmd1"/>
+          <p:cNvSpPr txBox="1"/>
+          <p:nvPr/>
+        </p:nvSpPr>
+        <p:spPr>
+          <a:xfrm>
+            <a:off x="2916936" y="3474720"/>
+            <a:ext cx="1847088" cy="274320"/>
+          </a:xfrm>
+          <a:prstGeom prst="rect">
+            <a:avLst/>
+          </a:prstGeom>
+          <a:noFill/>
+          <a:ln/>
+        </p:spPr>
+        <p:txBody>
+          <a:bodyPr wrap="square" lIns="0" tIns="0" rIns="0" bIns="0" rtlCol="0" anchor="t"/>
+          <a:lstStyle/>
+          <a:p>
+            <a:pPr algn="ctr" indent="0" marL="0">
+              <a:buNone/>
+            </a:pPr>
+            <a:r>
+              <a:rPr lang="en-US" sz="1100" dirty="0">
+                <a:solidFill>
+                  <a:schemeClr val="accent1"/>
+                </a:solidFill>
+              </a:rPr>
+              <a:t>Student1659420</a:t>
+            </a:r>
+            <a:endParaRPr lang="en-US" sz="1100" dirty="0"/>
+          </a:p>
+        </p:txBody>
+      </p:sp>
+      <p:sp>
+        <p:nvSpPr>
+          <p:cNvPr id="15" name="a-up-w-tmf1"/>
+          <p:cNvSpPr txBox="1"/>
+          <p:nvPr/>
+        </p:nvSpPr>
+        <p:spPr>
+          <a:xfrm>
+            <a:off x="2944368" y="3886200"/>
+            <a:ext cx="1792224" cy="1097280"/>
+          </a:xfrm>
+          <a:prstGeom prst="rect">
+            <a:avLst/>
+          </a:prstGeom>
+          <a:noFill/>
+          <a:ln/>
+        </p:spPr>
+        <p:txBody>
+          <a:bodyPr wrap="square" lIns="0" tIns="0" rIns="0" bIns="0" rtlCol="0" anchor="t"/>
+          <a:lstStyle/>
+          <a:p>
+            <a:pPr algn="ctr" indent="0" marL="0">
+              <a:buNone/>
+            </a:pPr>
+            <a:r>
+              <a:rPr lang="en-US" sz="1150" dirty="0">
+                <a:solidFill>
+                  <a:schemeClr val="accent6"/>
+                </a:solidFill>
+              </a:rPr>
+              <a:t>Database design, ER diagram, entities and migrations</a:t>
+            </a:r>
+            <a:endParaRPr lang="en-US" sz="1150" dirty="0"/>
+          </a:p>
+        </p:txBody>
+      </p:sp>
+      <p:sp>
+        <p:nvSpPr>
+          <p:cNvPr id="16" name="a-up-w-tmp1"/>
+          <p:cNvSpPr txBox="1"/>
+          <p:nvPr/>
+        </p:nvSpPr>
+        <p:spPr>
+          <a:xfrm>
+            <a:off x="2944368" y="4983480"/>
+            <a:ext cx="1792224" cy="777240"/>
+          </a:xfrm>
+          <a:prstGeom prst="rect">
+            <a:avLst/>
+          </a:prstGeom>
+          <a:noFill/>
+          <a:ln/>
+        </p:spPr>
+        <p:txBody>
+          <a:bodyPr wrap="square" lIns="0" tIns="0" rIns="0" bIns="0" rtlCol="0" anchor="t"/>
+          <a:lstStyle/>
+          <a:p>
+            <a:pPr algn="ctr" indent="0" marL="0">
+              <a:buNone/>
+            </a:pPr>
+            <a:r>
+              <a:rPr lang="en-US" sz="1050" b="1" dirty="0">
+                <a:solidFill>
+                  <a:schemeClr val="accent2"/>
+                </a:solidFill>
+              </a:rPr>
+              <a:t>Slides 6-8: architecture, database and identifiers</a:t>
+            </a:r>
+            <a:endParaRPr lang="en-US" sz="1050" dirty="0"/>
+          </a:p>
+        </p:txBody>
+      </p:sp>
+      <p:sp>
+        <p:nvSpPr>
+          <p:cNvPr id="17" name="a-up-tm2"/>
+          <p:cNvSpPr/>
+          <p:nvPr/>
+        </p:nvSpPr>
+        <p:spPr>
+          <a:xfrm>
+            <a:off x="5010912" y="1371600"/>
+            <a:ext cx="2121408" cy="4526280"/>
+          </a:xfrm>
+          <a:prstGeom prst="roundRect">
+            <a:avLst>
+              <a:gd name="adj" fmla="val 5172"/>
+            </a:avLst>
+          </a:prstGeom>
+          <a:solidFill>
+            <a:schemeClr val="bg1"/>
+          </a:solidFill>
+          <a:ln w="9525">
+            <a:solidFill>
+              <a:srgbClr val="CBD5E1"/>
+            </a:solidFill>
+            <a:prstDash val="solid"/>
+          </a:ln>
+          <a:effectLst>
+            <a:outerShdw sx="100000" sy="100000" kx="0" ky="0" algn="bl" rotWithShape="0" blurRad="127000" dist="38100" dir="5400000">
+              <a:srgbClr val="0A2540">
+                <a:alpha val="16000"/>
+              </a:srgbClr>
+            </a:outerShdw>
+          </a:effectLst>
+        </p:spPr>
+      </p:sp>
+      <p:sp>
+        <p:nvSpPr>
+          <p:cNvPr id="18" name="a-up-w-tmc2"/>
+          <p:cNvSpPr/>
+          <p:nvPr/>
+        </p:nvSpPr>
+        <p:spPr>
+          <a:xfrm>
+            <a:off x="5614416" y="1691640"/>
+            <a:ext cx="914400" cy="914400"/>
+          </a:xfrm>
+          <a:prstGeom prst="ellipse">
+            <a:avLst/>
+          </a:prstGeom>
+          <a:solidFill>
+            <a:schemeClr val="accent1"/>
+          </a:solidFill>
+          <a:ln/>
+        </p:spPr>
+      </p:sp>
+      <p:sp>
+        <p:nvSpPr>
+          <p:cNvPr id="19" name="a-up-w-tmi2"/>
+          <p:cNvSpPr txBox="1"/>
+          <p:nvPr/>
+        </p:nvSpPr>
+        <p:spPr>
+          <a:xfrm>
+            <a:off x="5614416" y="1691640"/>
+            <a:ext cx="914400" cy="914400"/>
+          </a:xfrm>
+          <a:prstGeom prst="rect">
+            <a:avLst/>
+          </a:prstGeom>
+          <a:noFill/>
+          <a:ln/>
+        </p:spPr>
+        <p:txBody>
+          <a:bodyPr wrap="square" lIns="0" tIns="0" rIns="0" bIns="0" rtlCol="0" anchor="ctr"/>
+          <a:lstStyle/>
+          <a:p>
+            <a:pPr algn="ctr" indent="0" marL="0">
+              <a:buNone/>
+            </a:pPr>
+            <a:r>
+              <a:rPr lang="en-US" sz="2400" b="1" dirty="0">
+                <a:solidFill>
+                  <a:schemeClr val="bg1"/>
+                </a:solidFill>
+              </a:rPr>
+              <a:t>ME</a:t>
+            </a:r>
+            <a:endParaRPr lang="en-US" sz="2400" dirty="0"/>
+          </a:p>
+        </p:txBody>
+      </p:sp>
+      <p:sp>
+        <p:nvSpPr>
+          <p:cNvPr id="20" name="a-up-w-tmn2"/>
+          <p:cNvSpPr txBox="1"/>
+          <p:nvPr/>
+        </p:nvSpPr>
+        <p:spPr>
+          <a:xfrm>
+            <a:off x="5148072" y="2788920"/>
+            <a:ext cx="1847088" cy="685800"/>
+          </a:xfrm>
+          <a:prstGeom prst="rect">
+            <a:avLst/>
+          </a:prstGeom>
+          <a:noFill/>
+          <a:ln/>
+        </p:spPr>
+        <p:txBody>
+          <a:bodyPr wrap="square" lIns="0" tIns="0" rIns="0" bIns="0" rtlCol="0" anchor="ctr"/>
+          <a:lstStyle/>
+          <a:p>
+            <a:pPr algn="ctr" indent="0" marL="0">
+              <a:buNone/>
+            </a:pPr>
+            <a:r>
+              <a:rPr lang="en-US" sz="1500" b="1" dirty="0">
+                <a:solidFill>
+                  <a:schemeClr val="tx2"/>
+                </a:solidFill>
+              </a:rPr>
+              <a:t>Muhammad Ehtisham Shakeel</a:t>
+            </a:r>
+            <a:endParaRPr lang="en-US" sz="1500" dirty="0"/>
+          </a:p>
+        </p:txBody>
+      </p:sp>
+      <p:sp>
+        <p:nvSpPr>
+          <p:cNvPr id="21" name="a-up-w-tmd2"/>
+          <p:cNvSpPr txBox="1"/>
+          <p:nvPr/>
+        </p:nvSpPr>
+        <p:spPr>
+          <a:xfrm>
+            <a:off x="5148072" y="3474720"/>
+            <a:ext cx="1847088" cy="274320"/>
+          </a:xfrm>
+          <a:prstGeom prst="rect">
+            <a:avLst/>
+          </a:prstGeom>
+          <a:noFill/>
+          <a:ln/>
+        </p:spPr>
+        <p:txBody>
+          <a:bodyPr wrap="square" lIns="0" tIns="0" rIns="0" bIns="0" rtlCol="0" anchor="t"/>
+          <a:lstStyle/>
+          <a:p>
+            <a:pPr algn="ctr" indent="0" marL="0">
+              <a:buNone/>
+            </a:pPr>
+            <a:r>
+              <a:rPr lang="en-US" sz="1100" dirty="0">
+                <a:solidFill>
+                  <a:schemeClr val="accent1"/>
+                </a:solidFill>
+              </a:rPr>
+              <a:t>Student1657963</a:t>
+            </a:r>
+            <a:endParaRPr lang="en-US" sz="1100" dirty="0"/>
+          </a:p>
+        </p:txBody>
+      </p:sp>
+      <p:sp>
+        <p:nvSpPr>
+          <p:cNvPr id="22" name="a-up-w-tmf2"/>
+          <p:cNvSpPr txBox="1"/>
+          <p:nvPr/>
+        </p:nvSpPr>
+        <p:spPr>
+          <a:xfrm>
+            <a:off x="5175504" y="3886200"/>
+            <a:ext cx="1792224" cy="1097280"/>
+          </a:xfrm>
+          <a:prstGeom prst="rect">
+            <a:avLst/>
+          </a:prstGeom>
+          <a:noFill/>
+          <a:ln/>
+        </p:spPr>
+        <p:txBody>
+          <a:bodyPr wrap="square" lIns="0" tIns="0" rIns="0" bIns="0" rtlCol="0" anchor="t"/>
+          <a:lstStyle/>
+          <a:p>
+            <a:pPr algn="ctr" indent="0" marL="0">
+              <a:buNone/>
+            </a:pPr>
+            <a:r>
+              <a:rPr lang="en-US" sz="1150" dirty="0">
+                <a:solidFill>
+                  <a:schemeClr val="accent6"/>
+                </a:solidFill>
+              </a:rPr>
+              <a:t>Login and security, orders, feasibility and connections</a:t>
+            </a:r>
+            <a:endParaRPr lang="en-US" sz="1150" dirty="0"/>
+          </a:p>
+        </p:txBody>
+      </p:sp>
+      <p:sp>
+        <p:nvSpPr>
+          <p:cNvPr id="23" name="a-up-w-tmp2"/>
+          <p:cNvSpPr txBox="1"/>
+          <p:nvPr/>
+        </p:nvSpPr>
+        <p:spPr>
+          <a:xfrm>
+            <a:off x="5175504" y="4983480"/>
+            <a:ext cx="1792224" cy="777240"/>
+          </a:xfrm>
+          <a:prstGeom prst="rect">
+            <a:avLst/>
+          </a:prstGeom>
+          <a:noFill/>
+          <a:ln/>
+        </p:spPr>
+        <p:txBody>
+          <a:bodyPr wrap="square" lIns="0" tIns="0" rIns="0" bIns="0" rtlCol="0" anchor="t"/>
+          <a:lstStyle/>
+          <a:p>
+            <a:pPr algn="ctr" indent="0" marL="0">
+              <a:buNone/>
+            </a:pPr>
+            <a:r>
+              <a:rPr lang="en-US" sz="1050" b="1" dirty="0">
+                <a:solidFill>
+                  <a:schemeClr val="accent2"/>
+                </a:solidFill>
+              </a:rPr>
+              <a:t>Slide 9 and the live demo</a:t>
+            </a:r>
+            <a:endParaRPr lang="en-US" sz="1050" dirty="0"/>
+          </a:p>
+        </p:txBody>
+      </p:sp>
+      <p:sp>
+        <p:nvSpPr>
+          <p:cNvPr id="24" name="a-up-tm3"/>
+          <p:cNvSpPr/>
+          <p:nvPr/>
+        </p:nvSpPr>
+        <p:spPr>
+          <a:xfrm>
+            <a:off x="7242048" y="1371600"/>
+            <a:ext cx="2121408" cy="4526280"/>
+          </a:xfrm>
+          <a:prstGeom prst="roundRect">
+            <a:avLst>
+              <a:gd name="adj" fmla="val 5172"/>
+            </a:avLst>
+          </a:prstGeom>
+          <a:solidFill>
+            <a:schemeClr val="bg1"/>
+          </a:solidFill>
+          <a:ln w="9525">
+            <a:solidFill>
+              <a:srgbClr val="CBD5E1"/>
+            </a:solidFill>
+            <a:prstDash val="solid"/>
+          </a:ln>
+          <a:effectLst>
+            <a:outerShdw sx="100000" sy="100000" kx="0" ky="0" algn="bl" rotWithShape="0" blurRad="127000" dist="38100" dir="5400000">
+              <a:srgbClr val="0A2540">
+                <a:alpha val="16000"/>
+              </a:srgbClr>
+            </a:outerShdw>
+          </a:effectLst>
+        </p:spPr>
+      </p:sp>
+      <p:sp>
+        <p:nvSpPr>
+          <p:cNvPr id="25" name="a-up-w-tmc3"/>
+          <p:cNvSpPr/>
+          <p:nvPr/>
+        </p:nvSpPr>
+        <p:spPr>
+          <a:xfrm>
+            <a:off x="7845552" y="1691640"/>
+            <a:ext cx="914400" cy="914400"/>
+          </a:xfrm>
+          <a:prstGeom prst="ellipse">
+            <a:avLst/>
+          </a:prstGeom>
+          <a:solidFill>
+            <a:schemeClr val="accent2"/>
+          </a:solidFill>
+          <a:ln/>
+        </p:spPr>
+      </p:sp>
+      <p:sp>
+        <p:nvSpPr>
+          <p:cNvPr id="26" name="a-up-w-tmi3"/>
+          <p:cNvSpPr txBox="1"/>
+          <p:nvPr/>
+        </p:nvSpPr>
+        <p:spPr>
+          <a:xfrm>
+            <a:off x="7845552" y="1691640"/>
+            <a:ext cx="914400" cy="914400"/>
+          </a:xfrm>
+          <a:prstGeom prst="rect">
+            <a:avLst/>
+          </a:prstGeom>
+          <a:noFill/>
+          <a:ln/>
+        </p:spPr>
+        <p:txBody>
+          <a:bodyPr wrap="square" lIns="0" tIns="0" rIns="0" bIns="0" rtlCol="0" anchor="ctr"/>
+          <a:lstStyle/>
+          <a:p>
+            <a:pPr algn="ctr" indent="0" marL="0">
+              <a:buNone/>
+            </a:pPr>
+            <a:r>
+              <a:rPr lang="en-US" sz="2400" b="1" dirty="0">
+                <a:solidFill>
+                  <a:schemeClr val="bg1"/>
+                </a:solidFill>
+              </a:rPr>
+              <a:t>MW</a:t>
+            </a:r>
+            <a:endParaRPr lang="en-US" sz="2400" dirty="0"/>
+          </a:p>
+        </p:txBody>
+      </p:sp>
+      <p:sp>
+        <p:nvSpPr>
+          <p:cNvPr id="27" name="a-up-w-tmn3"/>
+          <p:cNvSpPr txBox="1"/>
+          <p:nvPr/>
+        </p:nvSpPr>
+        <p:spPr>
+          <a:xfrm>
+            <a:off x="7379208" y="2788920"/>
+            <a:ext cx="1847088" cy="685800"/>
+          </a:xfrm>
+          <a:prstGeom prst="rect">
+            <a:avLst/>
+          </a:prstGeom>
+          <a:noFill/>
+          <a:ln/>
+        </p:spPr>
+        <p:txBody>
+          <a:bodyPr wrap="square" lIns="0" tIns="0" rIns="0" bIns="0" rtlCol="0" anchor="ctr"/>
+          <a:lstStyle/>
+          <a:p>
+            <a:pPr algn="ctr" indent="0" marL="0">
+              <a:buNone/>
+            </a:pPr>
+            <a:r>
+              <a:rPr lang="en-US" sz="1500" b="1" dirty="0">
+                <a:solidFill>
+                  <a:schemeClr val="tx2"/>
+                </a:solidFill>
+              </a:rPr>
+              <a:t>Muhammad Waleed</a:t>
+            </a:r>
+            <a:endParaRPr lang="en-US" sz="1500" dirty="0"/>
+          </a:p>
+        </p:txBody>
+      </p:sp>
+      <p:sp>
+        <p:nvSpPr>
+          <p:cNvPr id="28" name="a-up-w-tmd3"/>
+          <p:cNvSpPr txBox="1"/>
+          <p:nvPr/>
+        </p:nvSpPr>
+        <p:spPr>
+          <a:xfrm>
+            <a:off x="7379208" y="3474720"/>
+            <a:ext cx="1847088" cy="274320"/>
+          </a:xfrm>
+          <a:prstGeom prst="rect">
+            <a:avLst/>
+          </a:prstGeom>
+          <a:noFill/>
+          <a:ln/>
+        </p:spPr>
+        <p:txBody>
+          <a:bodyPr wrap="square" lIns="0" tIns="0" rIns="0" bIns="0" rtlCol="0" anchor="t"/>
+          <a:lstStyle/>
+          <a:p>
+            <a:pPr algn="ctr" indent="0" marL="0">
+              <a:buNone/>
+            </a:pPr>
+            <a:r>
+              <a:rPr lang="en-US" sz="1100" dirty="0">
+                <a:solidFill>
+                  <a:schemeClr val="accent1"/>
+                </a:solidFill>
+              </a:rPr>
+              <a:t>Student1659932</a:t>
+            </a:r>
+            <a:endParaRPr lang="en-US" sz="1100" dirty="0"/>
+          </a:p>
+        </p:txBody>
+      </p:sp>
+      <p:sp>
+        <p:nvSpPr>
+          <p:cNvPr id="29" name="a-up-w-tmf3"/>
+          <p:cNvSpPr txBox="1"/>
+          <p:nvPr/>
+        </p:nvSpPr>
+        <p:spPr>
+          <a:xfrm>
+            <a:off x="7406640" y="3886200"/>
+            <a:ext cx="1792224" cy="1097280"/>
+          </a:xfrm>
+          <a:prstGeom prst="rect">
+            <a:avLst/>
+          </a:prstGeom>
+          <a:noFill/>
+          <a:ln/>
+        </p:spPr>
+        <p:txBody>
+          <a:bodyPr wrap="square" lIns="0" tIns="0" rIns="0" bIns="0" rtlCol="0" anchor="t"/>
+          <a:lstStyle/>
+          <a:p>
+            <a:pPr algn="ctr" indent="0" marL="0">
+              <a:buNone/>
+            </a:pPr>
+            <a:r>
+              <a:rPr lang="en-US" sz="1150" dirty="0">
+                <a:solidFill>
+                  <a:schemeClr val="accent6"/>
+                </a:solidFill>
+              </a:rPr>
+              <a:t>Billing, payments, overdue control, tracking and search</a:t>
+            </a:r>
+            <a:endParaRPr lang="en-US" sz="1150" dirty="0"/>
+          </a:p>
+        </p:txBody>
+      </p:sp>
+      <p:sp>
+        <p:nvSpPr>
+          <p:cNvPr id="30" name="a-up-w-tmp3"/>
+          <p:cNvSpPr txBox="1"/>
+          <p:nvPr/>
+        </p:nvSpPr>
+        <p:spPr>
+          <a:xfrm>
+            <a:off x="7406640" y="4983480"/>
+            <a:ext cx="1792224" cy="777240"/>
+          </a:xfrm>
+          <a:prstGeom prst="rect">
+            <a:avLst/>
+          </a:prstGeom>
+          <a:noFill/>
+          <a:ln/>
+        </p:spPr>
+        <p:txBody>
+          <a:bodyPr wrap="square" lIns="0" tIns="0" rIns="0" bIns="0" rtlCol="0" anchor="t"/>
+          <a:lstStyle/>
+          <a:p>
+            <a:pPr algn="ctr" indent="0" marL="0">
+              <a:buNone/>
+            </a:pPr>
+            <a:r>
+              <a:rPr lang="en-US" sz="1050" b="1" dirty="0">
+                <a:solidFill>
+                  <a:schemeClr val="accent2"/>
+                </a:solidFill>
+              </a:rPr>
+              <a:t>Slides 10-12: billing, plans and postpaid control</a:t>
+            </a:r>
+            <a:endParaRPr lang="en-US" sz="1050" dirty="0"/>
+          </a:p>
+        </p:txBody>
+      </p:sp>
+      <p:sp>
+        <p:nvSpPr>
+          <p:cNvPr id="31" name="a-up-tm4"/>
+          <p:cNvSpPr/>
+          <p:nvPr/>
+        </p:nvSpPr>
+        <p:spPr>
+          <a:xfrm>
+            <a:off x="9473184" y="1371600"/>
+            <a:ext cx="2121408" cy="4526280"/>
+          </a:xfrm>
+          <a:prstGeom prst="roundRect">
+            <a:avLst>
+              <a:gd name="adj" fmla="val 5172"/>
+            </a:avLst>
+          </a:prstGeom>
+          <a:solidFill>
+            <a:schemeClr val="bg1"/>
+          </a:solidFill>
+          <a:ln w="9525">
+            <a:solidFill>
+              <a:srgbClr val="CBD5E1"/>
+            </a:solidFill>
+            <a:prstDash val="solid"/>
+          </a:ln>
+          <a:effectLst>
+            <a:outerShdw sx="100000" sy="100000" kx="0" ky="0" algn="bl" rotWithShape="0" blurRad="127000" dist="38100" dir="5400000">
+              <a:srgbClr val="0A2540">
+                <a:alpha val="16000"/>
+              </a:srgbClr>
+            </a:outerShdw>
+          </a:effectLst>
+        </p:spPr>
+      </p:sp>
+      <p:sp>
+        <p:nvSpPr>
+          <p:cNvPr id="32" name="a-up-w-tmc4"/>
+          <p:cNvSpPr/>
+          <p:nvPr/>
+        </p:nvSpPr>
+        <p:spPr>
+          <a:xfrm>
+            <a:off x="10076688" y="1691640"/>
+            <a:ext cx="914400" cy="914400"/>
+          </a:xfrm>
+          <a:prstGeom prst="ellipse">
+            <a:avLst/>
+          </a:prstGeom>
+          <a:solidFill>
+            <a:schemeClr val="accent1"/>
+          </a:solidFill>
+          <a:ln/>
+        </p:spPr>
+      </p:sp>
+      <p:sp>
+        <p:nvSpPr>
+          <p:cNvPr id="33" name="a-up-w-tmi4"/>
+          <p:cNvSpPr txBox="1"/>
+          <p:nvPr/>
+        </p:nvSpPr>
+        <p:spPr>
+          <a:xfrm>
+            <a:off x="10076688" y="1691640"/>
+            <a:ext cx="914400" cy="914400"/>
+          </a:xfrm>
+          <a:prstGeom prst="rect">
+            <a:avLst/>
+          </a:prstGeom>
+          <a:noFill/>
+          <a:ln/>
+        </p:spPr>
+        <p:txBody>
+          <a:bodyPr wrap="square" lIns="0" tIns="0" rIns="0" bIns="0" rtlCol="0" anchor="ctr"/>
+          <a:lstStyle/>
+          <a:p>
+            <a:pPr algn="ctr" indent="0" marL="0">
+              <a:buNone/>
+            </a:pPr>
+            <a:r>
+              <a:rPr lang="en-US" sz="2400" b="1" dirty="0">
+                <a:solidFill>
+                  <a:schemeClr val="bg1"/>
+                </a:solidFill>
+              </a:rPr>
+              <a:t>AT</a:t>
+            </a:r>
+            <a:endParaRPr lang="en-US" sz="2400" dirty="0"/>
+          </a:p>
+        </p:txBody>
+      </p:sp>
+      <p:sp>
+        <p:nvSpPr>
+          <p:cNvPr id="34" name="a-up-w-tmn4"/>
+          <p:cNvSpPr txBox="1"/>
+          <p:nvPr/>
+        </p:nvSpPr>
+        <p:spPr>
+          <a:xfrm>
+            <a:off x="9610344" y="2788920"/>
+            <a:ext cx="1847088" cy="685800"/>
+          </a:xfrm>
+          <a:prstGeom prst="rect">
+            <a:avLst/>
+          </a:prstGeom>
+          <a:noFill/>
+          <a:ln/>
+        </p:spPr>
+        <p:txBody>
+          <a:bodyPr wrap="square" lIns="0" tIns="0" rIns="0" bIns="0" rtlCol="0" anchor="ctr"/>
+          <a:lstStyle/>
+          <a:p>
+            <a:pPr algn="ctr" indent="0" marL="0">
+              <a:buNone/>
+            </a:pPr>
+            <a:r>
+              <a:rPr lang="en-US" sz="1500" b="1" dirty="0">
+                <a:solidFill>
+                  <a:schemeClr val="tx2"/>
+                </a:solidFill>
+              </a:rPr>
+              <a:t>Ali Turab</a:t>
+            </a:r>
+            <a:endParaRPr lang="en-US" sz="1500" dirty="0"/>
+          </a:p>
+        </p:txBody>
+      </p:sp>
+      <p:sp>
+        <p:nvSpPr>
+          <p:cNvPr id="35" name="a-up-w-tmd4"/>
+          <p:cNvSpPr txBox="1"/>
+          <p:nvPr/>
+        </p:nvSpPr>
+        <p:spPr>
+          <a:xfrm>
+            <a:off x="9610344" y="3474720"/>
+            <a:ext cx="1847088" cy="274320"/>
+          </a:xfrm>
+          <a:prstGeom prst="rect">
+            <a:avLst/>
+          </a:prstGeom>
+          <a:noFill/>
+          <a:ln/>
+        </p:spPr>
+        <p:txBody>
+          <a:bodyPr wrap="square" lIns="0" tIns="0" rIns="0" bIns="0" rtlCol="0" anchor="t"/>
+          <a:lstStyle/>
+          <a:p>
+            <a:pPr algn="ctr" indent="0" marL="0">
+              <a:buNone/>
+            </a:pPr>
+            <a:r>
+              <a:rPr lang="en-US" sz="1100" dirty="0">
+                <a:solidFill>
+                  <a:schemeClr val="accent1"/>
+                </a:solidFill>
+              </a:rPr>
+              <a:t>Student1667727</a:t>
+            </a:r>
+            <a:endParaRPr lang="en-US" sz="1100" dirty="0"/>
+          </a:p>
+        </p:txBody>
+      </p:sp>
+      <p:sp>
+        <p:nvSpPr>
+          <p:cNvPr id="36" name="a-up-w-tmf4"/>
+          <p:cNvSpPr txBox="1"/>
+          <p:nvPr/>
+        </p:nvSpPr>
+        <p:spPr>
+          <a:xfrm>
+            <a:off x="9637776" y="3886200"/>
+            <a:ext cx="1792224" cy="1097280"/>
+          </a:xfrm>
+          <a:prstGeom prst="rect">
+            <a:avLst/>
+          </a:prstGeom>
+          <a:noFill/>
+          <a:ln/>
+        </p:spPr>
+        <p:txBody>
+          <a:bodyPr wrap="square" lIns="0" tIns="0" rIns="0" bIns="0" rtlCol="0" anchor="t"/>
+          <a:lstStyle/>
+          <a:p>
+            <a:pPr algn="ctr" indent="0" marL="0">
+              <a:buNone/>
+            </a:pPr>
+            <a:r>
+              <a:rPr lang="en-US" sz="1150" dirty="0">
+                <a:solidFill>
+                  <a:schemeClr val="accent6"/>
+                </a:solidFill>
+              </a:rPr>
+              <a:t>Interface design, customer documents, testing and documentation</a:t>
+            </a:r>
+            <a:endParaRPr lang="en-US" sz="1150" dirty="0"/>
+          </a:p>
+        </p:txBody>
+      </p:sp>
+      <p:sp>
+        <p:nvSpPr>
+          <p:cNvPr id="37" name="a-up-w-tmp4"/>
+          <p:cNvSpPr txBox="1"/>
+          <p:nvPr/>
+        </p:nvSpPr>
+        <p:spPr>
+          <a:xfrm>
+            <a:off x="9637776" y="4983480"/>
+            <a:ext cx="1792224" cy="777240"/>
+          </a:xfrm>
+          <a:prstGeom prst="rect">
+            <a:avLst/>
+          </a:prstGeom>
+          <a:noFill/>
+          <a:ln/>
+        </p:spPr>
+        <p:txBody>
+          <a:bodyPr wrap="square" lIns="0" tIns="0" rIns="0" bIns="0" rtlCol="0" anchor="t"/>
+          <a:lstStyle/>
+          <a:p>
+            <a:pPr algn="ctr" indent="0" marL="0">
+              <a:buNone/>
+            </a:pPr>
+            <a:r>
+              <a:rPr lang="en-US" sz="1050" b="1" dirty="0">
+                <a:solidFill>
+                  <a:schemeClr val="accent2"/>
+                </a:solidFill>
+              </a:rPr>
+              <a:t>Slides 13-17: interface, quality and closing</a:t>
+            </a:r>
+            <a:endParaRPr lang="en-US" sz="1050" dirty="0"/>
+          </a:p>
+        </p:txBody>
+      </p:sp>
+      <p:sp>
+        <p:nvSpPr>
+          <p:cNvPr id="25" name="Slide Number Placeholder 0"/>
+          <p:cNvSpPr>
+            <a:spLocks noGrp="1"/>
+          </p:cNvSpPr>
+          <p:nvPr>
+            <p:ph type="sldNum" sz="quarter" idx="4294967295"/>
+          </p:nvPr>
+        </p:nvSpPr>
+        <p:spPr>
+          <a:xfrm>
+            <a:off x="11155680" y="6382512"/>
+            <a:ext cx="457200" cy="274320"/>
+          </a:xfrm>
+          <a:prstGeom prst="rect">
+            <a:avLst/>
+          </a:prstGeom>
+          <a:extLst>
+            <a:ext uri="{C572A759-6A51-4108-AA02-DFA0A04FC94B}">
+              <ma14:wrappingTextBoxFlag xmlns:ma14="http://schemas.microsoft.com/office/mac/drawingml/2011/main" val="0"/>
+            </a:ext>
+          </a:extLst>
+        </p:spPr>
+        <p:txBody>
+          <a:bodyPr/>
+          <a:lstStyle>
+            <a:lvl1pPr>
+              <a:defRPr sz="1000">
+                <a:solidFill>
+                  <a:schemeClr val="accent6"/>
+                </a:solidFill>
+              </a:defRPr>
+            </a:lvl1pPr>
+          </a:lstStyle>
+          <a:p>
+            <a:pPr algn="r"/>
+            <a:fld id="{F7021451-1387-4CA6-816F-3879F97B5CBC}" type="slidenum">
+              <a:rPr b="0" lang="en-US"/>
+              <a:t>2</a:t>
+            </a:fld>
+            <a:endParaRPr lang="en-US"/>
+          </a:p>
+        </p:txBody>
+      </p:sp>
+    </p:spTree>
+  </p:cSld>
+  <p:clrMapOvr>
+    <a:masterClrMapping/>
+  </p:clrMapOvr>
+  <p:transition spd="med">
+    <p:push dir="u"/>
+  </p:transition>
+  <p:timing>
+    <p:tnLst>
+      <p:par>
+        <p:cTn id="1" dur="indefinite" restart="never" nodeType="tmRoot">
+          <p:childTnLst>
+            <p:seq concurrent="1" nextAc="seek">
+              <p:cTn id="2" dur="indefinite" nodeType="mainSeq">
+                <p:childTnLst>
+                  <p:par>
+                    <p:cTn id="3" fill="hold">
+                      <p:stCondLst>
+                        <p:cond delay="indefinite"/>
+                        <p:cond evt="onBegin" delay="0">
+                          <p:tn val="2"/>
+                        </p:cond>
+                      </p:stCondLst>
+                      <p:childTnLst>
+                        <p:par>
+                          <p:cTn id="185" fill="hold">
+                            <p:stCondLst>
+                              <p:cond delay="0"/>
+                            </p:stCondLst>
+                            <p:childTnLst>
+                              <p:par>
+                                <p:cTn id="6" presetID="10" presetClass="entr" presetSubtype="0" fill="hold" grpId="0" nodeType="afterEffect">
+                                  <p:stCondLst>
+                                    <p:cond delay="0"/>
+                                  </p:stCondLst>
+                                  <p:childTnLst>
+                                    <p:set>
+                                      <p:cBhvr>
+                                        <p:cTn id="4" dur="1" fill="hold">
+                                          <p:stCondLst>
+                                            <p:cond delay="0"/>
+                                          </p:stCondLst>
+                                        </p:cTn>
+                                        <p:tgtEl>
+                                          <p:spTgt spid="2"/>
+                                        </p:tgtEl>
+                                        <p:attrNameLst>
+                                          <p:attrName>style.visibility</p:attrName>
+                                        </p:attrNameLst>
+                                      </p:cBhvr>
+                                      <p:to>
+                                        <p:strVal val="visible"/>
+                                      </p:to>
+                                    </p:set>
+                                    <p:animEffect transition="in" filter="fade">
+                                      <p:cBhvr>
+                                        <p:cTn id="5" dur="500"/>
+                                        <p:tgtEl>
+                                          <p:spTgt spid="2"/>
+                                        </p:tgtEl>
+                                      </p:cBhvr>
+                                    </p:animEffect>
+                                  </p:childTnLst>
+                                </p:cTn>
+                              </p:par>
+                              <p:par>
+                                <p:cTn id="11" presetID="42" presetClass="entr" presetSubtype="0" fill="hold" grpId="0" nodeType="withEffect">
+                                  <p:stCondLst>
+                                    <p:cond delay="200"/>
+                                  </p:stCondLst>
+                                  <p:childTnLst>
+                                    <p:set>
+                                      <p:cBhvr>
+                                        <p:cTn id="7" dur="1" fill="hold">
+                                          <p:stCondLst>
+                                            <p:cond delay="0"/>
+                                          </p:stCondLst>
+                                        </p:cTn>
+                                        <p:tgtEl>
+                                          <p:spTgt spid="3"/>
+                                        </p:tgtEl>
+                                        <p:attrNameLst>
+                                          <p:attrName>style.visibility</p:attrName>
+                                        </p:attrNameLst>
+                                      </p:cBhvr>
+                                      <p:to>
+                                        <p:strVal val="visible"/>
+                                      </p:to>
+                                    </p:set>
+                                    <p:animEffect transition="in" filter="fade">
+                                      <p:cBhvr>
+                                        <p:cTn id="8" dur="600"/>
+                                        <p:tgtEl>
+                                          <p:spTgt spid="3"/>
+                                        </p:tgtEl>
+                                      </p:cBhvr>
+                                    </p:animEffect>
+                                    <p:anim calcmode="lin" valueType="num">
+                                      <p:cBhvr>
+                                        <p:cTn id="9" dur="600" decel="100000" fill="hold"/>
+                                        <p:tgtEl>
+                                          <p:spTgt spid="3"/>
+                                        </p:tgtEl>
+                                        <p:attrNameLst>
+                                          <p:attrName>ppt_x</p:attrName>
+                                        </p:attrNameLst>
+                                      </p:cBhvr>
+                                      <p:tavLst>
+                                        <p:tav tm="0">
+                                          <p:val>
+                                            <p:strVal val="#ppt_x"/>
+                                          </p:val>
+                                        </p:tav>
+                                        <p:tav tm="100000">
+                                          <p:val>
+                                            <p:strVal val="#ppt_x"/>
+                                          </p:val>
+                                        </p:tav>
+                                      </p:tavLst>
+                                    </p:anim>
+                                    <p:anim calcmode="lin" valueType="num">
+                                      <p:cBhvr>
+                                        <p:cTn id="10" dur="600" decel="100000" fill="hold"/>
+                                        <p:tgtEl>
+                                          <p:spTgt spid="3"/>
+                                        </p:tgtEl>
+                                        <p:attrNameLst>
+                                          <p:attrName>ppt_y</p:attrName>
+                                        </p:attrNameLst>
+                                      </p:cBhvr>
+                                      <p:tavLst>
+                                        <p:tav tm="0">
+                                          <p:val>
+                                            <p:strVal val="#ppt_y+.08"/>
+                                          </p:val>
+                                        </p:tav>
+                                        <p:tav tm="100000">
+                                          <p:val>
+                                            <p:strVal val="#ppt_y"/>
+                                          </p:val>
+                                        </p:tav>
+                                      </p:tavLst>
+                                    </p:anim>
+                                  </p:childTnLst>
+                                </p:cTn>
+                              </p:par>
+                              <p:par>
+                                <p:cTn id="16" presetID="42" presetClass="entr" presetSubtype="0" fill="hold" grpId="0" nodeType="withEffect">
+                                  <p:stCondLst>
+                                    <p:cond delay="200"/>
+                                  </p:stCondLst>
+                                  <p:childTnLst>
+                                    <p:set>
+                                      <p:cBhvr>
+                                        <p:cTn id="12" dur="1" fill="hold">
+                                          <p:stCondLst>
+                                            <p:cond delay="0"/>
+                                          </p:stCondLst>
+                                        </p:cTn>
+                                        <p:tgtEl>
+                                          <p:spTgt spid="4"/>
+                                        </p:tgtEl>
+                                        <p:attrNameLst>
+                                          <p:attrName>style.visibility</p:attrName>
+                                        </p:attrNameLst>
+                                      </p:cBhvr>
+                                      <p:to>
+                                        <p:strVal val="visible"/>
+                                      </p:to>
+                                    </p:set>
+                                    <p:animEffect transition="in" filter="fade">
+                                      <p:cBhvr>
+                                        <p:cTn id="13" dur="600"/>
+                                        <p:tgtEl>
+                                          <p:spTgt spid="4"/>
+                                        </p:tgtEl>
+                                      </p:cBhvr>
+                                    </p:animEffect>
+                                    <p:anim calcmode="lin" valueType="num">
+                                      <p:cBhvr>
+                                        <p:cTn id="14" dur="600" decel="100000" fill="hold"/>
+                                        <p:tgtEl>
+                                          <p:spTgt spid="4"/>
+                                        </p:tgtEl>
+                                        <p:attrNameLst>
+                                          <p:attrName>ppt_x</p:attrName>
+                                        </p:attrNameLst>
+                                      </p:cBhvr>
+                                      <p:tavLst>
+                                        <p:tav tm="0">
+                                          <p:val>
+                                            <p:strVal val="#ppt_x"/>
+                                          </p:val>
+                                        </p:tav>
+                                        <p:tav tm="100000">
+                                          <p:val>
+                                            <p:strVal val="#ppt_x"/>
+                                          </p:val>
+                                        </p:tav>
+                                      </p:tavLst>
+                                    </p:anim>
+                                    <p:anim calcmode="lin" valueType="num">
+                                      <p:cBhvr>
+                                        <p:cTn id="15" dur="600" decel="100000" fill="hold"/>
+                                        <p:tgtEl>
+                                          <p:spTgt spid="4"/>
+                                        </p:tgtEl>
+                                        <p:attrNameLst>
+                                          <p:attrName>ppt_y</p:attrName>
+                                        </p:attrNameLst>
+                                      </p:cBhvr>
+                                      <p:tavLst>
+                                        <p:tav tm="0">
+                                          <p:val>
+                                            <p:strVal val="#ppt_y+.08"/>
+                                          </p:val>
+                                        </p:tav>
+                                        <p:tav tm="100000">
+                                          <p:val>
+                                            <p:strVal val="#ppt_y"/>
+                                          </p:val>
+                                        </p:tav>
+                                      </p:tavLst>
+                                    </p:anim>
+                                  </p:childTnLst>
+                                </p:cTn>
+                              </p:par>
+                              <p:par>
+                                <p:cTn id="21" presetID="42" presetClass="entr" presetSubtype="0" fill="hold" grpId="0" nodeType="withEffect">
+                                  <p:stCondLst>
+                                    <p:cond delay="200"/>
+                                  </p:stCondLst>
+                                  <p:childTnLst>
+                                    <p:set>
+                                      <p:cBhvr>
+                                        <p:cTn id="17" dur="1" fill="hold">
+                                          <p:stCondLst>
+                                            <p:cond delay="0"/>
+                                          </p:stCondLst>
+                                        </p:cTn>
+                                        <p:tgtEl>
+                                          <p:spTgt spid="5"/>
+                                        </p:tgtEl>
+                                        <p:attrNameLst>
+                                          <p:attrName>style.visibility</p:attrName>
+                                        </p:attrNameLst>
+                                      </p:cBhvr>
+                                      <p:to>
+                                        <p:strVal val="visible"/>
+                                      </p:to>
+                                    </p:set>
+                                    <p:animEffect transition="in" filter="fade">
+                                      <p:cBhvr>
+                                        <p:cTn id="18" dur="600"/>
+                                        <p:tgtEl>
+                                          <p:spTgt spid="5"/>
+                                        </p:tgtEl>
+                                      </p:cBhvr>
+                                    </p:animEffect>
+                                    <p:anim calcmode="lin" valueType="num">
+                                      <p:cBhvr>
+                                        <p:cTn id="19" dur="600" decel="100000" fill="hold"/>
+                                        <p:tgtEl>
+                                          <p:spTgt spid="5"/>
+                                        </p:tgtEl>
+                                        <p:attrNameLst>
+                                          <p:attrName>ppt_x</p:attrName>
+                                        </p:attrNameLst>
+                                      </p:cBhvr>
+                                      <p:tavLst>
+                                        <p:tav tm="0">
+                                          <p:val>
+                                            <p:strVal val="#ppt_x"/>
+                                          </p:val>
+                                        </p:tav>
+                                        <p:tav tm="100000">
+                                          <p:val>
+                                            <p:strVal val="#ppt_x"/>
+                                          </p:val>
+                                        </p:tav>
+                                      </p:tavLst>
+                                    </p:anim>
+                                    <p:anim calcmode="lin" valueType="num">
+                                      <p:cBhvr>
+                                        <p:cTn id="20" dur="600" decel="100000" fill="hold"/>
+                                        <p:tgtEl>
+                                          <p:spTgt spid="5"/>
+                                        </p:tgtEl>
+                                        <p:attrNameLst>
+                                          <p:attrName>ppt_y</p:attrName>
+                                        </p:attrNameLst>
+                                      </p:cBhvr>
+                                      <p:tavLst>
+                                        <p:tav tm="0">
+                                          <p:val>
+                                            <p:strVal val="#ppt_y+.08"/>
+                                          </p:val>
+                                        </p:tav>
+                                        <p:tav tm="100000">
+                                          <p:val>
+                                            <p:strVal val="#ppt_y"/>
+                                          </p:val>
+                                        </p:tav>
+                                      </p:tavLst>
+                                    </p:anim>
+                                  </p:childTnLst>
+                                </p:cTn>
+                              </p:par>
+                              <p:par>
+                                <p:cTn id="26" presetID="42" presetClass="entr" presetSubtype="0" fill="hold" grpId="0" nodeType="withEffect">
+                                  <p:stCondLst>
+                                    <p:cond delay="200"/>
+                                  </p:stCondLst>
+                                  <p:childTnLst>
+                                    <p:set>
+                                      <p:cBhvr>
+                                        <p:cTn id="22" dur="1" fill="hold">
+                                          <p:stCondLst>
+                                            <p:cond delay="0"/>
+                                          </p:stCondLst>
+                                        </p:cTn>
+                                        <p:tgtEl>
+                                          <p:spTgt spid="6"/>
+                                        </p:tgtEl>
+                                        <p:attrNameLst>
+                                          <p:attrName>style.visibility</p:attrName>
+                                        </p:attrNameLst>
+                                      </p:cBhvr>
+                                      <p:to>
+                                        <p:strVal val="visible"/>
+                                      </p:to>
+                                    </p:set>
+                                    <p:animEffect transition="in" filter="fade">
+                                      <p:cBhvr>
+                                        <p:cTn id="23" dur="600"/>
+                                        <p:tgtEl>
+                                          <p:spTgt spid="6"/>
+                                        </p:tgtEl>
+                                      </p:cBhvr>
+                                    </p:animEffect>
+                                    <p:anim calcmode="lin" valueType="num">
+                                      <p:cBhvr>
+                                        <p:cTn id="24" dur="600" decel="100000" fill="hold"/>
+                                        <p:tgtEl>
+                                          <p:spTgt spid="6"/>
+                                        </p:tgtEl>
+                                        <p:attrNameLst>
+                                          <p:attrName>ppt_x</p:attrName>
+                                        </p:attrNameLst>
+                                      </p:cBhvr>
+                                      <p:tavLst>
+                                        <p:tav tm="0">
+                                          <p:val>
+                                            <p:strVal val="#ppt_x"/>
+                                          </p:val>
+                                        </p:tav>
+                                        <p:tav tm="100000">
+                                          <p:val>
+                                            <p:strVal val="#ppt_x"/>
+                                          </p:val>
+                                        </p:tav>
+                                      </p:tavLst>
+                                    </p:anim>
+                                    <p:anim calcmode="lin" valueType="num">
+                                      <p:cBhvr>
+                                        <p:cTn id="25" dur="600" decel="100000" fill="hold"/>
+                                        <p:tgtEl>
+                                          <p:spTgt spid="6"/>
+                                        </p:tgtEl>
+                                        <p:attrNameLst>
+                                          <p:attrName>ppt_y</p:attrName>
+                                        </p:attrNameLst>
+                                      </p:cBhvr>
+                                      <p:tavLst>
+                                        <p:tav tm="0">
+                                          <p:val>
+                                            <p:strVal val="#ppt_y+.08"/>
+                                          </p:val>
+                                        </p:tav>
+                                        <p:tav tm="100000">
+                                          <p:val>
+                                            <p:strVal val="#ppt_y"/>
+                                          </p:val>
+                                        </p:tav>
+                                      </p:tavLst>
+                                    </p:anim>
+                                  </p:childTnLst>
+                                </p:cTn>
+                              </p:par>
+                              <p:par>
+                                <p:cTn id="31" presetID="42" presetClass="entr" presetSubtype="0" fill="hold" grpId="0" nodeType="withEffect">
+                                  <p:stCondLst>
+                                    <p:cond delay="200"/>
+                                  </p:stCondLst>
+                                  <p:childTnLst>
+                                    <p:set>
+                                      <p:cBhvr>
+                                        <p:cTn id="27" dur="1" fill="hold">
+                                          <p:stCondLst>
+                                            <p:cond delay="0"/>
+                                          </p:stCondLst>
+                                        </p:cTn>
+                                        <p:tgtEl>
+                                          <p:spTgt spid="7"/>
+                                        </p:tgtEl>
+                                        <p:attrNameLst>
+                                          <p:attrName>style.visibility</p:attrName>
+                                        </p:attrNameLst>
+                                      </p:cBhvr>
+                                      <p:to>
+                                        <p:strVal val="visible"/>
+                                      </p:to>
+                                    </p:set>
+                                    <p:animEffect transition="in" filter="fade">
+                                      <p:cBhvr>
+                                        <p:cTn id="28" dur="600"/>
+                                        <p:tgtEl>
+                                          <p:spTgt spid="7"/>
+                                        </p:tgtEl>
+                                      </p:cBhvr>
+                                    </p:animEffect>
+                                    <p:anim calcmode="lin" valueType="num">
+                                      <p:cBhvr>
+                                        <p:cTn id="29" dur="600" decel="100000" fill="hold"/>
+                                        <p:tgtEl>
+                                          <p:spTgt spid="7"/>
+                                        </p:tgtEl>
+                                        <p:attrNameLst>
+                                          <p:attrName>ppt_x</p:attrName>
+                                        </p:attrNameLst>
+                                      </p:cBhvr>
+                                      <p:tavLst>
+                                        <p:tav tm="0">
+                                          <p:val>
+                                            <p:strVal val="#ppt_x"/>
+                                          </p:val>
+                                        </p:tav>
+                                        <p:tav tm="100000">
+                                          <p:val>
+                                            <p:strVal val="#ppt_x"/>
+                                          </p:val>
+                                        </p:tav>
+                                      </p:tavLst>
+                                    </p:anim>
+                                    <p:anim calcmode="lin" valueType="num">
+                                      <p:cBhvr>
+                                        <p:cTn id="30" dur="600" decel="100000" fill="hold"/>
+                                        <p:tgtEl>
+                                          <p:spTgt spid="7"/>
+                                        </p:tgtEl>
+                                        <p:attrNameLst>
+                                          <p:attrName>ppt_y</p:attrName>
+                                        </p:attrNameLst>
+                                      </p:cBhvr>
+                                      <p:tavLst>
+                                        <p:tav tm="0">
+                                          <p:val>
+                                            <p:strVal val="#ppt_y+.08"/>
+                                          </p:val>
+                                        </p:tav>
+                                        <p:tav tm="100000">
+                                          <p:val>
+                                            <p:strVal val="#ppt_y"/>
+                                          </p:val>
+                                        </p:tav>
+                                      </p:tavLst>
+                                    </p:anim>
+                                  </p:childTnLst>
+                                </p:cTn>
+                              </p:par>
+                              <p:par>
+                                <p:cTn id="36" presetID="42" presetClass="entr" presetSubtype="0" fill="hold" grpId="0" nodeType="withEffect">
+                                  <p:stCondLst>
+                                    <p:cond delay="200"/>
+                                  </p:stCondLst>
+                                  <p:childTnLst>
+                                    <p:set>
+                                      <p:cBhvr>
+                                        <p:cTn id="32" dur="1" fill="hold">
+                                          <p:stCondLst>
+                                            <p:cond delay="0"/>
+                                          </p:stCondLst>
+                                        </p:cTn>
+                                        <p:tgtEl>
+                                          <p:spTgt spid="8"/>
+                                        </p:tgtEl>
+                                        <p:attrNameLst>
+                                          <p:attrName>style.visibility</p:attrName>
+                                        </p:attrNameLst>
+                                      </p:cBhvr>
+                                      <p:to>
+                                        <p:strVal val="visible"/>
+                                      </p:to>
+                                    </p:set>
+                                    <p:animEffect transition="in" filter="fade">
+                                      <p:cBhvr>
+                                        <p:cTn id="33" dur="600"/>
+                                        <p:tgtEl>
+                                          <p:spTgt spid="8"/>
+                                        </p:tgtEl>
+                                      </p:cBhvr>
+                                    </p:animEffect>
+                                    <p:anim calcmode="lin" valueType="num">
+                                      <p:cBhvr>
+                                        <p:cTn id="34" dur="600" decel="100000" fill="hold"/>
+                                        <p:tgtEl>
+                                          <p:spTgt spid="8"/>
+                                        </p:tgtEl>
+                                        <p:attrNameLst>
+                                          <p:attrName>ppt_x</p:attrName>
+                                        </p:attrNameLst>
+                                      </p:cBhvr>
+                                      <p:tavLst>
+                                        <p:tav tm="0">
+                                          <p:val>
+                                            <p:strVal val="#ppt_x"/>
+                                          </p:val>
+                                        </p:tav>
+                                        <p:tav tm="100000">
+                                          <p:val>
+                                            <p:strVal val="#ppt_x"/>
+                                          </p:val>
+                                        </p:tav>
+                                      </p:tavLst>
+                                    </p:anim>
+                                    <p:anim calcmode="lin" valueType="num">
+                                      <p:cBhvr>
+                                        <p:cTn id="35" dur="600" decel="100000" fill="hold"/>
+                                        <p:tgtEl>
+                                          <p:spTgt spid="8"/>
+                                        </p:tgtEl>
+                                        <p:attrNameLst>
+                                          <p:attrName>ppt_y</p:attrName>
+                                        </p:attrNameLst>
+                                      </p:cBhvr>
+                                      <p:tavLst>
+                                        <p:tav tm="0">
+                                          <p:val>
+                                            <p:strVal val="#ppt_y+.08"/>
+                                          </p:val>
+                                        </p:tav>
+                                        <p:tav tm="100000">
+                                          <p:val>
+                                            <p:strVal val="#ppt_y"/>
+                                          </p:val>
+                                        </p:tav>
+                                      </p:tavLst>
+                                    </p:anim>
+                                  </p:childTnLst>
+                                </p:cTn>
+                              </p:par>
+                              <p:par>
+                                <p:cTn id="41" presetID="42" presetClass="entr" presetSubtype="0" fill="hold" grpId="0" nodeType="withEffect">
+                                  <p:stCondLst>
+                                    <p:cond delay="200"/>
+                                  </p:stCondLst>
+                                  <p:childTnLst>
+                                    <p:set>
+                                      <p:cBhvr>
+                                        <p:cTn id="37" dur="1" fill="hold">
+                                          <p:stCondLst>
+                                            <p:cond delay="0"/>
+                                          </p:stCondLst>
+                                        </p:cTn>
+                                        <p:tgtEl>
+                                          <p:spTgt spid="9"/>
+                                        </p:tgtEl>
+                                        <p:attrNameLst>
+                                          <p:attrName>style.visibility</p:attrName>
+                                        </p:attrNameLst>
+                                      </p:cBhvr>
+                                      <p:to>
+                                        <p:strVal val="visible"/>
+                                      </p:to>
+                                    </p:set>
+                                    <p:animEffect transition="in" filter="fade">
+                                      <p:cBhvr>
+                                        <p:cTn id="38" dur="600"/>
+                                        <p:tgtEl>
+                                          <p:spTgt spid="9"/>
+                                        </p:tgtEl>
+                                      </p:cBhvr>
+                                    </p:animEffect>
+                                    <p:anim calcmode="lin" valueType="num">
+                                      <p:cBhvr>
+                                        <p:cTn id="39" dur="600" decel="100000" fill="hold"/>
+                                        <p:tgtEl>
+                                          <p:spTgt spid="9"/>
+                                        </p:tgtEl>
+                                        <p:attrNameLst>
+                                          <p:attrName>ppt_x</p:attrName>
+                                        </p:attrNameLst>
+                                      </p:cBhvr>
+                                      <p:tavLst>
+                                        <p:tav tm="0">
+                                          <p:val>
+                                            <p:strVal val="#ppt_x"/>
+                                          </p:val>
+                                        </p:tav>
+                                        <p:tav tm="100000">
+                                          <p:val>
+                                            <p:strVal val="#ppt_x"/>
+                                          </p:val>
+                                        </p:tav>
+                                      </p:tavLst>
+                                    </p:anim>
+                                    <p:anim calcmode="lin" valueType="num">
+                                      <p:cBhvr>
+                                        <p:cTn id="40" dur="600" decel="100000" fill="hold"/>
+                                        <p:tgtEl>
+                                          <p:spTgt spid="9"/>
+                                        </p:tgtEl>
+                                        <p:attrNameLst>
+                                          <p:attrName>ppt_y</p:attrName>
+                                        </p:attrNameLst>
+                                      </p:cBhvr>
+                                      <p:tavLst>
+                                        <p:tav tm="0">
+                                          <p:val>
+                                            <p:strVal val="#ppt_y+.08"/>
+                                          </p:val>
+                                        </p:tav>
+                                        <p:tav tm="100000">
+                                          <p:val>
+                                            <p:strVal val="#ppt_y"/>
+                                          </p:val>
+                                        </p:tav>
+                                      </p:tavLst>
+                                    </p:anim>
+                                  </p:childTnLst>
+                                </p:cTn>
+                              </p:par>
+                              <p:par>
+                                <p:cTn id="46" presetID="42" presetClass="entr" presetSubtype="0" fill="hold" grpId="0" nodeType="withEffect">
+                                  <p:stCondLst>
+                                    <p:cond delay="400"/>
+                                  </p:stCondLst>
+                                  <p:childTnLst>
+                                    <p:set>
+                                      <p:cBhvr>
+                                        <p:cTn id="42" dur="1" fill="hold">
+                                          <p:stCondLst>
+                                            <p:cond delay="0"/>
+                                          </p:stCondLst>
+                                        </p:cTn>
+                                        <p:tgtEl>
+                                          <p:spTgt spid="10"/>
+                                        </p:tgtEl>
+                                        <p:attrNameLst>
+                                          <p:attrName>style.visibility</p:attrName>
+                                        </p:attrNameLst>
+                                      </p:cBhvr>
+                                      <p:to>
+                                        <p:strVal val="visible"/>
+                                      </p:to>
+                                    </p:set>
+                                    <p:animEffect transition="in" filter="fade">
+                                      <p:cBhvr>
+                                        <p:cTn id="43" dur="600"/>
+                                        <p:tgtEl>
+                                          <p:spTgt spid="10"/>
+                                        </p:tgtEl>
+                                      </p:cBhvr>
+                                    </p:animEffect>
+                                    <p:anim calcmode="lin" valueType="num">
+                                      <p:cBhvr>
+                                        <p:cTn id="44" dur="600" decel="100000" fill="hold"/>
+                                        <p:tgtEl>
+                                          <p:spTgt spid="10"/>
+                                        </p:tgtEl>
+                                        <p:attrNameLst>
+                                          <p:attrName>ppt_x</p:attrName>
+                                        </p:attrNameLst>
+                                      </p:cBhvr>
+                                      <p:tavLst>
+                                        <p:tav tm="0">
+                                          <p:val>
+                                            <p:strVal val="#ppt_x"/>
+                                          </p:val>
+                                        </p:tav>
+                                        <p:tav tm="100000">
+                                          <p:val>
+                                            <p:strVal val="#ppt_x"/>
+                                          </p:val>
+                                        </p:tav>
+                                      </p:tavLst>
+                                    </p:anim>
+                                    <p:anim calcmode="lin" valueType="num">
+                                      <p:cBhvr>
+                                        <p:cTn id="45" dur="600" decel="100000" fill="hold"/>
+                                        <p:tgtEl>
+                                          <p:spTgt spid="10"/>
+                                        </p:tgtEl>
+                                        <p:attrNameLst>
+                                          <p:attrName>ppt_y</p:attrName>
+                                        </p:attrNameLst>
+                                      </p:cBhvr>
+                                      <p:tavLst>
+                                        <p:tav tm="0">
+                                          <p:val>
+                                            <p:strVal val="#ppt_y+.08"/>
+                                          </p:val>
+                                        </p:tav>
+                                        <p:tav tm="100000">
+                                          <p:val>
+                                            <p:strVal val="#ppt_y"/>
+                                          </p:val>
+                                        </p:tav>
+                                      </p:tavLst>
+                                    </p:anim>
+                                  </p:childTnLst>
+                                </p:cTn>
+                              </p:par>
+                              <p:par>
+                                <p:cTn id="51" presetID="42" presetClass="entr" presetSubtype="0" fill="hold" grpId="0" nodeType="withEffect">
+                                  <p:stCondLst>
+                                    <p:cond delay="400"/>
+                                  </p:stCondLst>
+                                  <p:childTnLst>
+                                    <p:set>
+                                      <p:cBhvr>
+                                        <p:cTn id="47" dur="1" fill="hold">
+                                          <p:stCondLst>
+                                            <p:cond delay="0"/>
+                                          </p:stCondLst>
+                                        </p:cTn>
+                                        <p:tgtEl>
+                                          <p:spTgt spid="11"/>
+                                        </p:tgtEl>
+                                        <p:attrNameLst>
+                                          <p:attrName>style.visibility</p:attrName>
+                                        </p:attrNameLst>
+                                      </p:cBhvr>
+                                      <p:to>
+                                        <p:strVal val="visible"/>
+                                      </p:to>
+                                    </p:set>
+                                    <p:animEffect transition="in" filter="fade">
+                                      <p:cBhvr>
+                                        <p:cTn id="48" dur="600"/>
+                                        <p:tgtEl>
+                                          <p:spTgt spid="11"/>
+                                        </p:tgtEl>
+                                      </p:cBhvr>
+                                    </p:animEffect>
+                                    <p:anim calcmode="lin" valueType="num">
+                                      <p:cBhvr>
+                                        <p:cTn id="49" dur="600" decel="100000" fill="hold"/>
+                                        <p:tgtEl>
+                                          <p:spTgt spid="11"/>
+                                        </p:tgtEl>
+                                        <p:attrNameLst>
+                                          <p:attrName>ppt_x</p:attrName>
+                                        </p:attrNameLst>
+                                      </p:cBhvr>
+                                      <p:tavLst>
+                                        <p:tav tm="0">
+                                          <p:val>
+                                            <p:strVal val="#ppt_x"/>
+                                          </p:val>
+                                        </p:tav>
+                                        <p:tav tm="100000">
+                                          <p:val>
+                                            <p:strVal val="#ppt_x"/>
+                                          </p:val>
+                                        </p:tav>
+                                      </p:tavLst>
+                                    </p:anim>
+                                    <p:anim calcmode="lin" valueType="num">
+                                      <p:cBhvr>
+                                        <p:cTn id="50" dur="600" decel="100000" fill="hold"/>
+                                        <p:tgtEl>
+                                          <p:spTgt spid="11"/>
+                                        </p:tgtEl>
+                                        <p:attrNameLst>
+                                          <p:attrName>ppt_y</p:attrName>
+                                        </p:attrNameLst>
+                                      </p:cBhvr>
+                                      <p:tavLst>
+                                        <p:tav tm="0">
+                                          <p:val>
+                                            <p:strVal val="#ppt_y+.08"/>
+                                          </p:val>
+                                        </p:tav>
+                                        <p:tav tm="100000">
+                                          <p:val>
+                                            <p:strVal val="#ppt_y"/>
+                                          </p:val>
+                                        </p:tav>
+                                      </p:tavLst>
+                                    </p:anim>
+                                  </p:childTnLst>
+                                </p:cTn>
+                              </p:par>
+                              <p:par>
+                                <p:cTn id="56" presetID="42" presetClass="entr" presetSubtype="0" fill="hold" grpId="0" nodeType="withEffect">
+                                  <p:stCondLst>
+                                    <p:cond delay="400"/>
+                                  </p:stCondLst>
+                                  <p:childTnLst>
+                                    <p:set>
+                                      <p:cBhvr>
+                                        <p:cTn id="52" dur="1" fill="hold">
+                                          <p:stCondLst>
+                                            <p:cond delay="0"/>
+                                          </p:stCondLst>
+                                        </p:cTn>
+                                        <p:tgtEl>
+                                          <p:spTgt spid="12"/>
+                                        </p:tgtEl>
+                                        <p:attrNameLst>
+                                          <p:attrName>style.visibility</p:attrName>
+                                        </p:attrNameLst>
+                                      </p:cBhvr>
+                                      <p:to>
+                                        <p:strVal val="visible"/>
+                                      </p:to>
+                                    </p:set>
+                                    <p:animEffect transition="in" filter="fade">
+                                      <p:cBhvr>
+                                        <p:cTn id="53" dur="600"/>
+                                        <p:tgtEl>
+                                          <p:spTgt spid="12"/>
+                                        </p:tgtEl>
+                                      </p:cBhvr>
+                                    </p:animEffect>
+                                    <p:anim calcmode="lin" valueType="num">
+                                      <p:cBhvr>
+                                        <p:cTn id="54" dur="600" decel="100000" fill="hold"/>
+                                        <p:tgtEl>
+                                          <p:spTgt spid="12"/>
+                                        </p:tgtEl>
+                                        <p:attrNameLst>
+                                          <p:attrName>ppt_x</p:attrName>
+                                        </p:attrNameLst>
+                                      </p:cBhvr>
+                                      <p:tavLst>
+                                        <p:tav tm="0">
+                                          <p:val>
+                                            <p:strVal val="#ppt_x"/>
+                                          </p:val>
+                                        </p:tav>
+                                        <p:tav tm="100000">
+                                          <p:val>
+                                            <p:strVal val="#ppt_x"/>
+                                          </p:val>
+                                        </p:tav>
+                                      </p:tavLst>
+                                    </p:anim>
+                                    <p:anim calcmode="lin" valueType="num">
+                                      <p:cBhvr>
+                                        <p:cTn id="55" dur="600" decel="100000" fill="hold"/>
+                                        <p:tgtEl>
+                                          <p:spTgt spid="12"/>
+                                        </p:tgtEl>
+                                        <p:attrNameLst>
+                                          <p:attrName>ppt_y</p:attrName>
+                                        </p:attrNameLst>
+                                      </p:cBhvr>
+                                      <p:tavLst>
+                                        <p:tav tm="0">
+                                          <p:val>
+                                            <p:strVal val="#ppt_y+.08"/>
+                                          </p:val>
+                                        </p:tav>
+                                        <p:tav tm="100000">
+                                          <p:val>
+                                            <p:strVal val="#ppt_y"/>
+                                          </p:val>
+                                        </p:tav>
+                                      </p:tavLst>
+                                    </p:anim>
+                                  </p:childTnLst>
+                                </p:cTn>
+                              </p:par>
+                              <p:par>
+                                <p:cTn id="61" presetID="42" presetClass="entr" presetSubtype="0" fill="hold" grpId="0" nodeType="withEffect">
+                                  <p:stCondLst>
+                                    <p:cond delay="400"/>
+                                  </p:stCondLst>
+                                  <p:childTnLst>
+                                    <p:set>
+                                      <p:cBhvr>
+                                        <p:cTn id="57" dur="1" fill="hold">
+                                          <p:stCondLst>
+                                            <p:cond delay="0"/>
+                                          </p:stCondLst>
+                                        </p:cTn>
+                                        <p:tgtEl>
+                                          <p:spTgt spid="13"/>
+                                        </p:tgtEl>
+                                        <p:attrNameLst>
+                                          <p:attrName>style.visibility</p:attrName>
+                                        </p:attrNameLst>
+                                      </p:cBhvr>
+                                      <p:to>
+                                        <p:strVal val="visible"/>
+                                      </p:to>
+                                    </p:set>
+                                    <p:animEffect transition="in" filter="fade">
+                                      <p:cBhvr>
+                                        <p:cTn id="58" dur="600"/>
+                                        <p:tgtEl>
+                                          <p:spTgt spid="13"/>
+                                        </p:tgtEl>
+                                      </p:cBhvr>
+                                    </p:animEffect>
+                                    <p:anim calcmode="lin" valueType="num">
+                                      <p:cBhvr>
+                                        <p:cTn id="59" dur="600" decel="100000" fill="hold"/>
+                                        <p:tgtEl>
+                                          <p:spTgt spid="13"/>
+                                        </p:tgtEl>
+                                        <p:attrNameLst>
+                                          <p:attrName>ppt_x</p:attrName>
+                                        </p:attrNameLst>
+                                      </p:cBhvr>
+                                      <p:tavLst>
+                                        <p:tav tm="0">
+                                          <p:val>
+                                            <p:strVal val="#ppt_x"/>
+                                          </p:val>
+                                        </p:tav>
+                                        <p:tav tm="100000">
+                                          <p:val>
+                                            <p:strVal val="#ppt_x"/>
+                                          </p:val>
+                                        </p:tav>
+                                      </p:tavLst>
+                                    </p:anim>
+                                    <p:anim calcmode="lin" valueType="num">
+                                      <p:cBhvr>
+                                        <p:cTn id="60" dur="600" decel="100000" fill="hold"/>
+                                        <p:tgtEl>
+                                          <p:spTgt spid="13"/>
+                                        </p:tgtEl>
+                                        <p:attrNameLst>
+                                          <p:attrName>ppt_y</p:attrName>
+                                        </p:attrNameLst>
+                                      </p:cBhvr>
+                                      <p:tavLst>
+                                        <p:tav tm="0">
+                                          <p:val>
+                                            <p:strVal val="#ppt_y+.08"/>
+                                          </p:val>
+                                        </p:tav>
+                                        <p:tav tm="100000">
+                                          <p:val>
+                                            <p:strVal val="#ppt_y"/>
+                                          </p:val>
+                                        </p:tav>
+                                      </p:tavLst>
+                                    </p:anim>
+                                  </p:childTnLst>
+                                </p:cTn>
+                              </p:par>
+                              <p:par>
+                                <p:cTn id="66" presetID="42" presetClass="entr" presetSubtype="0" fill="hold" grpId="0" nodeType="withEffect">
+                                  <p:stCondLst>
+                                    <p:cond delay="400"/>
+                                  </p:stCondLst>
+                                  <p:childTnLst>
+                                    <p:set>
+                                      <p:cBhvr>
+                                        <p:cTn id="62" dur="1" fill="hold">
+                                          <p:stCondLst>
+                                            <p:cond delay="0"/>
+                                          </p:stCondLst>
+                                        </p:cTn>
+                                        <p:tgtEl>
+                                          <p:spTgt spid="14"/>
+                                        </p:tgtEl>
+                                        <p:attrNameLst>
+                                          <p:attrName>style.visibility</p:attrName>
+                                        </p:attrNameLst>
+                                      </p:cBhvr>
+                                      <p:to>
+                                        <p:strVal val="visible"/>
+                                      </p:to>
+                                    </p:set>
+                                    <p:animEffect transition="in" filter="fade">
+                                      <p:cBhvr>
+                                        <p:cTn id="63" dur="600"/>
+                                        <p:tgtEl>
+                                          <p:spTgt spid="14"/>
+                                        </p:tgtEl>
+                                      </p:cBhvr>
+                                    </p:animEffect>
+                                    <p:anim calcmode="lin" valueType="num">
+                                      <p:cBhvr>
+                                        <p:cTn id="64" dur="600" decel="100000" fill="hold"/>
+                                        <p:tgtEl>
+                                          <p:spTgt spid="14"/>
+                                        </p:tgtEl>
+                                        <p:attrNameLst>
+                                          <p:attrName>ppt_x</p:attrName>
+                                        </p:attrNameLst>
+                                      </p:cBhvr>
+                                      <p:tavLst>
+                                        <p:tav tm="0">
+                                          <p:val>
+                                            <p:strVal val="#ppt_x"/>
+                                          </p:val>
+                                        </p:tav>
+                                        <p:tav tm="100000">
+                                          <p:val>
+                                            <p:strVal val="#ppt_x"/>
+                                          </p:val>
+                                        </p:tav>
+                                      </p:tavLst>
+                                    </p:anim>
+                                    <p:anim calcmode="lin" valueType="num">
+                                      <p:cBhvr>
+                                        <p:cTn id="65" dur="600" decel="100000" fill="hold"/>
+                                        <p:tgtEl>
+                                          <p:spTgt spid="14"/>
+                                        </p:tgtEl>
+                                        <p:attrNameLst>
+                                          <p:attrName>ppt_y</p:attrName>
+                                        </p:attrNameLst>
+                                      </p:cBhvr>
+                                      <p:tavLst>
+                                        <p:tav tm="0">
+                                          <p:val>
+                                            <p:strVal val="#ppt_y+.08"/>
+                                          </p:val>
+                                        </p:tav>
+                                        <p:tav tm="100000">
+                                          <p:val>
+                                            <p:strVal val="#ppt_y"/>
+                                          </p:val>
+                                        </p:tav>
+                                      </p:tavLst>
+                                    </p:anim>
+                                  </p:childTnLst>
+                                </p:cTn>
+                              </p:par>
+                              <p:par>
+                                <p:cTn id="71" presetID="42" presetClass="entr" presetSubtype="0" fill="hold" grpId="0" nodeType="withEffect">
+                                  <p:stCondLst>
+                                    <p:cond delay="400"/>
+                                  </p:stCondLst>
+                                  <p:childTnLst>
+                                    <p:set>
+                                      <p:cBhvr>
+                                        <p:cTn id="67" dur="1" fill="hold">
+                                          <p:stCondLst>
+                                            <p:cond delay="0"/>
+                                          </p:stCondLst>
+                                        </p:cTn>
+                                        <p:tgtEl>
+                                          <p:spTgt spid="15"/>
+                                        </p:tgtEl>
+                                        <p:attrNameLst>
+                                          <p:attrName>style.visibility</p:attrName>
+                                        </p:attrNameLst>
+                                      </p:cBhvr>
+                                      <p:to>
+                                        <p:strVal val="visible"/>
+                                      </p:to>
+                                    </p:set>
+                                    <p:animEffect transition="in" filter="fade">
+                                      <p:cBhvr>
+                                        <p:cTn id="68" dur="600"/>
+                                        <p:tgtEl>
+                                          <p:spTgt spid="15"/>
+                                        </p:tgtEl>
+                                      </p:cBhvr>
+                                    </p:animEffect>
+                                    <p:anim calcmode="lin" valueType="num">
+                                      <p:cBhvr>
+                                        <p:cTn id="69" dur="600" decel="100000" fill="hold"/>
+                                        <p:tgtEl>
+                                          <p:spTgt spid="15"/>
+                                        </p:tgtEl>
+                                        <p:attrNameLst>
+                                          <p:attrName>ppt_x</p:attrName>
+                                        </p:attrNameLst>
+                                      </p:cBhvr>
+                                      <p:tavLst>
+                                        <p:tav tm="0">
+                                          <p:val>
+                                            <p:strVal val="#ppt_x"/>
+                                          </p:val>
+                                        </p:tav>
+                                        <p:tav tm="100000">
+                                          <p:val>
+                                            <p:strVal val="#ppt_x"/>
+                                          </p:val>
+                                        </p:tav>
+                                      </p:tavLst>
+                                    </p:anim>
+                                    <p:anim calcmode="lin" valueType="num">
+                                      <p:cBhvr>
+                                        <p:cTn id="70" dur="600" decel="100000" fill="hold"/>
+                                        <p:tgtEl>
+                                          <p:spTgt spid="15"/>
+                                        </p:tgtEl>
+                                        <p:attrNameLst>
+                                          <p:attrName>ppt_y</p:attrName>
+                                        </p:attrNameLst>
+                                      </p:cBhvr>
+                                      <p:tavLst>
+                                        <p:tav tm="0">
+                                          <p:val>
+                                            <p:strVal val="#ppt_y+.08"/>
+                                          </p:val>
+                                        </p:tav>
+                                        <p:tav tm="100000">
+                                          <p:val>
+                                            <p:strVal val="#ppt_y"/>
+                                          </p:val>
+                                        </p:tav>
+                                      </p:tavLst>
+                                    </p:anim>
+                                  </p:childTnLst>
+                                </p:cTn>
+                              </p:par>
+                              <p:par>
+                                <p:cTn id="76" presetID="42" presetClass="entr" presetSubtype="0" fill="hold" grpId="0" nodeType="withEffect">
+                                  <p:stCondLst>
+                                    <p:cond delay="400"/>
+                                  </p:stCondLst>
+                                  <p:childTnLst>
+                                    <p:set>
+                                      <p:cBhvr>
+                                        <p:cTn id="72" dur="1" fill="hold">
+                                          <p:stCondLst>
+                                            <p:cond delay="0"/>
+                                          </p:stCondLst>
+                                        </p:cTn>
+                                        <p:tgtEl>
+                                          <p:spTgt spid="16"/>
+                                        </p:tgtEl>
+                                        <p:attrNameLst>
+                                          <p:attrName>style.visibility</p:attrName>
+                                        </p:attrNameLst>
+                                      </p:cBhvr>
+                                      <p:to>
+                                        <p:strVal val="visible"/>
+                                      </p:to>
+                                    </p:set>
+                                    <p:animEffect transition="in" filter="fade">
+                                      <p:cBhvr>
+                                        <p:cTn id="73" dur="600"/>
+                                        <p:tgtEl>
+                                          <p:spTgt spid="16"/>
+                                        </p:tgtEl>
+                                      </p:cBhvr>
+                                    </p:animEffect>
+                                    <p:anim calcmode="lin" valueType="num">
+                                      <p:cBhvr>
+                                        <p:cTn id="74" dur="600" decel="100000" fill="hold"/>
+                                        <p:tgtEl>
+                                          <p:spTgt spid="16"/>
+                                        </p:tgtEl>
+                                        <p:attrNameLst>
+                                          <p:attrName>ppt_x</p:attrName>
+                                        </p:attrNameLst>
+                                      </p:cBhvr>
+                                      <p:tavLst>
+                                        <p:tav tm="0">
+                                          <p:val>
+                                            <p:strVal val="#ppt_x"/>
+                                          </p:val>
+                                        </p:tav>
+                                        <p:tav tm="100000">
+                                          <p:val>
+                                            <p:strVal val="#ppt_x"/>
+                                          </p:val>
+                                        </p:tav>
+                                      </p:tavLst>
+                                    </p:anim>
+                                    <p:anim calcmode="lin" valueType="num">
+                                      <p:cBhvr>
+                                        <p:cTn id="75" dur="600" decel="100000" fill="hold"/>
+                                        <p:tgtEl>
+                                          <p:spTgt spid="16"/>
+                                        </p:tgtEl>
+                                        <p:attrNameLst>
+                                          <p:attrName>ppt_y</p:attrName>
+                                        </p:attrNameLst>
+                                      </p:cBhvr>
+                                      <p:tavLst>
+                                        <p:tav tm="0">
+                                          <p:val>
+                                            <p:strVal val="#ppt_y+.08"/>
+                                          </p:val>
+                                        </p:tav>
+                                        <p:tav tm="100000">
+                                          <p:val>
+                                            <p:strVal val="#ppt_y"/>
+                                          </p:val>
+                                        </p:tav>
+                                      </p:tavLst>
+                                    </p:anim>
+                                  </p:childTnLst>
+                                </p:cTn>
+                              </p:par>
+                              <p:par>
+                                <p:cTn id="81" presetID="42" presetClass="entr" presetSubtype="0" fill="hold" grpId="0" nodeType="withEffect">
+                                  <p:stCondLst>
+                                    <p:cond delay="600"/>
+                                  </p:stCondLst>
+                                  <p:childTnLst>
+                                    <p:set>
+                                      <p:cBhvr>
+                                        <p:cTn id="77" dur="1" fill="hold">
+                                          <p:stCondLst>
+                                            <p:cond delay="0"/>
+                                          </p:stCondLst>
+                                        </p:cTn>
+                                        <p:tgtEl>
+                                          <p:spTgt spid="17"/>
+                                        </p:tgtEl>
+                                        <p:attrNameLst>
+                                          <p:attrName>style.visibility</p:attrName>
+                                        </p:attrNameLst>
+                                      </p:cBhvr>
+                                      <p:to>
+                                        <p:strVal val="visible"/>
+                                      </p:to>
+                                    </p:set>
+                                    <p:animEffect transition="in" filter="fade">
+                                      <p:cBhvr>
+                                        <p:cTn id="78" dur="600"/>
+                                        <p:tgtEl>
+                                          <p:spTgt spid="17"/>
+                                        </p:tgtEl>
+                                      </p:cBhvr>
+                                    </p:animEffect>
+                                    <p:anim calcmode="lin" valueType="num">
+                                      <p:cBhvr>
+                                        <p:cTn id="79" dur="600" decel="100000" fill="hold"/>
+                                        <p:tgtEl>
+                                          <p:spTgt spid="17"/>
+                                        </p:tgtEl>
+                                        <p:attrNameLst>
+                                          <p:attrName>ppt_x</p:attrName>
+                                        </p:attrNameLst>
+                                      </p:cBhvr>
+                                      <p:tavLst>
+                                        <p:tav tm="0">
+                                          <p:val>
+                                            <p:strVal val="#ppt_x"/>
+                                          </p:val>
+                                        </p:tav>
+                                        <p:tav tm="100000">
+                                          <p:val>
+                                            <p:strVal val="#ppt_x"/>
+                                          </p:val>
+                                        </p:tav>
+                                      </p:tavLst>
+                                    </p:anim>
+                                    <p:anim calcmode="lin" valueType="num">
+                                      <p:cBhvr>
+                                        <p:cTn id="80" dur="600" decel="100000" fill="hold"/>
+                                        <p:tgtEl>
+                                          <p:spTgt spid="17"/>
+                                        </p:tgtEl>
+                                        <p:attrNameLst>
+                                          <p:attrName>ppt_y</p:attrName>
+                                        </p:attrNameLst>
+                                      </p:cBhvr>
+                                      <p:tavLst>
+                                        <p:tav tm="0">
+                                          <p:val>
+                                            <p:strVal val="#ppt_y+.08"/>
+                                          </p:val>
+                                        </p:tav>
+                                        <p:tav tm="100000">
+                                          <p:val>
+                                            <p:strVal val="#ppt_y"/>
+                                          </p:val>
+                                        </p:tav>
+                                      </p:tavLst>
+                                    </p:anim>
+                                  </p:childTnLst>
+                                </p:cTn>
+                              </p:par>
+                              <p:par>
+                                <p:cTn id="86" presetID="42" presetClass="entr" presetSubtype="0" fill="hold" grpId="0" nodeType="withEffect">
+                                  <p:stCondLst>
+                                    <p:cond delay="600"/>
+                                  </p:stCondLst>
+                                  <p:childTnLst>
+                                    <p:set>
+                                      <p:cBhvr>
+                                        <p:cTn id="82" dur="1" fill="hold">
+                                          <p:stCondLst>
+                                            <p:cond delay="0"/>
+                                          </p:stCondLst>
+                                        </p:cTn>
+                                        <p:tgtEl>
+                                          <p:spTgt spid="18"/>
+                                        </p:tgtEl>
+                                        <p:attrNameLst>
+                                          <p:attrName>style.visibility</p:attrName>
+                                        </p:attrNameLst>
+                                      </p:cBhvr>
+                                      <p:to>
+                                        <p:strVal val="visible"/>
+                                      </p:to>
+                                    </p:set>
+                                    <p:animEffect transition="in" filter="fade">
+                                      <p:cBhvr>
+                                        <p:cTn id="83" dur="600"/>
+                                        <p:tgtEl>
+                                          <p:spTgt spid="18"/>
+                                        </p:tgtEl>
+                                      </p:cBhvr>
+                                    </p:animEffect>
+                                    <p:anim calcmode="lin" valueType="num">
+                                      <p:cBhvr>
+                                        <p:cTn id="84" dur="600" decel="100000" fill="hold"/>
+                                        <p:tgtEl>
+                                          <p:spTgt spid="18"/>
+                                        </p:tgtEl>
+                                        <p:attrNameLst>
+                                          <p:attrName>ppt_x</p:attrName>
+                                        </p:attrNameLst>
+                                      </p:cBhvr>
+                                      <p:tavLst>
+                                        <p:tav tm="0">
+                                          <p:val>
+                                            <p:strVal val="#ppt_x"/>
+                                          </p:val>
+                                        </p:tav>
+                                        <p:tav tm="100000">
+                                          <p:val>
+                                            <p:strVal val="#ppt_x"/>
+                                          </p:val>
+                                        </p:tav>
+                                      </p:tavLst>
+                                    </p:anim>
+                                    <p:anim calcmode="lin" valueType="num">
+                                      <p:cBhvr>
+                                        <p:cTn id="85" dur="600" decel="100000" fill="hold"/>
+                                        <p:tgtEl>
+                                          <p:spTgt spid="18"/>
+                                        </p:tgtEl>
+                                        <p:attrNameLst>
+                                          <p:attrName>ppt_y</p:attrName>
+                                        </p:attrNameLst>
+                                      </p:cBhvr>
+                                      <p:tavLst>
+                                        <p:tav tm="0">
+                                          <p:val>
+                                            <p:strVal val="#ppt_y+.08"/>
+                                          </p:val>
+                                        </p:tav>
+                                        <p:tav tm="100000">
+                                          <p:val>
+                                            <p:strVal val="#ppt_y"/>
+                                          </p:val>
+                                        </p:tav>
+                                      </p:tavLst>
+                                    </p:anim>
+                                  </p:childTnLst>
+                                </p:cTn>
+                              </p:par>
+                              <p:par>
+                                <p:cTn id="91" presetID="42" presetClass="entr" presetSubtype="0" fill="hold" grpId="0" nodeType="withEffect">
+                                  <p:stCondLst>
+                                    <p:cond delay="600"/>
+                                  </p:stCondLst>
+                                  <p:childTnLst>
+                                    <p:set>
+                                      <p:cBhvr>
+                                        <p:cTn id="87" dur="1" fill="hold">
+                                          <p:stCondLst>
+                                            <p:cond delay="0"/>
+                                          </p:stCondLst>
+                                        </p:cTn>
+                                        <p:tgtEl>
+                                          <p:spTgt spid="19"/>
+                                        </p:tgtEl>
+                                        <p:attrNameLst>
+                                          <p:attrName>style.visibility</p:attrName>
+                                        </p:attrNameLst>
+                                      </p:cBhvr>
+                                      <p:to>
+                                        <p:strVal val="visible"/>
+                                      </p:to>
+                                    </p:set>
+                                    <p:animEffect transition="in" filter="fade">
+                                      <p:cBhvr>
+                                        <p:cTn id="88" dur="600"/>
+                                        <p:tgtEl>
+                                          <p:spTgt spid="19"/>
+                                        </p:tgtEl>
+                                      </p:cBhvr>
+                                    </p:animEffect>
+                                    <p:anim calcmode="lin" valueType="num">
+                                      <p:cBhvr>
+                                        <p:cTn id="89" dur="600" decel="100000" fill="hold"/>
+                                        <p:tgtEl>
+                                          <p:spTgt spid="19"/>
+                                        </p:tgtEl>
+                                        <p:attrNameLst>
+                                          <p:attrName>ppt_x</p:attrName>
+                                        </p:attrNameLst>
+                                      </p:cBhvr>
+                                      <p:tavLst>
+                                        <p:tav tm="0">
+                                          <p:val>
+                                            <p:strVal val="#ppt_x"/>
+                                          </p:val>
+                                        </p:tav>
+                                        <p:tav tm="100000">
+                                          <p:val>
+                                            <p:strVal val="#ppt_x"/>
+                                          </p:val>
+                                        </p:tav>
+                                      </p:tavLst>
+                                    </p:anim>
+                                    <p:anim calcmode="lin" valueType="num">
+                                      <p:cBhvr>
+                                        <p:cTn id="90" dur="600" decel="100000" fill="hold"/>
+                                        <p:tgtEl>
+                                          <p:spTgt spid="19"/>
+                                        </p:tgtEl>
+                                        <p:attrNameLst>
+                                          <p:attrName>ppt_y</p:attrName>
+                                        </p:attrNameLst>
+                                      </p:cBhvr>
+                                      <p:tavLst>
+                                        <p:tav tm="0">
+                                          <p:val>
+                                            <p:strVal val="#ppt_y+.08"/>
+                                          </p:val>
+                                        </p:tav>
+                                        <p:tav tm="100000">
+                                          <p:val>
+                                            <p:strVal val="#ppt_y"/>
+                                          </p:val>
+                                        </p:tav>
+                                      </p:tavLst>
+                                    </p:anim>
+                                  </p:childTnLst>
+                                </p:cTn>
+                              </p:par>
+                              <p:par>
+                                <p:cTn id="96" presetID="42" presetClass="entr" presetSubtype="0" fill="hold" grpId="0" nodeType="withEffect">
+                                  <p:stCondLst>
+                                    <p:cond delay="600"/>
+                                  </p:stCondLst>
+                                  <p:childTnLst>
+                                    <p:set>
+                                      <p:cBhvr>
+                                        <p:cTn id="92" dur="1" fill="hold">
+                                          <p:stCondLst>
+                                            <p:cond delay="0"/>
+                                          </p:stCondLst>
+                                        </p:cTn>
+                                        <p:tgtEl>
+                                          <p:spTgt spid="20"/>
+                                        </p:tgtEl>
+                                        <p:attrNameLst>
+                                          <p:attrName>style.visibility</p:attrName>
+                                        </p:attrNameLst>
+                                      </p:cBhvr>
+                                      <p:to>
+                                        <p:strVal val="visible"/>
+                                      </p:to>
+                                    </p:set>
+                                    <p:animEffect transition="in" filter="fade">
+                                      <p:cBhvr>
+                                        <p:cTn id="93" dur="600"/>
+                                        <p:tgtEl>
+                                          <p:spTgt spid="20"/>
+                                        </p:tgtEl>
+                                      </p:cBhvr>
+                                    </p:animEffect>
+                                    <p:anim calcmode="lin" valueType="num">
+                                      <p:cBhvr>
+                                        <p:cTn id="94" dur="600" decel="100000" fill="hold"/>
+                                        <p:tgtEl>
+                                          <p:spTgt spid="20"/>
+                                        </p:tgtEl>
+                                        <p:attrNameLst>
+                                          <p:attrName>ppt_x</p:attrName>
+                                        </p:attrNameLst>
+                                      </p:cBhvr>
+                                      <p:tavLst>
+                                        <p:tav tm="0">
+                                          <p:val>
+                                            <p:strVal val="#ppt_x"/>
+                                          </p:val>
+                                        </p:tav>
+                                        <p:tav tm="100000">
+                                          <p:val>
+                                            <p:strVal val="#ppt_x"/>
+                                          </p:val>
+                                        </p:tav>
+                                      </p:tavLst>
+                                    </p:anim>
+                                    <p:anim calcmode="lin" valueType="num">
+                                      <p:cBhvr>
+                                        <p:cTn id="95" dur="600" decel="100000" fill="hold"/>
+                                        <p:tgtEl>
+                                          <p:spTgt spid="20"/>
+                                        </p:tgtEl>
+                                        <p:attrNameLst>
+                                          <p:attrName>ppt_y</p:attrName>
+                                        </p:attrNameLst>
+                                      </p:cBhvr>
+                                      <p:tavLst>
+                                        <p:tav tm="0">
+                                          <p:val>
+                                            <p:strVal val="#ppt_y+.08"/>
+                                          </p:val>
+                                        </p:tav>
+                                        <p:tav tm="100000">
+                                          <p:val>
+                                            <p:strVal val="#ppt_y"/>
+                                          </p:val>
+                                        </p:tav>
+                                      </p:tavLst>
+                                    </p:anim>
+                                  </p:childTnLst>
+                                </p:cTn>
+                              </p:par>
+                              <p:par>
+                                <p:cTn id="101" presetID="42" presetClass="entr" presetSubtype="0" fill="hold" grpId="0" nodeType="withEffect">
+                                  <p:stCondLst>
+                                    <p:cond delay="600"/>
+                                  </p:stCondLst>
+                                  <p:childTnLst>
+                                    <p:set>
+                                      <p:cBhvr>
+                                        <p:cTn id="97" dur="1" fill="hold">
+                                          <p:stCondLst>
+                                            <p:cond delay="0"/>
+                                          </p:stCondLst>
+                                        </p:cTn>
+                                        <p:tgtEl>
+                                          <p:spTgt spid="21"/>
+                                        </p:tgtEl>
+                                        <p:attrNameLst>
+                                          <p:attrName>style.visibility</p:attrName>
+                                        </p:attrNameLst>
+                                      </p:cBhvr>
+                                      <p:to>
+                                        <p:strVal val="visible"/>
+                                      </p:to>
+                                    </p:set>
+                                    <p:animEffect transition="in" filter="fade">
+                                      <p:cBhvr>
+                                        <p:cTn id="98" dur="600"/>
+                                        <p:tgtEl>
+                                          <p:spTgt spid="21"/>
+                                        </p:tgtEl>
+                                      </p:cBhvr>
+                                    </p:animEffect>
+                                    <p:anim calcmode="lin" valueType="num">
+                                      <p:cBhvr>
+                                        <p:cTn id="99" dur="600" decel="100000" fill="hold"/>
+                                        <p:tgtEl>
+                                          <p:spTgt spid="21"/>
+                                        </p:tgtEl>
+                                        <p:attrNameLst>
+                                          <p:attrName>ppt_x</p:attrName>
+                                        </p:attrNameLst>
+                                      </p:cBhvr>
+                                      <p:tavLst>
+                                        <p:tav tm="0">
+                                          <p:val>
+                                            <p:strVal val="#ppt_x"/>
+                                          </p:val>
+                                        </p:tav>
+                                        <p:tav tm="100000">
+                                          <p:val>
+                                            <p:strVal val="#ppt_x"/>
+                                          </p:val>
+                                        </p:tav>
+                                      </p:tavLst>
+                                    </p:anim>
+                                    <p:anim calcmode="lin" valueType="num">
+                                      <p:cBhvr>
+                                        <p:cTn id="100" dur="600" decel="100000" fill="hold"/>
+                                        <p:tgtEl>
+                                          <p:spTgt spid="21"/>
+                                        </p:tgtEl>
+                                        <p:attrNameLst>
+                                          <p:attrName>ppt_y</p:attrName>
+                                        </p:attrNameLst>
+                                      </p:cBhvr>
+                                      <p:tavLst>
+                                        <p:tav tm="0">
+                                          <p:val>
+                                            <p:strVal val="#ppt_y+.08"/>
+                                          </p:val>
+                                        </p:tav>
+                                        <p:tav tm="100000">
+                                          <p:val>
+                                            <p:strVal val="#ppt_y"/>
+                                          </p:val>
+                                        </p:tav>
+                                      </p:tavLst>
+                                    </p:anim>
+                                  </p:childTnLst>
+                                </p:cTn>
+                              </p:par>
+                              <p:par>
+                                <p:cTn id="106" presetID="42" presetClass="entr" presetSubtype="0" fill="hold" grpId="0" nodeType="withEffect">
+                                  <p:stCondLst>
+                                    <p:cond delay="600"/>
+                                  </p:stCondLst>
+                                  <p:childTnLst>
+                                    <p:set>
+                                      <p:cBhvr>
+                                        <p:cTn id="102" dur="1" fill="hold">
+                                          <p:stCondLst>
+                                            <p:cond delay="0"/>
+                                          </p:stCondLst>
+                                        </p:cTn>
+                                        <p:tgtEl>
+                                          <p:spTgt spid="22"/>
+                                        </p:tgtEl>
+                                        <p:attrNameLst>
+                                          <p:attrName>style.visibility</p:attrName>
+                                        </p:attrNameLst>
+                                      </p:cBhvr>
+                                      <p:to>
+                                        <p:strVal val="visible"/>
+                                      </p:to>
+                                    </p:set>
+                                    <p:animEffect transition="in" filter="fade">
+                                      <p:cBhvr>
+                                        <p:cTn id="103" dur="600"/>
+                                        <p:tgtEl>
+                                          <p:spTgt spid="22"/>
+                                        </p:tgtEl>
+                                      </p:cBhvr>
+                                    </p:animEffect>
+                                    <p:anim calcmode="lin" valueType="num">
+                                      <p:cBhvr>
+                                        <p:cTn id="104" dur="600" decel="100000" fill="hold"/>
+                                        <p:tgtEl>
+                                          <p:spTgt spid="22"/>
+                                        </p:tgtEl>
+                                        <p:attrNameLst>
+                                          <p:attrName>ppt_x</p:attrName>
+                                        </p:attrNameLst>
+                                      </p:cBhvr>
+                                      <p:tavLst>
+                                        <p:tav tm="0">
+                                          <p:val>
+                                            <p:strVal val="#ppt_x"/>
+                                          </p:val>
+                                        </p:tav>
+                                        <p:tav tm="100000">
+                                          <p:val>
+                                            <p:strVal val="#ppt_x"/>
+                                          </p:val>
+                                        </p:tav>
+                                      </p:tavLst>
+                                    </p:anim>
+                                    <p:anim calcmode="lin" valueType="num">
+                                      <p:cBhvr>
+                                        <p:cTn id="105" dur="600" decel="100000" fill="hold"/>
+                                        <p:tgtEl>
+                                          <p:spTgt spid="22"/>
+                                        </p:tgtEl>
+                                        <p:attrNameLst>
+                                          <p:attrName>ppt_y</p:attrName>
+                                        </p:attrNameLst>
+                                      </p:cBhvr>
+                                      <p:tavLst>
+                                        <p:tav tm="0">
+                                          <p:val>
+                                            <p:strVal val="#ppt_y+.08"/>
+                                          </p:val>
+                                        </p:tav>
+                                        <p:tav tm="100000">
+                                          <p:val>
+                                            <p:strVal val="#ppt_y"/>
+                                          </p:val>
+                                        </p:tav>
+                                      </p:tavLst>
+                                    </p:anim>
+                                  </p:childTnLst>
+                                </p:cTn>
+                              </p:par>
+                              <p:par>
+                                <p:cTn id="111" presetID="42" presetClass="entr" presetSubtype="0" fill="hold" grpId="0" nodeType="withEffect">
+                                  <p:stCondLst>
+                                    <p:cond delay="600"/>
+                                  </p:stCondLst>
+                                  <p:childTnLst>
+                                    <p:set>
+                                      <p:cBhvr>
+                                        <p:cTn id="107" dur="1" fill="hold">
+                                          <p:stCondLst>
+                                            <p:cond delay="0"/>
+                                          </p:stCondLst>
+                                        </p:cTn>
+                                        <p:tgtEl>
+                                          <p:spTgt spid="23"/>
+                                        </p:tgtEl>
+                                        <p:attrNameLst>
+                                          <p:attrName>style.visibility</p:attrName>
+                                        </p:attrNameLst>
+                                      </p:cBhvr>
+                                      <p:to>
+                                        <p:strVal val="visible"/>
+                                      </p:to>
+                                    </p:set>
+                                    <p:animEffect transition="in" filter="fade">
+                                      <p:cBhvr>
+                                        <p:cTn id="108" dur="600"/>
+                                        <p:tgtEl>
+                                          <p:spTgt spid="23"/>
+                                        </p:tgtEl>
+                                      </p:cBhvr>
+                                    </p:animEffect>
+                                    <p:anim calcmode="lin" valueType="num">
+                                      <p:cBhvr>
+                                        <p:cTn id="109" dur="600" decel="100000" fill="hold"/>
+                                        <p:tgtEl>
+                                          <p:spTgt spid="23"/>
+                                        </p:tgtEl>
+                                        <p:attrNameLst>
+                                          <p:attrName>ppt_x</p:attrName>
+                                        </p:attrNameLst>
+                                      </p:cBhvr>
+                                      <p:tavLst>
+                                        <p:tav tm="0">
+                                          <p:val>
+                                            <p:strVal val="#ppt_x"/>
+                                          </p:val>
+                                        </p:tav>
+                                        <p:tav tm="100000">
+                                          <p:val>
+                                            <p:strVal val="#ppt_x"/>
+                                          </p:val>
+                                        </p:tav>
+                                      </p:tavLst>
+                                    </p:anim>
+                                    <p:anim calcmode="lin" valueType="num">
+                                      <p:cBhvr>
+                                        <p:cTn id="110" dur="600" decel="100000" fill="hold"/>
+                                        <p:tgtEl>
+                                          <p:spTgt spid="23"/>
+                                        </p:tgtEl>
+                                        <p:attrNameLst>
+                                          <p:attrName>ppt_y</p:attrName>
+                                        </p:attrNameLst>
+                                      </p:cBhvr>
+                                      <p:tavLst>
+                                        <p:tav tm="0">
+                                          <p:val>
+                                            <p:strVal val="#ppt_y+.08"/>
+                                          </p:val>
+                                        </p:tav>
+                                        <p:tav tm="100000">
+                                          <p:val>
+                                            <p:strVal val="#ppt_y"/>
+                                          </p:val>
+                                        </p:tav>
+                                      </p:tavLst>
+                                    </p:anim>
+                                  </p:childTnLst>
+                                </p:cTn>
+                              </p:par>
+                              <p:par>
+                                <p:cTn id="116" presetID="42" presetClass="entr" presetSubtype="0" fill="hold" grpId="0" nodeType="withEffect">
+                                  <p:stCondLst>
+                                    <p:cond delay="800"/>
+                                  </p:stCondLst>
+                                  <p:childTnLst>
+                                    <p:set>
+                                      <p:cBhvr>
+                                        <p:cTn id="112" dur="1" fill="hold">
+                                          <p:stCondLst>
+                                            <p:cond delay="0"/>
+                                          </p:stCondLst>
+                                        </p:cTn>
+                                        <p:tgtEl>
+                                          <p:spTgt spid="24"/>
+                                        </p:tgtEl>
+                                        <p:attrNameLst>
+                                          <p:attrName>style.visibility</p:attrName>
+                                        </p:attrNameLst>
+                                      </p:cBhvr>
+                                      <p:to>
+                                        <p:strVal val="visible"/>
+                                      </p:to>
+                                    </p:set>
+                                    <p:animEffect transition="in" filter="fade">
+                                      <p:cBhvr>
+                                        <p:cTn id="113" dur="600"/>
+                                        <p:tgtEl>
+                                          <p:spTgt spid="24"/>
+                                        </p:tgtEl>
+                                      </p:cBhvr>
+                                    </p:animEffect>
+                                    <p:anim calcmode="lin" valueType="num">
+                                      <p:cBhvr>
+                                        <p:cTn id="114" dur="600" decel="100000" fill="hold"/>
+                                        <p:tgtEl>
+                                          <p:spTgt spid="24"/>
+                                        </p:tgtEl>
+                                        <p:attrNameLst>
+                                          <p:attrName>ppt_x</p:attrName>
+                                        </p:attrNameLst>
+                                      </p:cBhvr>
+                                      <p:tavLst>
+                                        <p:tav tm="0">
+                                          <p:val>
+                                            <p:strVal val="#ppt_x"/>
+                                          </p:val>
+                                        </p:tav>
+                                        <p:tav tm="100000">
+                                          <p:val>
+                                            <p:strVal val="#ppt_x"/>
+                                          </p:val>
+                                        </p:tav>
+                                      </p:tavLst>
+                                    </p:anim>
+                                    <p:anim calcmode="lin" valueType="num">
+                                      <p:cBhvr>
+                                        <p:cTn id="115" dur="600" decel="100000" fill="hold"/>
+                                        <p:tgtEl>
+                                          <p:spTgt spid="24"/>
+                                        </p:tgtEl>
+                                        <p:attrNameLst>
+                                          <p:attrName>ppt_y</p:attrName>
+                                        </p:attrNameLst>
+                                      </p:cBhvr>
+                                      <p:tavLst>
+                                        <p:tav tm="0">
+                                          <p:val>
+                                            <p:strVal val="#ppt_y+.08"/>
+                                          </p:val>
+                                        </p:tav>
+                                        <p:tav tm="100000">
+                                          <p:val>
+                                            <p:strVal val="#ppt_y"/>
+                                          </p:val>
+                                        </p:tav>
+                                      </p:tavLst>
+                                    </p:anim>
+                                  </p:childTnLst>
+                                </p:cTn>
+                              </p:par>
+                              <p:par>
+                                <p:cTn id="121" presetID="42" presetClass="entr" presetSubtype="0" fill="hold" grpId="0" nodeType="withEffect">
+                                  <p:stCondLst>
+                                    <p:cond delay="800"/>
+                                  </p:stCondLst>
+                                  <p:childTnLst>
+                                    <p:set>
+                                      <p:cBhvr>
+                                        <p:cTn id="117" dur="1" fill="hold">
+                                          <p:stCondLst>
+                                            <p:cond delay="0"/>
+                                          </p:stCondLst>
+                                        </p:cTn>
+                                        <p:tgtEl>
+                                          <p:spTgt spid="25"/>
+                                        </p:tgtEl>
+                                        <p:attrNameLst>
+                                          <p:attrName>style.visibility</p:attrName>
+                                        </p:attrNameLst>
+                                      </p:cBhvr>
+                                      <p:to>
+                                        <p:strVal val="visible"/>
+                                      </p:to>
+                                    </p:set>
+                                    <p:animEffect transition="in" filter="fade">
+                                      <p:cBhvr>
+                                        <p:cTn id="118" dur="600"/>
+                                        <p:tgtEl>
+                                          <p:spTgt spid="25"/>
+                                        </p:tgtEl>
+                                      </p:cBhvr>
+                                    </p:animEffect>
+                                    <p:anim calcmode="lin" valueType="num">
+                                      <p:cBhvr>
+                                        <p:cTn id="119" dur="600" decel="100000" fill="hold"/>
+                                        <p:tgtEl>
+                                          <p:spTgt spid="25"/>
+                                        </p:tgtEl>
+                                        <p:attrNameLst>
+                                          <p:attrName>ppt_x</p:attrName>
+                                        </p:attrNameLst>
+                                      </p:cBhvr>
+                                      <p:tavLst>
+                                        <p:tav tm="0">
+                                          <p:val>
+                                            <p:strVal val="#ppt_x"/>
+                                          </p:val>
+                                        </p:tav>
+                                        <p:tav tm="100000">
+                                          <p:val>
+                                            <p:strVal val="#ppt_x"/>
+                                          </p:val>
+                                        </p:tav>
+                                      </p:tavLst>
+                                    </p:anim>
+                                    <p:anim calcmode="lin" valueType="num">
+                                      <p:cBhvr>
+                                        <p:cTn id="120" dur="600" decel="100000" fill="hold"/>
+                                        <p:tgtEl>
+                                          <p:spTgt spid="25"/>
+                                        </p:tgtEl>
+                                        <p:attrNameLst>
+                                          <p:attrName>ppt_y</p:attrName>
+                                        </p:attrNameLst>
+                                      </p:cBhvr>
+                                      <p:tavLst>
+                                        <p:tav tm="0">
+                                          <p:val>
+                                            <p:strVal val="#ppt_y+.08"/>
+                                          </p:val>
+                                        </p:tav>
+                                        <p:tav tm="100000">
+                                          <p:val>
+                                            <p:strVal val="#ppt_y"/>
+                                          </p:val>
+                                        </p:tav>
+                                      </p:tavLst>
+                                    </p:anim>
+                                  </p:childTnLst>
+                                </p:cTn>
+                              </p:par>
+                              <p:par>
+                                <p:cTn id="126" presetID="42" presetClass="entr" presetSubtype="0" fill="hold" grpId="0" nodeType="withEffect">
+                                  <p:stCondLst>
+                                    <p:cond delay="800"/>
+                                  </p:stCondLst>
+                                  <p:childTnLst>
+                                    <p:set>
+                                      <p:cBhvr>
+                                        <p:cTn id="122" dur="1" fill="hold">
+                                          <p:stCondLst>
+                                            <p:cond delay="0"/>
+                                          </p:stCondLst>
+                                        </p:cTn>
+                                        <p:tgtEl>
+                                          <p:spTgt spid="26"/>
+                                        </p:tgtEl>
+                                        <p:attrNameLst>
+                                          <p:attrName>style.visibility</p:attrName>
+                                        </p:attrNameLst>
+                                      </p:cBhvr>
+                                      <p:to>
+                                        <p:strVal val="visible"/>
+                                      </p:to>
+                                    </p:set>
+                                    <p:animEffect transition="in" filter="fade">
+                                      <p:cBhvr>
+                                        <p:cTn id="123" dur="600"/>
+                                        <p:tgtEl>
+                                          <p:spTgt spid="26"/>
+                                        </p:tgtEl>
+                                      </p:cBhvr>
+                                    </p:animEffect>
+                                    <p:anim calcmode="lin" valueType="num">
+                                      <p:cBhvr>
+                                        <p:cTn id="124" dur="600" decel="100000" fill="hold"/>
+                                        <p:tgtEl>
+                                          <p:spTgt spid="26"/>
+                                        </p:tgtEl>
+                                        <p:attrNameLst>
+                                          <p:attrName>ppt_x</p:attrName>
+                                        </p:attrNameLst>
+                                      </p:cBhvr>
+                                      <p:tavLst>
+                                        <p:tav tm="0">
+                                          <p:val>
+                                            <p:strVal val="#ppt_x"/>
+                                          </p:val>
+                                        </p:tav>
+                                        <p:tav tm="100000">
+                                          <p:val>
+                                            <p:strVal val="#ppt_x"/>
+                                          </p:val>
+                                        </p:tav>
+                                      </p:tavLst>
+                                    </p:anim>
+                                    <p:anim calcmode="lin" valueType="num">
+                                      <p:cBhvr>
+                                        <p:cTn id="125" dur="600" decel="100000" fill="hold"/>
+                                        <p:tgtEl>
+                                          <p:spTgt spid="26"/>
+                                        </p:tgtEl>
+                                        <p:attrNameLst>
+                                          <p:attrName>ppt_y</p:attrName>
+                                        </p:attrNameLst>
+                                      </p:cBhvr>
+                                      <p:tavLst>
+                                        <p:tav tm="0">
+                                          <p:val>
+                                            <p:strVal val="#ppt_y+.08"/>
+                                          </p:val>
+                                        </p:tav>
+                                        <p:tav tm="100000">
+                                          <p:val>
+                                            <p:strVal val="#ppt_y"/>
+                                          </p:val>
+                                        </p:tav>
+                                      </p:tavLst>
+                                    </p:anim>
+                                  </p:childTnLst>
+                                </p:cTn>
+                              </p:par>
+                              <p:par>
+                                <p:cTn id="131" presetID="42" presetClass="entr" presetSubtype="0" fill="hold" grpId="0" nodeType="withEffect">
+                                  <p:stCondLst>
+                                    <p:cond delay="800"/>
+                                  </p:stCondLst>
+                                  <p:childTnLst>
+                                    <p:set>
+                                      <p:cBhvr>
+                                        <p:cTn id="127" dur="1" fill="hold">
+                                          <p:stCondLst>
+                                            <p:cond delay="0"/>
+                                          </p:stCondLst>
+                                        </p:cTn>
+                                        <p:tgtEl>
+                                          <p:spTgt spid="27"/>
+                                        </p:tgtEl>
+                                        <p:attrNameLst>
+                                          <p:attrName>style.visibility</p:attrName>
+                                        </p:attrNameLst>
+                                      </p:cBhvr>
+                                      <p:to>
+                                        <p:strVal val="visible"/>
+                                      </p:to>
+                                    </p:set>
+                                    <p:animEffect transition="in" filter="fade">
+                                      <p:cBhvr>
+                                        <p:cTn id="128" dur="600"/>
+                                        <p:tgtEl>
+                                          <p:spTgt spid="27"/>
+                                        </p:tgtEl>
+                                      </p:cBhvr>
+                                    </p:animEffect>
+                                    <p:anim calcmode="lin" valueType="num">
+                                      <p:cBhvr>
+                                        <p:cTn id="129" dur="600" decel="100000" fill="hold"/>
+                                        <p:tgtEl>
+                                          <p:spTgt spid="27"/>
+                                        </p:tgtEl>
+                                        <p:attrNameLst>
+                                          <p:attrName>ppt_x</p:attrName>
+                                        </p:attrNameLst>
+                                      </p:cBhvr>
+                                      <p:tavLst>
+                                        <p:tav tm="0">
+                                          <p:val>
+                                            <p:strVal val="#ppt_x"/>
+                                          </p:val>
+                                        </p:tav>
+                                        <p:tav tm="100000">
+                                          <p:val>
+                                            <p:strVal val="#ppt_x"/>
+                                          </p:val>
+                                        </p:tav>
+                                      </p:tavLst>
+                                    </p:anim>
+                                    <p:anim calcmode="lin" valueType="num">
+                                      <p:cBhvr>
+                                        <p:cTn id="130" dur="600" decel="100000" fill="hold"/>
+                                        <p:tgtEl>
+                                          <p:spTgt spid="27"/>
+                                        </p:tgtEl>
+                                        <p:attrNameLst>
+                                          <p:attrName>ppt_y</p:attrName>
+                                        </p:attrNameLst>
+                                      </p:cBhvr>
+                                      <p:tavLst>
+                                        <p:tav tm="0">
+                                          <p:val>
+                                            <p:strVal val="#ppt_y+.08"/>
+                                          </p:val>
+                                        </p:tav>
+                                        <p:tav tm="100000">
+                                          <p:val>
+                                            <p:strVal val="#ppt_y"/>
+                                          </p:val>
+                                        </p:tav>
+                                      </p:tavLst>
+                                    </p:anim>
+                                  </p:childTnLst>
+                                </p:cTn>
+                              </p:par>
+                              <p:par>
+                                <p:cTn id="136" presetID="42" presetClass="entr" presetSubtype="0" fill="hold" grpId="0" nodeType="withEffect">
+                                  <p:stCondLst>
+                                    <p:cond delay="800"/>
+                                  </p:stCondLst>
+                                  <p:childTnLst>
+                                    <p:set>
+                                      <p:cBhvr>
+                                        <p:cTn id="132" dur="1" fill="hold">
+                                          <p:stCondLst>
+                                            <p:cond delay="0"/>
+                                          </p:stCondLst>
+                                        </p:cTn>
+                                        <p:tgtEl>
+                                          <p:spTgt spid="28"/>
+                                        </p:tgtEl>
+                                        <p:attrNameLst>
+                                          <p:attrName>style.visibility</p:attrName>
+                                        </p:attrNameLst>
+                                      </p:cBhvr>
+                                      <p:to>
+                                        <p:strVal val="visible"/>
+                                      </p:to>
+                                    </p:set>
+                                    <p:animEffect transition="in" filter="fade">
+                                      <p:cBhvr>
+                                        <p:cTn id="133" dur="600"/>
+                                        <p:tgtEl>
+                                          <p:spTgt spid="28"/>
+                                        </p:tgtEl>
+                                      </p:cBhvr>
+                                    </p:animEffect>
+                                    <p:anim calcmode="lin" valueType="num">
+                                      <p:cBhvr>
+                                        <p:cTn id="134" dur="600" decel="100000" fill="hold"/>
+                                        <p:tgtEl>
+                                          <p:spTgt spid="28"/>
+                                        </p:tgtEl>
+                                        <p:attrNameLst>
+                                          <p:attrName>ppt_x</p:attrName>
+                                        </p:attrNameLst>
+                                      </p:cBhvr>
+                                      <p:tavLst>
+                                        <p:tav tm="0">
+                                          <p:val>
+                                            <p:strVal val="#ppt_x"/>
+                                          </p:val>
+                                        </p:tav>
+                                        <p:tav tm="100000">
+                                          <p:val>
+                                            <p:strVal val="#ppt_x"/>
+                                          </p:val>
+                                        </p:tav>
+                                      </p:tavLst>
+                                    </p:anim>
+                                    <p:anim calcmode="lin" valueType="num">
+                                      <p:cBhvr>
+                                        <p:cTn id="135" dur="600" decel="100000" fill="hold"/>
+                                        <p:tgtEl>
+                                          <p:spTgt spid="28"/>
+                                        </p:tgtEl>
+                                        <p:attrNameLst>
+                                          <p:attrName>ppt_y</p:attrName>
+                                        </p:attrNameLst>
+                                      </p:cBhvr>
+                                      <p:tavLst>
+                                        <p:tav tm="0">
+                                          <p:val>
+                                            <p:strVal val="#ppt_y+.08"/>
+                                          </p:val>
+                                        </p:tav>
+                                        <p:tav tm="100000">
+                                          <p:val>
+                                            <p:strVal val="#ppt_y"/>
+                                          </p:val>
+                                        </p:tav>
+                                      </p:tavLst>
+                                    </p:anim>
+                                  </p:childTnLst>
+                                </p:cTn>
+                              </p:par>
+                              <p:par>
+                                <p:cTn id="141" presetID="42" presetClass="entr" presetSubtype="0" fill="hold" grpId="0" nodeType="withEffect">
+                                  <p:stCondLst>
+                                    <p:cond delay="800"/>
+                                  </p:stCondLst>
+                                  <p:childTnLst>
+                                    <p:set>
+                                      <p:cBhvr>
+                                        <p:cTn id="137" dur="1" fill="hold">
+                                          <p:stCondLst>
+                                            <p:cond delay="0"/>
+                                          </p:stCondLst>
+                                        </p:cTn>
+                                        <p:tgtEl>
+                                          <p:spTgt spid="29"/>
+                                        </p:tgtEl>
+                                        <p:attrNameLst>
+                                          <p:attrName>style.visibility</p:attrName>
+                                        </p:attrNameLst>
+                                      </p:cBhvr>
+                                      <p:to>
+                                        <p:strVal val="visible"/>
+                                      </p:to>
+                                    </p:set>
+                                    <p:animEffect transition="in" filter="fade">
+                                      <p:cBhvr>
+                                        <p:cTn id="138" dur="600"/>
+                                        <p:tgtEl>
+                                          <p:spTgt spid="29"/>
+                                        </p:tgtEl>
+                                      </p:cBhvr>
+                                    </p:animEffect>
+                                    <p:anim calcmode="lin" valueType="num">
+                                      <p:cBhvr>
+                                        <p:cTn id="139" dur="600" decel="100000" fill="hold"/>
+                                        <p:tgtEl>
+                                          <p:spTgt spid="29"/>
+                                        </p:tgtEl>
+                                        <p:attrNameLst>
+                                          <p:attrName>ppt_x</p:attrName>
+                                        </p:attrNameLst>
+                                      </p:cBhvr>
+                                      <p:tavLst>
+                                        <p:tav tm="0">
+                                          <p:val>
+                                            <p:strVal val="#ppt_x"/>
+                                          </p:val>
+                                        </p:tav>
+                                        <p:tav tm="100000">
+                                          <p:val>
+                                            <p:strVal val="#ppt_x"/>
+                                          </p:val>
+                                        </p:tav>
+                                      </p:tavLst>
+                                    </p:anim>
+                                    <p:anim calcmode="lin" valueType="num">
+                                      <p:cBhvr>
+                                        <p:cTn id="140" dur="600" decel="100000" fill="hold"/>
+                                        <p:tgtEl>
+                                          <p:spTgt spid="29"/>
+                                        </p:tgtEl>
+                                        <p:attrNameLst>
+                                          <p:attrName>ppt_y</p:attrName>
+                                        </p:attrNameLst>
+                                      </p:cBhvr>
+                                      <p:tavLst>
+                                        <p:tav tm="0">
+                                          <p:val>
+                                            <p:strVal val="#ppt_y+.08"/>
+                                          </p:val>
+                                        </p:tav>
+                                        <p:tav tm="100000">
+                                          <p:val>
+                                            <p:strVal val="#ppt_y"/>
+                                          </p:val>
+                                        </p:tav>
+                                      </p:tavLst>
+                                    </p:anim>
+                                  </p:childTnLst>
+                                </p:cTn>
+                              </p:par>
+                              <p:par>
+                                <p:cTn id="146" presetID="42" presetClass="entr" presetSubtype="0" fill="hold" grpId="0" nodeType="withEffect">
+                                  <p:stCondLst>
+                                    <p:cond delay="800"/>
+                                  </p:stCondLst>
+                                  <p:childTnLst>
+                                    <p:set>
+                                      <p:cBhvr>
+                                        <p:cTn id="142" dur="1" fill="hold">
+                                          <p:stCondLst>
+                                            <p:cond delay="0"/>
+                                          </p:stCondLst>
+                                        </p:cTn>
+                                        <p:tgtEl>
+                                          <p:spTgt spid="30"/>
+                                        </p:tgtEl>
+                                        <p:attrNameLst>
+                                          <p:attrName>style.visibility</p:attrName>
+                                        </p:attrNameLst>
+                                      </p:cBhvr>
+                                      <p:to>
+                                        <p:strVal val="visible"/>
+                                      </p:to>
+                                    </p:set>
+                                    <p:animEffect transition="in" filter="fade">
+                                      <p:cBhvr>
+                                        <p:cTn id="143" dur="600"/>
+                                        <p:tgtEl>
+                                          <p:spTgt spid="30"/>
+                                        </p:tgtEl>
+                                      </p:cBhvr>
+                                    </p:animEffect>
+                                    <p:anim calcmode="lin" valueType="num">
+                                      <p:cBhvr>
+                                        <p:cTn id="144" dur="600" decel="100000" fill="hold"/>
+                                        <p:tgtEl>
+                                          <p:spTgt spid="30"/>
+                                        </p:tgtEl>
+                                        <p:attrNameLst>
+                                          <p:attrName>ppt_x</p:attrName>
+                                        </p:attrNameLst>
+                                      </p:cBhvr>
+                                      <p:tavLst>
+                                        <p:tav tm="0">
+                                          <p:val>
+                                            <p:strVal val="#ppt_x"/>
+                                          </p:val>
+                                        </p:tav>
+                                        <p:tav tm="100000">
+                                          <p:val>
+                                            <p:strVal val="#ppt_x"/>
+                                          </p:val>
+                                        </p:tav>
+                                      </p:tavLst>
+                                    </p:anim>
+                                    <p:anim calcmode="lin" valueType="num">
+                                      <p:cBhvr>
+                                        <p:cTn id="145" dur="600" decel="100000" fill="hold"/>
+                                        <p:tgtEl>
+                                          <p:spTgt spid="30"/>
+                                        </p:tgtEl>
+                                        <p:attrNameLst>
+                                          <p:attrName>ppt_y</p:attrName>
+                                        </p:attrNameLst>
+                                      </p:cBhvr>
+                                      <p:tavLst>
+                                        <p:tav tm="0">
+                                          <p:val>
+                                            <p:strVal val="#ppt_y+.08"/>
+                                          </p:val>
+                                        </p:tav>
+                                        <p:tav tm="100000">
+                                          <p:val>
+                                            <p:strVal val="#ppt_y"/>
+                                          </p:val>
+                                        </p:tav>
+                                      </p:tavLst>
+                                    </p:anim>
+                                  </p:childTnLst>
+                                </p:cTn>
+                              </p:par>
+                              <p:par>
+                                <p:cTn id="151" presetID="42" presetClass="entr" presetSubtype="0" fill="hold" grpId="0" nodeType="withEffect">
+                                  <p:stCondLst>
+                                    <p:cond delay="1000"/>
+                                  </p:stCondLst>
+                                  <p:childTnLst>
+                                    <p:set>
+                                      <p:cBhvr>
+                                        <p:cTn id="147" dur="1" fill="hold">
+                                          <p:stCondLst>
+                                            <p:cond delay="0"/>
+                                          </p:stCondLst>
+                                        </p:cTn>
+                                        <p:tgtEl>
+                                          <p:spTgt spid="31"/>
+                                        </p:tgtEl>
+                                        <p:attrNameLst>
+                                          <p:attrName>style.visibility</p:attrName>
+                                        </p:attrNameLst>
+                                      </p:cBhvr>
+                                      <p:to>
+                                        <p:strVal val="visible"/>
+                                      </p:to>
+                                    </p:set>
+                                    <p:animEffect transition="in" filter="fade">
+                                      <p:cBhvr>
+                                        <p:cTn id="148" dur="600"/>
+                                        <p:tgtEl>
+                                          <p:spTgt spid="31"/>
+                                        </p:tgtEl>
+                                      </p:cBhvr>
+                                    </p:animEffect>
+                                    <p:anim calcmode="lin" valueType="num">
+                                      <p:cBhvr>
+                                        <p:cTn id="149" dur="600" decel="100000" fill="hold"/>
+                                        <p:tgtEl>
+                                          <p:spTgt spid="31"/>
+                                        </p:tgtEl>
+                                        <p:attrNameLst>
+                                          <p:attrName>ppt_x</p:attrName>
+                                        </p:attrNameLst>
+                                      </p:cBhvr>
+                                      <p:tavLst>
+                                        <p:tav tm="0">
+                                          <p:val>
+                                            <p:strVal val="#ppt_x"/>
+                                          </p:val>
+                                        </p:tav>
+                                        <p:tav tm="100000">
+                                          <p:val>
+                                            <p:strVal val="#ppt_x"/>
+                                          </p:val>
+                                        </p:tav>
+                                      </p:tavLst>
+                                    </p:anim>
+                                    <p:anim calcmode="lin" valueType="num">
+                                      <p:cBhvr>
+                                        <p:cTn id="150" dur="600" decel="100000" fill="hold"/>
+                                        <p:tgtEl>
+                                          <p:spTgt spid="31"/>
+                                        </p:tgtEl>
+                                        <p:attrNameLst>
+                                          <p:attrName>ppt_y</p:attrName>
+                                        </p:attrNameLst>
+                                      </p:cBhvr>
+                                      <p:tavLst>
+                                        <p:tav tm="0">
+                                          <p:val>
+                                            <p:strVal val="#ppt_y+.08"/>
+                                          </p:val>
+                                        </p:tav>
+                                        <p:tav tm="100000">
+                                          <p:val>
+                                            <p:strVal val="#ppt_y"/>
+                                          </p:val>
+                                        </p:tav>
+                                      </p:tavLst>
+                                    </p:anim>
+                                  </p:childTnLst>
+                                </p:cTn>
+                              </p:par>
+                              <p:par>
+                                <p:cTn id="156" presetID="42" presetClass="entr" presetSubtype="0" fill="hold" grpId="0" nodeType="withEffect">
+                                  <p:stCondLst>
+                                    <p:cond delay="1000"/>
+                                  </p:stCondLst>
+                                  <p:childTnLst>
+                                    <p:set>
+                                      <p:cBhvr>
+                                        <p:cTn id="152" dur="1" fill="hold">
+                                          <p:stCondLst>
+                                            <p:cond delay="0"/>
+                                          </p:stCondLst>
+                                        </p:cTn>
+                                        <p:tgtEl>
+                                          <p:spTgt spid="32"/>
+                                        </p:tgtEl>
+                                        <p:attrNameLst>
+                                          <p:attrName>style.visibility</p:attrName>
+                                        </p:attrNameLst>
+                                      </p:cBhvr>
+                                      <p:to>
+                                        <p:strVal val="visible"/>
+                                      </p:to>
+                                    </p:set>
+                                    <p:animEffect transition="in" filter="fade">
+                                      <p:cBhvr>
+                                        <p:cTn id="153" dur="600"/>
+                                        <p:tgtEl>
+                                          <p:spTgt spid="32"/>
+                                        </p:tgtEl>
+                                      </p:cBhvr>
+                                    </p:animEffect>
+                                    <p:anim calcmode="lin" valueType="num">
+                                      <p:cBhvr>
+                                        <p:cTn id="154" dur="600" decel="100000" fill="hold"/>
+                                        <p:tgtEl>
+                                          <p:spTgt spid="32"/>
+                                        </p:tgtEl>
+                                        <p:attrNameLst>
+                                          <p:attrName>ppt_x</p:attrName>
+                                        </p:attrNameLst>
+                                      </p:cBhvr>
+                                      <p:tavLst>
+                                        <p:tav tm="0">
+                                          <p:val>
+                                            <p:strVal val="#ppt_x"/>
+                                          </p:val>
+                                        </p:tav>
+                                        <p:tav tm="100000">
+                                          <p:val>
+                                            <p:strVal val="#ppt_x"/>
+                                          </p:val>
+                                        </p:tav>
+                                      </p:tavLst>
+                                    </p:anim>
+                                    <p:anim calcmode="lin" valueType="num">
+                                      <p:cBhvr>
+                                        <p:cTn id="155" dur="600" decel="100000" fill="hold"/>
+                                        <p:tgtEl>
+                                          <p:spTgt spid="32"/>
+                                        </p:tgtEl>
+                                        <p:attrNameLst>
+                                          <p:attrName>ppt_y</p:attrName>
+                                        </p:attrNameLst>
+                                      </p:cBhvr>
+                                      <p:tavLst>
+                                        <p:tav tm="0">
+                                          <p:val>
+                                            <p:strVal val="#ppt_y+.08"/>
+                                          </p:val>
+                                        </p:tav>
+                                        <p:tav tm="100000">
+                                          <p:val>
+                                            <p:strVal val="#ppt_y"/>
+                                          </p:val>
+                                        </p:tav>
+                                      </p:tavLst>
+                                    </p:anim>
+                                  </p:childTnLst>
+                                </p:cTn>
+                              </p:par>
+                              <p:par>
+                                <p:cTn id="161" presetID="42" presetClass="entr" presetSubtype="0" fill="hold" grpId="0" nodeType="withEffect">
+                                  <p:stCondLst>
+                                    <p:cond delay="1000"/>
+                                  </p:stCondLst>
+                                  <p:childTnLst>
+                                    <p:set>
+                                      <p:cBhvr>
+                                        <p:cTn id="157" dur="1" fill="hold">
+                                          <p:stCondLst>
+                                            <p:cond delay="0"/>
+                                          </p:stCondLst>
+                                        </p:cTn>
+                                        <p:tgtEl>
+                                          <p:spTgt spid="33"/>
+                                        </p:tgtEl>
+                                        <p:attrNameLst>
+                                          <p:attrName>style.visibility</p:attrName>
+                                        </p:attrNameLst>
+                                      </p:cBhvr>
+                                      <p:to>
+                                        <p:strVal val="visible"/>
+                                      </p:to>
+                                    </p:set>
+                                    <p:animEffect transition="in" filter="fade">
+                                      <p:cBhvr>
+                                        <p:cTn id="158" dur="600"/>
+                                        <p:tgtEl>
+                                          <p:spTgt spid="33"/>
+                                        </p:tgtEl>
+                                      </p:cBhvr>
+                                    </p:animEffect>
+                                    <p:anim calcmode="lin" valueType="num">
+                                      <p:cBhvr>
+                                        <p:cTn id="159" dur="600" decel="100000" fill="hold"/>
+                                        <p:tgtEl>
+                                          <p:spTgt spid="33"/>
+                                        </p:tgtEl>
+                                        <p:attrNameLst>
+                                          <p:attrName>ppt_x</p:attrName>
+                                        </p:attrNameLst>
+                                      </p:cBhvr>
+                                      <p:tavLst>
+                                        <p:tav tm="0">
+                                          <p:val>
+                                            <p:strVal val="#ppt_x"/>
+                                          </p:val>
+                                        </p:tav>
+                                        <p:tav tm="100000">
+                                          <p:val>
+                                            <p:strVal val="#ppt_x"/>
+                                          </p:val>
+                                        </p:tav>
+                                      </p:tavLst>
+                                    </p:anim>
+                                    <p:anim calcmode="lin" valueType="num">
+                                      <p:cBhvr>
+                                        <p:cTn id="160" dur="600" decel="100000" fill="hold"/>
+                                        <p:tgtEl>
+                                          <p:spTgt spid="33"/>
+                                        </p:tgtEl>
+                                        <p:attrNameLst>
+                                          <p:attrName>ppt_y</p:attrName>
+                                        </p:attrNameLst>
+                                      </p:cBhvr>
+                                      <p:tavLst>
+                                        <p:tav tm="0">
+                                          <p:val>
+                                            <p:strVal val="#ppt_y+.08"/>
+                                          </p:val>
+                                        </p:tav>
+                                        <p:tav tm="100000">
+                                          <p:val>
+                                            <p:strVal val="#ppt_y"/>
+                                          </p:val>
+                                        </p:tav>
+                                      </p:tavLst>
+                                    </p:anim>
+                                  </p:childTnLst>
+                                </p:cTn>
+                              </p:par>
+                              <p:par>
+                                <p:cTn id="166" presetID="42" presetClass="entr" presetSubtype="0" fill="hold" grpId="0" nodeType="withEffect">
+                                  <p:stCondLst>
+                                    <p:cond delay="1000"/>
+                                  </p:stCondLst>
+                                  <p:childTnLst>
+                                    <p:set>
+                                      <p:cBhvr>
+                                        <p:cTn id="162" dur="1" fill="hold">
+                                          <p:stCondLst>
+                                            <p:cond delay="0"/>
+                                          </p:stCondLst>
+                                        </p:cTn>
+                                        <p:tgtEl>
+                                          <p:spTgt spid="34"/>
+                                        </p:tgtEl>
+                                        <p:attrNameLst>
+                                          <p:attrName>style.visibility</p:attrName>
+                                        </p:attrNameLst>
+                                      </p:cBhvr>
+                                      <p:to>
+                                        <p:strVal val="visible"/>
+                                      </p:to>
+                                    </p:set>
+                                    <p:animEffect transition="in" filter="fade">
+                                      <p:cBhvr>
+                                        <p:cTn id="163" dur="600"/>
+                                        <p:tgtEl>
+                                          <p:spTgt spid="34"/>
+                                        </p:tgtEl>
+                                      </p:cBhvr>
+                                    </p:animEffect>
+                                    <p:anim calcmode="lin" valueType="num">
+                                      <p:cBhvr>
+                                        <p:cTn id="164" dur="600" decel="100000" fill="hold"/>
+                                        <p:tgtEl>
+                                          <p:spTgt spid="34"/>
+                                        </p:tgtEl>
+                                        <p:attrNameLst>
+                                          <p:attrName>ppt_x</p:attrName>
+                                        </p:attrNameLst>
+                                      </p:cBhvr>
+                                      <p:tavLst>
+                                        <p:tav tm="0">
+                                          <p:val>
+                                            <p:strVal val="#ppt_x"/>
+                                          </p:val>
+                                        </p:tav>
+                                        <p:tav tm="100000">
+                                          <p:val>
+                                            <p:strVal val="#ppt_x"/>
+                                          </p:val>
+                                        </p:tav>
+                                      </p:tavLst>
+                                    </p:anim>
+                                    <p:anim calcmode="lin" valueType="num">
+                                      <p:cBhvr>
+                                        <p:cTn id="165" dur="600" decel="100000" fill="hold"/>
+                                        <p:tgtEl>
+                                          <p:spTgt spid="34"/>
+                                        </p:tgtEl>
+                                        <p:attrNameLst>
+                                          <p:attrName>ppt_y</p:attrName>
+                                        </p:attrNameLst>
+                                      </p:cBhvr>
+                                      <p:tavLst>
+                                        <p:tav tm="0">
+                                          <p:val>
+                                            <p:strVal val="#ppt_y+.08"/>
+                                          </p:val>
+                                        </p:tav>
+                                        <p:tav tm="100000">
+                                          <p:val>
+                                            <p:strVal val="#ppt_y"/>
+                                          </p:val>
+                                        </p:tav>
+                                      </p:tavLst>
+                                    </p:anim>
+                                  </p:childTnLst>
+                                </p:cTn>
+                              </p:par>
+                              <p:par>
+                                <p:cTn id="171" presetID="42" presetClass="entr" presetSubtype="0" fill="hold" grpId="0" nodeType="withEffect">
+                                  <p:stCondLst>
+                                    <p:cond delay="1000"/>
+                                  </p:stCondLst>
+                                  <p:childTnLst>
+                                    <p:set>
+                                      <p:cBhvr>
+                                        <p:cTn id="167" dur="1" fill="hold">
+                                          <p:stCondLst>
+                                            <p:cond delay="0"/>
+                                          </p:stCondLst>
+                                        </p:cTn>
+                                        <p:tgtEl>
+                                          <p:spTgt spid="35"/>
+                                        </p:tgtEl>
+                                        <p:attrNameLst>
+                                          <p:attrName>style.visibility</p:attrName>
+                                        </p:attrNameLst>
+                                      </p:cBhvr>
+                                      <p:to>
+                                        <p:strVal val="visible"/>
+                                      </p:to>
+                                    </p:set>
+                                    <p:animEffect transition="in" filter="fade">
+                                      <p:cBhvr>
+                                        <p:cTn id="168" dur="600"/>
+                                        <p:tgtEl>
+                                          <p:spTgt spid="35"/>
+                                        </p:tgtEl>
+                                      </p:cBhvr>
+                                    </p:animEffect>
+                                    <p:anim calcmode="lin" valueType="num">
+                                      <p:cBhvr>
+                                        <p:cTn id="169" dur="600" decel="100000" fill="hold"/>
+                                        <p:tgtEl>
+                                          <p:spTgt spid="35"/>
+                                        </p:tgtEl>
+                                        <p:attrNameLst>
+                                          <p:attrName>ppt_x</p:attrName>
+                                        </p:attrNameLst>
+                                      </p:cBhvr>
+                                      <p:tavLst>
+                                        <p:tav tm="0">
+                                          <p:val>
+                                            <p:strVal val="#ppt_x"/>
+                                          </p:val>
+                                        </p:tav>
+                                        <p:tav tm="100000">
+                                          <p:val>
+                                            <p:strVal val="#ppt_x"/>
+                                          </p:val>
+                                        </p:tav>
+                                      </p:tavLst>
+                                    </p:anim>
+                                    <p:anim calcmode="lin" valueType="num">
+                                      <p:cBhvr>
+                                        <p:cTn id="170" dur="600" decel="100000" fill="hold"/>
+                                        <p:tgtEl>
+                                          <p:spTgt spid="35"/>
+                                        </p:tgtEl>
+                                        <p:attrNameLst>
+                                          <p:attrName>ppt_y</p:attrName>
+                                        </p:attrNameLst>
+                                      </p:cBhvr>
+                                      <p:tavLst>
+                                        <p:tav tm="0">
+                                          <p:val>
+                                            <p:strVal val="#ppt_y+.08"/>
+                                          </p:val>
+                                        </p:tav>
+                                        <p:tav tm="100000">
+                                          <p:val>
+                                            <p:strVal val="#ppt_y"/>
+                                          </p:val>
+                                        </p:tav>
+                                      </p:tavLst>
+                                    </p:anim>
+                                  </p:childTnLst>
+                                </p:cTn>
+                              </p:par>
+                              <p:par>
+                                <p:cTn id="176" presetID="42" presetClass="entr" presetSubtype="0" fill="hold" grpId="0" nodeType="withEffect">
+                                  <p:stCondLst>
+                                    <p:cond delay="1000"/>
+                                  </p:stCondLst>
+                                  <p:childTnLst>
+                                    <p:set>
+                                      <p:cBhvr>
+                                        <p:cTn id="172" dur="1" fill="hold">
+                                          <p:stCondLst>
+                                            <p:cond delay="0"/>
+                                          </p:stCondLst>
+                                        </p:cTn>
+                                        <p:tgtEl>
+                                          <p:spTgt spid="36"/>
+                                        </p:tgtEl>
+                                        <p:attrNameLst>
+                                          <p:attrName>style.visibility</p:attrName>
+                                        </p:attrNameLst>
+                                      </p:cBhvr>
+                                      <p:to>
+                                        <p:strVal val="visible"/>
+                                      </p:to>
+                                    </p:set>
+                                    <p:animEffect transition="in" filter="fade">
+                                      <p:cBhvr>
+                                        <p:cTn id="173" dur="600"/>
+                                        <p:tgtEl>
+                                          <p:spTgt spid="36"/>
+                                        </p:tgtEl>
+                                      </p:cBhvr>
+                                    </p:animEffect>
+                                    <p:anim calcmode="lin" valueType="num">
+                                      <p:cBhvr>
+                                        <p:cTn id="174" dur="600" decel="100000" fill="hold"/>
+                                        <p:tgtEl>
+                                          <p:spTgt spid="36"/>
+                                        </p:tgtEl>
+                                        <p:attrNameLst>
+                                          <p:attrName>ppt_x</p:attrName>
+                                        </p:attrNameLst>
+                                      </p:cBhvr>
+                                      <p:tavLst>
+                                        <p:tav tm="0">
+                                          <p:val>
+                                            <p:strVal val="#ppt_x"/>
+                                          </p:val>
+                                        </p:tav>
+                                        <p:tav tm="100000">
+                                          <p:val>
+                                            <p:strVal val="#ppt_x"/>
+                                          </p:val>
+                                        </p:tav>
+                                      </p:tavLst>
+                                    </p:anim>
+                                    <p:anim calcmode="lin" valueType="num">
+                                      <p:cBhvr>
+                                        <p:cTn id="175" dur="600" decel="100000" fill="hold"/>
+                                        <p:tgtEl>
+                                          <p:spTgt spid="36"/>
+                                        </p:tgtEl>
+                                        <p:attrNameLst>
+                                          <p:attrName>ppt_y</p:attrName>
+                                        </p:attrNameLst>
+                                      </p:cBhvr>
+                                      <p:tavLst>
+                                        <p:tav tm="0">
+                                          <p:val>
+                                            <p:strVal val="#ppt_y+.08"/>
+                                          </p:val>
+                                        </p:tav>
+                                        <p:tav tm="100000">
+                                          <p:val>
+                                            <p:strVal val="#ppt_y"/>
+                                          </p:val>
+                                        </p:tav>
+                                      </p:tavLst>
+                                    </p:anim>
+                                  </p:childTnLst>
+                                </p:cTn>
+                              </p:par>
+                              <p:par>
+                                <p:cTn id="181" presetID="42" presetClass="entr" presetSubtype="0" fill="hold" grpId="0" nodeType="withEffect">
+                                  <p:stCondLst>
+                                    <p:cond delay="1000"/>
+                                  </p:stCondLst>
+                                  <p:childTnLst>
+                                    <p:set>
+                                      <p:cBhvr>
+                                        <p:cTn id="177" dur="1" fill="hold">
+                                          <p:stCondLst>
+                                            <p:cond delay="0"/>
+                                          </p:stCondLst>
+                                        </p:cTn>
+                                        <p:tgtEl>
+                                          <p:spTgt spid="37"/>
+                                        </p:tgtEl>
+                                        <p:attrNameLst>
+                                          <p:attrName>style.visibility</p:attrName>
+                                        </p:attrNameLst>
+                                      </p:cBhvr>
+                                      <p:to>
+                                        <p:strVal val="visible"/>
+                                      </p:to>
+                                    </p:set>
+                                    <p:animEffect transition="in" filter="fade">
+                                      <p:cBhvr>
+                                        <p:cTn id="178" dur="600"/>
+                                        <p:tgtEl>
+                                          <p:spTgt spid="37"/>
+                                        </p:tgtEl>
+                                      </p:cBhvr>
+                                    </p:animEffect>
+                                    <p:anim calcmode="lin" valueType="num">
+                                      <p:cBhvr>
+                                        <p:cTn id="179" dur="600" decel="100000" fill="hold"/>
+                                        <p:tgtEl>
+                                          <p:spTgt spid="37"/>
+                                        </p:tgtEl>
+                                        <p:attrNameLst>
+                                          <p:attrName>ppt_x</p:attrName>
+                                        </p:attrNameLst>
+                                      </p:cBhvr>
+                                      <p:tavLst>
+                                        <p:tav tm="0">
+                                          <p:val>
+                                            <p:strVal val="#ppt_x"/>
+                                          </p:val>
+                                        </p:tav>
+                                        <p:tav tm="100000">
+                                          <p:val>
+                                            <p:strVal val="#ppt_x"/>
+                                          </p:val>
+                                        </p:tav>
+                                      </p:tavLst>
+                                    </p:anim>
+                                    <p:anim calcmode="lin" valueType="num">
+                                      <p:cBhvr>
+                                        <p:cTn id="180" dur="600" decel="100000" fill="hold"/>
+                                        <p:tgtEl>
+                                          <p:spTgt spid="37"/>
+                                        </p:tgtEl>
+                                        <p:attrNameLst>
+                                          <p:attrName>ppt_y</p:attrName>
+                                        </p:attrNameLst>
+                                      </p:cBhvr>
+                                      <p:tavLst>
+                                        <p:tav tm="0">
+                                          <p:val>
+                                            <p:strVal val="#ppt_y+.08"/>
+                                          </p:val>
+                                        </p:tav>
+                                        <p:tav tm="100000">
+                                          <p:val>
+                                            <p:strVal val="#ppt_y"/>
+                                          </p:val>
+                                        </p:tav>
+                                      </p:tavLst>
+                                    </p:anim>
+                                  </p:childTnLst>
+                                </p:cTn>
+                              </p:par>
+                              <p:par>
+                                <p:cTn id="184" presetID="10" presetClass="entr" presetSubtype="0" fill="hold" grpId="0" nodeType="withEffect">
+                                  <p:stCondLst>
+                                    <p:cond delay="1200"/>
+                                  </p:stCondLst>
+                                  <p:childTnLst>
+                                    <p:set>
+                                      <p:cBhvr>
+                                        <p:cTn id="182" dur="1" fill="hold">
+                                          <p:stCondLst>
+                                            <p:cond delay="0"/>
+                                          </p:stCondLst>
+                                        </p:cTn>
+                                        <p:tgtEl>
+                                          <p:spTgt spid="25"/>
+                                        </p:tgtEl>
+                                        <p:attrNameLst>
+                                          <p:attrName>style.visibility</p:attrName>
+                                        </p:attrNameLst>
+                                      </p:cBhvr>
+                                      <p:to>
+                                        <p:strVal val="visible"/>
+                                      </p:to>
+                                    </p:set>
+                                    <p:animEffect transition="in" filter="fade">
+                                      <p:cBhvr>
+                                        <p:cTn id="183" dur="500"/>
+                                        <p:tgtEl>
+                                          <p:spTgt spid="25"/>
+                                        </p:tgtEl>
+                                      </p:cBhvr>
+                                    </p:animEffect>
+                                  </p:childTnLst>
+                                </p:cTn>
+                              </p:par>
+                            </p:childTnLst>
+                          </p:cTn>
+                        </p:par>
+                      </p:childTnLst>
+                    </p:cTn>
+                  </p:par>
+                </p:childTnLst>
+              </p:cTn>
+              <p:prevCondLst>
+                <p:cond evt="onPrev" delay="0">
+                  <p:tgtEl>
+                    <p:sldTgt/>
+                  </p:tgtEl>
+                </p:cond>
+              </p:prevCondLst>
+              <p:nextCondLst>
+                <p:cond evt="onNext" delay="0">
+                  <p:tgtEl>
+                    <p:sldTgt/>
+                  </p:tgtEl>
+                </p:cond>
+              </p:nextCondLst>
+            </p:seq>
+          </p:childTnLst>
+        </p:cTn>
+      </p:par>
+    </p:tnLst>
+    <p:bldLst>
+      <p:bldP spid="2" grpId="0" animBg="1"/>
+      <p:bldP spid="5" grpId="0" animBg="1"/>
+      <p:bldP spid="6" grpId="0" animBg="1"/>
+      <p:bldP spid="7" grpId="0" animBg="1"/>
+      <p:bldP spid="8" grpId="0" animBg="1"/>
+      <p:bldP spid="9" grpId="0" animBg="1"/>
+      <p:bldP spid="12" grpId="0" animBg="1"/>
+      <p:bldP spid="13" grpId="0" animBg="1"/>
+      <p:bldP spid="14" grpId="0" animBg="1"/>
+      <p:bldP spid="15" grpId="0" animBg="1"/>
+      <p:bldP spid="16" grpId="0" animBg="1"/>
+      <p:bldP spid="19" grpId="0" animBg="1"/>
+      <p:bldP spid="20" grpId="0" animBg="1"/>
+      <p:bldP spid="21" grpId="0" animBg="1"/>
+      <p:bldP spid="22" grpId="0" animBg="1"/>
+      <p:bldP spid="23" grpId="0" animBg="1"/>
+      <p:bldP spid="26" grpId="0" animBg="1"/>
+      <p:bldP spid="27" grpId="0" animBg="1"/>
+      <p:bldP spid="28" grpId="0" animBg="1"/>
+      <p:bldP spid="29" grpId="0" animBg="1"/>
+      <p:bldP spid="30" grpId="0" animBg="1"/>
+      <p:bldP spid="33" grpId="0" animBg="1"/>
+      <p:bldP spid="34" grpId="0" animBg="1"/>
+      <p:bldP spid="35" grpId="0" animBg="1"/>
+      <p:bldP spid="36" grpId="0" animBg="1"/>
+      <p:bldP spid="37" grpId="0" animBg="1"/>
+      <p:bldP spid="25" grpId="0" animBg="1"/>
+    </p:bldLst>
+  </p:timing>
+</p:sld>
+</file>
+
+<file path=ppt/slides/slide3.xml><?xml version="1.0" encoding="utf-8"?>
+<p:sld xmlns:a="http://schemas.openxmlformats.org/drawingml/2006/main" xmlns:r="http://schemas.openxmlformats.org/officeDocument/2006/relationships" xmlns:p="http://schemas.openxmlformats.org/presentationml/2006/main">
+  <p:cSld name="Slide 3">
     <p:spTree>
       <p:nvGrpSpPr>
         <p:cNvPr id="1" name=""/>
@@ -18095,7 +24581,7 @@
                   <a:schemeClr val="accent6"/>
                 </a:solidFill>
               </a:rPr>
-              <a:t>3D design and dashboards</a:t>
+              <a:t>Light / dark design and dashboards</a:t>
             </a:r>
             <a:endParaRPr lang="en-US" sz="1400" dirty="0"/>
           </a:p>
@@ -18306,7 +24792,7 @@
             <a:pPr algn="r"/>
             <a:fld id="{F7021451-1387-4CA6-816F-3879F97B5CBC}" type="slidenum">
               <a:rPr b="0" lang="en-US"/>
-              <a:t>2</a:t>
+              <a:t>3</a:t>
             </a:fld>
             <a:endParaRPr lang="en-US"/>
           </a:p>
@@ -20896,9 +27382,9 @@
 </p:sld>
 </file>
 
-<file path=ppt/slides/slide3.xml><?xml version="1.0" encoding="utf-8"?>
+<file path=ppt/slides/slide4.xml><?xml version="1.0" encoding="utf-8"?>
 <p:sld xmlns:a="http://schemas.openxmlformats.org/drawingml/2006/main" xmlns:r="http://schemas.openxmlformats.org/officeDocument/2006/relationships" xmlns:p="http://schemas.openxmlformats.org/presentationml/2006/main">
-  <p:cSld name="Slide 3">
+  <p:cSld name="Slide 4">
     <p:spTree>
       <p:nvGrpSpPr>
         <p:cNvPr id="1" name=""/>
@@ -21596,7 +28082,7 @@
             <a:pPr algn="r"/>
             <a:fld id="{F7021451-1387-4CA6-816F-3879F97B5CBC}" type="slidenum">
               <a:rPr b="0" lang="en-US"/>
-              <a:t>3</a:t>
+              <a:t>4</a:t>
             </a:fld>
             <a:endParaRPr lang="en-US"/>
           </a:p>
@@ -23231,9 +29717,9 @@
 </p:sld>
 </file>
 
-<file path=ppt/slides/slide4.xml><?xml version="1.0" encoding="utf-8"?>
+<file path=ppt/slides/slide5.xml><?xml version="1.0" encoding="utf-8"?>
 <p:sld xmlns:a="http://schemas.openxmlformats.org/drawingml/2006/main" xmlns:r="http://schemas.openxmlformats.org/officeDocument/2006/relationships" xmlns:p="http://schemas.openxmlformats.org/presentationml/2006/main">
-  <p:cSld name="Slide 4">
+  <p:cSld name="Slide 5">
     <p:spTree>
       <p:nvGrpSpPr>
         <p:cNvPr id="1" name=""/>
@@ -24180,7 +30666,7 @@
             <a:pPr algn="r"/>
             <a:fld id="{F7021451-1387-4CA6-816F-3879F97B5CBC}" type="slidenum">
               <a:rPr b="0" lang="en-US"/>
-              <a:t>4</a:t>
+              <a:t>5</a:t>
             </a:fld>
             <a:endParaRPr lang="en-US"/>
           </a:p>
@@ -26463,9 +32949,9 @@
 </p:sld>
 </file>
 
-<file path=ppt/slides/slide5.xml><?xml version="1.0" encoding="utf-8"?>
+<file path=ppt/slides/slide6.xml><?xml version="1.0" encoding="utf-8"?>
 <p:sld xmlns:a="http://schemas.openxmlformats.org/drawingml/2006/main" xmlns:r="http://schemas.openxmlformats.org/officeDocument/2006/relationships" xmlns:p="http://schemas.openxmlformats.org/presentationml/2006/main">
-  <p:cSld name="Slide 5">
+  <p:cSld name="Slide 6">
     <p:spTree>
       <p:nvGrpSpPr>
         <p:cNvPr id="1" name=""/>
@@ -27035,7 +33521,7 @@
             <a:pPr algn="r"/>
             <a:fld id="{F7021451-1387-4CA6-816F-3879F97B5CBC}" type="slidenum">
               <a:rPr b="0" lang="en-US"/>
-              <a:t>5</a:t>
+              <a:t>6</a:t>
             </a:fld>
             <a:endParaRPr lang="en-US"/>
           </a:p>
@@ -28389,9 +34875,9 @@
 </p:sld>
 </file>
 
-<file path=ppt/slides/slide6.xml><?xml version="1.0" encoding="utf-8"?>
+<file path=ppt/slides/slide7.xml><?xml version="1.0" encoding="utf-8"?>
 <p:sld xmlns:a="http://schemas.openxmlformats.org/drawingml/2006/main" xmlns:r="http://schemas.openxmlformats.org/officeDocument/2006/relationships" xmlns:p="http://schemas.openxmlformats.org/presentationml/2006/main">
-  <p:cSld name="Slide 6">
+  <p:cSld name="Slide 7">
     <p:spTree>
       <p:nvGrpSpPr>
         <p:cNvPr id="1" name=""/>
@@ -28967,7 +35453,7 @@
             <a:pPr algn="r"/>
             <a:fld id="{F7021451-1387-4CA6-816F-3879F97B5CBC}" type="slidenum">
               <a:rPr b="0" lang="en-US"/>
-              <a:t>6</a:t>
+              <a:t>7</a:t>
             </a:fld>
             <a:endParaRPr lang="en-US"/>
           </a:p>
@@ -30252,9 +36738,9 @@
 </p:sld>
 </file>
 
-<file path=ppt/slides/slide7.xml><?xml version="1.0" encoding="utf-8"?>
+<file path=ppt/slides/slide8.xml><?xml version="1.0" encoding="utf-8"?>
 <p:sld xmlns:a="http://schemas.openxmlformats.org/drawingml/2006/main" xmlns:r="http://schemas.openxmlformats.org/officeDocument/2006/relationships" xmlns:p="http://schemas.openxmlformats.org/presentationml/2006/main">
-  <p:cSld name="Slide 7">
+  <p:cSld name="Slide 8">
     <p:spTree>
       <p:nvGrpSpPr>
         <p:cNvPr id="1" name=""/>
@@ -30975,7 +37461,7 @@
             <a:pPr algn="r"/>
             <a:fld id="{F7021451-1387-4CA6-816F-3879F97B5CBC}" type="slidenum">
               <a:rPr b="0" lang="en-US"/>
-              <a:t>7</a:t>
+              <a:t>8</a:t>
             </a:fld>
             <a:endParaRPr lang="en-US"/>
           </a:p>
@@ -32486,9 +38972,9 @@
 </p:sld>
 </file>
 
-<file path=ppt/slides/slide8.xml><?xml version="1.0" encoding="utf-8"?>
+<file path=ppt/slides/slide9.xml><?xml version="1.0" encoding="utf-8"?>
 <p:sld xmlns:a="http://schemas.openxmlformats.org/drawingml/2006/main" xmlns:r="http://schemas.openxmlformats.org/officeDocument/2006/relationships" xmlns:p="http://schemas.openxmlformats.org/presentationml/2006/main">
-  <p:cSld name="Slide 8">
+  <p:cSld name="Slide 9">
     <p:spTree>
       <p:nvGrpSpPr>
         <p:cNvPr id="1" name=""/>
@@ -33238,7 +39724,7 @@
             <a:pPr algn="r"/>
             <a:fld id="{F7021451-1387-4CA6-816F-3879F97B5CBC}" type="slidenum">
               <a:rPr b="0" lang="en-US"/>
-              <a:t>8</a:t>
+              <a:t>9</a:t>
             </a:fld>
             <a:endParaRPr lang="en-US"/>
           </a:p>
@@ -35164,2080 +41650,6 @@
       <p:bldP spid="19" grpId="0" animBg="1"/>
       <p:bldP spid="23" grpId="0" animBg="1"/>
       <p:bldP spid="24" grpId="0" animBg="1"/>
-      <p:bldP spid="25" grpId="0" animBg="1"/>
-    </p:bldLst>
-  </p:timing>
-</p:sld>
-</file>
-
-<file path=ppt/slides/slide9.xml><?xml version="1.0" encoding="utf-8"?>
-<p:sld xmlns:a="http://schemas.openxmlformats.org/drawingml/2006/main" xmlns:r="http://schemas.openxmlformats.org/officeDocument/2006/relationships" xmlns:p="http://schemas.openxmlformats.org/presentationml/2006/main">
-  <p:cSld name="Slide 9">
-    <p:spTree>
-      <p:nvGrpSpPr>
-        <p:cNvPr id="1" name=""/>
-        <p:cNvGrpSpPr/>
-        <p:nvPr/>
-      </p:nvGrpSpPr>
-      <p:grpSpPr>
-        <a:xfrm>
-          <a:off x="0" y="0"/>
-          <a:ext cx="0" cy="0"/>
-          <a:chOff x="0" y="0"/>
-          <a:chExt cx="0" cy="0"/>
-        </a:xfrm>
-      </p:grpSpPr>
-      <p:sp>
-        <p:nvSpPr>
-          <p:cNvPr id="2" name="Text 0"/>
-          <p:cNvSpPr/>
-          <p:nvPr>
-            <p:ph idx="100" type="title" hasCustomPrompt="1"/>
-          </p:nvPr>
-        </p:nvSpPr>
-        <p:spPr>
-          <a:xfrm>
-            <a:off x="548640" y="347472"/>
-            <a:ext cx="11064240" cy="731520"/>
-          </a:xfrm>
-          <a:prstGeom prst="rect">
-            <a:avLst/>
-          </a:prstGeom>
-          <a:noFill/>
-          <a:ln/>
-        </p:spPr>
-        <p:txBody>
-          <a:bodyPr wrap="square" lIns="0" tIns="0" rIns="0" bIns="0" rtlCol="0" anchor="ctr"/>
-          <a:lstStyle/>
-          <a:p>
-            <a:pPr algn="l" indent="0" marL="0">
-              <a:buNone/>
-            </a:pPr>
-            <a:r>
-              <a:rPr lang="en-US" sz="3200" b="1" dirty="0">
-                <a:solidFill>
-                  <a:schemeClr val="tx2"/>
-                </a:solidFill>
-              </a:rPr>
-              <a:t>The billing engine</a:t>
-            </a:r>
-            <a:endParaRPr lang="en-US" sz="3200" dirty="0"/>
-          </a:p>
-        </p:txBody>
-      </p:sp>
-      <p:sp>
-        <p:nvSpPr>
-          <p:cNvPr id="3" name="a-zoom-bill"/>
-          <p:cNvSpPr/>
-          <p:nvPr/>
-        </p:nvSpPr>
-        <p:spPr>
-          <a:xfrm>
-            <a:off x="493776" y="1362456"/>
-            <a:ext cx="6876288" cy="2825496"/>
-          </a:xfrm>
-          <a:prstGeom prst="roundRect">
-            <a:avLst>
-              <a:gd name="adj" fmla="val 2589"/>
-            </a:avLst>
-          </a:prstGeom>
-          <a:solidFill>
-            <a:schemeClr val="bg1"/>
-          </a:solidFill>
-          <a:ln w="9525">
-            <a:solidFill>
-              <a:srgbClr val="CBD5E1"/>
-            </a:solidFill>
-            <a:prstDash val="solid"/>
-          </a:ln>
-          <a:effectLst>
-            <a:outerShdw sx="100000" sy="100000" kx="0" ky="0" algn="bl" rotWithShape="0" blurRad="127000" dist="38100" dir="5400000">
-              <a:srgbClr val="0A2540">
-                <a:alpha val="16000"/>
-              </a:srgbClr>
-            </a:outerShdw>
-          </a:effectLst>
-        </p:spPr>
-      </p:sp>
-      <p:pic>
-        <p:nvPicPr>
-          <p:cNvPr id="4" name="a-zoom-w-bill-img" descr="/tmp/claude-0/-home-user-done/4a4296a4-6fd8-5cee-98c2-5de0aee80c99/scratchpad/docs/img/billing-flow.png">    </p:cNvPr>
-          <p:cNvPicPr>
-            <a:picLocks noChangeAspect="1"/>
-          </p:cNvPicPr>
-          <p:nvPr/>
-        </p:nvPicPr>
-        <p:blipFill>
-          <a:blip r:embed="rId1"/>
-          <a:stretch>
-            <a:fillRect/>
-          </a:stretch>
-        </p:blipFill>
-        <p:spPr>
-          <a:xfrm>
-            <a:off x="548640" y="1417320"/>
-            <a:ext cx="6766560" cy="2715768"/>
-          </a:xfrm>
-          <a:prstGeom prst="rect">
-            <a:avLst/>
-          </a:prstGeom>
-        </p:spPr>
-      </p:pic>
-      <p:pic>
-        <p:nvPicPr>
-          <p:cNvPr id="5" name="a-left-bi0" descr="/tmp/claude-0/-home-user-done/4a4296a4-6fd8-5cee-98c2-5de0aee80c99/scratchpad/docs/img/icons/check-g.png">    </p:cNvPr>
-          <p:cNvPicPr>
-            <a:picLocks noChangeAspect="1"/>
-          </p:cNvPicPr>
-          <p:nvPr/>
-        </p:nvPicPr>
-        <p:blipFill>
-          <a:blip r:embed="rId2"/>
-          <a:stretch>
-            <a:fillRect/>
-          </a:stretch>
-        </p:blipFill>
-        <p:spPr>
-          <a:xfrm>
-            <a:off x="548640" y="4526280"/>
-            <a:ext cx="237744" cy="237744"/>
-          </a:xfrm>
-          <a:prstGeom prst="rect">
-            <a:avLst/>
-          </a:prstGeom>
-        </p:spPr>
-      </p:pic>
-      <p:sp>
-        <p:nvSpPr>
-          <p:cNvPr id="6" name="a-left-w-bt0"/>
-          <p:cNvSpPr txBox="1"/>
-          <p:nvPr/>
-        </p:nvSpPr>
-        <p:spPr>
-          <a:xfrm>
-            <a:off x="914400" y="4498848"/>
-            <a:ext cx="6400800" cy="310896"/>
-          </a:xfrm>
-          <a:prstGeom prst="rect">
-            <a:avLst/>
-          </a:prstGeom>
-          <a:noFill/>
-          <a:ln/>
-        </p:spPr>
-        <p:txBody>
-          <a:bodyPr wrap="square" lIns="0" tIns="0" rIns="0" bIns="0" rtlCol="0" anchor="t"/>
-          <a:lstStyle/>
-          <a:p>
-            <a:pPr indent="0" marL="0">
-              <a:buNone/>
-            </a:pPr>
-            <a:r>
-              <a:rPr lang="en-US" sz="1400" dirty="0">
-                <a:solidFill>
-                  <a:schemeClr val="tx1"/>
-                </a:solidFill>
-              </a:rPr>
-              <a:t>Plan fee once per validity period</a:t>
-            </a:r>
-            <a:endParaRPr lang="en-US" sz="1400" dirty="0"/>
-          </a:p>
-        </p:txBody>
-      </p:sp>
-      <p:pic>
-        <p:nvPicPr>
-          <p:cNvPr id="7" name="a-left-bi1" descr="/tmp/claude-0/-home-user-done/4a4296a4-6fd8-5cee-98c2-5de0aee80c99/scratchpad/docs/img/icons/check-g.png">    </p:cNvPr>
-          <p:cNvPicPr>
-            <a:picLocks noChangeAspect="1"/>
-          </p:cNvPicPr>
-          <p:nvPr/>
-        </p:nvPicPr>
-        <p:blipFill>
-          <a:blip r:embed="rId3"/>
-          <a:stretch>
-            <a:fillRect/>
-          </a:stretch>
-        </p:blipFill>
-        <p:spPr>
-          <a:xfrm>
-            <a:off x="548640" y="4873752"/>
-            <a:ext cx="237744" cy="237744"/>
-          </a:xfrm>
-          <a:prstGeom prst="rect">
-            <a:avLst/>
-          </a:prstGeom>
-        </p:spPr>
-      </p:pic>
-      <p:sp>
-        <p:nvSpPr>
-          <p:cNvPr id="8" name="a-left-w-bt1"/>
-          <p:cNvSpPr txBox="1"/>
-          <p:nvPr/>
-        </p:nvSpPr>
-        <p:spPr>
-          <a:xfrm>
-            <a:off x="914400" y="4846320"/>
-            <a:ext cx="6400800" cy="310896"/>
-          </a:xfrm>
-          <a:prstGeom prst="rect">
-            <a:avLst/>
-          </a:prstGeom>
-          <a:noFill/>
-          <a:ln/>
-        </p:spPr>
-        <p:txBody>
-          <a:bodyPr wrap="square" lIns="0" tIns="0" rIns="0" bIns="0" rtlCol="0" anchor="t"/>
-          <a:lstStyle/>
-          <a:p>
-            <a:pPr indent="0" marL="0">
-              <a:buNone/>
-            </a:pPr>
-            <a:r>
-              <a:rPr lang="en-US" sz="1400" dirty="0">
-                <a:solidFill>
-                  <a:schemeClr val="tx1"/>
-                </a:solidFill>
-              </a:rPr>
-              <a:t>Call minutes x the plan's per-minute rates</a:t>
-            </a:r>
-            <a:endParaRPr lang="en-US" sz="1400" dirty="0"/>
-          </a:p>
-        </p:txBody>
-      </p:sp>
-      <p:pic>
-        <p:nvPicPr>
-          <p:cNvPr id="9" name="a-left-bi2" descr="/tmp/claude-0/-home-user-done/4a4296a4-6fd8-5cee-98c2-5de0aee80c99/scratchpad/docs/img/icons/check-g.png">    </p:cNvPr>
-          <p:cNvPicPr>
-            <a:picLocks noChangeAspect="1"/>
-          </p:cNvPicPr>
-          <p:nvPr/>
-        </p:nvPicPr>
-        <p:blipFill>
-          <a:blip r:embed="rId4"/>
-          <a:stretch>
-            <a:fillRect/>
-          </a:stretch>
-        </p:blipFill>
-        <p:spPr>
-          <a:xfrm>
-            <a:off x="548640" y="5221224"/>
-            <a:ext cx="237744" cy="237744"/>
-          </a:xfrm>
-          <a:prstGeom prst="rect">
-            <a:avLst/>
-          </a:prstGeom>
-        </p:spPr>
-      </p:pic>
-      <p:sp>
-        <p:nvSpPr>
-          <p:cNvPr id="10" name="a-left-w-bt2"/>
-          <p:cNvSpPr txBox="1"/>
-          <p:nvPr/>
-        </p:nvSpPr>
-        <p:spPr>
-          <a:xfrm>
-            <a:off x="914400" y="5193792"/>
-            <a:ext cx="6400800" cy="310896"/>
-          </a:xfrm>
-          <a:prstGeom prst="rect">
-            <a:avLst/>
-          </a:prstGeom>
-          <a:noFill/>
-          <a:ln/>
-        </p:spPr>
-        <p:txBody>
-          <a:bodyPr wrap="square" lIns="0" tIns="0" rIns="0" bIns="0" rtlCol="0" anchor="t"/>
-          <a:lstStyle/>
-          <a:p>
-            <a:pPr indent="0" marL="0">
-              <a:buNone/>
-            </a:pPr>
-            <a:r>
-              <a:rPr lang="en-US" sz="1400" dirty="0">
-                <a:solidFill>
-                  <a:schemeClr val="tx1"/>
-                </a:solidFill>
-              </a:rPr>
-              <a:t>Replacement charges added once, automatically</a:t>
-            </a:r>
-            <a:endParaRPr lang="en-US" sz="1400" dirty="0"/>
-          </a:p>
-        </p:txBody>
-      </p:sp>
-      <p:pic>
-        <p:nvPicPr>
-          <p:cNvPr id="11" name="a-left-bi3" descr="/tmp/claude-0/-home-user-done/4a4296a4-6fd8-5cee-98c2-5de0aee80c99/scratchpad/docs/img/icons/check-g.png">    </p:cNvPr>
-          <p:cNvPicPr>
-            <a:picLocks noChangeAspect="1"/>
-          </p:cNvPicPr>
-          <p:nvPr/>
-        </p:nvPicPr>
-        <p:blipFill>
-          <a:blip r:embed="rId5"/>
-          <a:stretch>
-            <a:fillRect/>
-          </a:stretch>
-        </p:blipFill>
-        <p:spPr>
-          <a:xfrm>
-            <a:off x="548640" y="5568696"/>
-            <a:ext cx="237744" cy="237744"/>
-          </a:xfrm>
-          <a:prstGeom prst="rect">
-            <a:avLst/>
-          </a:prstGeom>
-        </p:spPr>
-      </p:pic>
-      <p:sp>
-        <p:nvSpPr>
-          <p:cNvPr id="12" name="a-left-w-bt3"/>
-          <p:cNvSpPr txBox="1"/>
-          <p:nvPr/>
-        </p:nvSpPr>
-        <p:spPr>
-          <a:xfrm>
-            <a:off x="914400" y="5541264"/>
-            <a:ext cx="6400800" cy="310896"/>
-          </a:xfrm>
-          <a:prstGeom prst="rect">
-            <a:avLst/>
-          </a:prstGeom>
-          <a:noFill/>
-          <a:ln/>
-        </p:spPr>
-        <p:txBody>
-          <a:bodyPr wrap="square" lIns="0" tIns="0" rIns="0" bIns="0" rtlCol="0" anchor="t"/>
-          <a:lstStyle/>
-          <a:p>
-            <a:pPr indent="0" marL="0">
-              <a:buNone/>
-            </a:pPr>
-            <a:r>
-              <a:rPr lang="en-US" sz="1400" dirty="0">
-                <a:solidFill>
-                  <a:schemeClr val="tx1"/>
-                </a:solidFill>
-              </a:rPr>
-              <a:t>Deposit and bulk discount on the first bill</a:t>
-            </a:r>
-            <a:endParaRPr lang="en-US" sz="1400" dirty="0"/>
-          </a:p>
-        </p:txBody>
-      </p:sp>
-      <p:pic>
-        <p:nvPicPr>
-          <p:cNvPr id="13" name="a-left-bi4" descr="/tmp/claude-0/-home-user-done/4a4296a4-6fd8-5cee-98c2-5de0aee80c99/scratchpad/docs/img/icons/check-g.png">    </p:cNvPr>
-          <p:cNvPicPr>
-            <a:picLocks noChangeAspect="1"/>
-          </p:cNvPicPr>
-          <p:nvPr/>
-        </p:nvPicPr>
-        <p:blipFill>
-          <a:blip r:embed="rId6"/>
-          <a:stretch>
-            <a:fillRect/>
-          </a:stretch>
-        </p:blipFill>
-        <p:spPr>
-          <a:xfrm>
-            <a:off x="548640" y="5916168"/>
-            <a:ext cx="237744" cy="237744"/>
-          </a:xfrm>
-          <a:prstGeom prst="rect">
-            <a:avLst/>
-          </a:prstGeom>
-        </p:spPr>
-      </p:pic>
-      <p:sp>
-        <p:nvSpPr>
-          <p:cNvPr id="14" name="a-left-w-bt4"/>
-          <p:cNvSpPr txBox="1"/>
-          <p:nvPr/>
-        </p:nvSpPr>
-        <p:spPr>
-          <a:xfrm>
-            <a:off x="914400" y="5888736"/>
-            <a:ext cx="6400800" cy="310896"/>
-          </a:xfrm>
-          <a:prstGeom prst="rect">
-            <a:avLst/>
-          </a:prstGeom>
-          <a:noFill/>
-          <a:ln/>
-        </p:spPr>
-        <p:txBody>
-          <a:bodyPr wrap="square" lIns="0" tIns="0" rIns="0" bIns="0" rtlCol="0" anchor="t"/>
-          <a:lstStyle/>
-          <a:p>
-            <a:pPr indent="0" marL="0">
-              <a:buNone/>
-            </a:pPr>
-            <a:r>
-              <a:rPr lang="en-US" sz="1400" dirty="0">
-                <a:solidFill>
-                  <a:schemeClr val="tx1"/>
-                </a:solidFill>
-              </a:rPr>
-              <a:t>Unpaid earlier bills shown as brought forward</a:t>
-            </a:r>
-            <a:endParaRPr lang="en-US" sz="1400" dirty="0"/>
-          </a:p>
-        </p:txBody>
-      </p:sp>
-      <p:sp>
-        <p:nvSpPr>
-          <p:cNvPr id="15" name="a-zoom-ex"/>
-          <p:cNvSpPr/>
-          <p:nvPr/>
-        </p:nvSpPr>
-        <p:spPr>
-          <a:xfrm>
-            <a:off x="7772400" y="1417320"/>
-            <a:ext cx="3840480" cy="4709160"/>
-          </a:xfrm>
-          <a:prstGeom prst="roundRect">
-            <a:avLst>
-              <a:gd name="adj" fmla="val 2857"/>
-            </a:avLst>
-          </a:prstGeom>
-          <a:solidFill>
-            <a:schemeClr val="bg2"/>
-          </a:solidFill>
-          <a:ln w="9525">
-            <a:solidFill>
-              <a:srgbClr val="CBD5E1"/>
-            </a:solidFill>
-            <a:prstDash val="solid"/>
-          </a:ln>
-          <a:effectLst>
-            <a:outerShdw sx="100000" sy="100000" kx="0" ky="0" algn="bl" rotWithShape="0" blurRad="127000" dist="38100" dir="5400000">
-              <a:srgbClr val="0A2540">
-                <a:alpha val="16000"/>
-              </a:srgbClr>
-            </a:outerShdw>
-          </a:effectLst>
-        </p:spPr>
-      </p:sp>
-      <p:sp>
-        <p:nvSpPr>
-          <p:cNvPr id="16" name="a-fade-exh"/>
-          <p:cNvSpPr txBox="1"/>
-          <p:nvPr/>
-        </p:nvSpPr>
-        <p:spPr>
-          <a:xfrm>
-            <a:off x="8092440" y="1691640"/>
-            <a:ext cx="3291840" cy="365760"/>
-          </a:xfrm>
-          <a:prstGeom prst="rect">
-            <a:avLst/>
-          </a:prstGeom>
-          <a:noFill/>
-          <a:ln/>
-        </p:spPr>
-        <p:txBody>
-          <a:bodyPr wrap="square" lIns="0" tIns="0" rIns="0" bIns="0" rtlCol="0" anchor="t"/>
-          <a:lstStyle/>
-          <a:p>
-            <a:pPr indent="0" marL="0">
-              <a:buNone/>
-            </a:pPr>
-            <a:r>
-              <a:rPr lang="en-US" sz="1600" b="1" dirty="0">
-                <a:solidFill>
-                  <a:schemeClr val="accent1"/>
-                </a:solidFill>
-              </a:rPr>
-              <a:t>Worked example</a:t>
-            </a:r>
-            <a:endParaRPr lang="en-US" sz="1600" dirty="0"/>
-          </a:p>
-        </p:txBody>
-      </p:sp>
-      <p:sp>
-        <p:nvSpPr>
-          <p:cNvPr id="17" name="a-fade-exb"/>
-          <p:cNvSpPr txBox="1"/>
-          <p:nvPr/>
-        </p:nvSpPr>
-        <p:spPr>
-          <a:xfrm>
-            <a:off x="8092440" y="2194560"/>
-            <a:ext cx="3291840" cy="1554480"/>
-          </a:xfrm>
-          <a:prstGeom prst="rect">
-            <a:avLst/>
-          </a:prstGeom>
-          <a:noFill/>
-          <a:ln/>
-        </p:spPr>
-        <p:txBody>
-          <a:bodyPr wrap="square" lIns="0" tIns="0" rIns="0" bIns="0" rtlCol="0" anchor="t"/>
-          <a:lstStyle/>
-          <a:p>
-            <a:pPr indent="0" marL="0">
-              <a:spcAft>
-                <a:spcPts val="600"/>
-              </a:spcAft>
-              <a:buNone/>
-            </a:pPr>
-            <a:r>
-              <a:rPr lang="en-US" sz="1400" dirty="0">
-                <a:solidFill>
-                  <a:schemeClr val="tx2"/>
-                </a:solidFill>
-              </a:rPr>
-              <a:t>Plan fee  $35.00</a:t>
-            </a:r>
-            <a:endParaRPr lang="en-US" sz="1400" dirty="0"/>
-          </a:p>
-          <a:p>
-            <a:pPr indent="0" marL="0">
-              <a:spcAft>
-                <a:spcPts val="600"/>
-              </a:spcAft>
-              <a:buNone/>
-            </a:pPr>
-            <a:r>
-              <a:rPr lang="en-US" sz="1400" dirty="0">
-                <a:solidFill>
-                  <a:schemeClr val="tx2"/>
-                </a:solidFill>
-              </a:rPr>
-              <a:t>100 local min x $0.75  $75.00</a:t>
-            </a:r>
-            <a:endParaRPr lang="en-US" sz="1400" dirty="0"/>
-          </a:p>
-          <a:p>
-            <a:pPr indent="0" marL="0">
-              <a:spcAft>
-                <a:spcPts val="600"/>
-              </a:spcAft>
-              <a:buNone/>
-            </a:pPr>
-            <a:r>
-              <a:rPr lang="en-US" sz="1400" dirty="0">
-                <a:solidFill>
-                  <a:schemeClr val="tx2"/>
-                </a:solidFill>
-              </a:rPr>
-              <a:t>Deposit (first bill)  $250.00</a:t>
-            </a:r>
-            <a:endParaRPr lang="en-US" sz="1400" dirty="0"/>
-          </a:p>
-          <a:p>
-            <a:pPr indent="0" marL="0">
-              <a:spcAft>
-                <a:spcPts val="600"/>
-              </a:spcAft>
-              <a:buNone/>
-            </a:pPr>
-            <a:r>
-              <a:rPr lang="en-US" sz="1400" dirty="0">
-                <a:solidFill>
-                  <a:schemeClr val="tx2"/>
-                </a:solidFill>
-              </a:rPr>
-              <a:t>Service tax 12.24%  $44.06</a:t>
-            </a:r>
-            <a:endParaRPr lang="en-US" sz="1400" dirty="0"/>
-          </a:p>
-        </p:txBody>
-      </p:sp>
-      <p:sp>
-        <p:nvSpPr>
-          <p:cNvPr id="18" name="a-zoom-ext"/>
-          <p:cNvSpPr txBox="1"/>
-          <p:nvPr/>
-        </p:nvSpPr>
-        <p:spPr>
-          <a:xfrm>
-            <a:off x="8092440" y="3886200"/>
-            <a:ext cx="3291840" cy="914400"/>
-          </a:xfrm>
-          <a:prstGeom prst="rect">
-            <a:avLst/>
-          </a:prstGeom>
-          <a:noFill/>
-          <a:ln/>
-        </p:spPr>
-        <p:txBody>
-          <a:bodyPr wrap="square" lIns="0" tIns="0" rIns="0" bIns="0" rtlCol="0" anchor="t"/>
-          <a:lstStyle/>
-          <a:p>
-            <a:pPr indent="0" marL="0">
-              <a:buNone/>
-            </a:pPr>
-            <a:r>
-              <a:rPr lang="en-US" sz="5000" b="1" dirty="0">
-                <a:solidFill>
-                  <a:schemeClr val="accent2"/>
-                </a:solidFill>
-              </a:rPr>
-              <a:t>$404.06</a:t>
-            </a:r>
-            <a:endParaRPr lang="en-US" sz="5000" dirty="0"/>
-          </a:p>
-        </p:txBody>
-      </p:sp>
-      <p:sp>
-        <p:nvSpPr>
-          <p:cNvPr id="19" name="a-fade-exn"/>
-          <p:cNvSpPr txBox="1"/>
-          <p:nvPr/>
-        </p:nvSpPr>
-        <p:spPr>
-          <a:xfrm>
-            <a:off x="8092440" y="4892040"/>
-            <a:ext cx="3291840" cy="822960"/>
-          </a:xfrm>
-          <a:prstGeom prst="rect">
-            <a:avLst/>
-          </a:prstGeom>
-          <a:noFill/>
-          <a:ln/>
-        </p:spPr>
-        <p:txBody>
-          <a:bodyPr wrap="square" lIns="0" tIns="0" rIns="0" bIns="0" rtlCol="0" anchor="t"/>
-          <a:lstStyle/>
-          <a:p>
-            <a:pPr indent="0" marL="0">
-              <a:buNone/>
-            </a:pPr>
-            <a:r>
-              <a:rPr lang="en-US" sz="1300" i="1" dirty="0">
-                <a:solidFill>
-                  <a:schemeClr val="accent6"/>
-                </a:solidFill>
-              </a:rPr>
-              <a:t>First bill total - verified by the automated tests</a:t>
-            </a:r>
-            <a:endParaRPr lang="en-US" sz="1300" dirty="0"/>
-          </a:p>
-        </p:txBody>
-      </p:sp>
-      <p:sp>
-        <p:nvSpPr>
-          <p:cNvPr id="25" name="Slide Number Placeholder 0"/>
-          <p:cNvSpPr>
-            <a:spLocks noGrp="1"/>
-          </p:cNvSpPr>
-          <p:nvPr>
-            <p:ph type="sldNum" sz="quarter" idx="4294967295"/>
-          </p:nvPr>
-        </p:nvSpPr>
-        <p:spPr>
-          <a:xfrm>
-            <a:off x="11155680" y="6382512"/>
-            <a:ext cx="457200" cy="274320"/>
-          </a:xfrm>
-          <a:prstGeom prst="rect">
-            <a:avLst/>
-          </a:prstGeom>
-          <a:extLst>
-            <a:ext uri="{C572A759-6A51-4108-AA02-DFA0A04FC94B}">
-              <ma14:wrappingTextBoxFlag xmlns:ma14="http://schemas.microsoft.com/office/mac/drawingml/2011/main" val="0"/>
-            </a:ext>
-          </a:extLst>
-        </p:spPr>
-        <p:txBody>
-          <a:bodyPr/>
-          <a:lstStyle>
-            <a:lvl1pPr>
-              <a:defRPr sz="1000">
-                <a:solidFill>
-                  <a:schemeClr val="accent6"/>
-                </a:solidFill>
-              </a:defRPr>
-            </a:lvl1pPr>
-          </a:lstStyle>
-          <a:p>
-            <a:pPr algn="r"/>
-            <a:fld id="{F7021451-1387-4CA6-816F-3879F97B5CBC}" type="slidenum">
-              <a:rPr b="0" lang="en-US"/>
-              <a:t>9</a:t>
-            </a:fld>
-            <a:endParaRPr lang="en-US"/>
-          </a:p>
-        </p:txBody>
-      </p:sp>
-    </p:spTree>
-  </p:cSld>
-  <p:clrMapOvr>
-    <a:masterClrMapping/>
-  </p:clrMapOvr>
-  <p:transition spd="med">
-    <p:push dir="u"/>
-  </p:transition>
-  <p:timing>
-    <p:tnLst>
-      <p:par>
-        <p:cTn id="1" dur="indefinite" restart="never" nodeType="tmRoot">
-          <p:childTnLst>
-            <p:seq concurrent="1" nextAc="seek">
-              <p:cTn id="2" dur="indefinite" nodeType="mainSeq">
-                <p:childTnLst>
-                  <p:par>
-                    <p:cTn id="3" fill="hold">
-                      <p:stCondLst>
-                        <p:cond delay="indefinite"/>
-                        <p:cond evt="onBegin" delay="0">
-                          <p:tn val="2"/>
-                        </p:cond>
-                      </p:stCondLst>
-                      <p:childTnLst>
-                        <p:par>
-                          <p:cTn id="89" fill="hold">
-                            <p:stCondLst>
-                              <p:cond delay="0"/>
-                            </p:stCondLst>
-                            <p:childTnLst>
-                              <p:par>
-                                <p:cTn id="6" presetID="10" presetClass="entr" presetSubtype="0" fill="hold" grpId="0" nodeType="afterEffect">
-                                  <p:stCondLst>
-                                    <p:cond delay="0"/>
-                                  </p:stCondLst>
-                                  <p:childTnLst>
-                                    <p:set>
-                                      <p:cBhvr>
-                                        <p:cTn id="4" dur="1" fill="hold">
-                                          <p:stCondLst>
-                                            <p:cond delay="0"/>
-                                          </p:stCondLst>
-                                        </p:cTn>
-                                        <p:tgtEl>
-                                          <p:spTgt spid="2"/>
-                                        </p:tgtEl>
-                                        <p:attrNameLst>
-                                          <p:attrName>style.visibility</p:attrName>
-                                        </p:attrNameLst>
-                                      </p:cBhvr>
-                                      <p:to>
-                                        <p:strVal val="visible"/>
-                                      </p:to>
-                                    </p:set>
-                                    <p:animEffect transition="in" filter="fade">
-                                      <p:cBhvr>
-                                        <p:cTn id="5" dur="500"/>
-                                        <p:tgtEl>
-                                          <p:spTgt spid="2"/>
-                                        </p:tgtEl>
-                                      </p:cBhvr>
-                                    </p:animEffect>
-                                  </p:childTnLst>
-                                </p:cTn>
-                              </p:par>
-                              <p:par>
-                                <p:cTn id="11" presetID="53" presetClass="entr" presetSubtype="16" fill="hold" grpId="0" nodeType="withEffect">
-                                  <p:stCondLst>
-                                    <p:cond delay="200"/>
-                                  </p:stCondLst>
-                                  <p:childTnLst>
-                                    <p:set>
-                                      <p:cBhvr>
-                                        <p:cTn id="7" dur="1" fill="hold">
-                                          <p:stCondLst>
-                                            <p:cond delay="0"/>
-                                          </p:stCondLst>
-                                        </p:cTn>
-                                        <p:tgtEl>
-                                          <p:spTgt spid="3"/>
-                                        </p:tgtEl>
-                                        <p:attrNameLst>
-                                          <p:attrName>style.visibility</p:attrName>
-                                        </p:attrNameLst>
-                                      </p:cBhvr>
-                                      <p:to>
-                                        <p:strVal val="visible"/>
-                                      </p:to>
-                                    </p:set>
-                                    <p:anim calcmode="lin" valueType="num">
-                                      <p:cBhvr>
-                                        <p:cTn id="9" dur="650" decel="100000" fill="hold"/>
-                                        <p:tgtEl>
-                                          <p:spTgt spid="3"/>
-                                        </p:tgtEl>
-                                        <p:attrNameLst>
-                                          <p:attrName>ppt_w</p:attrName>
-                                        </p:attrNameLst>
-                                      </p:cBhvr>
-                                      <p:tavLst>
-                                        <p:tav tm="0">
-                                          <p:val>
-                                            <p:strVal val="#ppt_w*0.7"/>
-                                          </p:val>
-                                        </p:tav>
-                                        <p:tav tm="100000">
-                                          <p:val>
-                                            <p:strVal val="#ppt_w"/>
-                                          </p:val>
-                                        </p:tav>
-                                      </p:tavLst>
-                                    </p:anim>
-                                    <p:anim calcmode="lin" valueType="num">
-                                      <p:cBhvr>
-                                        <p:cTn id="10" dur="650" decel="100000" fill="hold"/>
-                                        <p:tgtEl>
-                                          <p:spTgt spid="3"/>
-                                        </p:tgtEl>
-                                        <p:attrNameLst>
-                                          <p:attrName>ppt_h</p:attrName>
-                                        </p:attrNameLst>
-                                      </p:cBhvr>
-                                      <p:tavLst>
-                                        <p:tav tm="0">
-                                          <p:val>
-                                            <p:strVal val="#ppt_h*0.7"/>
-                                          </p:val>
-                                        </p:tav>
-                                        <p:tav tm="100000">
-                                          <p:val>
-                                            <p:strVal val="#ppt_h"/>
-                                          </p:val>
-                                        </p:tav>
-                                      </p:tavLst>
-                                    </p:anim>
-                                    <p:animEffect transition="in" filter="fade">
-                                      <p:cBhvr>
-                                        <p:cTn id="8" dur="650"/>
-                                        <p:tgtEl>
-                                          <p:spTgt spid="3"/>
-                                        </p:tgtEl>
-                                      </p:cBhvr>
-                                    </p:animEffect>
-                                  </p:childTnLst>
-                                </p:cTn>
-                              </p:par>
-                              <p:par>
-                                <p:cTn id="16" presetID="53" presetClass="entr" presetSubtype="16" fill="hold" grpId="0" nodeType="withEffect">
-                                  <p:stCondLst>
-                                    <p:cond delay="200"/>
-                                  </p:stCondLst>
-                                  <p:childTnLst>
-                                    <p:set>
-                                      <p:cBhvr>
-                                        <p:cTn id="12" dur="1" fill="hold">
-                                          <p:stCondLst>
-                                            <p:cond delay="0"/>
-                                          </p:stCondLst>
-                                        </p:cTn>
-                                        <p:tgtEl>
-                                          <p:spTgt spid="4"/>
-                                        </p:tgtEl>
-                                        <p:attrNameLst>
-                                          <p:attrName>style.visibility</p:attrName>
-                                        </p:attrNameLst>
-                                      </p:cBhvr>
-                                      <p:to>
-                                        <p:strVal val="visible"/>
-                                      </p:to>
-                                    </p:set>
-                                    <p:anim calcmode="lin" valueType="num">
-                                      <p:cBhvr>
-                                        <p:cTn id="14" dur="650" decel="100000" fill="hold"/>
-                                        <p:tgtEl>
-                                          <p:spTgt spid="4"/>
-                                        </p:tgtEl>
-                                        <p:attrNameLst>
-                                          <p:attrName>ppt_w</p:attrName>
-                                        </p:attrNameLst>
-                                      </p:cBhvr>
-                                      <p:tavLst>
-                                        <p:tav tm="0">
-                                          <p:val>
-                                            <p:strVal val="#ppt_w*0.7"/>
-                                          </p:val>
-                                        </p:tav>
-                                        <p:tav tm="100000">
-                                          <p:val>
-                                            <p:strVal val="#ppt_w"/>
-                                          </p:val>
-                                        </p:tav>
-                                      </p:tavLst>
-                                    </p:anim>
-                                    <p:anim calcmode="lin" valueType="num">
-                                      <p:cBhvr>
-                                        <p:cTn id="15" dur="650" decel="100000" fill="hold"/>
-                                        <p:tgtEl>
-                                          <p:spTgt spid="4"/>
-                                        </p:tgtEl>
-                                        <p:attrNameLst>
-                                          <p:attrName>ppt_h</p:attrName>
-                                        </p:attrNameLst>
-                                      </p:cBhvr>
-                                      <p:tavLst>
-                                        <p:tav tm="0">
-                                          <p:val>
-                                            <p:strVal val="#ppt_h*0.7"/>
-                                          </p:val>
-                                        </p:tav>
-                                        <p:tav tm="100000">
-                                          <p:val>
-                                            <p:strVal val="#ppt_h"/>
-                                          </p:val>
-                                        </p:tav>
-                                      </p:tavLst>
-                                    </p:anim>
-                                    <p:animEffect transition="in" filter="fade">
-                                      <p:cBhvr>
-                                        <p:cTn id="13" dur="650"/>
-                                        <p:tgtEl>
-                                          <p:spTgt spid="4"/>
-                                        </p:tgtEl>
-                                      </p:cBhvr>
-                                    </p:animEffect>
-                                  </p:childTnLst>
-                                </p:cTn>
-                              </p:par>
-                              <p:par>
-                                <p:cTn id="21" presetID="42" presetClass="entr" presetSubtype="0" fill="hold" grpId="0" nodeType="withEffect">
-                                  <p:stCondLst>
-                                    <p:cond delay="400"/>
-                                  </p:stCondLst>
-                                  <p:childTnLst>
-                                    <p:set>
-                                      <p:cBhvr>
-                                        <p:cTn id="17" dur="1" fill="hold">
-                                          <p:stCondLst>
-                                            <p:cond delay="0"/>
-                                          </p:stCondLst>
-                                        </p:cTn>
-                                        <p:tgtEl>
-                                          <p:spTgt spid="5"/>
-                                        </p:tgtEl>
-                                        <p:attrNameLst>
-                                          <p:attrName>style.visibility</p:attrName>
-                                        </p:attrNameLst>
-                                      </p:cBhvr>
-                                      <p:to>
-                                        <p:strVal val="visible"/>
-                                      </p:to>
-                                    </p:set>
-                                    <p:animEffect transition="in" filter="fade">
-                                      <p:cBhvr>
-                                        <p:cTn id="18" dur="600"/>
-                                        <p:tgtEl>
-                                          <p:spTgt spid="5"/>
-                                        </p:tgtEl>
-                                      </p:cBhvr>
-                                    </p:animEffect>
-                                    <p:anim calcmode="lin" valueType="num">
-                                      <p:cBhvr>
-                                        <p:cTn id="19" dur="600" decel="100000" fill="hold"/>
-                                        <p:tgtEl>
-                                          <p:spTgt spid="5"/>
-                                        </p:tgtEl>
-                                        <p:attrNameLst>
-                                          <p:attrName>ppt_x</p:attrName>
-                                        </p:attrNameLst>
-                                      </p:cBhvr>
-                                      <p:tavLst>
-                                        <p:tav tm="0">
-                                          <p:val>
-                                            <p:strVal val="#ppt_x-.08"/>
-                                          </p:val>
-                                        </p:tav>
-                                        <p:tav tm="100000">
-                                          <p:val>
-                                            <p:strVal val="#ppt_x"/>
-                                          </p:val>
-                                        </p:tav>
-                                      </p:tavLst>
-                                    </p:anim>
-                                    <p:anim calcmode="lin" valueType="num">
-                                      <p:cBhvr>
-                                        <p:cTn id="20" dur="600" decel="100000" fill="hold"/>
-                                        <p:tgtEl>
-                                          <p:spTgt spid="5"/>
-                                        </p:tgtEl>
-                                        <p:attrNameLst>
-                                          <p:attrName>ppt_y</p:attrName>
-                                        </p:attrNameLst>
-                                      </p:cBhvr>
-                                      <p:tavLst>
-                                        <p:tav tm="0">
-                                          <p:val>
-                                            <p:strVal val="#ppt_y"/>
-                                          </p:val>
-                                        </p:tav>
-                                        <p:tav tm="100000">
-                                          <p:val>
-                                            <p:strVal val="#ppt_y"/>
-                                          </p:val>
-                                        </p:tav>
-                                      </p:tavLst>
-                                    </p:anim>
-                                  </p:childTnLst>
-                                </p:cTn>
-                              </p:par>
-                              <p:par>
-                                <p:cTn id="26" presetID="42" presetClass="entr" presetSubtype="0" fill="hold" grpId="0" nodeType="withEffect">
-                                  <p:stCondLst>
-                                    <p:cond delay="400"/>
-                                  </p:stCondLst>
-                                  <p:childTnLst>
-                                    <p:set>
-                                      <p:cBhvr>
-                                        <p:cTn id="22" dur="1" fill="hold">
-                                          <p:stCondLst>
-                                            <p:cond delay="0"/>
-                                          </p:stCondLst>
-                                        </p:cTn>
-                                        <p:tgtEl>
-                                          <p:spTgt spid="6"/>
-                                        </p:tgtEl>
-                                        <p:attrNameLst>
-                                          <p:attrName>style.visibility</p:attrName>
-                                        </p:attrNameLst>
-                                      </p:cBhvr>
-                                      <p:to>
-                                        <p:strVal val="visible"/>
-                                      </p:to>
-                                    </p:set>
-                                    <p:animEffect transition="in" filter="fade">
-                                      <p:cBhvr>
-                                        <p:cTn id="23" dur="600"/>
-                                        <p:tgtEl>
-                                          <p:spTgt spid="6"/>
-                                        </p:tgtEl>
-                                      </p:cBhvr>
-                                    </p:animEffect>
-                                    <p:anim calcmode="lin" valueType="num">
-                                      <p:cBhvr>
-                                        <p:cTn id="24" dur="600" decel="100000" fill="hold"/>
-                                        <p:tgtEl>
-                                          <p:spTgt spid="6"/>
-                                        </p:tgtEl>
-                                        <p:attrNameLst>
-                                          <p:attrName>ppt_x</p:attrName>
-                                        </p:attrNameLst>
-                                      </p:cBhvr>
-                                      <p:tavLst>
-                                        <p:tav tm="0">
-                                          <p:val>
-                                            <p:strVal val="#ppt_x-.08"/>
-                                          </p:val>
-                                        </p:tav>
-                                        <p:tav tm="100000">
-                                          <p:val>
-                                            <p:strVal val="#ppt_x"/>
-                                          </p:val>
-                                        </p:tav>
-                                      </p:tavLst>
-                                    </p:anim>
-                                    <p:anim calcmode="lin" valueType="num">
-                                      <p:cBhvr>
-                                        <p:cTn id="25" dur="600" decel="100000" fill="hold"/>
-                                        <p:tgtEl>
-                                          <p:spTgt spid="6"/>
-                                        </p:tgtEl>
-                                        <p:attrNameLst>
-                                          <p:attrName>ppt_y</p:attrName>
-                                        </p:attrNameLst>
-                                      </p:cBhvr>
-                                      <p:tavLst>
-                                        <p:tav tm="0">
-                                          <p:val>
-                                            <p:strVal val="#ppt_y"/>
-                                          </p:val>
-                                        </p:tav>
-                                        <p:tav tm="100000">
-                                          <p:val>
-                                            <p:strVal val="#ppt_y"/>
-                                          </p:val>
-                                        </p:tav>
-                                      </p:tavLst>
-                                    </p:anim>
-                                  </p:childTnLst>
-                                </p:cTn>
-                              </p:par>
-                              <p:par>
-                                <p:cTn id="31" presetID="42" presetClass="entr" presetSubtype="0" fill="hold" grpId="0" nodeType="withEffect">
-                                  <p:stCondLst>
-                                    <p:cond delay="600"/>
-                                  </p:stCondLst>
-                                  <p:childTnLst>
-                                    <p:set>
-                                      <p:cBhvr>
-                                        <p:cTn id="27" dur="1" fill="hold">
-                                          <p:stCondLst>
-                                            <p:cond delay="0"/>
-                                          </p:stCondLst>
-                                        </p:cTn>
-                                        <p:tgtEl>
-                                          <p:spTgt spid="7"/>
-                                        </p:tgtEl>
-                                        <p:attrNameLst>
-                                          <p:attrName>style.visibility</p:attrName>
-                                        </p:attrNameLst>
-                                      </p:cBhvr>
-                                      <p:to>
-                                        <p:strVal val="visible"/>
-                                      </p:to>
-                                    </p:set>
-                                    <p:animEffect transition="in" filter="fade">
-                                      <p:cBhvr>
-                                        <p:cTn id="28" dur="600"/>
-                                        <p:tgtEl>
-                                          <p:spTgt spid="7"/>
-                                        </p:tgtEl>
-                                      </p:cBhvr>
-                                    </p:animEffect>
-                                    <p:anim calcmode="lin" valueType="num">
-                                      <p:cBhvr>
-                                        <p:cTn id="29" dur="600" decel="100000" fill="hold"/>
-                                        <p:tgtEl>
-                                          <p:spTgt spid="7"/>
-                                        </p:tgtEl>
-                                        <p:attrNameLst>
-                                          <p:attrName>ppt_x</p:attrName>
-                                        </p:attrNameLst>
-                                      </p:cBhvr>
-                                      <p:tavLst>
-                                        <p:tav tm="0">
-                                          <p:val>
-                                            <p:strVal val="#ppt_x-.08"/>
-                                          </p:val>
-                                        </p:tav>
-                                        <p:tav tm="100000">
-                                          <p:val>
-                                            <p:strVal val="#ppt_x"/>
-                                          </p:val>
-                                        </p:tav>
-                                      </p:tavLst>
-                                    </p:anim>
-                                    <p:anim calcmode="lin" valueType="num">
-                                      <p:cBhvr>
-                                        <p:cTn id="30" dur="600" decel="100000" fill="hold"/>
-                                        <p:tgtEl>
-                                          <p:spTgt spid="7"/>
-                                        </p:tgtEl>
-                                        <p:attrNameLst>
-                                          <p:attrName>ppt_y</p:attrName>
-                                        </p:attrNameLst>
-                                      </p:cBhvr>
-                                      <p:tavLst>
-                                        <p:tav tm="0">
-                                          <p:val>
-                                            <p:strVal val="#ppt_y"/>
-                                          </p:val>
-                                        </p:tav>
-                                        <p:tav tm="100000">
-                                          <p:val>
-                                            <p:strVal val="#ppt_y"/>
-                                          </p:val>
-                                        </p:tav>
-                                      </p:tavLst>
-                                    </p:anim>
-                                  </p:childTnLst>
-                                </p:cTn>
-                              </p:par>
-                              <p:par>
-                                <p:cTn id="36" presetID="42" presetClass="entr" presetSubtype="0" fill="hold" grpId="0" nodeType="withEffect">
-                                  <p:stCondLst>
-                                    <p:cond delay="600"/>
-                                  </p:stCondLst>
-                                  <p:childTnLst>
-                                    <p:set>
-                                      <p:cBhvr>
-                                        <p:cTn id="32" dur="1" fill="hold">
-                                          <p:stCondLst>
-                                            <p:cond delay="0"/>
-                                          </p:stCondLst>
-                                        </p:cTn>
-                                        <p:tgtEl>
-                                          <p:spTgt spid="8"/>
-                                        </p:tgtEl>
-                                        <p:attrNameLst>
-                                          <p:attrName>style.visibility</p:attrName>
-                                        </p:attrNameLst>
-                                      </p:cBhvr>
-                                      <p:to>
-                                        <p:strVal val="visible"/>
-                                      </p:to>
-                                    </p:set>
-                                    <p:animEffect transition="in" filter="fade">
-                                      <p:cBhvr>
-                                        <p:cTn id="33" dur="600"/>
-                                        <p:tgtEl>
-                                          <p:spTgt spid="8"/>
-                                        </p:tgtEl>
-                                      </p:cBhvr>
-                                    </p:animEffect>
-                                    <p:anim calcmode="lin" valueType="num">
-                                      <p:cBhvr>
-                                        <p:cTn id="34" dur="600" decel="100000" fill="hold"/>
-                                        <p:tgtEl>
-                                          <p:spTgt spid="8"/>
-                                        </p:tgtEl>
-                                        <p:attrNameLst>
-                                          <p:attrName>ppt_x</p:attrName>
-                                        </p:attrNameLst>
-                                      </p:cBhvr>
-                                      <p:tavLst>
-                                        <p:tav tm="0">
-                                          <p:val>
-                                            <p:strVal val="#ppt_x-.08"/>
-                                          </p:val>
-                                        </p:tav>
-                                        <p:tav tm="100000">
-                                          <p:val>
-                                            <p:strVal val="#ppt_x"/>
-                                          </p:val>
-                                        </p:tav>
-                                      </p:tavLst>
-                                    </p:anim>
-                                    <p:anim calcmode="lin" valueType="num">
-                                      <p:cBhvr>
-                                        <p:cTn id="35" dur="600" decel="100000" fill="hold"/>
-                                        <p:tgtEl>
-                                          <p:spTgt spid="8"/>
-                                        </p:tgtEl>
-                                        <p:attrNameLst>
-                                          <p:attrName>ppt_y</p:attrName>
-                                        </p:attrNameLst>
-                                      </p:cBhvr>
-                                      <p:tavLst>
-                                        <p:tav tm="0">
-                                          <p:val>
-                                            <p:strVal val="#ppt_y"/>
-                                          </p:val>
-                                        </p:tav>
-                                        <p:tav tm="100000">
-                                          <p:val>
-                                            <p:strVal val="#ppt_y"/>
-                                          </p:val>
-                                        </p:tav>
-                                      </p:tavLst>
-                                    </p:anim>
-                                  </p:childTnLst>
-                                </p:cTn>
-                              </p:par>
-                              <p:par>
-                                <p:cTn id="41" presetID="42" presetClass="entr" presetSubtype="0" fill="hold" grpId="0" nodeType="withEffect">
-                                  <p:stCondLst>
-                                    <p:cond delay="800"/>
-                                  </p:stCondLst>
-                                  <p:childTnLst>
-                                    <p:set>
-                                      <p:cBhvr>
-                                        <p:cTn id="37" dur="1" fill="hold">
-                                          <p:stCondLst>
-                                            <p:cond delay="0"/>
-                                          </p:stCondLst>
-                                        </p:cTn>
-                                        <p:tgtEl>
-                                          <p:spTgt spid="9"/>
-                                        </p:tgtEl>
-                                        <p:attrNameLst>
-                                          <p:attrName>style.visibility</p:attrName>
-                                        </p:attrNameLst>
-                                      </p:cBhvr>
-                                      <p:to>
-                                        <p:strVal val="visible"/>
-                                      </p:to>
-                                    </p:set>
-                                    <p:animEffect transition="in" filter="fade">
-                                      <p:cBhvr>
-                                        <p:cTn id="38" dur="600"/>
-                                        <p:tgtEl>
-                                          <p:spTgt spid="9"/>
-                                        </p:tgtEl>
-                                      </p:cBhvr>
-                                    </p:animEffect>
-                                    <p:anim calcmode="lin" valueType="num">
-                                      <p:cBhvr>
-                                        <p:cTn id="39" dur="600" decel="100000" fill="hold"/>
-                                        <p:tgtEl>
-                                          <p:spTgt spid="9"/>
-                                        </p:tgtEl>
-                                        <p:attrNameLst>
-                                          <p:attrName>ppt_x</p:attrName>
-                                        </p:attrNameLst>
-                                      </p:cBhvr>
-                                      <p:tavLst>
-                                        <p:tav tm="0">
-                                          <p:val>
-                                            <p:strVal val="#ppt_x-.08"/>
-                                          </p:val>
-                                        </p:tav>
-                                        <p:tav tm="100000">
-                                          <p:val>
-                                            <p:strVal val="#ppt_x"/>
-                                          </p:val>
-                                        </p:tav>
-                                      </p:tavLst>
-                                    </p:anim>
-                                    <p:anim calcmode="lin" valueType="num">
-                                      <p:cBhvr>
-                                        <p:cTn id="40" dur="600" decel="100000" fill="hold"/>
-                                        <p:tgtEl>
-                                          <p:spTgt spid="9"/>
-                                        </p:tgtEl>
-                                        <p:attrNameLst>
-                                          <p:attrName>ppt_y</p:attrName>
-                                        </p:attrNameLst>
-                                      </p:cBhvr>
-                                      <p:tavLst>
-                                        <p:tav tm="0">
-                                          <p:val>
-                                            <p:strVal val="#ppt_y"/>
-                                          </p:val>
-                                        </p:tav>
-                                        <p:tav tm="100000">
-                                          <p:val>
-                                            <p:strVal val="#ppt_y"/>
-                                          </p:val>
-                                        </p:tav>
-                                      </p:tavLst>
-                                    </p:anim>
-                                  </p:childTnLst>
-                                </p:cTn>
-                              </p:par>
-                              <p:par>
-                                <p:cTn id="46" presetID="42" presetClass="entr" presetSubtype="0" fill="hold" grpId="0" nodeType="withEffect">
-                                  <p:stCondLst>
-                                    <p:cond delay="800"/>
-                                  </p:stCondLst>
-                                  <p:childTnLst>
-                                    <p:set>
-                                      <p:cBhvr>
-                                        <p:cTn id="42" dur="1" fill="hold">
-                                          <p:stCondLst>
-                                            <p:cond delay="0"/>
-                                          </p:stCondLst>
-                                        </p:cTn>
-                                        <p:tgtEl>
-                                          <p:spTgt spid="10"/>
-                                        </p:tgtEl>
-                                        <p:attrNameLst>
-                                          <p:attrName>style.visibility</p:attrName>
-                                        </p:attrNameLst>
-                                      </p:cBhvr>
-                                      <p:to>
-                                        <p:strVal val="visible"/>
-                                      </p:to>
-                                    </p:set>
-                                    <p:animEffect transition="in" filter="fade">
-                                      <p:cBhvr>
-                                        <p:cTn id="43" dur="600"/>
-                                        <p:tgtEl>
-                                          <p:spTgt spid="10"/>
-                                        </p:tgtEl>
-                                      </p:cBhvr>
-                                    </p:animEffect>
-                                    <p:anim calcmode="lin" valueType="num">
-                                      <p:cBhvr>
-                                        <p:cTn id="44" dur="600" decel="100000" fill="hold"/>
-                                        <p:tgtEl>
-                                          <p:spTgt spid="10"/>
-                                        </p:tgtEl>
-                                        <p:attrNameLst>
-                                          <p:attrName>ppt_x</p:attrName>
-                                        </p:attrNameLst>
-                                      </p:cBhvr>
-                                      <p:tavLst>
-                                        <p:tav tm="0">
-                                          <p:val>
-                                            <p:strVal val="#ppt_x-.08"/>
-                                          </p:val>
-                                        </p:tav>
-                                        <p:tav tm="100000">
-                                          <p:val>
-                                            <p:strVal val="#ppt_x"/>
-                                          </p:val>
-                                        </p:tav>
-                                      </p:tavLst>
-                                    </p:anim>
-                                    <p:anim calcmode="lin" valueType="num">
-                                      <p:cBhvr>
-                                        <p:cTn id="45" dur="600" decel="100000" fill="hold"/>
-                                        <p:tgtEl>
-                                          <p:spTgt spid="10"/>
-                                        </p:tgtEl>
-                                        <p:attrNameLst>
-                                          <p:attrName>ppt_y</p:attrName>
-                                        </p:attrNameLst>
-                                      </p:cBhvr>
-                                      <p:tavLst>
-                                        <p:tav tm="0">
-                                          <p:val>
-                                            <p:strVal val="#ppt_y"/>
-                                          </p:val>
-                                        </p:tav>
-                                        <p:tav tm="100000">
-                                          <p:val>
-                                            <p:strVal val="#ppt_y"/>
-                                          </p:val>
-                                        </p:tav>
-                                      </p:tavLst>
-                                    </p:anim>
-                                  </p:childTnLst>
-                                </p:cTn>
-                              </p:par>
-                              <p:par>
-                                <p:cTn id="51" presetID="42" presetClass="entr" presetSubtype="0" fill="hold" grpId="0" nodeType="withEffect">
-                                  <p:stCondLst>
-                                    <p:cond delay="1000"/>
-                                  </p:stCondLst>
-                                  <p:childTnLst>
-                                    <p:set>
-                                      <p:cBhvr>
-                                        <p:cTn id="47" dur="1" fill="hold">
-                                          <p:stCondLst>
-                                            <p:cond delay="0"/>
-                                          </p:stCondLst>
-                                        </p:cTn>
-                                        <p:tgtEl>
-                                          <p:spTgt spid="11"/>
-                                        </p:tgtEl>
-                                        <p:attrNameLst>
-                                          <p:attrName>style.visibility</p:attrName>
-                                        </p:attrNameLst>
-                                      </p:cBhvr>
-                                      <p:to>
-                                        <p:strVal val="visible"/>
-                                      </p:to>
-                                    </p:set>
-                                    <p:animEffect transition="in" filter="fade">
-                                      <p:cBhvr>
-                                        <p:cTn id="48" dur="600"/>
-                                        <p:tgtEl>
-                                          <p:spTgt spid="11"/>
-                                        </p:tgtEl>
-                                      </p:cBhvr>
-                                    </p:animEffect>
-                                    <p:anim calcmode="lin" valueType="num">
-                                      <p:cBhvr>
-                                        <p:cTn id="49" dur="600" decel="100000" fill="hold"/>
-                                        <p:tgtEl>
-                                          <p:spTgt spid="11"/>
-                                        </p:tgtEl>
-                                        <p:attrNameLst>
-                                          <p:attrName>ppt_x</p:attrName>
-                                        </p:attrNameLst>
-                                      </p:cBhvr>
-                                      <p:tavLst>
-                                        <p:tav tm="0">
-                                          <p:val>
-                                            <p:strVal val="#ppt_x-.08"/>
-                                          </p:val>
-                                        </p:tav>
-                                        <p:tav tm="100000">
-                                          <p:val>
-                                            <p:strVal val="#ppt_x"/>
-                                          </p:val>
-                                        </p:tav>
-                                      </p:tavLst>
-                                    </p:anim>
-                                    <p:anim calcmode="lin" valueType="num">
-                                      <p:cBhvr>
-                                        <p:cTn id="50" dur="600" decel="100000" fill="hold"/>
-                                        <p:tgtEl>
-                                          <p:spTgt spid="11"/>
-                                        </p:tgtEl>
-                                        <p:attrNameLst>
-                                          <p:attrName>ppt_y</p:attrName>
-                                        </p:attrNameLst>
-                                      </p:cBhvr>
-                                      <p:tavLst>
-                                        <p:tav tm="0">
-                                          <p:val>
-                                            <p:strVal val="#ppt_y"/>
-                                          </p:val>
-                                        </p:tav>
-                                        <p:tav tm="100000">
-                                          <p:val>
-                                            <p:strVal val="#ppt_y"/>
-                                          </p:val>
-                                        </p:tav>
-                                      </p:tavLst>
-                                    </p:anim>
-                                  </p:childTnLst>
-                                </p:cTn>
-                              </p:par>
-                              <p:par>
-                                <p:cTn id="56" presetID="42" presetClass="entr" presetSubtype="0" fill="hold" grpId="0" nodeType="withEffect">
-                                  <p:stCondLst>
-                                    <p:cond delay="1000"/>
-                                  </p:stCondLst>
-                                  <p:childTnLst>
-                                    <p:set>
-                                      <p:cBhvr>
-                                        <p:cTn id="52" dur="1" fill="hold">
-                                          <p:stCondLst>
-                                            <p:cond delay="0"/>
-                                          </p:stCondLst>
-                                        </p:cTn>
-                                        <p:tgtEl>
-                                          <p:spTgt spid="12"/>
-                                        </p:tgtEl>
-                                        <p:attrNameLst>
-                                          <p:attrName>style.visibility</p:attrName>
-                                        </p:attrNameLst>
-                                      </p:cBhvr>
-                                      <p:to>
-                                        <p:strVal val="visible"/>
-                                      </p:to>
-                                    </p:set>
-                                    <p:animEffect transition="in" filter="fade">
-                                      <p:cBhvr>
-                                        <p:cTn id="53" dur="600"/>
-                                        <p:tgtEl>
-                                          <p:spTgt spid="12"/>
-                                        </p:tgtEl>
-                                      </p:cBhvr>
-                                    </p:animEffect>
-                                    <p:anim calcmode="lin" valueType="num">
-                                      <p:cBhvr>
-                                        <p:cTn id="54" dur="600" decel="100000" fill="hold"/>
-                                        <p:tgtEl>
-                                          <p:spTgt spid="12"/>
-                                        </p:tgtEl>
-                                        <p:attrNameLst>
-                                          <p:attrName>ppt_x</p:attrName>
-                                        </p:attrNameLst>
-                                      </p:cBhvr>
-                                      <p:tavLst>
-                                        <p:tav tm="0">
-                                          <p:val>
-                                            <p:strVal val="#ppt_x-.08"/>
-                                          </p:val>
-                                        </p:tav>
-                                        <p:tav tm="100000">
-                                          <p:val>
-                                            <p:strVal val="#ppt_x"/>
-                                          </p:val>
-                                        </p:tav>
-                                      </p:tavLst>
-                                    </p:anim>
-                                    <p:anim calcmode="lin" valueType="num">
-                                      <p:cBhvr>
-                                        <p:cTn id="55" dur="600" decel="100000" fill="hold"/>
-                                        <p:tgtEl>
-                                          <p:spTgt spid="12"/>
-                                        </p:tgtEl>
-                                        <p:attrNameLst>
-                                          <p:attrName>ppt_y</p:attrName>
-                                        </p:attrNameLst>
-                                      </p:cBhvr>
-                                      <p:tavLst>
-                                        <p:tav tm="0">
-                                          <p:val>
-                                            <p:strVal val="#ppt_y"/>
-                                          </p:val>
-                                        </p:tav>
-                                        <p:tav tm="100000">
-                                          <p:val>
-                                            <p:strVal val="#ppt_y"/>
-                                          </p:val>
-                                        </p:tav>
-                                      </p:tavLst>
-                                    </p:anim>
-                                  </p:childTnLst>
-                                </p:cTn>
-                              </p:par>
-                              <p:par>
-                                <p:cTn id="61" presetID="42" presetClass="entr" presetSubtype="0" fill="hold" grpId="0" nodeType="withEffect">
-                                  <p:stCondLst>
-                                    <p:cond delay="1200"/>
-                                  </p:stCondLst>
-                                  <p:childTnLst>
-                                    <p:set>
-                                      <p:cBhvr>
-                                        <p:cTn id="57" dur="1" fill="hold">
-                                          <p:stCondLst>
-                                            <p:cond delay="0"/>
-                                          </p:stCondLst>
-                                        </p:cTn>
-                                        <p:tgtEl>
-                                          <p:spTgt spid="13"/>
-                                        </p:tgtEl>
-                                        <p:attrNameLst>
-                                          <p:attrName>style.visibility</p:attrName>
-                                        </p:attrNameLst>
-                                      </p:cBhvr>
-                                      <p:to>
-                                        <p:strVal val="visible"/>
-                                      </p:to>
-                                    </p:set>
-                                    <p:animEffect transition="in" filter="fade">
-                                      <p:cBhvr>
-                                        <p:cTn id="58" dur="600"/>
-                                        <p:tgtEl>
-                                          <p:spTgt spid="13"/>
-                                        </p:tgtEl>
-                                      </p:cBhvr>
-                                    </p:animEffect>
-                                    <p:anim calcmode="lin" valueType="num">
-                                      <p:cBhvr>
-                                        <p:cTn id="59" dur="600" decel="100000" fill="hold"/>
-                                        <p:tgtEl>
-                                          <p:spTgt spid="13"/>
-                                        </p:tgtEl>
-                                        <p:attrNameLst>
-                                          <p:attrName>ppt_x</p:attrName>
-                                        </p:attrNameLst>
-                                      </p:cBhvr>
-                                      <p:tavLst>
-                                        <p:tav tm="0">
-                                          <p:val>
-                                            <p:strVal val="#ppt_x-.08"/>
-                                          </p:val>
-                                        </p:tav>
-                                        <p:tav tm="100000">
-                                          <p:val>
-                                            <p:strVal val="#ppt_x"/>
-                                          </p:val>
-                                        </p:tav>
-                                      </p:tavLst>
-                                    </p:anim>
-                                    <p:anim calcmode="lin" valueType="num">
-                                      <p:cBhvr>
-                                        <p:cTn id="60" dur="600" decel="100000" fill="hold"/>
-                                        <p:tgtEl>
-                                          <p:spTgt spid="13"/>
-                                        </p:tgtEl>
-                                        <p:attrNameLst>
-                                          <p:attrName>ppt_y</p:attrName>
-                                        </p:attrNameLst>
-                                      </p:cBhvr>
-                                      <p:tavLst>
-                                        <p:tav tm="0">
-                                          <p:val>
-                                            <p:strVal val="#ppt_y"/>
-                                          </p:val>
-                                        </p:tav>
-                                        <p:tav tm="100000">
-                                          <p:val>
-                                            <p:strVal val="#ppt_y"/>
-                                          </p:val>
-                                        </p:tav>
-                                      </p:tavLst>
-                                    </p:anim>
-                                  </p:childTnLst>
-                                </p:cTn>
-                              </p:par>
-                              <p:par>
-                                <p:cTn id="66" presetID="42" presetClass="entr" presetSubtype="0" fill="hold" grpId="0" nodeType="withEffect">
-                                  <p:stCondLst>
-                                    <p:cond delay="1200"/>
-                                  </p:stCondLst>
-                                  <p:childTnLst>
-                                    <p:set>
-                                      <p:cBhvr>
-                                        <p:cTn id="62" dur="1" fill="hold">
-                                          <p:stCondLst>
-                                            <p:cond delay="0"/>
-                                          </p:stCondLst>
-                                        </p:cTn>
-                                        <p:tgtEl>
-                                          <p:spTgt spid="14"/>
-                                        </p:tgtEl>
-                                        <p:attrNameLst>
-                                          <p:attrName>style.visibility</p:attrName>
-                                        </p:attrNameLst>
-                                      </p:cBhvr>
-                                      <p:to>
-                                        <p:strVal val="visible"/>
-                                      </p:to>
-                                    </p:set>
-                                    <p:animEffect transition="in" filter="fade">
-                                      <p:cBhvr>
-                                        <p:cTn id="63" dur="600"/>
-                                        <p:tgtEl>
-                                          <p:spTgt spid="14"/>
-                                        </p:tgtEl>
-                                      </p:cBhvr>
-                                    </p:animEffect>
-                                    <p:anim calcmode="lin" valueType="num">
-                                      <p:cBhvr>
-                                        <p:cTn id="64" dur="600" decel="100000" fill="hold"/>
-                                        <p:tgtEl>
-                                          <p:spTgt spid="14"/>
-                                        </p:tgtEl>
-                                        <p:attrNameLst>
-                                          <p:attrName>ppt_x</p:attrName>
-                                        </p:attrNameLst>
-                                      </p:cBhvr>
-                                      <p:tavLst>
-                                        <p:tav tm="0">
-                                          <p:val>
-                                            <p:strVal val="#ppt_x-.08"/>
-                                          </p:val>
-                                        </p:tav>
-                                        <p:tav tm="100000">
-                                          <p:val>
-                                            <p:strVal val="#ppt_x"/>
-                                          </p:val>
-                                        </p:tav>
-                                      </p:tavLst>
-                                    </p:anim>
-                                    <p:anim calcmode="lin" valueType="num">
-                                      <p:cBhvr>
-                                        <p:cTn id="65" dur="600" decel="100000" fill="hold"/>
-                                        <p:tgtEl>
-                                          <p:spTgt spid="14"/>
-                                        </p:tgtEl>
-                                        <p:attrNameLst>
-                                          <p:attrName>ppt_y</p:attrName>
-                                        </p:attrNameLst>
-                                      </p:cBhvr>
-                                      <p:tavLst>
-                                        <p:tav tm="0">
-                                          <p:val>
-                                            <p:strVal val="#ppt_y"/>
-                                          </p:val>
-                                        </p:tav>
-                                        <p:tav tm="100000">
-                                          <p:val>
-                                            <p:strVal val="#ppt_y"/>
-                                          </p:val>
-                                        </p:tav>
-                                      </p:tavLst>
-                                    </p:anim>
-                                  </p:childTnLst>
-                                </p:cTn>
-                              </p:par>
-                              <p:par>
-                                <p:cTn id="71" presetID="53" presetClass="entr" presetSubtype="16" fill="hold" grpId="0" nodeType="withEffect">
-                                  <p:stCondLst>
-                                    <p:cond delay="1400"/>
-                                  </p:stCondLst>
-                                  <p:childTnLst>
-                                    <p:set>
-                                      <p:cBhvr>
-                                        <p:cTn id="67" dur="1" fill="hold">
-                                          <p:stCondLst>
-                                            <p:cond delay="0"/>
-                                          </p:stCondLst>
-                                        </p:cTn>
-                                        <p:tgtEl>
-                                          <p:spTgt spid="15"/>
-                                        </p:tgtEl>
-                                        <p:attrNameLst>
-                                          <p:attrName>style.visibility</p:attrName>
-                                        </p:attrNameLst>
-                                      </p:cBhvr>
-                                      <p:to>
-                                        <p:strVal val="visible"/>
-                                      </p:to>
-                                    </p:set>
-                                    <p:anim calcmode="lin" valueType="num">
-                                      <p:cBhvr>
-                                        <p:cTn id="69" dur="650" decel="100000" fill="hold"/>
-                                        <p:tgtEl>
-                                          <p:spTgt spid="15"/>
-                                        </p:tgtEl>
-                                        <p:attrNameLst>
-                                          <p:attrName>ppt_w</p:attrName>
-                                        </p:attrNameLst>
-                                      </p:cBhvr>
-                                      <p:tavLst>
-                                        <p:tav tm="0">
-                                          <p:val>
-                                            <p:strVal val="#ppt_w*0.7"/>
-                                          </p:val>
-                                        </p:tav>
-                                        <p:tav tm="100000">
-                                          <p:val>
-                                            <p:strVal val="#ppt_w"/>
-                                          </p:val>
-                                        </p:tav>
-                                      </p:tavLst>
-                                    </p:anim>
-                                    <p:anim calcmode="lin" valueType="num">
-                                      <p:cBhvr>
-                                        <p:cTn id="70" dur="650" decel="100000" fill="hold"/>
-                                        <p:tgtEl>
-                                          <p:spTgt spid="15"/>
-                                        </p:tgtEl>
-                                        <p:attrNameLst>
-                                          <p:attrName>ppt_h</p:attrName>
-                                        </p:attrNameLst>
-                                      </p:cBhvr>
-                                      <p:tavLst>
-                                        <p:tav tm="0">
-                                          <p:val>
-                                            <p:strVal val="#ppt_h*0.7"/>
-                                          </p:val>
-                                        </p:tav>
-                                        <p:tav tm="100000">
-                                          <p:val>
-                                            <p:strVal val="#ppt_h"/>
-                                          </p:val>
-                                        </p:tav>
-                                      </p:tavLst>
-                                    </p:anim>
-                                    <p:animEffect transition="in" filter="fade">
-                                      <p:cBhvr>
-                                        <p:cTn id="68" dur="650"/>
-                                        <p:tgtEl>
-                                          <p:spTgt spid="15"/>
-                                        </p:tgtEl>
-                                      </p:cBhvr>
-                                    </p:animEffect>
-                                  </p:childTnLst>
-                                </p:cTn>
-                              </p:par>
-                              <p:par>
-                                <p:cTn id="74" presetID="10" presetClass="entr" presetSubtype="0" fill="hold" grpId="0" nodeType="withEffect">
-                                  <p:stCondLst>
-                                    <p:cond delay="1600"/>
-                                  </p:stCondLst>
-                                  <p:childTnLst>
-                                    <p:set>
-                                      <p:cBhvr>
-                                        <p:cTn id="72" dur="1" fill="hold">
-                                          <p:stCondLst>
-                                            <p:cond delay="0"/>
-                                          </p:stCondLst>
-                                        </p:cTn>
-                                        <p:tgtEl>
-                                          <p:spTgt spid="16"/>
-                                        </p:tgtEl>
-                                        <p:attrNameLst>
-                                          <p:attrName>style.visibility</p:attrName>
-                                        </p:attrNameLst>
-                                      </p:cBhvr>
-                                      <p:to>
-                                        <p:strVal val="visible"/>
-                                      </p:to>
-                                    </p:set>
-                                    <p:animEffect transition="in" filter="fade">
-                                      <p:cBhvr>
-                                        <p:cTn id="73" dur="500"/>
-                                        <p:tgtEl>
-                                          <p:spTgt spid="16"/>
-                                        </p:tgtEl>
-                                      </p:cBhvr>
-                                    </p:animEffect>
-                                  </p:childTnLst>
-                                </p:cTn>
-                              </p:par>
-                              <p:par>
-                                <p:cTn id="77" presetID="10" presetClass="entr" presetSubtype="0" fill="hold" grpId="0" nodeType="withEffect">
-                                  <p:stCondLst>
-                                    <p:cond delay="1800"/>
-                                  </p:stCondLst>
-                                  <p:childTnLst>
-                                    <p:set>
-                                      <p:cBhvr>
-                                        <p:cTn id="75" dur="1" fill="hold">
-                                          <p:stCondLst>
-                                            <p:cond delay="0"/>
-                                          </p:stCondLst>
-                                        </p:cTn>
-                                        <p:tgtEl>
-                                          <p:spTgt spid="17"/>
-                                        </p:tgtEl>
-                                        <p:attrNameLst>
-                                          <p:attrName>style.visibility</p:attrName>
-                                        </p:attrNameLst>
-                                      </p:cBhvr>
-                                      <p:to>
-                                        <p:strVal val="visible"/>
-                                      </p:to>
-                                    </p:set>
-                                    <p:animEffect transition="in" filter="fade">
-                                      <p:cBhvr>
-                                        <p:cTn id="76" dur="500"/>
-                                        <p:tgtEl>
-                                          <p:spTgt spid="17"/>
-                                        </p:tgtEl>
-                                      </p:cBhvr>
-                                    </p:animEffect>
-                                  </p:childTnLst>
-                                </p:cTn>
-                              </p:par>
-                              <p:par>
-                                <p:cTn id="82" presetID="53" presetClass="entr" presetSubtype="16" fill="hold" grpId="0" nodeType="withEffect">
-                                  <p:stCondLst>
-                                    <p:cond delay="2000"/>
-                                  </p:stCondLst>
-                                  <p:childTnLst>
-                                    <p:set>
-                                      <p:cBhvr>
-                                        <p:cTn id="78" dur="1" fill="hold">
-                                          <p:stCondLst>
-                                            <p:cond delay="0"/>
-                                          </p:stCondLst>
-                                        </p:cTn>
-                                        <p:tgtEl>
-                                          <p:spTgt spid="18"/>
-                                        </p:tgtEl>
-                                        <p:attrNameLst>
-                                          <p:attrName>style.visibility</p:attrName>
-                                        </p:attrNameLst>
-                                      </p:cBhvr>
-                                      <p:to>
-                                        <p:strVal val="visible"/>
-                                      </p:to>
-                                    </p:set>
-                                    <p:anim calcmode="lin" valueType="num">
-                                      <p:cBhvr>
-                                        <p:cTn id="80" dur="650" decel="100000" fill="hold"/>
-                                        <p:tgtEl>
-                                          <p:spTgt spid="18"/>
-                                        </p:tgtEl>
-                                        <p:attrNameLst>
-                                          <p:attrName>ppt_w</p:attrName>
-                                        </p:attrNameLst>
-                                      </p:cBhvr>
-                                      <p:tavLst>
-                                        <p:tav tm="0">
-                                          <p:val>
-                                            <p:strVal val="#ppt_w*0.7"/>
-                                          </p:val>
-                                        </p:tav>
-                                        <p:tav tm="100000">
-                                          <p:val>
-                                            <p:strVal val="#ppt_w"/>
-                                          </p:val>
-                                        </p:tav>
-                                      </p:tavLst>
-                                    </p:anim>
-                                    <p:anim calcmode="lin" valueType="num">
-                                      <p:cBhvr>
-                                        <p:cTn id="81" dur="650" decel="100000" fill="hold"/>
-                                        <p:tgtEl>
-                                          <p:spTgt spid="18"/>
-                                        </p:tgtEl>
-                                        <p:attrNameLst>
-                                          <p:attrName>ppt_h</p:attrName>
-                                        </p:attrNameLst>
-                                      </p:cBhvr>
-                                      <p:tavLst>
-                                        <p:tav tm="0">
-                                          <p:val>
-                                            <p:strVal val="#ppt_h*0.7"/>
-                                          </p:val>
-                                        </p:tav>
-                                        <p:tav tm="100000">
-                                          <p:val>
-                                            <p:strVal val="#ppt_h"/>
-                                          </p:val>
-                                        </p:tav>
-                                      </p:tavLst>
-                                    </p:anim>
-                                    <p:animEffect transition="in" filter="fade">
-                                      <p:cBhvr>
-                                        <p:cTn id="79" dur="650"/>
-                                        <p:tgtEl>
-                                          <p:spTgt spid="18"/>
-                                        </p:tgtEl>
-                                      </p:cBhvr>
-                                    </p:animEffect>
-                                  </p:childTnLst>
-                                </p:cTn>
-                              </p:par>
-                              <p:par>
-                                <p:cTn id="85" presetID="10" presetClass="entr" presetSubtype="0" fill="hold" grpId="0" nodeType="withEffect">
-                                  <p:stCondLst>
-                                    <p:cond delay="2200"/>
-                                  </p:stCondLst>
-                                  <p:childTnLst>
-                                    <p:set>
-                                      <p:cBhvr>
-                                        <p:cTn id="83" dur="1" fill="hold">
-                                          <p:stCondLst>
-                                            <p:cond delay="0"/>
-                                          </p:stCondLst>
-                                        </p:cTn>
-                                        <p:tgtEl>
-                                          <p:spTgt spid="19"/>
-                                        </p:tgtEl>
-                                        <p:attrNameLst>
-                                          <p:attrName>style.visibility</p:attrName>
-                                        </p:attrNameLst>
-                                      </p:cBhvr>
-                                      <p:to>
-                                        <p:strVal val="visible"/>
-                                      </p:to>
-                                    </p:set>
-                                    <p:animEffect transition="in" filter="fade">
-                                      <p:cBhvr>
-                                        <p:cTn id="84" dur="500"/>
-                                        <p:tgtEl>
-                                          <p:spTgt spid="19"/>
-                                        </p:tgtEl>
-                                      </p:cBhvr>
-                                    </p:animEffect>
-                                  </p:childTnLst>
-                                </p:cTn>
-                              </p:par>
-                              <p:par>
-                                <p:cTn id="88" presetID="10" presetClass="entr" presetSubtype="0" fill="hold" grpId="0" nodeType="withEffect">
-                                  <p:stCondLst>
-                                    <p:cond delay="2400"/>
-                                  </p:stCondLst>
-                                  <p:childTnLst>
-                                    <p:set>
-                                      <p:cBhvr>
-                                        <p:cTn id="86" dur="1" fill="hold">
-                                          <p:stCondLst>
-                                            <p:cond delay="0"/>
-                                          </p:stCondLst>
-                                        </p:cTn>
-                                        <p:tgtEl>
-                                          <p:spTgt spid="25"/>
-                                        </p:tgtEl>
-                                        <p:attrNameLst>
-                                          <p:attrName>style.visibility</p:attrName>
-                                        </p:attrNameLst>
-                                      </p:cBhvr>
-                                      <p:to>
-                                        <p:strVal val="visible"/>
-                                      </p:to>
-                                    </p:set>
-                                    <p:animEffect transition="in" filter="fade">
-                                      <p:cBhvr>
-                                        <p:cTn id="87" dur="500"/>
-                                        <p:tgtEl>
-                                          <p:spTgt spid="25"/>
-                                        </p:tgtEl>
-                                      </p:cBhvr>
-                                    </p:animEffect>
-                                  </p:childTnLst>
-                                </p:cTn>
-                              </p:par>
-                            </p:childTnLst>
-                          </p:cTn>
-                        </p:par>
-                      </p:childTnLst>
-                    </p:cTn>
-                  </p:par>
-                </p:childTnLst>
-              </p:cTn>
-              <p:prevCondLst>
-                <p:cond evt="onPrev" delay="0">
-                  <p:tgtEl>
-                    <p:sldTgt/>
-                  </p:tgtEl>
-                </p:cond>
-              </p:prevCondLst>
-              <p:nextCondLst>
-                <p:cond evt="onNext" delay="0">
-                  <p:tgtEl>
-                    <p:sldTgt/>
-                  </p:tgtEl>
-                </p:cond>
-              </p:nextCondLst>
-            </p:seq>
-          </p:childTnLst>
-        </p:cTn>
-      </p:par>
-    </p:tnLst>
-    <p:bldLst>
-      <p:bldP spid="2" grpId="0" animBg="1"/>
-      <p:bldP spid="6" grpId="0" animBg="1"/>
-      <p:bldP spid="8" grpId="0" animBg="1"/>
-      <p:bldP spid="10" grpId="0" animBg="1"/>
-      <p:bldP spid="12" grpId="0" animBg="1"/>
-      <p:bldP spid="14" grpId="0" animBg="1"/>
-      <p:bldP spid="16" grpId="0" animBg="1"/>
-      <p:bldP spid="17" grpId="0" animBg="1"/>
-      <p:bldP spid="18" grpId="0" animBg="1"/>
-      <p:bldP spid="19" grpId="0" animBg="1"/>
       <p:bldP spid="25" grpId="0" animBg="1"/>
     </p:bldLst>
   </p:timing>

--- a/documentation/Nexus_Documentation/Nexus_Presentation_animated.pptx
+++ b/documentation/Nexus_Documentation/Nexus_Presentation_animated.pptx
@@ -123,27 +123,27 @@
   <p:extLst>
     <p:ext uri="{521415D9-36F7-43E2-AB2F-B90AF26B5E84}">
       <p14:sectionLst xmlns:p14="http://schemas.microsoft.com/office/powerpoint/2010/main">
-        <p14:section name="Introduction" id="{b3f5d123-1a3d-2dff-be96-845a293f6c1f}">
+        <p14:section name="Introduction" id="{69b7fc02-057b-32ed-569e-693c856a1545}">
           <p14:sldIdLst>
             <p14:sldId id="256"/>
             <p14:sldId id="257"/>
             <p14:sldId id="258"/>
           </p14:sldIdLst>
         </p14:section>
-        <p14:section name="Problem and solution" id="{6a46c6fb-8a0d-5888-a669-06c97fc297e7}">
+        <p14:section name="Problem and solution" id="{12bc3e6b-9695-686a-cf56-9de082ca2526}">
           <p14:sldIdLst>
             <p14:sldId id="259"/>
             <p14:sldId id="260"/>
           </p14:sldIdLst>
         </p14:section>
-        <p14:section name="Design" id="{38bf5e4d-c77d-c876-f1aa-83db6426eda1}">
+        <p14:section name="Design" id="{acf2ded9-c467-1caf-97a7-c7ec278a03c9}">
           <p14:sldIdLst>
             <p14:sldId id="261"/>
             <p14:sldId id="262"/>
             <p14:sldId id="263"/>
           </p14:sldIdLst>
         </p14:section>
-        <p14:section name="Business rules" id="{7b9275da-df37-a21b-c032-27af92bd02f1}">
+        <p14:section name="Business rules" id="{c05eea33-7d08-47f9-f8a6-453961947879}">
           <p14:sldIdLst>
             <p14:sldId id="264"/>
             <p14:sldId id="265"/>
@@ -151,19 +151,19 @@
             <p14:sldId id="267"/>
           </p14:sldIdLst>
         </p14:section>
-        <p14:section name="Interface" id="{23da28bb-2189-858f-5080-c53f9382f180}">
+        <p14:section name="Interface" id="{9f03a7e4-419f-f966-cbe6-272df00f9feb}">
           <p14:sldIdLst>
             <p14:sldId id="268"/>
             <p14:sldId id="269"/>
           </p14:sldIdLst>
         </p14:section>
-        <p14:section name="Quality" id="{3c934f4b-80af-7168-287e-93c6f6aa8910}">
+        <p14:section name="Quality" id="{ba2e0be1-1278-b69d-0f97-2329bed1779e}">
           <p14:sldIdLst>
             <p14:sldId id="270"/>
             <p14:sldId id="271"/>
           </p14:sldIdLst>
         </p14:section>
-        <p14:section name="Close" id="{ba2ecbb7-c4c4-9698-accd-ae381e0fd752}">
+        <p14:section name="Close" id="{e2a2e786-7415-8622-25d8-34c5aa628826}">
           <p14:sldIdLst>
             <p14:sldId id="272"/>
           </p14:sldIdLst>
@@ -1640,7 +1640,7 @@
           <a:p>
             <a:r>
               <a:rPr lang="en-US" dirty="0"/>
-              <a:t>Introduce each member of the group, their main area of work and which part of the presentation they will give.</a:t>
+              <a:t>Introduce each member of the group, the system role they own (Admin, Retail, Technical, Accounts, Customer), their main area of work and which part of the presentation they will give.</a:t>
             </a:r>
             <a:endParaRPr lang="en-US" dirty="0"/>
           </a:p>
@@ -19589,8 +19589,8 @@
         </p:nvSpPr>
         <p:spPr>
           <a:xfrm>
-            <a:off x="685800" y="2788920"/>
-            <a:ext cx="1847088" cy="685800"/>
+            <a:off x="640080" y="2743200"/>
+            <a:ext cx="1938528" cy="640080"/>
           </a:xfrm>
           <a:prstGeom prst="rect">
             <a:avLst/>
@@ -19625,8 +19625,8 @@
         </p:nvSpPr>
         <p:spPr>
           <a:xfrm>
-            <a:off x="685800" y="3474720"/>
-            <a:ext cx="1847088" cy="274320"/>
+            <a:off x="685800" y="3429000"/>
+            <a:ext cx="1847088" cy="256032"/>
           </a:xfrm>
           <a:prstGeom prst="rect">
             <a:avLst/>
@@ -19655,14 +19655,77 @@
       </p:sp>
       <p:sp>
         <p:nvSpPr>
-          <p:cNvPr id="8" name="a-up-w-tmf0"/>
+          <p:cNvPr id="8" name="a-up-w-tmr0"/>
+          <p:cNvSpPr/>
+          <p:nvPr/>
+        </p:nvSpPr>
+        <p:spPr>
+          <a:xfrm>
+            <a:off x="822960" y="3749040"/>
+            <a:ext cx="1572768" cy="329184"/>
+          </a:xfrm>
+          <a:prstGeom prst="roundRect">
+            <a:avLst>
+              <a:gd name="adj" fmla="val 50000"/>
+            </a:avLst>
+          </a:prstGeom>
+          <a:solidFill>
+            <a:schemeClr val="bg2"/>
+          </a:solidFill>
+          <a:ln w="6350">
+            <a:solidFill>
+              <a:srgbClr val="CBD5E1"/>
+            </a:solidFill>
+            <a:prstDash val="solid"/>
+          </a:ln>
+        </p:spPr>
+      </p:sp>
+      <p:sp>
+        <p:nvSpPr>
+          <p:cNvPr id="9" name="a-up-w-tmrt0"/>
           <p:cNvSpPr txBox="1"/>
           <p:nvPr/>
         </p:nvSpPr>
         <p:spPr>
           <a:xfrm>
-            <a:off x="713232" y="3886200"/>
-            <a:ext cx="1792224" cy="1097280"/>
+            <a:off x="822960" y="3749040"/>
+            <a:ext cx="1572768" cy="329184"/>
+          </a:xfrm>
+          <a:prstGeom prst="rect">
+            <a:avLst/>
+          </a:prstGeom>
+          <a:noFill/>
+          <a:ln/>
+        </p:spPr>
+        <p:txBody>
+          <a:bodyPr wrap="square" lIns="0" tIns="0" rIns="0" bIns="0" rtlCol="0" anchor="ctr"/>
+          <a:lstStyle/>
+          <a:p>
+            <a:pPr algn="ctr" indent="0" marL="0">
+              <a:buNone/>
+            </a:pPr>
+            <a:r>
+              <a:rPr lang="en-US" sz="1150" b="1" dirty="0">
+                <a:solidFill>
+                  <a:schemeClr val="accent1"/>
+                </a:solidFill>
+              </a:rPr>
+              <a:t>Admin</a:t>
+            </a:r>
+            <a:endParaRPr lang="en-US" sz="1150" dirty="0"/>
+          </a:p>
+        </p:txBody>
+      </p:sp>
+      <p:sp>
+        <p:nvSpPr>
+          <p:cNvPr id="10" name="a-up-w-tmf0"/>
+          <p:cNvSpPr txBox="1"/>
+          <p:nvPr/>
+        </p:nvSpPr>
+        <p:spPr>
+          <a:xfrm>
+            <a:off x="713232" y="4187952"/>
+            <a:ext cx="1792224" cy="822960"/>
           </a:xfrm>
           <a:prstGeom prst="rect">
             <a:avLst/>
@@ -19678,20 +19741,20 @@
               <a:buNone/>
             </a:pPr>
             <a:r>
-              <a:rPr lang="en-US" sz="1150" dirty="0">
+              <a:rPr lang="en-US" sz="1050" dirty="0">
                 <a:solidFill>
                   <a:schemeClr val="accent6"/>
                 </a:solidFill>
               </a:rPr>
               <a:t>Requirement analysis, admin module and project coordination</a:t>
             </a:r>
-            <a:endParaRPr lang="en-US" sz="1150" dirty="0"/>
+            <a:endParaRPr lang="en-US" sz="1050" dirty="0"/>
           </a:p>
         </p:txBody>
       </p:sp>
       <p:sp>
         <p:nvSpPr>
-          <p:cNvPr id="9" name="a-up-w-tmp0"/>
+          <p:cNvPr id="11" name="a-up-w-tmp0"/>
           <p:cNvSpPr txBox="1"/>
           <p:nvPr/>
         </p:nvSpPr>
@@ -19727,7 +19790,7 @@
       </p:sp>
       <p:sp>
         <p:nvSpPr>
-          <p:cNvPr id="10" name="a-up-tm1"/>
+          <p:cNvPr id="12" name="a-up-tm1"/>
           <p:cNvSpPr/>
           <p:nvPr/>
         </p:nvSpPr>
@@ -19761,7 +19824,7 @@
       </p:sp>
       <p:sp>
         <p:nvSpPr>
-          <p:cNvPr id="11" name="a-up-w-tmc1"/>
+          <p:cNvPr id="13" name="a-up-w-tmc1"/>
           <p:cNvSpPr/>
           <p:nvPr/>
         </p:nvSpPr>
@@ -19781,7 +19844,7 @@
       </p:sp>
       <p:sp>
         <p:nvSpPr>
-          <p:cNvPr id="12" name="a-up-w-tmi1"/>
+          <p:cNvPr id="14" name="a-up-w-tmi1"/>
           <p:cNvSpPr txBox="1"/>
           <p:nvPr/>
         </p:nvSpPr>
@@ -19817,14 +19880,14 @@
       </p:sp>
       <p:sp>
         <p:nvSpPr>
-          <p:cNvPr id="13" name="a-up-w-tmn1"/>
+          <p:cNvPr id="15" name="a-up-w-tmn1"/>
           <p:cNvSpPr txBox="1"/>
           <p:nvPr/>
         </p:nvSpPr>
         <p:spPr>
           <a:xfrm>
-            <a:off x="2916936" y="2788920"/>
-            <a:ext cx="1847088" cy="685800"/>
+            <a:off x="2871216" y="2743200"/>
+            <a:ext cx="1938528" cy="640080"/>
           </a:xfrm>
           <a:prstGeom prst="rect">
             <a:avLst/>
@@ -19853,14 +19916,14 @@
       </p:sp>
       <p:sp>
         <p:nvSpPr>
-          <p:cNvPr id="14" name="a-up-w-tmd1"/>
+          <p:cNvPr id="16" name="a-up-w-tmd1"/>
           <p:cNvSpPr txBox="1"/>
           <p:nvPr/>
         </p:nvSpPr>
         <p:spPr>
           <a:xfrm>
-            <a:off x="2916936" y="3474720"/>
-            <a:ext cx="1847088" cy="274320"/>
+            <a:off x="2916936" y="3429000"/>
+            <a:ext cx="1847088" cy="256032"/>
           </a:xfrm>
           <a:prstGeom prst="rect">
             <a:avLst/>
@@ -19889,14 +19952,77 @@
       </p:sp>
       <p:sp>
         <p:nvSpPr>
-          <p:cNvPr id="15" name="a-up-w-tmf1"/>
+          <p:cNvPr id="17" name="a-up-w-tmr1"/>
+          <p:cNvSpPr/>
+          <p:nvPr/>
+        </p:nvSpPr>
+        <p:spPr>
+          <a:xfrm>
+            <a:off x="3054096" y="3749040"/>
+            <a:ext cx="1572768" cy="329184"/>
+          </a:xfrm>
+          <a:prstGeom prst="roundRect">
+            <a:avLst>
+              <a:gd name="adj" fmla="val 50000"/>
+            </a:avLst>
+          </a:prstGeom>
+          <a:solidFill>
+            <a:schemeClr val="bg2"/>
+          </a:solidFill>
+          <a:ln w="6350">
+            <a:solidFill>
+              <a:srgbClr val="CBD5E1"/>
+            </a:solidFill>
+            <a:prstDash val="solid"/>
+          </a:ln>
+        </p:spPr>
+      </p:sp>
+      <p:sp>
+        <p:nvSpPr>
+          <p:cNvPr id="18" name="a-up-w-tmrt1"/>
           <p:cNvSpPr txBox="1"/>
           <p:nvPr/>
         </p:nvSpPr>
         <p:spPr>
           <a:xfrm>
-            <a:off x="2944368" y="3886200"/>
-            <a:ext cx="1792224" cy="1097280"/>
+            <a:off x="3054096" y="3749040"/>
+            <a:ext cx="1572768" cy="329184"/>
+          </a:xfrm>
+          <a:prstGeom prst="rect">
+            <a:avLst/>
+          </a:prstGeom>
+          <a:noFill/>
+          <a:ln/>
+        </p:spPr>
+        <p:txBody>
+          <a:bodyPr wrap="square" lIns="0" tIns="0" rIns="0" bIns="0" rtlCol="0" anchor="ctr"/>
+          <a:lstStyle/>
+          <a:p>
+            <a:pPr algn="ctr" indent="0" marL="0">
+              <a:buNone/>
+            </a:pPr>
+            <a:r>
+              <a:rPr lang="en-US" sz="1150" b="1" dirty="0">
+                <a:solidFill>
+                  <a:schemeClr val="accent1"/>
+                </a:solidFill>
+              </a:rPr>
+              <a:t>Retail Staff</a:t>
+            </a:r>
+            <a:endParaRPr lang="en-US" sz="1150" dirty="0"/>
+          </a:p>
+        </p:txBody>
+      </p:sp>
+      <p:sp>
+        <p:nvSpPr>
+          <p:cNvPr id="19" name="a-up-w-tmf1"/>
+          <p:cNvSpPr txBox="1"/>
+          <p:nvPr/>
+        </p:nvSpPr>
+        <p:spPr>
+          <a:xfrm>
+            <a:off x="2944368" y="4187952"/>
+            <a:ext cx="1792224" cy="822960"/>
           </a:xfrm>
           <a:prstGeom prst="rect">
             <a:avLst/>
@@ -19912,20 +20038,20 @@
               <a:buNone/>
             </a:pPr>
             <a:r>
-              <a:rPr lang="en-US" sz="1150" dirty="0">
+              <a:rPr lang="en-US" sz="1050" dirty="0">
                 <a:solidFill>
                   <a:schemeClr val="accent6"/>
                 </a:solidFill>
               </a:rPr>
               <a:t>Database design, ER diagram, entities and migrations</a:t>
             </a:r>
-            <a:endParaRPr lang="en-US" sz="1150" dirty="0"/>
+            <a:endParaRPr lang="en-US" sz="1050" dirty="0"/>
           </a:p>
         </p:txBody>
       </p:sp>
       <p:sp>
         <p:nvSpPr>
-          <p:cNvPr id="16" name="a-up-w-tmp1"/>
+          <p:cNvPr id="20" name="a-up-w-tmp1"/>
           <p:cNvSpPr txBox="1"/>
           <p:nvPr/>
         </p:nvSpPr>
@@ -19961,7 +20087,7 @@
       </p:sp>
       <p:sp>
         <p:nvSpPr>
-          <p:cNvPr id="17" name="a-up-tm2"/>
+          <p:cNvPr id="21" name="a-up-tm2"/>
           <p:cNvSpPr/>
           <p:nvPr/>
         </p:nvSpPr>
@@ -19995,7 +20121,7 @@
       </p:sp>
       <p:sp>
         <p:nvSpPr>
-          <p:cNvPr id="18" name="a-up-w-tmc2"/>
+          <p:cNvPr id="22" name="a-up-w-tmc2"/>
           <p:cNvSpPr/>
           <p:nvPr/>
         </p:nvSpPr>
@@ -20015,7 +20141,7 @@
       </p:sp>
       <p:sp>
         <p:nvSpPr>
-          <p:cNvPr id="19" name="a-up-w-tmi2"/>
+          <p:cNvPr id="23" name="a-up-w-tmi2"/>
           <p:cNvSpPr txBox="1"/>
           <p:nvPr/>
         </p:nvSpPr>
@@ -20051,14 +20177,14 @@
       </p:sp>
       <p:sp>
         <p:nvSpPr>
-          <p:cNvPr id="20" name="a-up-w-tmn2"/>
+          <p:cNvPr id="24" name="a-up-w-tmn2"/>
           <p:cNvSpPr txBox="1"/>
           <p:nvPr/>
         </p:nvSpPr>
         <p:spPr>
           <a:xfrm>
-            <a:off x="5148072" y="2788920"/>
-            <a:ext cx="1847088" cy="685800"/>
+            <a:off x="5102352" y="2743200"/>
+            <a:ext cx="1938528" cy="640080"/>
           </a:xfrm>
           <a:prstGeom prst="rect">
             <a:avLst/>
@@ -20074,27 +20200,27 @@
               <a:buNone/>
             </a:pPr>
             <a:r>
-              <a:rPr lang="en-US" sz="1500" b="1" dirty="0">
+              <a:rPr lang="en-US" sz="1250" b="1" dirty="0">
                 <a:solidFill>
                   <a:schemeClr val="tx2"/>
                 </a:solidFill>
               </a:rPr>
               <a:t>Muhammad Ehtisham Shakeel</a:t>
             </a:r>
-            <a:endParaRPr lang="en-US" sz="1500" dirty="0"/>
+            <a:endParaRPr lang="en-US" sz="1250" dirty="0"/>
           </a:p>
         </p:txBody>
       </p:sp>
       <p:sp>
         <p:nvSpPr>
-          <p:cNvPr id="21" name="a-up-w-tmd2"/>
+          <p:cNvPr id="25" name="a-up-w-tmd2"/>
           <p:cNvSpPr txBox="1"/>
           <p:nvPr/>
         </p:nvSpPr>
         <p:spPr>
           <a:xfrm>
-            <a:off x="5148072" y="3474720"/>
-            <a:ext cx="1847088" cy="274320"/>
+            <a:off x="5148072" y="3429000"/>
+            <a:ext cx="1847088" cy="256032"/>
           </a:xfrm>
           <a:prstGeom prst="rect">
             <a:avLst/>
@@ -20123,14 +20249,77 @@
       </p:sp>
       <p:sp>
         <p:nvSpPr>
-          <p:cNvPr id="22" name="a-up-w-tmf2"/>
+          <p:cNvPr id="26" name="a-up-w-tmr2"/>
+          <p:cNvSpPr/>
+          <p:nvPr/>
+        </p:nvSpPr>
+        <p:spPr>
+          <a:xfrm>
+            <a:off x="5285232" y="3749040"/>
+            <a:ext cx="1572768" cy="329184"/>
+          </a:xfrm>
+          <a:prstGeom prst="roundRect">
+            <a:avLst>
+              <a:gd name="adj" fmla="val 50000"/>
+            </a:avLst>
+          </a:prstGeom>
+          <a:solidFill>
+            <a:schemeClr val="bg2"/>
+          </a:solidFill>
+          <a:ln w="6350">
+            <a:solidFill>
+              <a:srgbClr val="CBD5E1"/>
+            </a:solidFill>
+            <a:prstDash val="solid"/>
+          </a:ln>
+        </p:spPr>
+      </p:sp>
+      <p:sp>
+        <p:nvSpPr>
+          <p:cNvPr id="27" name="a-up-w-tmrt2"/>
           <p:cNvSpPr txBox="1"/>
           <p:nvPr/>
         </p:nvSpPr>
         <p:spPr>
           <a:xfrm>
-            <a:off x="5175504" y="3886200"/>
-            <a:ext cx="1792224" cy="1097280"/>
+            <a:off x="5285232" y="3749040"/>
+            <a:ext cx="1572768" cy="329184"/>
+          </a:xfrm>
+          <a:prstGeom prst="rect">
+            <a:avLst/>
+          </a:prstGeom>
+          <a:noFill/>
+          <a:ln/>
+        </p:spPr>
+        <p:txBody>
+          <a:bodyPr wrap="square" lIns="0" tIns="0" rIns="0" bIns="0" rtlCol="0" anchor="ctr"/>
+          <a:lstStyle/>
+          <a:p>
+            <a:pPr algn="ctr" indent="0" marL="0">
+              <a:buNone/>
+            </a:pPr>
+            <a:r>
+              <a:rPr lang="en-US" sz="1150" b="1" dirty="0">
+                <a:solidFill>
+                  <a:schemeClr val="accent1"/>
+                </a:solidFill>
+              </a:rPr>
+              <a:t>Technical Staff</a:t>
+            </a:r>
+            <a:endParaRPr lang="en-US" sz="1150" dirty="0"/>
+          </a:p>
+        </p:txBody>
+      </p:sp>
+      <p:sp>
+        <p:nvSpPr>
+          <p:cNvPr id="28" name="a-up-w-tmf2"/>
+          <p:cNvSpPr txBox="1"/>
+          <p:nvPr/>
+        </p:nvSpPr>
+        <p:spPr>
+          <a:xfrm>
+            <a:off x="5175504" y="4187952"/>
+            <a:ext cx="1792224" cy="822960"/>
           </a:xfrm>
           <a:prstGeom prst="rect">
             <a:avLst/>
@@ -20146,20 +20335,20 @@
               <a:buNone/>
             </a:pPr>
             <a:r>
-              <a:rPr lang="en-US" sz="1150" dirty="0">
+              <a:rPr lang="en-US" sz="1050" dirty="0">
                 <a:solidFill>
                   <a:schemeClr val="accent6"/>
                 </a:solidFill>
               </a:rPr>
               <a:t>Login and security, orders, feasibility and connections</a:t>
             </a:r>
-            <a:endParaRPr lang="en-US" sz="1150" dirty="0"/>
+            <a:endParaRPr lang="en-US" sz="1050" dirty="0"/>
           </a:p>
         </p:txBody>
       </p:sp>
       <p:sp>
         <p:nvSpPr>
-          <p:cNvPr id="23" name="a-up-w-tmp2"/>
+          <p:cNvPr id="29" name="a-up-w-tmp2"/>
           <p:cNvSpPr txBox="1"/>
           <p:nvPr/>
         </p:nvSpPr>
@@ -20195,7 +20384,7 @@
       </p:sp>
       <p:sp>
         <p:nvSpPr>
-          <p:cNvPr id="24" name="a-up-tm3"/>
+          <p:cNvPr id="30" name="a-up-tm3"/>
           <p:cNvSpPr/>
           <p:nvPr/>
         </p:nvSpPr>
@@ -20229,7 +20418,7 @@
       </p:sp>
       <p:sp>
         <p:nvSpPr>
-          <p:cNvPr id="25" name="a-up-w-tmc3"/>
+          <p:cNvPr id="31" name="a-up-w-tmc3"/>
           <p:cNvSpPr/>
           <p:nvPr/>
         </p:nvSpPr>
@@ -20249,7 +20438,7 @@
       </p:sp>
       <p:sp>
         <p:nvSpPr>
-          <p:cNvPr id="26" name="a-up-w-tmi3"/>
+          <p:cNvPr id="32" name="a-up-w-tmi3"/>
           <p:cNvSpPr txBox="1"/>
           <p:nvPr/>
         </p:nvSpPr>
@@ -20285,14 +20474,14 @@
       </p:sp>
       <p:sp>
         <p:nvSpPr>
-          <p:cNvPr id="27" name="a-up-w-tmn3"/>
+          <p:cNvPr id="33" name="a-up-w-tmn3"/>
           <p:cNvSpPr txBox="1"/>
           <p:nvPr/>
         </p:nvSpPr>
         <p:spPr>
           <a:xfrm>
-            <a:off x="7379208" y="2788920"/>
-            <a:ext cx="1847088" cy="685800"/>
+            <a:off x="7333488" y="2743200"/>
+            <a:ext cx="1938528" cy="640080"/>
           </a:xfrm>
           <a:prstGeom prst="rect">
             <a:avLst/>
@@ -20308,27 +20497,27 @@
               <a:buNone/>
             </a:pPr>
             <a:r>
-              <a:rPr lang="en-US" sz="1500" b="1" dirty="0">
+              <a:rPr lang="en-US" sz="1250" b="1" dirty="0">
                 <a:solidFill>
                   <a:schemeClr val="tx2"/>
                 </a:solidFill>
               </a:rPr>
               <a:t>Muhammad Waleed</a:t>
             </a:r>
-            <a:endParaRPr lang="en-US" sz="1500" dirty="0"/>
+            <a:endParaRPr lang="en-US" sz="1250" dirty="0"/>
           </a:p>
         </p:txBody>
       </p:sp>
       <p:sp>
         <p:nvSpPr>
-          <p:cNvPr id="28" name="a-up-w-tmd3"/>
+          <p:cNvPr id="34" name="a-up-w-tmd3"/>
           <p:cNvSpPr txBox="1"/>
           <p:nvPr/>
         </p:nvSpPr>
         <p:spPr>
           <a:xfrm>
-            <a:off x="7379208" y="3474720"/>
-            <a:ext cx="1847088" cy="274320"/>
+            <a:off x="7379208" y="3429000"/>
+            <a:ext cx="1847088" cy="256032"/>
           </a:xfrm>
           <a:prstGeom prst="rect">
             <a:avLst/>
@@ -20357,14 +20546,77 @@
       </p:sp>
       <p:sp>
         <p:nvSpPr>
-          <p:cNvPr id="29" name="a-up-w-tmf3"/>
+          <p:cNvPr id="35" name="a-up-w-tmr3"/>
+          <p:cNvSpPr/>
+          <p:nvPr/>
+        </p:nvSpPr>
+        <p:spPr>
+          <a:xfrm>
+            <a:off x="7516368" y="3749040"/>
+            <a:ext cx="1572768" cy="329184"/>
+          </a:xfrm>
+          <a:prstGeom prst="roundRect">
+            <a:avLst>
+              <a:gd name="adj" fmla="val 50000"/>
+            </a:avLst>
+          </a:prstGeom>
+          <a:solidFill>
+            <a:schemeClr val="bg2"/>
+          </a:solidFill>
+          <a:ln w="6350">
+            <a:solidFill>
+              <a:srgbClr val="CBD5E1"/>
+            </a:solidFill>
+            <a:prstDash val="solid"/>
+          </a:ln>
+        </p:spPr>
+      </p:sp>
+      <p:sp>
+        <p:nvSpPr>
+          <p:cNvPr id="36" name="a-up-w-tmrt3"/>
           <p:cNvSpPr txBox="1"/>
           <p:nvPr/>
         </p:nvSpPr>
         <p:spPr>
           <a:xfrm>
-            <a:off x="7406640" y="3886200"/>
-            <a:ext cx="1792224" cy="1097280"/>
+            <a:off x="7516368" y="3749040"/>
+            <a:ext cx="1572768" cy="329184"/>
+          </a:xfrm>
+          <a:prstGeom prst="rect">
+            <a:avLst/>
+          </a:prstGeom>
+          <a:noFill/>
+          <a:ln/>
+        </p:spPr>
+        <p:txBody>
+          <a:bodyPr wrap="square" lIns="0" tIns="0" rIns="0" bIns="0" rtlCol="0" anchor="ctr"/>
+          <a:lstStyle/>
+          <a:p>
+            <a:pPr algn="ctr" indent="0" marL="0">
+              <a:buNone/>
+            </a:pPr>
+            <a:r>
+              <a:rPr lang="en-US" sz="1150" b="1" dirty="0">
+                <a:solidFill>
+                  <a:schemeClr val="accent1"/>
+                </a:solidFill>
+              </a:rPr>
+              <a:t>Accounts Staff</a:t>
+            </a:r>
+            <a:endParaRPr lang="en-US" sz="1150" dirty="0"/>
+          </a:p>
+        </p:txBody>
+      </p:sp>
+      <p:sp>
+        <p:nvSpPr>
+          <p:cNvPr id="37" name="a-up-w-tmf3"/>
+          <p:cNvSpPr txBox="1"/>
+          <p:nvPr/>
+        </p:nvSpPr>
+        <p:spPr>
+          <a:xfrm>
+            <a:off x="7406640" y="4187952"/>
+            <a:ext cx="1792224" cy="822960"/>
           </a:xfrm>
           <a:prstGeom prst="rect">
             <a:avLst/>
@@ -20380,20 +20632,20 @@
               <a:buNone/>
             </a:pPr>
             <a:r>
-              <a:rPr lang="en-US" sz="1150" dirty="0">
+              <a:rPr lang="en-US" sz="1050" dirty="0">
                 <a:solidFill>
                   <a:schemeClr val="accent6"/>
                 </a:solidFill>
               </a:rPr>
               <a:t>Billing, payments, overdue control, tracking and search</a:t>
             </a:r>
-            <a:endParaRPr lang="en-US" sz="1150" dirty="0"/>
+            <a:endParaRPr lang="en-US" sz="1050" dirty="0"/>
           </a:p>
         </p:txBody>
       </p:sp>
       <p:sp>
         <p:nvSpPr>
-          <p:cNvPr id="30" name="a-up-w-tmp3"/>
+          <p:cNvPr id="38" name="a-up-w-tmp3"/>
           <p:cNvSpPr txBox="1"/>
           <p:nvPr/>
         </p:nvSpPr>
@@ -20429,7 +20681,7 @@
       </p:sp>
       <p:sp>
         <p:nvSpPr>
-          <p:cNvPr id="31" name="a-up-tm4"/>
+          <p:cNvPr id="39" name="a-up-tm4"/>
           <p:cNvSpPr/>
           <p:nvPr/>
         </p:nvSpPr>
@@ -20463,7 +20715,7 @@
       </p:sp>
       <p:sp>
         <p:nvSpPr>
-          <p:cNvPr id="32" name="a-up-w-tmc4"/>
+          <p:cNvPr id="40" name="a-up-w-tmc4"/>
           <p:cNvSpPr/>
           <p:nvPr/>
         </p:nvSpPr>
@@ -20483,7 +20735,7 @@
       </p:sp>
       <p:sp>
         <p:nvSpPr>
-          <p:cNvPr id="33" name="a-up-w-tmi4"/>
+          <p:cNvPr id="41" name="a-up-w-tmi4"/>
           <p:cNvSpPr txBox="1"/>
           <p:nvPr/>
         </p:nvSpPr>
@@ -20519,14 +20771,14 @@
       </p:sp>
       <p:sp>
         <p:nvSpPr>
-          <p:cNvPr id="34" name="a-up-w-tmn4"/>
+          <p:cNvPr id="42" name="a-up-w-tmn4"/>
           <p:cNvSpPr txBox="1"/>
           <p:nvPr/>
         </p:nvSpPr>
         <p:spPr>
           <a:xfrm>
-            <a:off x="9610344" y="2788920"/>
-            <a:ext cx="1847088" cy="685800"/>
+            <a:off x="9564624" y="2743200"/>
+            <a:ext cx="1938528" cy="640080"/>
           </a:xfrm>
           <a:prstGeom prst="rect">
             <a:avLst/>
@@ -20555,14 +20807,14 @@
       </p:sp>
       <p:sp>
         <p:nvSpPr>
-          <p:cNvPr id="35" name="a-up-w-tmd4"/>
+          <p:cNvPr id="43" name="a-up-w-tmd4"/>
           <p:cNvSpPr txBox="1"/>
           <p:nvPr/>
         </p:nvSpPr>
         <p:spPr>
           <a:xfrm>
-            <a:off x="9610344" y="3474720"/>
-            <a:ext cx="1847088" cy="274320"/>
+            <a:off x="9610344" y="3429000"/>
+            <a:ext cx="1847088" cy="256032"/>
           </a:xfrm>
           <a:prstGeom prst="rect">
             <a:avLst/>
@@ -20591,14 +20843,77 @@
       </p:sp>
       <p:sp>
         <p:nvSpPr>
-          <p:cNvPr id="36" name="a-up-w-tmf4"/>
+          <p:cNvPr id="44" name="a-up-w-tmr4"/>
+          <p:cNvSpPr/>
+          <p:nvPr/>
+        </p:nvSpPr>
+        <p:spPr>
+          <a:xfrm>
+            <a:off x="9747504" y="3749040"/>
+            <a:ext cx="1572768" cy="329184"/>
+          </a:xfrm>
+          <a:prstGeom prst="roundRect">
+            <a:avLst>
+              <a:gd name="adj" fmla="val 50000"/>
+            </a:avLst>
+          </a:prstGeom>
+          <a:solidFill>
+            <a:schemeClr val="bg2"/>
+          </a:solidFill>
+          <a:ln w="6350">
+            <a:solidFill>
+              <a:srgbClr val="CBD5E1"/>
+            </a:solidFill>
+            <a:prstDash val="solid"/>
+          </a:ln>
+        </p:spPr>
+      </p:sp>
+      <p:sp>
+        <p:nvSpPr>
+          <p:cNvPr id="45" name="a-up-w-tmrt4"/>
           <p:cNvSpPr txBox="1"/>
           <p:nvPr/>
         </p:nvSpPr>
         <p:spPr>
           <a:xfrm>
-            <a:off x="9637776" y="3886200"/>
-            <a:ext cx="1792224" cy="1097280"/>
+            <a:off x="9747504" y="3749040"/>
+            <a:ext cx="1572768" cy="329184"/>
+          </a:xfrm>
+          <a:prstGeom prst="rect">
+            <a:avLst/>
+          </a:prstGeom>
+          <a:noFill/>
+          <a:ln/>
+        </p:spPr>
+        <p:txBody>
+          <a:bodyPr wrap="square" lIns="0" tIns="0" rIns="0" bIns="0" rtlCol="0" anchor="ctr"/>
+          <a:lstStyle/>
+          <a:p>
+            <a:pPr algn="ctr" indent="0" marL="0">
+              <a:buNone/>
+            </a:pPr>
+            <a:r>
+              <a:rPr lang="en-US" sz="1150" b="1" dirty="0">
+                <a:solidFill>
+                  <a:schemeClr val="accent1"/>
+                </a:solidFill>
+              </a:rPr>
+              <a:t>Customer</a:t>
+            </a:r>
+            <a:endParaRPr lang="en-US" sz="1150" dirty="0"/>
+          </a:p>
+        </p:txBody>
+      </p:sp>
+      <p:sp>
+        <p:nvSpPr>
+          <p:cNvPr id="46" name="a-up-w-tmf4"/>
+          <p:cNvSpPr txBox="1"/>
+          <p:nvPr/>
+        </p:nvSpPr>
+        <p:spPr>
+          <a:xfrm>
+            <a:off x="9637776" y="4187952"/>
+            <a:ext cx="1792224" cy="822960"/>
           </a:xfrm>
           <a:prstGeom prst="rect">
             <a:avLst/>
@@ -20614,20 +20929,20 @@
               <a:buNone/>
             </a:pPr>
             <a:r>
-              <a:rPr lang="en-US" sz="1150" dirty="0">
+              <a:rPr lang="en-US" sz="1050" dirty="0">
                 <a:solidFill>
                   <a:schemeClr val="accent6"/>
                 </a:solidFill>
               </a:rPr>
               <a:t>Interface design, customer documents, testing and documentation</a:t>
             </a:r>
-            <a:endParaRPr lang="en-US" sz="1150" dirty="0"/>
+            <a:endParaRPr lang="en-US" sz="1050" dirty="0"/>
           </a:p>
         </p:txBody>
       </p:sp>
       <p:sp>
         <p:nvSpPr>
-          <p:cNvPr id="37" name="a-up-w-tmp4"/>
+          <p:cNvPr id="47" name="a-up-w-tmp4"/>
           <p:cNvSpPr txBox="1"/>
           <p:nvPr/>
         </p:nvSpPr>
@@ -20658,6 +20973,42 @@
               <a:t>Slides 13-17: interface, quality and closing</a:t>
             </a:r>
             <a:endParaRPr lang="en-US" sz="1050" dirty="0"/>
+          </a:p>
+        </p:txBody>
+      </p:sp>
+      <p:sp>
+        <p:nvSpPr>
+          <p:cNvPr id="48" name="a-fade-tmfoot"/>
+          <p:cNvSpPr txBox="1"/>
+          <p:nvPr/>
+        </p:nvSpPr>
+        <p:spPr>
+          <a:xfrm>
+            <a:off x="548640" y="5989320"/>
+            <a:ext cx="11064240" cy="274320"/>
+          </a:xfrm>
+          <a:prstGeom prst="rect">
+            <a:avLst/>
+          </a:prstGeom>
+          <a:noFill/>
+          <a:ln/>
+        </p:spPr>
+        <p:txBody>
+          <a:bodyPr wrap="square" lIns="0" tIns="0" rIns="0" bIns="0" rtlCol="0" anchor="t"/>
+          <a:lstStyle/>
+          <a:p>
+            <a:pPr algn="ctr" indent="0" marL="0">
+              <a:buNone/>
+            </a:pPr>
+            <a:r>
+              <a:rPr lang="en-US" sz="1200" dirty="0">
+                <a:solidFill>
+                  <a:schemeClr val="accent6"/>
+                </a:solidFill>
+              </a:rPr>
+              <a:t>ADSE  ·  Semester 3  ·  Aptech Center NN2</a:t>
+            </a:r>
+            <a:endParaRPr lang="en-US" sz="1200" dirty="0"/>
           </a:p>
         </p:txBody>
       </p:sp>
@@ -20732,7 +21083,7 @@
                       </p:stCondLst>
                       <p:childTnLst>
                         <p:par>
-                          <p:cTn id="185" fill="hold">
+                          <p:cTn id="238" fill="hold">
                             <p:stCondLst>
                               <p:cond delay="0"/>
                             </p:stCondLst>
@@ -21342,7 +21693,7 @@
                               <p:par>
                                 <p:cTn id="46" presetID="42" presetClass="entr" presetSubtype="0" fill="hold" grpId="0" nodeType="withEffect">
                                   <p:stCondLst>
-                                    <p:cond delay="400"/>
+                                    <p:cond delay="200"/>
                                   </p:stCondLst>
                                   <p:childTnLst>
                                     <p:set>
@@ -21423,7 +21774,7 @@
                               <p:par>
                                 <p:cTn id="51" presetID="42" presetClass="entr" presetSubtype="0" fill="hold" grpId="0" nodeType="withEffect">
                                   <p:stCondLst>
-                                    <p:cond delay="400"/>
+                                    <p:cond delay="200"/>
                                   </p:stCondLst>
                                   <p:childTnLst>
                                     <p:set>
@@ -21909,7 +22260,7 @@
                               <p:par>
                                 <p:cTn id="81" presetID="42" presetClass="entr" presetSubtype="0" fill="hold" grpId="0" nodeType="withEffect">
                                   <p:stCondLst>
-                                    <p:cond delay="600"/>
+                                    <p:cond delay="400"/>
                                   </p:stCondLst>
                                   <p:childTnLst>
                                     <p:set>
@@ -21990,7 +22341,7 @@
                               <p:par>
                                 <p:cTn id="86" presetID="42" presetClass="entr" presetSubtype="0" fill="hold" grpId="0" nodeType="withEffect">
                                   <p:stCondLst>
-                                    <p:cond delay="600"/>
+                                    <p:cond delay="400"/>
                                   </p:stCondLst>
                                   <p:childTnLst>
                                     <p:set>
@@ -22071,7 +22422,7 @@
                               <p:par>
                                 <p:cTn id="91" presetID="42" presetClass="entr" presetSubtype="0" fill="hold" grpId="0" nodeType="withEffect">
                                   <p:stCondLst>
-                                    <p:cond delay="600"/>
+                                    <p:cond delay="400"/>
                                   </p:stCondLst>
                                   <p:childTnLst>
                                     <p:set>
@@ -22152,7 +22503,7 @@
                               <p:par>
                                 <p:cTn id="96" presetID="42" presetClass="entr" presetSubtype="0" fill="hold" grpId="0" nodeType="withEffect">
                                   <p:stCondLst>
-                                    <p:cond delay="600"/>
+                                    <p:cond delay="400"/>
                                   </p:stCondLst>
                                   <p:childTnLst>
                                     <p:set>
@@ -22476,7 +22827,7 @@
                               <p:par>
                                 <p:cTn id="116" presetID="42" presetClass="entr" presetSubtype="0" fill="hold" grpId="0" nodeType="withEffect">
                                   <p:stCondLst>
-                                    <p:cond delay="800"/>
+                                    <p:cond delay="600"/>
                                   </p:stCondLst>
                                   <p:childTnLst>
                                     <p:set>
@@ -22557,7 +22908,7 @@
                               <p:par>
                                 <p:cTn id="121" presetID="42" presetClass="entr" presetSubtype="0" fill="hold" grpId="0" nodeType="withEffect">
                                   <p:stCondLst>
-                                    <p:cond delay="800"/>
+                                    <p:cond delay="600"/>
                                   </p:stCondLst>
                                   <p:childTnLst>
                                     <p:set>
@@ -22638,7 +22989,7 @@
                               <p:par>
                                 <p:cTn id="126" presetID="42" presetClass="entr" presetSubtype="0" fill="hold" grpId="0" nodeType="withEffect">
                                   <p:stCondLst>
-                                    <p:cond delay="800"/>
+                                    <p:cond delay="600"/>
                                   </p:stCondLst>
                                   <p:childTnLst>
                                     <p:set>
@@ -22719,7 +23070,7 @@
                               <p:par>
                                 <p:cTn id="131" presetID="42" presetClass="entr" presetSubtype="0" fill="hold" grpId="0" nodeType="withEffect">
                                   <p:stCondLst>
-                                    <p:cond delay="800"/>
+                                    <p:cond delay="600"/>
                                   </p:stCondLst>
                                   <p:childTnLst>
                                     <p:set>
@@ -22800,7 +23151,7 @@
                               <p:par>
                                 <p:cTn id="136" presetID="42" presetClass="entr" presetSubtype="0" fill="hold" grpId="0" nodeType="withEffect">
                                   <p:stCondLst>
-                                    <p:cond delay="800"/>
+                                    <p:cond delay="600"/>
                                   </p:stCondLst>
                                   <p:childTnLst>
                                     <p:set>
@@ -22881,7 +23232,7 @@
                               <p:par>
                                 <p:cTn id="141" presetID="42" presetClass="entr" presetSubtype="0" fill="hold" grpId="0" nodeType="withEffect">
                                   <p:stCondLst>
-                                    <p:cond delay="800"/>
+                                    <p:cond delay="600"/>
                                   </p:stCondLst>
                                   <p:childTnLst>
                                     <p:set>
@@ -23043,7 +23394,7 @@
                               <p:par>
                                 <p:cTn id="151" presetID="42" presetClass="entr" presetSubtype="0" fill="hold" grpId="0" nodeType="withEffect">
                                   <p:stCondLst>
-                                    <p:cond delay="1000"/>
+                                    <p:cond delay="800"/>
                                   </p:stCondLst>
                                   <p:childTnLst>
                                     <p:set>
@@ -23124,7 +23475,7 @@
                               <p:par>
                                 <p:cTn id="156" presetID="42" presetClass="entr" presetSubtype="0" fill="hold" grpId="0" nodeType="withEffect">
                                   <p:stCondLst>
-                                    <p:cond delay="1000"/>
+                                    <p:cond delay="800"/>
                                   </p:stCondLst>
                                   <p:childTnLst>
                                     <p:set>
@@ -23205,7 +23556,7 @@
                               <p:par>
                                 <p:cTn id="161" presetID="42" presetClass="entr" presetSubtype="0" fill="hold" grpId="0" nodeType="withEffect">
                                   <p:stCondLst>
-                                    <p:cond delay="1000"/>
+                                    <p:cond delay="800"/>
                                   </p:stCondLst>
                                   <p:childTnLst>
                                     <p:set>
@@ -23286,7 +23637,7 @@
                               <p:par>
                                 <p:cTn id="166" presetID="42" presetClass="entr" presetSubtype="0" fill="hold" grpId="0" nodeType="withEffect">
                                   <p:stCondLst>
-                                    <p:cond delay="1000"/>
+                                    <p:cond delay="800"/>
                                   </p:stCondLst>
                                   <p:childTnLst>
                                     <p:set>
@@ -23367,7 +23718,7 @@
                               <p:par>
                                 <p:cTn id="171" presetID="42" presetClass="entr" presetSubtype="0" fill="hold" grpId="0" nodeType="withEffect">
                                   <p:stCondLst>
-                                    <p:cond delay="1000"/>
+                                    <p:cond delay="800"/>
                                   </p:stCondLst>
                                   <p:childTnLst>
                                     <p:set>
@@ -23448,7 +23799,7 @@
                               <p:par>
                                 <p:cTn id="176" presetID="42" presetClass="entr" presetSubtype="0" fill="hold" grpId="0" nodeType="withEffect">
                                   <p:stCondLst>
-                                    <p:cond delay="1000"/>
+                                    <p:cond delay="800"/>
                                   </p:stCondLst>
                                   <p:childTnLst>
                                     <p:set>
@@ -23529,7 +23880,7 @@
                               <p:par>
                                 <p:cTn id="181" presetID="42" presetClass="entr" presetSubtype="0" fill="hold" grpId="0" nodeType="withEffect">
                                   <p:stCondLst>
-                                    <p:cond delay="1000"/>
+                                    <p:cond delay="800"/>
                                   </p:stCondLst>
                                   <p:childTnLst>
                                     <p:set>
@@ -23608,20 +23959,830 @@
                                 </p:cTn>
                               </p:par>
                               <p:par>
-                                <p:cTn id="184" presetID="10" presetClass="entr" presetSubtype="0" fill="hold" grpId="0" nodeType="withEffect">
+                                <p:cTn id="186" presetID="42" presetClass="entr" presetSubtype="0" fill="hold" grpId="0" nodeType="withEffect">
+                                  <p:stCondLst>
+                                    <p:cond delay="800"/>
+                                  </p:stCondLst>
+                                  <p:childTnLst>
+                                    <p:set>
+                                      <p:cBhvr>
+                                        <p:cTn id="182" dur="1" fill="hold">
+                                          <p:stCondLst>
+                                            <p:cond delay="0"/>
+                                          </p:stCondLst>
+                                        </p:cTn>
+                                        <p:tgtEl>
+                                          <p:spTgt spid="38"/>
+                                        </p:tgtEl>
+                                        <p:attrNameLst>
+                                          <p:attrName>style.visibility</p:attrName>
+                                        </p:attrNameLst>
+                                      </p:cBhvr>
+                                      <p:to>
+                                        <p:strVal val="visible"/>
+                                      </p:to>
+                                    </p:set>
+                                    <p:animEffect transition="in" filter="fade">
+                                      <p:cBhvr>
+                                        <p:cTn id="183" dur="600"/>
+                                        <p:tgtEl>
+                                          <p:spTgt spid="38"/>
+                                        </p:tgtEl>
+                                      </p:cBhvr>
+                                    </p:animEffect>
+                                    <p:anim calcmode="lin" valueType="num">
+                                      <p:cBhvr>
+                                        <p:cTn id="184" dur="600" decel="100000" fill="hold"/>
+                                        <p:tgtEl>
+                                          <p:spTgt spid="38"/>
+                                        </p:tgtEl>
+                                        <p:attrNameLst>
+                                          <p:attrName>ppt_x</p:attrName>
+                                        </p:attrNameLst>
+                                      </p:cBhvr>
+                                      <p:tavLst>
+                                        <p:tav tm="0">
+                                          <p:val>
+                                            <p:strVal val="#ppt_x"/>
+                                          </p:val>
+                                        </p:tav>
+                                        <p:tav tm="100000">
+                                          <p:val>
+                                            <p:strVal val="#ppt_x"/>
+                                          </p:val>
+                                        </p:tav>
+                                      </p:tavLst>
+                                    </p:anim>
+                                    <p:anim calcmode="lin" valueType="num">
+                                      <p:cBhvr>
+                                        <p:cTn id="185" dur="600" decel="100000" fill="hold"/>
+                                        <p:tgtEl>
+                                          <p:spTgt spid="38"/>
+                                        </p:tgtEl>
+                                        <p:attrNameLst>
+                                          <p:attrName>ppt_y</p:attrName>
+                                        </p:attrNameLst>
+                                      </p:cBhvr>
+                                      <p:tavLst>
+                                        <p:tav tm="0">
+                                          <p:val>
+                                            <p:strVal val="#ppt_y+.08"/>
+                                          </p:val>
+                                        </p:tav>
+                                        <p:tav tm="100000">
+                                          <p:val>
+                                            <p:strVal val="#ppt_y"/>
+                                          </p:val>
+                                        </p:tav>
+                                      </p:tavLst>
+                                    </p:anim>
+                                  </p:childTnLst>
+                                </p:cTn>
+                              </p:par>
+                              <p:par>
+                                <p:cTn id="191" presetID="42" presetClass="entr" presetSubtype="0" fill="hold" grpId="0" nodeType="withEffect">
+                                  <p:stCondLst>
+                                    <p:cond delay="1000"/>
+                                  </p:stCondLst>
+                                  <p:childTnLst>
+                                    <p:set>
+                                      <p:cBhvr>
+                                        <p:cTn id="187" dur="1" fill="hold">
+                                          <p:stCondLst>
+                                            <p:cond delay="0"/>
+                                          </p:stCondLst>
+                                        </p:cTn>
+                                        <p:tgtEl>
+                                          <p:spTgt spid="39"/>
+                                        </p:tgtEl>
+                                        <p:attrNameLst>
+                                          <p:attrName>style.visibility</p:attrName>
+                                        </p:attrNameLst>
+                                      </p:cBhvr>
+                                      <p:to>
+                                        <p:strVal val="visible"/>
+                                      </p:to>
+                                    </p:set>
+                                    <p:animEffect transition="in" filter="fade">
+                                      <p:cBhvr>
+                                        <p:cTn id="188" dur="600"/>
+                                        <p:tgtEl>
+                                          <p:spTgt spid="39"/>
+                                        </p:tgtEl>
+                                      </p:cBhvr>
+                                    </p:animEffect>
+                                    <p:anim calcmode="lin" valueType="num">
+                                      <p:cBhvr>
+                                        <p:cTn id="189" dur="600" decel="100000" fill="hold"/>
+                                        <p:tgtEl>
+                                          <p:spTgt spid="39"/>
+                                        </p:tgtEl>
+                                        <p:attrNameLst>
+                                          <p:attrName>ppt_x</p:attrName>
+                                        </p:attrNameLst>
+                                      </p:cBhvr>
+                                      <p:tavLst>
+                                        <p:tav tm="0">
+                                          <p:val>
+                                            <p:strVal val="#ppt_x"/>
+                                          </p:val>
+                                        </p:tav>
+                                        <p:tav tm="100000">
+                                          <p:val>
+                                            <p:strVal val="#ppt_x"/>
+                                          </p:val>
+                                        </p:tav>
+                                      </p:tavLst>
+                                    </p:anim>
+                                    <p:anim calcmode="lin" valueType="num">
+                                      <p:cBhvr>
+                                        <p:cTn id="190" dur="600" decel="100000" fill="hold"/>
+                                        <p:tgtEl>
+                                          <p:spTgt spid="39"/>
+                                        </p:tgtEl>
+                                        <p:attrNameLst>
+                                          <p:attrName>ppt_y</p:attrName>
+                                        </p:attrNameLst>
+                                      </p:cBhvr>
+                                      <p:tavLst>
+                                        <p:tav tm="0">
+                                          <p:val>
+                                            <p:strVal val="#ppt_y+.08"/>
+                                          </p:val>
+                                        </p:tav>
+                                        <p:tav tm="100000">
+                                          <p:val>
+                                            <p:strVal val="#ppt_y"/>
+                                          </p:val>
+                                        </p:tav>
+                                      </p:tavLst>
+                                    </p:anim>
+                                  </p:childTnLst>
+                                </p:cTn>
+                              </p:par>
+                              <p:par>
+                                <p:cTn id="196" presetID="42" presetClass="entr" presetSubtype="0" fill="hold" grpId="0" nodeType="withEffect">
+                                  <p:stCondLst>
+                                    <p:cond delay="1000"/>
+                                  </p:stCondLst>
+                                  <p:childTnLst>
+                                    <p:set>
+                                      <p:cBhvr>
+                                        <p:cTn id="192" dur="1" fill="hold">
+                                          <p:stCondLst>
+                                            <p:cond delay="0"/>
+                                          </p:stCondLst>
+                                        </p:cTn>
+                                        <p:tgtEl>
+                                          <p:spTgt spid="40"/>
+                                        </p:tgtEl>
+                                        <p:attrNameLst>
+                                          <p:attrName>style.visibility</p:attrName>
+                                        </p:attrNameLst>
+                                      </p:cBhvr>
+                                      <p:to>
+                                        <p:strVal val="visible"/>
+                                      </p:to>
+                                    </p:set>
+                                    <p:animEffect transition="in" filter="fade">
+                                      <p:cBhvr>
+                                        <p:cTn id="193" dur="600"/>
+                                        <p:tgtEl>
+                                          <p:spTgt spid="40"/>
+                                        </p:tgtEl>
+                                      </p:cBhvr>
+                                    </p:animEffect>
+                                    <p:anim calcmode="lin" valueType="num">
+                                      <p:cBhvr>
+                                        <p:cTn id="194" dur="600" decel="100000" fill="hold"/>
+                                        <p:tgtEl>
+                                          <p:spTgt spid="40"/>
+                                        </p:tgtEl>
+                                        <p:attrNameLst>
+                                          <p:attrName>ppt_x</p:attrName>
+                                        </p:attrNameLst>
+                                      </p:cBhvr>
+                                      <p:tavLst>
+                                        <p:tav tm="0">
+                                          <p:val>
+                                            <p:strVal val="#ppt_x"/>
+                                          </p:val>
+                                        </p:tav>
+                                        <p:tav tm="100000">
+                                          <p:val>
+                                            <p:strVal val="#ppt_x"/>
+                                          </p:val>
+                                        </p:tav>
+                                      </p:tavLst>
+                                    </p:anim>
+                                    <p:anim calcmode="lin" valueType="num">
+                                      <p:cBhvr>
+                                        <p:cTn id="195" dur="600" decel="100000" fill="hold"/>
+                                        <p:tgtEl>
+                                          <p:spTgt spid="40"/>
+                                        </p:tgtEl>
+                                        <p:attrNameLst>
+                                          <p:attrName>ppt_y</p:attrName>
+                                        </p:attrNameLst>
+                                      </p:cBhvr>
+                                      <p:tavLst>
+                                        <p:tav tm="0">
+                                          <p:val>
+                                            <p:strVal val="#ppt_y+.08"/>
+                                          </p:val>
+                                        </p:tav>
+                                        <p:tav tm="100000">
+                                          <p:val>
+                                            <p:strVal val="#ppt_y"/>
+                                          </p:val>
+                                        </p:tav>
+                                      </p:tavLst>
+                                    </p:anim>
+                                  </p:childTnLst>
+                                </p:cTn>
+                              </p:par>
+                              <p:par>
+                                <p:cTn id="201" presetID="42" presetClass="entr" presetSubtype="0" fill="hold" grpId="0" nodeType="withEffect">
+                                  <p:stCondLst>
+                                    <p:cond delay="1000"/>
+                                  </p:stCondLst>
+                                  <p:childTnLst>
+                                    <p:set>
+                                      <p:cBhvr>
+                                        <p:cTn id="197" dur="1" fill="hold">
+                                          <p:stCondLst>
+                                            <p:cond delay="0"/>
+                                          </p:stCondLst>
+                                        </p:cTn>
+                                        <p:tgtEl>
+                                          <p:spTgt spid="41"/>
+                                        </p:tgtEl>
+                                        <p:attrNameLst>
+                                          <p:attrName>style.visibility</p:attrName>
+                                        </p:attrNameLst>
+                                      </p:cBhvr>
+                                      <p:to>
+                                        <p:strVal val="visible"/>
+                                      </p:to>
+                                    </p:set>
+                                    <p:animEffect transition="in" filter="fade">
+                                      <p:cBhvr>
+                                        <p:cTn id="198" dur="600"/>
+                                        <p:tgtEl>
+                                          <p:spTgt spid="41"/>
+                                        </p:tgtEl>
+                                      </p:cBhvr>
+                                    </p:animEffect>
+                                    <p:anim calcmode="lin" valueType="num">
+                                      <p:cBhvr>
+                                        <p:cTn id="199" dur="600" decel="100000" fill="hold"/>
+                                        <p:tgtEl>
+                                          <p:spTgt spid="41"/>
+                                        </p:tgtEl>
+                                        <p:attrNameLst>
+                                          <p:attrName>ppt_x</p:attrName>
+                                        </p:attrNameLst>
+                                      </p:cBhvr>
+                                      <p:tavLst>
+                                        <p:tav tm="0">
+                                          <p:val>
+                                            <p:strVal val="#ppt_x"/>
+                                          </p:val>
+                                        </p:tav>
+                                        <p:tav tm="100000">
+                                          <p:val>
+                                            <p:strVal val="#ppt_x"/>
+                                          </p:val>
+                                        </p:tav>
+                                      </p:tavLst>
+                                    </p:anim>
+                                    <p:anim calcmode="lin" valueType="num">
+                                      <p:cBhvr>
+                                        <p:cTn id="200" dur="600" decel="100000" fill="hold"/>
+                                        <p:tgtEl>
+                                          <p:spTgt spid="41"/>
+                                        </p:tgtEl>
+                                        <p:attrNameLst>
+                                          <p:attrName>ppt_y</p:attrName>
+                                        </p:attrNameLst>
+                                      </p:cBhvr>
+                                      <p:tavLst>
+                                        <p:tav tm="0">
+                                          <p:val>
+                                            <p:strVal val="#ppt_y+.08"/>
+                                          </p:val>
+                                        </p:tav>
+                                        <p:tav tm="100000">
+                                          <p:val>
+                                            <p:strVal val="#ppt_y"/>
+                                          </p:val>
+                                        </p:tav>
+                                      </p:tavLst>
+                                    </p:anim>
+                                  </p:childTnLst>
+                                </p:cTn>
+                              </p:par>
+                              <p:par>
+                                <p:cTn id="206" presetID="42" presetClass="entr" presetSubtype="0" fill="hold" grpId="0" nodeType="withEffect">
+                                  <p:stCondLst>
+                                    <p:cond delay="1000"/>
+                                  </p:stCondLst>
+                                  <p:childTnLst>
+                                    <p:set>
+                                      <p:cBhvr>
+                                        <p:cTn id="202" dur="1" fill="hold">
+                                          <p:stCondLst>
+                                            <p:cond delay="0"/>
+                                          </p:stCondLst>
+                                        </p:cTn>
+                                        <p:tgtEl>
+                                          <p:spTgt spid="42"/>
+                                        </p:tgtEl>
+                                        <p:attrNameLst>
+                                          <p:attrName>style.visibility</p:attrName>
+                                        </p:attrNameLst>
+                                      </p:cBhvr>
+                                      <p:to>
+                                        <p:strVal val="visible"/>
+                                      </p:to>
+                                    </p:set>
+                                    <p:animEffect transition="in" filter="fade">
+                                      <p:cBhvr>
+                                        <p:cTn id="203" dur="600"/>
+                                        <p:tgtEl>
+                                          <p:spTgt spid="42"/>
+                                        </p:tgtEl>
+                                      </p:cBhvr>
+                                    </p:animEffect>
+                                    <p:anim calcmode="lin" valueType="num">
+                                      <p:cBhvr>
+                                        <p:cTn id="204" dur="600" decel="100000" fill="hold"/>
+                                        <p:tgtEl>
+                                          <p:spTgt spid="42"/>
+                                        </p:tgtEl>
+                                        <p:attrNameLst>
+                                          <p:attrName>ppt_x</p:attrName>
+                                        </p:attrNameLst>
+                                      </p:cBhvr>
+                                      <p:tavLst>
+                                        <p:tav tm="0">
+                                          <p:val>
+                                            <p:strVal val="#ppt_x"/>
+                                          </p:val>
+                                        </p:tav>
+                                        <p:tav tm="100000">
+                                          <p:val>
+                                            <p:strVal val="#ppt_x"/>
+                                          </p:val>
+                                        </p:tav>
+                                      </p:tavLst>
+                                    </p:anim>
+                                    <p:anim calcmode="lin" valueType="num">
+                                      <p:cBhvr>
+                                        <p:cTn id="205" dur="600" decel="100000" fill="hold"/>
+                                        <p:tgtEl>
+                                          <p:spTgt spid="42"/>
+                                        </p:tgtEl>
+                                        <p:attrNameLst>
+                                          <p:attrName>ppt_y</p:attrName>
+                                        </p:attrNameLst>
+                                      </p:cBhvr>
+                                      <p:tavLst>
+                                        <p:tav tm="0">
+                                          <p:val>
+                                            <p:strVal val="#ppt_y+.08"/>
+                                          </p:val>
+                                        </p:tav>
+                                        <p:tav tm="100000">
+                                          <p:val>
+                                            <p:strVal val="#ppt_y"/>
+                                          </p:val>
+                                        </p:tav>
+                                      </p:tavLst>
+                                    </p:anim>
+                                  </p:childTnLst>
+                                </p:cTn>
+                              </p:par>
+                              <p:par>
+                                <p:cTn id="211" presetID="42" presetClass="entr" presetSubtype="0" fill="hold" grpId="0" nodeType="withEffect">
+                                  <p:stCondLst>
+                                    <p:cond delay="1000"/>
+                                  </p:stCondLst>
+                                  <p:childTnLst>
+                                    <p:set>
+                                      <p:cBhvr>
+                                        <p:cTn id="207" dur="1" fill="hold">
+                                          <p:stCondLst>
+                                            <p:cond delay="0"/>
+                                          </p:stCondLst>
+                                        </p:cTn>
+                                        <p:tgtEl>
+                                          <p:spTgt spid="43"/>
+                                        </p:tgtEl>
+                                        <p:attrNameLst>
+                                          <p:attrName>style.visibility</p:attrName>
+                                        </p:attrNameLst>
+                                      </p:cBhvr>
+                                      <p:to>
+                                        <p:strVal val="visible"/>
+                                      </p:to>
+                                    </p:set>
+                                    <p:animEffect transition="in" filter="fade">
+                                      <p:cBhvr>
+                                        <p:cTn id="208" dur="600"/>
+                                        <p:tgtEl>
+                                          <p:spTgt spid="43"/>
+                                        </p:tgtEl>
+                                      </p:cBhvr>
+                                    </p:animEffect>
+                                    <p:anim calcmode="lin" valueType="num">
+                                      <p:cBhvr>
+                                        <p:cTn id="209" dur="600" decel="100000" fill="hold"/>
+                                        <p:tgtEl>
+                                          <p:spTgt spid="43"/>
+                                        </p:tgtEl>
+                                        <p:attrNameLst>
+                                          <p:attrName>ppt_x</p:attrName>
+                                        </p:attrNameLst>
+                                      </p:cBhvr>
+                                      <p:tavLst>
+                                        <p:tav tm="0">
+                                          <p:val>
+                                            <p:strVal val="#ppt_x"/>
+                                          </p:val>
+                                        </p:tav>
+                                        <p:tav tm="100000">
+                                          <p:val>
+                                            <p:strVal val="#ppt_x"/>
+                                          </p:val>
+                                        </p:tav>
+                                      </p:tavLst>
+                                    </p:anim>
+                                    <p:anim calcmode="lin" valueType="num">
+                                      <p:cBhvr>
+                                        <p:cTn id="210" dur="600" decel="100000" fill="hold"/>
+                                        <p:tgtEl>
+                                          <p:spTgt spid="43"/>
+                                        </p:tgtEl>
+                                        <p:attrNameLst>
+                                          <p:attrName>ppt_y</p:attrName>
+                                        </p:attrNameLst>
+                                      </p:cBhvr>
+                                      <p:tavLst>
+                                        <p:tav tm="0">
+                                          <p:val>
+                                            <p:strVal val="#ppt_y+.08"/>
+                                          </p:val>
+                                        </p:tav>
+                                        <p:tav tm="100000">
+                                          <p:val>
+                                            <p:strVal val="#ppt_y"/>
+                                          </p:val>
+                                        </p:tav>
+                                      </p:tavLst>
+                                    </p:anim>
+                                  </p:childTnLst>
+                                </p:cTn>
+                              </p:par>
+                              <p:par>
+                                <p:cTn id="216" presetID="42" presetClass="entr" presetSubtype="0" fill="hold" grpId="0" nodeType="withEffect">
+                                  <p:stCondLst>
+                                    <p:cond delay="1000"/>
+                                  </p:stCondLst>
+                                  <p:childTnLst>
+                                    <p:set>
+                                      <p:cBhvr>
+                                        <p:cTn id="212" dur="1" fill="hold">
+                                          <p:stCondLst>
+                                            <p:cond delay="0"/>
+                                          </p:stCondLst>
+                                        </p:cTn>
+                                        <p:tgtEl>
+                                          <p:spTgt spid="44"/>
+                                        </p:tgtEl>
+                                        <p:attrNameLst>
+                                          <p:attrName>style.visibility</p:attrName>
+                                        </p:attrNameLst>
+                                      </p:cBhvr>
+                                      <p:to>
+                                        <p:strVal val="visible"/>
+                                      </p:to>
+                                    </p:set>
+                                    <p:animEffect transition="in" filter="fade">
+                                      <p:cBhvr>
+                                        <p:cTn id="213" dur="600"/>
+                                        <p:tgtEl>
+                                          <p:spTgt spid="44"/>
+                                        </p:tgtEl>
+                                      </p:cBhvr>
+                                    </p:animEffect>
+                                    <p:anim calcmode="lin" valueType="num">
+                                      <p:cBhvr>
+                                        <p:cTn id="214" dur="600" decel="100000" fill="hold"/>
+                                        <p:tgtEl>
+                                          <p:spTgt spid="44"/>
+                                        </p:tgtEl>
+                                        <p:attrNameLst>
+                                          <p:attrName>ppt_x</p:attrName>
+                                        </p:attrNameLst>
+                                      </p:cBhvr>
+                                      <p:tavLst>
+                                        <p:tav tm="0">
+                                          <p:val>
+                                            <p:strVal val="#ppt_x"/>
+                                          </p:val>
+                                        </p:tav>
+                                        <p:tav tm="100000">
+                                          <p:val>
+                                            <p:strVal val="#ppt_x"/>
+                                          </p:val>
+                                        </p:tav>
+                                      </p:tavLst>
+                                    </p:anim>
+                                    <p:anim calcmode="lin" valueType="num">
+                                      <p:cBhvr>
+                                        <p:cTn id="215" dur="600" decel="100000" fill="hold"/>
+                                        <p:tgtEl>
+                                          <p:spTgt spid="44"/>
+                                        </p:tgtEl>
+                                        <p:attrNameLst>
+                                          <p:attrName>ppt_y</p:attrName>
+                                        </p:attrNameLst>
+                                      </p:cBhvr>
+                                      <p:tavLst>
+                                        <p:tav tm="0">
+                                          <p:val>
+                                            <p:strVal val="#ppt_y+.08"/>
+                                          </p:val>
+                                        </p:tav>
+                                        <p:tav tm="100000">
+                                          <p:val>
+                                            <p:strVal val="#ppt_y"/>
+                                          </p:val>
+                                        </p:tav>
+                                      </p:tavLst>
+                                    </p:anim>
+                                  </p:childTnLst>
+                                </p:cTn>
+                              </p:par>
+                              <p:par>
+                                <p:cTn id="221" presetID="42" presetClass="entr" presetSubtype="0" fill="hold" grpId="0" nodeType="withEffect">
+                                  <p:stCondLst>
+                                    <p:cond delay="1000"/>
+                                  </p:stCondLst>
+                                  <p:childTnLst>
+                                    <p:set>
+                                      <p:cBhvr>
+                                        <p:cTn id="217" dur="1" fill="hold">
+                                          <p:stCondLst>
+                                            <p:cond delay="0"/>
+                                          </p:stCondLst>
+                                        </p:cTn>
+                                        <p:tgtEl>
+                                          <p:spTgt spid="45"/>
+                                        </p:tgtEl>
+                                        <p:attrNameLst>
+                                          <p:attrName>style.visibility</p:attrName>
+                                        </p:attrNameLst>
+                                      </p:cBhvr>
+                                      <p:to>
+                                        <p:strVal val="visible"/>
+                                      </p:to>
+                                    </p:set>
+                                    <p:animEffect transition="in" filter="fade">
+                                      <p:cBhvr>
+                                        <p:cTn id="218" dur="600"/>
+                                        <p:tgtEl>
+                                          <p:spTgt spid="45"/>
+                                        </p:tgtEl>
+                                      </p:cBhvr>
+                                    </p:animEffect>
+                                    <p:anim calcmode="lin" valueType="num">
+                                      <p:cBhvr>
+                                        <p:cTn id="219" dur="600" decel="100000" fill="hold"/>
+                                        <p:tgtEl>
+                                          <p:spTgt spid="45"/>
+                                        </p:tgtEl>
+                                        <p:attrNameLst>
+                                          <p:attrName>ppt_x</p:attrName>
+                                        </p:attrNameLst>
+                                      </p:cBhvr>
+                                      <p:tavLst>
+                                        <p:tav tm="0">
+                                          <p:val>
+                                            <p:strVal val="#ppt_x"/>
+                                          </p:val>
+                                        </p:tav>
+                                        <p:tav tm="100000">
+                                          <p:val>
+                                            <p:strVal val="#ppt_x"/>
+                                          </p:val>
+                                        </p:tav>
+                                      </p:tavLst>
+                                    </p:anim>
+                                    <p:anim calcmode="lin" valueType="num">
+                                      <p:cBhvr>
+                                        <p:cTn id="220" dur="600" decel="100000" fill="hold"/>
+                                        <p:tgtEl>
+                                          <p:spTgt spid="45"/>
+                                        </p:tgtEl>
+                                        <p:attrNameLst>
+                                          <p:attrName>ppt_y</p:attrName>
+                                        </p:attrNameLst>
+                                      </p:cBhvr>
+                                      <p:tavLst>
+                                        <p:tav tm="0">
+                                          <p:val>
+                                            <p:strVal val="#ppt_y+.08"/>
+                                          </p:val>
+                                        </p:tav>
+                                        <p:tav tm="100000">
+                                          <p:val>
+                                            <p:strVal val="#ppt_y"/>
+                                          </p:val>
+                                        </p:tav>
+                                      </p:tavLst>
+                                    </p:anim>
+                                  </p:childTnLst>
+                                </p:cTn>
+                              </p:par>
+                              <p:par>
+                                <p:cTn id="226" presetID="42" presetClass="entr" presetSubtype="0" fill="hold" grpId="0" nodeType="withEffect">
+                                  <p:stCondLst>
+                                    <p:cond delay="1000"/>
+                                  </p:stCondLst>
+                                  <p:childTnLst>
+                                    <p:set>
+                                      <p:cBhvr>
+                                        <p:cTn id="222" dur="1" fill="hold">
+                                          <p:stCondLst>
+                                            <p:cond delay="0"/>
+                                          </p:stCondLst>
+                                        </p:cTn>
+                                        <p:tgtEl>
+                                          <p:spTgt spid="46"/>
+                                        </p:tgtEl>
+                                        <p:attrNameLst>
+                                          <p:attrName>style.visibility</p:attrName>
+                                        </p:attrNameLst>
+                                      </p:cBhvr>
+                                      <p:to>
+                                        <p:strVal val="visible"/>
+                                      </p:to>
+                                    </p:set>
+                                    <p:animEffect transition="in" filter="fade">
+                                      <p:cBhvr>
+                                        <p:cTn id="223" dur="600"/>
+                                        <p:tgtEl>
+                                          <p:spTgt spid="46"/>
+                                        </p:tgtEl>
+                                      </p:cBhvr>
+                                    </p:animEffect>
+                                    <p:anim calcmode="lin" valueType="num">
+                                      <p:cBhvr>
+                                        <p:cTn id="224" dur="600" decel="100000" fill="hold"/>
+                                        <p:tgtEl>
+                                          <p:spTgt spid="46"/>
+                                        </p:tgtEl>
+                                        <p:attrNameLst>
+                                          <p:attrName>ppt_x</p:attrName>
+                                        </p:attrNameLst>
+                                      </p:cBhvr>
+                                      <p:tavLst>
+                                        <p:tav tm="0">
+                                          <p:val>
+                                            <p:strVal val="#ppt_x"/>
+                                          </p:val>
+                                        </p:tav>
+                                        <p:tav tm="100000">
+                                          <p:val>
+                                            <p:strVal val="#ppt_x"/>
+                                          </p:val>
+                                        </p:tav>
+                                      </p:tavLst>
+                                    </p:anim>
+                                    <p:anim calcmode="lin" valueType="num">
+                                      <p:cBhvr>
+                                        <p:cTn id="225" dur="600" decel="100000" fill="hold"/>
+                                        <p:tgtEl>
+                                          <p:spTgt spid="46"/>
+                                        </p:tgtEl>
+                                        <p:attrNameLst>
+                                          <p:attrName>ppt_y</p:attrName>
+                                        </p:attrNameLst>
+                                      </p:cBhvr>
+                                      <p:tavLst>
+                                        <p:tav tm="0">
+                                          <p:val>
+                                            <p:strVal val="#ppt_y+.08"/>
+                                          </p:val>
+                                        </p:tav>
+                                        <p:tav tm="100000">
+                                          <p:val>
+                                            <p:strVal val="#ppt_y"/>
+                                          </p:val>
+                                        </p:tav>
+                                      </p:tavLst>
+                                    </p:anim>
+                                  </p:childTnLst>
+                                </p:cTn>
+                              </p:par>
+                              <p:par>
+                                <p:cTn id="231" presetID="42" presetClass="entr" presetSubtype="0" fill="hold" grpId="0" nodeType="withEffect">
+                                  <p:stCondLst>
+                                    <p:cond delay="1000"/>
+                                  </p:stCondLst>
+                                  <p:childTnLst>
+                                    <p:set>
+                                      <p:cBhvr>
+                                        <p:cTn id="227" dur="1" fill="hold">
+                                          <p:stCondLst>
+                                            <p:cond delay="0"/>
+                                          </p:stCondLst>
+                                        </p:cTn>
+                                        <p:tgtEl>
+                                          <p:spTgt spid="47"/>
+                                        </p:tgtEl>
+                                        <p:attrNameLst>
+                                          <p:attrName>style.visibility</p:attrName>
+                                        </p:attrNameLst>
+                                      </p:cBhvr>
+                                      <p:to>
+                                        <p:strVal val="visible"/>
+                                      </p:to>
+                                    </p:set>
+                                    <p:animEffect transition="in" filter="fade">
+                                      <p:cBhvr>
+                                        <p:cTn id="228" dur="600"/>
+                                        <p:tgtEl>
+                                          <p:spTgt spid="47"/>
+                                        </p:tgtEl>
+                                      </p:cBhvr>
+                                    </p:animEffect>
+                                    <p:anim calcmode="lin" valueType="num">
+                                      <p:cBhvr>
+                                        <p:cTn id="229" dur="600" decel="100000" fill="hold"/>
+                                        <p:tgtEl>
+                                          <p:spTgt spid="47"/>
+                                        </p:tgtEl>
+                                        <p:attrNameLst>
+                                          <p:attrName>ppt_x</p:attrName>
+                                        </p:attrNameLst>
+                                      </p:cBhvr>
+                                      <p:tavLst>
+                                        <p:tav tm="0">
+                                          <p:val>
+                                            <p:strVal val="#ppt_x"/>
+                                          </p:val>
+                                        </p:tav>
+                                        <p:tav tm="100000">
+                                          <p:val>
+                                            <p:strVal val="#ppt_x"/>
+                                          </p:val>
+                                        </p:tav>
+                                      </p:tavLst>
+                                    </p:anim>
+                                    <p:anim calcmode="lin" valueType="num">
+                                      <p:cBhvr>
+                                        <p:cTn id="230" dur="600" decel="100000" fill="hold"/>
+                                        <p:tgtEl>
+                                          <p:spTgt spid="47"/>
+                                        </p:tgtEl>
+                                        <p:attrNameLst>
+                                          <p:attrName>ppt_y</p:attrName>
+                                        </p:attrNameLst>
+                                      </p:cBhvr>
+                                      <p:tavLst>
+                                        <p:tav tm="0">
+                                          <p:val>
+                                            <p:strVal val="#ppt_y+.08"/>
+                                          </p:val>
+                                        </p:tav>
+                                        <p:tav tm="100000">
+                                          <p:val>
+                                            <p:strVal val="#ppt_y"/>
+                                          </p:val>
+                                        </p:tav>
+                                      </p:tavLst>
+                                    </p:anim>
+                                  </p:childTnLst>
+                                </p:cTn>
+                              </p:par>
+                              <p:par>
+                                <p:cTn id="234" presetID="10" presetClass="entr" presetSubtype="0" fill="hold" grpId="0" nodeType="withEffect">
                                   <p:stCondLst>
                                     <p:cond delay="1200"/>
                                   </p:stCondLst>
                                   <p:childTnLst>
                                     <p:set>
                                       <p:cBhvr>
-                                        <p:cTn id="182" dur="1" fill="hold">
+                                        <p:cTn id="232" dur="1" fill="hold">
                                           <p:stCondLst>
                                             <p:cond delay="0"/>
                                           </p:stCondLst>
                                         </p:cTn>
                                         <p:tgtEl>
-                                          <p:spTgt spid="25"/>
+                                          <p:spTgt spid="48"/>
                                         </p:tgtEl>
                                         <p:attrNameLst>
                                           <p:attrName>style.visibility</p:attrName>
@@ -23633,7 +24794,42 @@
                                     </p:set>
                                     <p:animEffect transition="in" filter="fade">
                                       <p:cBhvr>
-                                        <p:cTn id="183" dur="500"/>
+                                        <p:cTn id="233" dur="500"/>
+                                        <p:tgtEl>
+                                          <p:spTgt spid="48"/>
+                                        </p:tgtEl>
+                                      </p:cBhvr>
+                                    </p:animEffect>
+                                  </p:childTnLst>
+                                </p:cTn>
+                              </p:par>
+                              <p:par>
+                                <p:cTn id="237" presetID="10" presetClass="entr" presetSubtype="0" fill="hold" grpId="0" nodeType="withEffect">
+                                  <p:stCondLst>
+                                    <p:cond delay="1400"/>
+                                  </p:stCondLst>
+                                  <p:childTnLst>
+                                    <p:set>
+                                      <p:cBhvr>
+                                        <p:cTn id="235" dur="1" fill="hold">
+                                          <p:stCondLst>
+                                            <p:cond delay="0"/>
+                                          </p:stCondLst>
+                                        </p:cTn>
+                                        <p:tgtEl>
+                                          <p:spTgt spid="25"/>
+                                        </p:tgtEl>
+                                        <p:attrNameLst>
+                                          <p:attrName>style.visibility</p:attrName>
+                                        </p:attrNameLst>
+                                      </p:cBhvr>
+                                      <p:to>
+                                        <p:strVal val="visible"/>
+                                      </p:to>
+                                    </p:set>
+                                    <p:animEffect transition="in" filter="fade">
+                                      <p:cBhvr>
+                                        <p:cTn id="236" dur="500"/>
                                         <p:tgtEl>
                                           <p:spTgt spid="25"/>
                                         </p:tgtEl>
@@ -23674,28 +24870,34 @@
       <p:bldP spid="5" grpId="0" animBg="1"/>
       <p:bldP spid="6" grpId="0" animBg="1"/>
       <p:bldP spid="7" grpId="0" animBg="1"/>
-      <p:bldP spid="8" grpId="0" animBg="1"/>
       <p:bldP spid="9" grpId="0" animBg="1"/>
-      <p:bldP spid="12" grpId="0" animBg="1"/>
-      <p:bldP spid="13" grpId="0" animBg="1"/>
+      <p:bldP spid="10" grpId="0" animBg="1"/>
+      <p:bldP spid="11" grpId="0" animBg="1"/>
       <p:bldP spid="14" grpId="0" animBg="1"/>
       <p:bldP spid="15" grpId="0" animBg="1"/>
       <p:bldP spid="16" grpId="0" animBg="1"/>
+      <p:bldP spid="18" grpId="0" animBg="1"/>
       <p:bldP spid="19" grpId="0" animBg="1"/>
       <p:bldP spid="20" grpId="0" animBg="1"/>
-      <p:bldP spid="21" grpId="0" animBg="1"/>
-      <p:bldP spid="22" grpId="0" animBg="1"/>
       <p:bldP spid="23" grpId="0" animBg="1"/>
-      <p:bldP spid="26" grpId="0" animBg="1"/>
+      <p:bldP spid="24" grpId="0" animBg="1"/>
+      <p:bldP spid="25" grpId="0" animBg="1"/>
       <p:bldP spid="27" grpId="0" animBg="1"/>
       <p:bldP spid="28" grpId="0" animBg="1"/>
       <p:bldP spid="29" grpId="0" animBg="1"/>
-      <p:bldP spid="30" grpId="0" animBg="1"/>
+      <p:bldP spid="32" grpId="0" animBg="1"/>
       <p:bldP spid="33" grpId="0" animBg="1"/>
       <p:bldP spid="34" grpId="0" animBg="1"/>
-      <p:bldP spid="35" grpId="0" animBg="1"/>
       <p:bldP spid="36" grpId="0" animBg="1"/>
       <p:bldP spid="37" grpId="0" animBg="1"/>
+      <p:bldP spid="38" grpId="0" animBg="1"/>
+      <p:bldP spid="41" grpId="0" animBg="1"/>
+      <p:bldP spid="42" grpId="0" animBg="1"/>
+      <p:bldP spid="43" grpId="0" animBg="1"/>
+      <p:bldP spid="45" grpId="0" animBg="1"/>
+      <p:bldP spid="46" grpId="0" animBg="1"/>
+      <p:bldP spid="47" grpId="0" animBg="1"/>
+      <p:bldP spid="48" grpId="0" animBg="1"/>
       <p:bldP spid="25" grpId="0" animBg="1"/>
     </p:bldLst>
   </p:timing>
